--- a/docs/EOS_Payment_Improved.pptx
+++ b/docs/EOS_Payment_Improved.pptx
@@ -19,12 +19,8 @@
     <p:sldId id="267" r:id="rId13"/>
     <p:sldId id="268" r:id="rId14"/>
     <p:sldId id="269" r:id="rId15"/>
-    <p:sldId id="270" r:id="rId16"/>
-    <p:sldId id="271" r:id="rId17"/>
-    <p:sldId id="272" r:id="rId18"/>
-    <p:sldId id="273" r:id="rId19"/>
-    <p:sldId id="274" r:id="rId20"/>
-    <p:sldId id="276" r:id="rId21"/>
+    <p:sldId id="274" r:id="rId16"/>
+    <p:sldId id="276" r:id="rId17"/>
   </p:sldIdLst>
   <p:sldSz cx="12192000" cy="6858000"/>
   <p:notesSz cx="6858000" cy="9144000"/>
@@ -280,7 +276,7 @@
           <a:p>
             <a:fld id="{BC37747E-FE7D-4488-9C1D-2D2E2936D1F7}" type="datetimeFigureOut">
               <a:rPr lang="vi-VN" smtClean="0"/>
-              <a:t>31/05/2026</a:t>
+              <a:t>02/06/2026</a:t>
             </a:fld>
             <a:endParaRPr lang="vi-VN"/>
           </a:p>
@@ -480,7 +476,7 @@
           <a:p>
             <a:fld id="{BC37747E-FE7D-4488-9C1D-2D2E2936D1F7}" type="datetimeFigureOut">
               <a:rPr lang="vi-VN" smtClean="0"/>
-              <a:t>31/05/2026</a:t>
+              <a:t>02/06/2026</a:t>
             </a:fld>
             <a:endParaRPr lang="vi-VN"/>
           </a:p>
@@ -690,7 +686,7 @@
           <a:p>
             <a:fld id="{BC37747E-FE7D-4488-9C1D-2D2E2936D1F7}" type="datetimeFigureOut">
               <a:rPr lang="vi-VN" smtClean="0"/>
-              <a:t>31/05/2026</a:t>
+              <a:t>02/06/2026</a:t>
             </a:fld>
             <a:endParaRPr lang="vi-VN"/>
           </a:p>
@@ -890,7 +886,7 @@
           <a:p>
             <a:fld id="{BC37747E-FE7D-4488-9C1D-2D2E2936D1F7}" type="datetimeFigureOut">
               <a:rPr lang="vi-VN" smtClean="0"/>
-              <a:t>31/05/2026</a:t>
+              <a:t>02/06/2026</a:t>
             </a:fld>
             <a:endParaRPr lang="vi-VN"/>
           </a:p>
@@ -1166,7 +1162,7 @@
           <a:p>
             <a:fld id="{BC37747E-FE7D-4488-9C1D-2D2E2936D1F7}" type="datetimeFigureOut">
               <a:rPr lang="vi-VN" smtClean="0"/>
-              <a:t>31/05/2026</a:t>
+              <a:t>02/06/2026</a:t>
             </a:fld>
             <a:endParaRPr lang="vi-VN"/>
           </a:p>
@@ -1434,7 +1430,7 @@
           <a:p>
             <a:fld id="{BC37747E-FE7D-4488-9C1D-2D2E2936D1F7}" type="datetimeFigureOut">
               <a:rPr lang="vi-VN" smtClean="0"/>
-              <a:t>31/05/2026</a:t>
+              <a:t>02/06/2026</a:t>
             </a:fld>
             <a:endParaRPr lang="vi-VN"/>
           </a:p>
@@ -1849,7 +1845,7 @@
           <a:p>
             <a:fld id="{BC37747E-FE7D-4488-9C1D-2D2E2936D1F7}" type="datetimeFigureOut">
               <a:rPr lang="vi-VN" smtClean="0"/>
-              <a:t>31/05/2026</a:t>
+              <a:t>02/06/2026</a:t>
             </a:fld>
             <a:endParaRPr lang="vi-VN"/>
           </a:p>
@@ -1991,7 +1987,7 @@
           <a:p>
             <a:fld id="{BC37747E-FE7D-4488-9C1D-2D2E2936D1F7}" type="datetimeFigureOut">
               <a:rPr lang="vi-VN" smtClean="0"/>
-              <a:t>31/05/2026</a:t>
+              <a:t>02/06/2026</a:t>
             </a:fld>
             <a:endParaRPr lang="vi-VN"/>
           </a:p>
@@ -2104,7 +2100,7 @@
           <a:p>
             <a:fld id="{BC37747E-FE7D-4488-9C1D-2D2E2936D1F7}" type="datetimeFigureOut">
               <a:rPr lang="vi-VN" smtClean="0"/>
-              <a:t>31/05/2026</a:t>
+              <a:t>02/06/2026</a:t>
             </a:fld>
             <a:endParaRPr lang="vi-VN"/>
           </a:p>
@@ -2417,7 +2413,7 @@
           <a:p>
             <a:fld id="{BC37747E-FE7D-4488-9C1D-2D2E2936D1F7}" type="datetimeFigureOut">
               <a:rPr lang="vi-VN" smtClean="0"/>
-              <a:t>31/05/2026</a:t>
+              <a:t>02/06/2026</a:t>
             </a:fld>
             <a:endParaRPr lang="vi-VN"/>
           </a:p>
@@ -2706,7 +2702,7 @@
           <a:p>
             <a:fld id="{BC37747E-FE7D-4488-9C1D-2D2E2936D1F7}" type="datetimeFigureOut">
               <a:rPr lang="vi-VN" smtClean="0"/>
-              <a:t>31/05/2026</a:t>
+              <a:t>02/06/2026</a:t>
             </a:fld>
             <a:endParaRPr lang="vi-VN"/>
           </a:p>
@@ -2949,7 +2945,7 @@
           <a:p>
             <a:fld id="{BC37747E-FE7D-4488-9C1D-2D2E2936D1F7}" type="datetimeFigureOut">
               <a:rPr lang="vi-VN" smtClean="0"/>
-              <a:t>31/05/2026</a:t>
+              <a:t>02/06/2026</a:t>
             </a:fld>
             <a:endParaRPr lang="vi-VN"/>
           </a:p>
@@ -3449,7 +3445,47 @@
         <p:spPr>
           <a:xfrm>
             <a:off x="558800" y="635000"/>
-            <a:ext cx="2032000" cy="892552"/>
+            <a:ext cx="1570789" cy="892552"/>
+          </a:xfrm>
+          <a:prstGeom prst="rect">
+            <a:avLst/>
+          </a:prstGeom>
+          <a:noFill/>
+        </p:spPr>
+        <p:txBody>
+          <a:bodyPr vert="horz" wrap="square" lIns="0" tIns="0" rIns="0" bIns="0" rtlCol="0">
+            <a:spAutoFit/>
+          </a:bodyPr>
+          <a:lstStyle/>
+          <a:p>
+            <a:r>
+              <a:rPr lang="vi-VN" sz="5800" b="1" dirty="0">
+                <a:solidFill>
+                  <a:srgbClr val="10B981"/>
+                </a:solidFill>
+                <a:latin typeface="Aptos" panose="020B0004020202020204" pitchFamily="34" charset="0"/>
+              </a:rPr>
+              <a:t>EOS</a:t>
+            </a:r>
+          </a:p>
+        </p:txBody>
+      </p:sp>
+      <p:sp>
+        <p:nvSpPr>
+          <p:cNvPr id="4" name="TextBox 3">
+            <a:extLst>
+              <a:ext uri="{FF2B5EF4-FFF2-40B4-BE49-F238E27FC236}">
+                <a16:creationId xmlns:a16="http://schemas.microsoft.com/office/drawing/2014/main" id="{97ED8138-7591-D555-5797-C59BF39C3AAE}"/>
+              </a:ext>
+            </a:extLst>
+          </p:cNvPr>
+          <p:cNvSpPr txBox="1"/>
+          <p:nvPr/>
+        </p:nvSpPr>
+        <p:spPr>
+          <a:xfrm>
+            <a:off x="2129589" y="687864"/>
+            <a:ext cx="8255000" cy="646331"/>
           </a:xfrm>
           <a:prstGeom prst="rect">
             <a:avLst/>
@@ -3463,23 +3499,23 @@
           <a:lstStyle/>
           <a:p>
             <a:r>
-              <a:rPr lang="vi-VN" sz="5800" b="1">
-                <a:solidFill>
-                  <a:srgbClr val="10B981"/>
-                </a:solidFill>
-                <a:latin typeface="Aptos" panose="020B0004020202020204" pitchFamily="34" charset="0"/>
-              </a:rPr>
-              <a:t>EOS</a:t>
-            </a:r>
-          </a:p>
-        </p:txBody>
-      </p:sp>
-      <p:sp>
-        <p:nvSpPr>
-          <p:cNvPr id="4" name="TextBox 3">
-            <a:extLst>
-              <a:ext uri="{FF2B5EF4-FFF2-40B4-BE49-F238E27FC236}">
-                <a16:creationId xmlns:a16="http://schemas.microsoft.com/office/drawing/2014/main" id="{97ED8138-7591-D555-5797-C59BF39C3AAE}"/>
+              <a:rPr lang="vi-VN" sz="4200" b="1" dirty="0">
+                <a:solidFill>
+                  <a:srgbClr val="F1F5F9"/>
+                </a:solidFill>
+                <a:latin typeface="Aptos" panose="020B0004020202020204" pitchFamily="34" charset="0"/>
+              </a:rPr>
+              <a:t>Payment System</a:t>
+            </a:r>
+          </a:p>
+        </p:txBody>
+      </p:sp>
+      <p:sp>
+        <p:nvSpPr>
+          <p:cNvPr id="5" name="TextBox 4">
+            <a:extLst>
+              <a:ext uri="{FF2B5EF4-FFF2-40B4-BE49-F238E27FC236}">
+                <a16:creationId xmlns:a16="http://schemas.microsoft.com/office/drawing/2014/main" id="{DEA89366-9306-E10A-AB28-42066B8003BC}"/>
               </a:ext>
             </a:extLst>
           </p:cNvPr>
@@ -3488,8 +3524,8 @@
         </p:nvSpPr>
         <p:spPr>
           <a:xfrm>
-            <a:off x="558800" y="1498600"/>
-            <a:ext cx="8255000" cy="646331"/>
+            <a:off x="609600" y="1459453"/>
+            <a:ext cx="7747000" cy="553998"/>
           </a:xfrm>
           <a:prstGeom prst="rect">
             <a:avLst/>
@@ -3503,47 +3539,7 @@
           <a:lstStyle/>
           <a:p>
             <a:r>
-              <a:rPr lang="vi-VN" sz="4200" b="1">
-                <a:solidFill>
-                  <a:srgbClr val="F1F5F9"/>
-                </a:solidFill>
-                <a:latin typeface="Aptos" panose="020B0004020202020204" pitchFamily="34" charset="0"/>
-              </a:rPr>
-              <a:t>Payment System</a:t>
-            </a:r>
-          </a:p>
-        </p:txBody>
-      </p:sp>
-      <p:sp>
-        <p:nvSpPr>
-          <p:cNvPr id="5" name="TextBox 4">
-            <a:extLst>
-              <a:ext uri="{FF2B5EF4-FFF2-40B4-BE49-F238E27FC236}">
-                <a16:creationId xmlns:a16="http://schemas.microsoft.com/office/drawing/2014/main" id="{DEA89366-9306-E10A-AB28-42066B8003BC}"/>
-              </a:ext>
-            </a:extLst>
-          </p:cNvPr>
-          <p:cNvSpPr txBox="1"/>
-          <p:nvPr/>
-        </p:nvSpPr>
-        <p:spPr>
-          <a:xfrm>
-            <a:off x="609600" y="2311400"/>
-            <a:ext cx="7747000" cy="492443"/>
-          </a:xfrm>
-          <a:prstGeom prst="rect">
-            <a:avLst/>
-          </a:prstGeom>
-          <a:noFill/>
-        </p:spPr>
-        <p:txBody>
-          <a:bodyPr vert="horz" lIns="0" tIns="0" rIns="0" bIns="0" rtlCol="0">
-            <a:spAutoFit/>
-          </a:bodyPr>
-          <a:lstStyle/>
-          <a:p>
-            <a:r>
-              <a:rPr lang="en-US" sz="1600">
+              <a:rPr lang="en-US" dirty="0">
                 <a:solidFill>
                   <a:srgbClr val="94A3B8"/>
                 </a:solidFill>
@@ -3551,7 +3547,7 @@
               </a:rPr>
               <a:t>Exactly-Once Semantics for Idempotent Payments in a Distributed Stream Processing System</a:t>
             </a:r>
-            <a:endParaRPr lang="vi-VN" sz="1600">
+            <a:endParaRPr lang="vi-VN" dirty="0">
               <a:solidFill>
                 <a:srgbClr val="94A3B8"/>
               </a:solidFill>
@@ -3574,8 +3570,163 @@
         </p:nvSpPr>
         <p:spPr>
           <a:xfrm>
-            <a:off x="609600" y="2819400"/>
-            <a:ext cx="8255000" cy="246221"/>
+            <a:off x="609600" y="2052310"/>
+            <a:ext cx="6609347" cy="1292662"/>
+          </a:xfrm>
+          <a:prstGeom prst="rect">
+            <a:avLst/>
+          </a:prstGeom>
+          <a:noFill/>
+        </p:spPr>
+        <p:txBody>
+          <a:bodyPr vert="horz" wrap="square" lIns="0" tIns="0" rIns="0" bIns="0" rtlCol="0">
+            <a:spAutoFit/>
+          </a:bodyPr>
+          <a:lstStyle/>
+          <a:p>
+            <a:r>
+              <a:rPr lang="en-US" sz="2800" b="1" dirty="0" err="1">
+                <a:solidFill>
+                  <a:srgbClr val="F1F5F9"/>
+                </a:solidFill>
+                <a:latin typeface="Aptos" panose="020B0004020202020204" pitchFamily="34" charset="0"/>
+              </a:rPr>
+              <a:t>Họ</a:t>
+            </a:r>
+            <a:r>
+              <a:rPr lang="en-US" sz="2800" b="1" dirty="0">
+                <a:solidFill>
+                  <a:srgbClr val="F1F5F9"/>
+                </a:solidFill>
+                <a:latin typeface="Aptos" panose="020B0004020202020204" pitchFamily="34" charset="0"/>
+              </a:rPr>
+              <a:t> </a:t>
+            </a:r>
+            <a:r>
+              <a:rPr lang="en-US" sz="2800" b="1" dirty="0" err="1">
+                <a:solidFill>
+                  <a:srgbClr val="F1F5F9"/>
+                </a:solidFill>
+                <a:latin typeface="Aptos" panose="020B0004020202020204" pitchFamily="34" charset="0"/>
+              </a:rPr>
+              <a:t>và</a:t>
+            </a:r>
+            <a:r>
+              <a:rPr lang="en-US" sz="2800" b="1" dirty="0">
+                <a:solidFill>
+                  <a:srgbClr val="F1F5F9"/>
+                </a:solidFill>
+                <a:latin typeface="Aptos" panose="020B0004020202020204" pitchFamily="34" charset="0"/>
+              </a:rPr>
+              <a:t> </a:t>
+            </a:r>
+            <a:r>
+              <a:rPr lang="en-US" sz="2800" b="1" dirty="0" err="1">
+                <a:solidFill>
+                  <a:srgbClr val="F1F5F9"/>
+                </a:solidFill>
+                <a:latin typeface="Aptos" panose="020B0004020202020204" pitchFamily="34" charset="0"/>
+              </a:rPr>
+              <a:t>tên</a:t>
+            </a:r>
+            <a:r>
+              <a:rPr lang="en-US" sz="2800" b="1" dirty="0">
+                <a:solidFill>
+                  <a:srgbClr val="F1F5F9"/>
+                </a:solidFill>
+                <a:latin typeface="Aptos" panose="020B0004020202020204" pitchFamily="34" charset="0"/>
+              </a:rPr>
+              <a:t>: </a:t>
+            </a:r>
+            <a:r>
+              <a:rPr lang="vi-VN" sz="2800" b="1" dirty="0">
+                <a:solidFill>
+                  <a:srgbClr val="F1F5F9"/>
+                </a:solidFill>
+                <a:latin typeface="Aptos" panose="020B0004020202020204" pitchFamily="34" charset="0"/>
+              </a:rPr>
+              <a:t>Nguyễn Hoài Phương </a:t>
+            </a:r>
+            <a:endParaRPr lang="en-US" sz="2800" b="1" dirty="0">
+              <a:solidFill>
+                <a:srgbClr val="F1F5F9"/>
+              </a:solidFill>
+              <a:latin typeface="Aptos" panose="020B0004020202020204" pitchFamily="34" charset="0"/>
+            </a:endParaRPr>
+          </a:p>
+          <a:p>
+            <a:r>
+              <a:rPr lang="en-US" sz="2800" b="1" dirty="0">
+                <a:solidFill>
+                  <a:srgbClr val="F1F5F9"/>
+                </a:solidFill>
+                <a:latin typeface="Aptos" panose="020B0004020202020204" pitchFamily="34" charset="0"/>
+              </a:rPr>
+              <a:t>MSSV: </a:t>
+            </a:r>
+            <a:r>
+              <a:rPr lang="vi-VN" sz="2800" b="1" dirty="0">
+                <a:solidFill>
+                  <a:srgbClr val="F1F5F9"/>
+                </a:solidFill>
+                <a:latin typeface="Aptos" panose="020B0004020202020204" pitchFamily="34" charset="0"/>
+              </a:rPr>
+              <a:t>N23DCCN183</a:t>
+            </a:r>
+            <a:endParaRPr lang="en-US" sz="2800" b="1" dirty="0">
+              <a:solidFill>
+                <a:srgbClr val="F1F5F9"/>
+              </a:solidFill>
+              <a:latin typeface="Aptos" panose="020B0004020202020204" pitchFamily="34" charset="0"/>
+            </a:endParaRPr>
+          </a:p>
+          <a:p>
+            <a:r>
+              <a:rPr lang="en-US" sz="2800" b="1" dirty="0" err="1">
+                <a:solidFill>
+                  <a:srgbClr val="F1F5F9"/>
+                </a:solidFill>
+                <a:latin typeface="Aptos" panose="020B0004020202020204" pitchFamily="34" charset="0"/>
+              </a:rPr>
+              <a:t>Lớp</a:t>
+            </a:r>
+            <a:r>
+              <a:rPr lang="en-US" sz="2800" b="1" dirty="0">
+                <a:solidFill>
+                  <a:srgbClr val="F1F5F9"/>
+                </a:solidFill>
+                <a:latin typeface="Aptos" panose="020B0004020202020204" pitchFamily="34" charset="0"/>
+              </a:rPr>
+              <a:t>: </a:t>
+            </a:r>
+            <a:r>
+              <a:rPr lang="vi-VN" sz="2800" b="1" dirty="0">
+                <a:solidFill>
+                  <a:srgbClr val="F1F5F9"/>
+                </a:solidFill>
+                <a:latin typeface="Aptos" panose="020B0004020202020204" pitchFamily="34" charset="0"/>
+              </a:rPr>
+              <a:t>D23CQCN03-N</a:t>
+            </a:r>
+          </a:p>
+        </p:txBody>
+      </p:sp>
+      <p:sp>
+        <p:nvSpPr>
+          <p:cNvPr id="7" name="TextBox 6">
+            <a:extLst>
+              <a:ext uri="{FF2B5EF4-FFF2-40B4-BE49-F238E27FC236}">
+                <a16:creationId xmlns:a16="http://schemas.microsoft.com/office/drawing/2014/main" id="{D5366931-B6E4-F22E-87A4-A492400C45DC}"/>
+              </a:ext>
+            </a:extLst>
+          </p:cNvPr>
+          <p:cNvSpPr txBox="1"/>
+          <p:nvPr/>
+        </p:nvSpPr>
+        <p:spPr>
+          <a:xfrm>
+            <a:off x="609600" y="3415928"/>
+            <a:ext cx="8255000" cy="861774"/>
           </a:xfrm>
           <a:prstGeom prst="rect">
             <a:avLst/>
@@ -3589,53 +3740,30 @@
           <a:lstStyle/>
           <a:p>
             <a:r>
-              <a:rPr lang="vi-VN" sz="1600" b="1">
-                <a:solidFill>
-                  <a:srgbClr val="F1F5F9"/>
-                </a:solidFill>
-                <a:latin typeface="Aptos" panose="020B0004020202020204" pitchFamily="34" charset="0"/>
-              </a:rPr>
-              <a:t>Nguyễn Hoài Phương - N23DCCN183 - D23CQCN03-N</a:t>
-            </a:r>
-          </a:p>
-        </p:txBody>
-      </p:sp>
-      <p:sp>
-        <p:nvSpPr>
-          <p:cNvPr id="7" name="TextBox 6">
-            <a:extLst>
-              <a:ext uri="{FF2B5EF4-FFF2-40B4-BE49-F238E27FC236}">
-                <a16:creationId xmlns:a16="http://schemas.microsoft.com/office/drawing/2014/main" id="{D5366931-B6E4-F22E-87A4-A492400C45DC}"/>
-              </a:ext>
-            </a:extLst>
-          </p:cNvPr>
-          <p:cNvSpPr txBox="1"/>
-          <p:nvPr/>
-        </p:nvSpPr>
-        <p:spPr>
-          <a:xfrm>
-            <a:off x="609600" y="3200400"/>
-            <a:ext cx="8255000" cy="230832"/>
-          </a:xfrm>
-          <a:prstGeom prst="rect">
-            <a:avLst/>
-          </a:prstGeom>
-          <a:noFill/>
-        </p:spPr>
-        <p:txBody>
-          <a:bodyPr vert="horz" lIns="0" tIns="0" rIns="0" bIns="0" rtlCol="0">
-            <a:spAutoFit/>
-          </a:bodyPr>
-          <a:lstStyle/>
-          <a:p>
-            <a:r>
-              <a:rPr lang="vi-VN" sz="1500">
+              <a:rPr lang="vi-VN" sz="2800" dirty="0">
                 <a:solidFill>
                   <a:srgbClr val="94A3B8"/>
                 </a:solidFill>
                 <a:latin typeface="Aptos" panose="020B0004020202020204" pitchFamily="34" charset="0"/>
               </a:rPr>
-              <a:t>Môn: Cơ sở dữ liệu phân tán | GVHD: Lê Hà Thanh</a:t>
+              <a:t>Môn: Cơ sở dữ liệu phân tán</a:t>
+            </a:r>
+            <a:endParaRPr lang="en-US" sz="2800" dirty="0">
+              <a:solidFill>
+                <a:srgbClr val="94A3B8"/>
+              </a:solidFill>
+              <a:latin typeface="Aptos" panose="020B0004020202020204" pitchFamily="34" charset="0"/>
+            </a:endParaRPr>
+          </a:p>
+          <a:p>
+            <a:r>
+              <a:rPr lang="vi-VN" sz="2800" dirty="0">
+                <a:solidFill>
+                  <a:srgbClr val="94A3B8"/>
+                </a:solidFill>
+                <a:latin typeface="Aptos" panose="020B0004020202020204" pitchFamily="34" charset="0"/>
+              </a:rPr>
+              <a:t>GVHD: Lê Hà Thanh</a:t>
             </a:r>
           </a:p>
         </p:txBody>
@@ -3654,7 +3782,7 @@
         </p:nvSpPr>
         <p:spPr>
           <a:xfrm>
-            <a:off x="8763000" y="863600"/>
+            <a:off x="8675437" y="2052310"/>
             <a:ext cx="2794000" cy="2794000"/>
           </a:xfrm>
           <a:prstGeom prst="roundRect">
@@ -3708,8 +3836,8 @@
         </p:nvSpPr>
         <p:spPr>
           <a:xfrm>
-            <a:off x="9067800" y="1270000"/>
-            <a:ext cx="2184400" cy="1384995"/>
+            <a:off x="8980237" y="2156648"/>
+            <a:ext cx="2184400" cy="2585323"/>
           </a:xfrm>
           <a:prstGeom prst="rect">
             <a:avLst/>
@@ -3724,7 +3852,7 @@
           <a:p>
             <a:pPr algn="ctr"/>
             <a:r>
-              <a:rPr lang="en-US" b="1">
+              <a:rPr lang="en-US" sz="2400" b="1" dirty="0">
                 <a:solidFill>
                   <a:srgbClr val="F1F5F9"/>
                 </a:solidFill>
@@ -3733,9 +3861,39 @@
               <a:t>Client
 Gateway
 NODE_A  NODE_B  NODE_C
-Global Dedup + WAL</a:t>
-            </a:r>
-            <a:endParaRPr lang="vi-VN" b="1">
+Global </a:t>
+            </a:r>
+            <a:r>
+              <a:rPr lang="en-US" sz="2400" b="1" dirty="0" err="1">
+                <a:solidFill>
+                  <a:srgbClr val="F1F5F9"/>
+                </a:solidFill>
+                <a:latin typeface="Aptos" panose="020B0004020202020204" pitchFamily="34" charset="0"/>
+              </a:rPr>
+              <a:t>Dedup</a:t>
+            </a:r>
+            <a:r>
+              <a:rPr lang="en-US" sz="2400" b="1" dirty="0">
+                <a:solidFill>
+                  <a:srgbClr val="F1F5F9"/>
+                </a:solidFill>
+                <a:latin typeface="Aptos" panose="020B0004020202020204" pitchFamily="34" charset="0"/>
+              </a:rPr>
+              <a:t> </a:t>
+            </a:r>
+          </a:p>
+          <a:p>
+            <a:pPr algn="ctr"/>
+            <a:r>
+              <a:rPr lang="en-US" sz="2400" b="1" dirty="0">
+                <a:solidFill>
+                  <a:srgbClr val="F1F5F9"/>
+                </a:solidFill>
+                <a:latin typeface="Aptos" panose="020B0004020202020204" pitchFamily="34" charset="0"/>
+              </a:rPr>
+              <a:t>WAL</a:t>
+            </a:r>
+            <a:endParaRPr lang="vi-VN" sz="2400" b="1" dirty="0">
               <a:solidFill>
                 <a:srgbClr val="F1F5F9"/>
               </a:solidFill>
@@ -3758,8 +3916,8 @@
         </p:nvSpPr>
         <p:spPr>
           <a:xfrm>
-            <a:off x="609600" y="3632200"/>
-            <a:ext cx="9144000" cy="246221"/>
+            <a:off x="558800" y="4277701"/>
+            <a:ext cx="7394074" cy="369332"/>
           </a:xfrm>
           <a:prstGeom prst="rect">
             <a:avLst/>
@@ -3767,13 +3925,13 @@
           <a:noFill/>
         </p:spPr>
         <p:txBody>
-          <a:bodyPr vert="horz" lIns="0" tIns="0" rIns="0" bIns="0" rtlCol="0">
+          <a:bodyPr vert="horz" wrap="square" lIns="0" tIns="0" rIns="0" bIns="0" rtlCol="0">
             <a:spAutoFit/>
           </a:bodyPr>
           <a:lstStyle/>
           <a:p>
             <a:r>
-              <a:rPr lang="vi-VN" sz="1600">
+              <a:rPr lang="vi-VN" sz="2400" dirty="0">
                 <a:solidFill>
                   <a:srgbClr val="38BDF8"/>
                 </a:solidFill>
@@ -6081,7 +6239,7 @@
           <a:lstStyle/>
           <a:p>
             <a:r>
-              <a:rPr lang="vi-VN" sz="1900" b="1">
+              <a:rPr lang="vi-VN" sz="1900" b="1" dirty="0">
                 <a:solidFill>
                   <a:srgbClr val="22D3EE"/>
                 </a:solidFill>
@@ -6215,7 +6373,7 @@
           <a:lstStyle/>
           <a:p>
             <a:r>
-              <a:rPr lang="vi-VN" sz="2400" b="1">
+              <a:rPr lang="vi-VN" sz="2400" b="1" dirty="0">
                 <a:solidFill>
                   <a:srgbClr val="EF4444"/>
                 </a:solidFill>
@@ -6896,7 +7054,7 @@
           <a:lstStyle/>
           <a:p>
             <a:pPr algn="ctr"/>
-            <a:endParaRPr lang="vi-VN"/>
+            <a:endParaRPr lang="vi-VN" dirty="0"/>
           </a:p>
         </p:txBody>
       </p:sp>
@@ -6969,14 +7127,29 @@
           <a:lstStyle/>
           <a:p>
             <a:r>
-              <a:rPr lang="vi-VN" sz="3000" b="1">
+              <a:rPr lang="vi-VN" sz="3000" b="1" dirty="0">
                 <a:solidFill>
                   <a:srgbClr val="F1F5F9"/>
                 </a:solidFill>
                 <a:latin typeface="Aptos" panose="020B0004020202020204" pitchFamily="34" charset="0"/>
               </a:rPr>
-              <a:t>Các test và kịch bản demo</a:t>
-            </a:r>
+              <a:t>Các te</a:t>
+            </a:r>
+            <a:r>
+              <a:rPr lang="en-US" sz="3000" b="1" dirty="0">
+                <a:solidFill>
+                  <a:srgbClr val="F1F5F9"/>
+                </a:solidFill>
+                <a:latin typeface="Aptos" panose="020B0004020202020204" pitchFamily="34" charset="0"/>
+              </a:rPr>
+              <a:t>st demo</a:t>
+            </a:r>
+            <a:endParaRPr lang="vi-VN" sz="3000" b="1" dirty="0">
+              <a:solidFill>
+                <a:srgbClr val="F1F5F9"/>
+              </a:solidFill>
+              <a:latin typeface="Aptos" panose="020B0004020202020204" pitchFamily="34" charset="0"/>
+            </a:endParaRPr>
           </a:p>
         </p:txBody>
       </p:sp>
@@ -7089,7 +7262,7 @@
         <p:spPr>
           <a:xfrm>
             <a:off x="965200" y="2006600"/>
-            <a:ext cx="10414000" cy="1569660"/>
+            <a:ext cx="10414000" cy="4431983"/>
           </a:xfrm>
           <a:prstGeom prst="rect">
             <a:avLst/>
@@ -7103,421 +7276,1084 @@
           <a:lstStyle/>
           <a:p>
             <a:r>
-              <a:rPr lang="vi-VN" sz="1700">
-                <a:solidFill>
-                  <a:srgbClr val="F1F5F9"/>
-                </a:solidFill>
-                <a:latin typeface="Aptos" panose="020B0004020202020204" pitchFamily="34" charset="0"/>
-              </a:rPr>
-              <a:t>• eosRejectsDuplicateAndCommitsOnce: EOS chỉ commit một transaction.
-• aloProcessesDuplicates: ALO xử lý duplicate để làm baseline.
-• outOfOrderRetryUsesEventTimeWindow: retry out-of-order vẫn bị dedup.
-• concurrentEosDuplicateStillCommitsOnce: race condition chỉ có một SUCCESS.
-• nodeFailureRejectsPayment: node FAILED trả 503.
-• benchmarkShowsEosBlocksDuplicatesAndAloDoesNot: EOS chặn duplicate, ALO không chặn.</a:t>
-            </a:r>
-          </a:p>
-        </p:txBody>
-      </p:sp>
-      <p:sp>
-        <p:nvSpPr>
-          <p:cNvPr id="10" name="Rectangle: Rounded Corners 9">
-            <a:extLst>
-              <a:ext uri="{FF2B5EF4-FFF2-40B4-BE49-F238E27FC236}">
-                <a16:creationId xmlns:a16="http://schemas.microsoft.com/office/drawing/2014/main" id="{08BF53C6-D650-6F97-182F-D137D614F391}"/>
-              </a:ext>
-            </a:extLst>
-          </p:cNvPr>
-          <p:cNvSpPr/>
-          <p:nvPr/>
-        </p:nvSpPr>
-        <p:spPr>
-          <a:xfrm>
-            <a:off x="1397000" y="4851400"/>
-            <a:ext cx="2286000" cy="965200"/>
-          </a:xfrm>
-          <a:prstGeom prst="roundRect">
-            <a:avLst/>
-          </a:prstGeom>
-          <a:solidFill>
-            <a:srgbClr val="1E293B"/>
-          </a:solidFill>
-          <a:ln w="12700">
-            <a:solidFill>
-              <a:srgbClr val="334155"/>
-            </a:solidFill>
-          </a:ln>
-        </p:spPr>
-        <p:style>
-          <a:lnRef idx="2">
-            <a:schemeClr val="accent1">
-              <a:shade val="15000"/>
-            </a:schemeClr>
-          </a:lnRef>
-          <a:fillRef idx="1">
-            <a:schemeClr val="accent1"/>
-          </a:fillRef>
-          <a:effectRef idx="0">
-            <a:schemeClr val="accent1"/>
-          </a:effectRef>
-          <a:fontRef idx="minor">
-            <a:schemeClr val="lt1"/>
-          </a:fontRef>
-        </p:style>
-        <p:txBody>
-          <a:bodyPr rtlCol="0" anchor="ctr"/>
-          <a:lstStyle/>
-          <a:p>
-            <a:pPr algn="ctr"/>
-            <a:endParaRPr lang="vi-VN"/>
-          </a:p>
-        </p:txBody>
-      </p:sp>
-      <p:sp>
-        <p:nvSpPr>
-          <p:cNvPr id="11" name="TextBox 10">
-            <a:extLst>
-              <a:ext uri="{FF2B5EF4-FFF2-40B4-BE49-F238E27FC236}">
-                <a16:creationId xmlns:a16="http://schemas.microsoft.com/office/drawing/2014/main" id="{12FEE04E-6067-983C-B49E-8655FA72F354}"/>
-              </a:ext>
-            </a:extLst>
-          </p:cNvPr>
-          <p:cNvSpPr txBox="1"/>
-          <p:nvPr/>
-        </p:nvSpPr>
-        <p:spPr>
-          <a:xfrm>
-            <a:off x="1574800" y="5016500"/>
-            <a:ext cx="1930400" cy="369332"/>
-          </a:xfrm>
-          <a:prstGeom prst="rect">
-            <a:avLst/>
-          </a:prstGeom>
-          <a:noFill/>
-        </p:spPr>
-        <p:txBody>
-          <a:bodyPr vert="horz" lIns="0" tIns="0" rIns="0" bIns="0" rtlCol="0">
-            <a:spAutoFit/>
-          </a:bodyPr>
-          <a:lstStyle/>
-          <a:p>
-            <a:r>
-              <a:rPr lang="vi-VN" sz="2400" b="1">
-                <a:solidFill>
-                  <a:srgbClr val="10B981"/>
-                </a:solidFill>
-                <a:latin typeface="Aptos" panose="020B0004020202020204" pitchFamily="34" charset="0"/>
-              </a:rPr>
-              <a:t>8 PASS</a:t>
-            </a:r>
-          </a:p>
-        </p:txBody>
-      </p:sp>
-      <p:sp>
-        <p:nvSpPr>
-          <p:cNvPr id="12" name="TextBox 11">
-            <a:extLst>
-              <a:ext uri="{FF2B5EF4-FFF2-40B4-BE49-F238E27FC236}">
-                <a16:creationId xmlns:a16="http://schemas.microsoft.com/office/drawing/2014/main" id="{D7C2BDAF-9F9D-33ED-94BF-F3DB743B1928}"/>
-              </a:ext>
-            </a:extLst>
-          </p:cNvPr>
-          <p:cNvSpPr txBox="1"/>
-          <p:nvPr/>
-        </p:nvSpPr>
-        <p:spPr>
-          <a:xfrm>
-            <a:off x="1574800" y="5461000"/>
-            <a:ext cx="1930400" cy="153888"/>
-          </a:xfrm>
-          <a:prstGeom prst="rect">
-            <a:avLst/>
-          </a:prstGeom>
-          <a:noFill/>
-        </p:spPr>
-        <p:txBody>
-          <a:bodyPr vert="horz" lIns="0" tIns="0" rIns="0" bIns="0" rtlCol="0">
-            <a:spAutoFit/>
-          </a:bodyPr>
-          <a:lstStyle/>
-          <a:p>
-            <a:r>
-              <a:rPr lang="vi-VN" sz="1000">
-                <a:solidFill>
-                  <a:srgbClr val="94A3B8"/>
-                </a:solidFill>
-                <a:latin typeface="Aptos" panose="020B0004020202020204" pitchFamily="34" charset="0"/>
-              </a:rPr>
-              <a:t>Maven test</a:t>
-            </a:r>
-          </a:p>
-        </p:txBody>
-      </p:sp>
-      <p:sp>
-        <p:nvSpPr>
-          <p:cNvPr id="13" name="Rectangle: Rounded Corners 12">
-            <a:extLst>
-              <a:ext uri="{FF2B5EF4-FFF2-40B4-BE49-F238E27FC236}">
-                <a16:creationId xmlns:a16="http://schemas.microsoft.com/office/drawing/2014/main" id="{2B210271-F50B-665E-70CF-F4782BD4CAA9}"/>
-              </a:ext>
-            </a:extLst>
-          </p:cNvPr>
-          <p:cNvSpPr/>
-          <p:nvPr/>
-        </p:nvSpPr>
-        <p:spPr>
-          <a:xfrm>
-            <a:off x="4191000" y="4851400"/>
-            <a:ext cx="2032000" cy="965200"/>
-          </a:xfrm>
-          <a:prstGeom prst="roundRect">
-            <a:avLst/>
-          </a:prstGeom>
-          <a:solidFill>
-            <a:srgbClr val="1E293B"/>
-          </a:solidFill>
-          <a:ln w="12700">
-            <a:solidFill>
-              <a:srgbClr val="334155"/>
-            </a:solidFill>
-          </a:ln>
-        </p:spPr>
-        <p:style>
-          <a:lnRef idx="2">
-            <a:schemeClr val="accent1">
-              <a:shade val="15000"/>
-            </a:schemeClr>
-          </a:lnRef>
-          <a:fillRef idx="1">
-            <a:schemeClr val="accent1"/>
-          </a:fillRef>
-          <a:effectRef idx="0">
-            <a:schemeClr val="accent1"/>
-          </a:effectRef>
-          <a:fontRef idx="minor">
-            <a:schemeClr val="lt1"/>
-          </a:fontRef>
-        </p:style>
-        <p:txBody>
-          <a:bodyPr rtlCol="0" anchor="ctr"/>
-          <a:lstStyle/>
-          <a:p>
-            <a:pPr algn="ctr"/>
-            <a:endParaRPr lang="vi-VN"/>
-          </a:p>
-        </p:txBody>
-      </p:sp>
-      <p:sp>
-        <p:nvSpPr>
-          <p:cNvPr id="14" name="TextBox 13">
-            <a:extLst>
-              <a:ext uri="{FF2B5EF4-FFF2-40B4-BE49-F238E27FC236}">
-                <a16:creationId xmlns:a16="http://schemas.microsoft.com/office/drawing/2014/main" id="{6C1C35B1-A857-5095-7FC5-39662547DF2B}"/>
-              </a:ext>
-            </a:extLst>
-          </p:cNvPr>
-          <p:cNvSpPr txBox="1"/>
-          <p:nvPr/>
-        </p:nvSpPr>
-        <p:spPr>
-          <a:xfrm>
-            <a:off x="4368800" y="5016500"/>
-            <a:ext cx="1676400" cy="369332"/>
-          </a:xfrm>
-          <a:prstGeom prst="rect">
-            <a:avLst/>
-          </a:prstGeom>
-          <a:noFill/>
-        </p:spPr>
-        <p:txBody>
-          <a:bodyPr vert="horz" lIns="0" tIns="0" rIns="0" bIns="0" rtlCol="0">
-            <a:spAutoFit/>
-          </a:bodyPr>
-          <a:lstStyle/>
-          <a:p>
-            <a:r>
-              <a:rPr lang="vi-VN" sz="2400" b="1">
-                <a:solidFill>
-                  <a:srgbClr val="10B981"/>
-                </a:solidFill>
-                <a:latin typeface="Aptos" panose="020B0004020202020204" pitchFamily="34" charset="0"/>
-              </a:rPr>
-              <a:t>0</a:t>
-            </a:r>
-          </a:p>
-        </p:txBody>
-      </p:sp>
-      <p:sp>
-        <p:nvSpPr>
-          <p:cNvPr id="15" name="TextBox 14">
-            <a:extLst>
-              <a:ext uri="{FF2B5EF4-FFF2-40B4-BE49-F238E27FC236}">
-                <a16:creationId xmlns:a16="http://schemas.microsoft.com/office/drawing/2014/main" id="{917D0CB0-D75B-F28D-2DCF-21D65CC91317}"/>
-              </a:ext>
-            </a:extLst>
-          </p:cNvPr>
-          <p:cNvSpPr txBox="1"/>
-          <p:nvPr/>
-        </p:nvSpPr>
-        <p:spPr>
-          <a:xfrm>
-            <a:off x="4368800" y="5461000"/>
-            <a:ext cx="1676400" cy="153888"/>
-          </a:xfrm>
-          <a:prstGeom prst="rect">
-            <a:avLst/>
-          </a:prstGeom>
-          <a:noFill/>
-        </p:spPr>
-        <p:txBody>
-          <a:bodyPr vert="horz" lIns="0" tIns="0" rIns="0" bIns="0" rtlCol="0">
-            <a:spAutoFit/>
-          </a:bodyPr>
-          <a:lstStyle/>
-          <a:p>
-            <a:r>
-              <a:rPr lang="vi-VN" sz="1000">
-                <a:solidFill>
-                  <a:srgbClr val="94A3B8"/>
-                </a:solidFill>
-                <a:latin typeface="Aptos" panose="020B0004020202020204" pitchFamily="34" charset="0"/>
-              </a:rPr>
-              <a:t>Failures</a:t>
-            </a:r>
-          </a:p>
-        </p:txBody>
-      </p:sp>
-      <p:sp>
-        <p:nvSpPr>
-          <p:cNvPr id="16" name="Rectangle: Rounded Corners 15">
-            <a:extLst>
-              <a:ext uri="{FF2B5EF4-FFF2-40B4-BE49-F238E27FC236}">
-                <a16:creationId xmlns:a16="http://schemas.microsoft.com/office/drawing/2014/main" id="{0464F6E9-9C46-3D98-F524-6F9C4E79269F}"/>
-              </a:ext>
-            </a:extLst>
-          </p:cNvPr>
-          <p:cNvSpPr/>
-          <p:nvPr/>
-        </p:nvSpPr>
-        <p:spPr>
-          <a:xfrm>
-            <a:off x="6731000" y="4851400"/>
-            <a:ext cx="2032000" cy="965200"/>
-          </a:xfrm>
-          <a:prstGeom prst="roundRect">
-            <a:avLst/>
-          </a:prstGeom>
-          <a:solidFill>
-            <a:srgbClr val="1E293B"/>
-          </a:solidFill>
-          <a:ln w="12700">
-            <a:solidFill>
-              <a:srgbClr val="334155"/>
-            </a:solidFill>
-          </a:ln>
-        </p:spPr>
-        <p:style>
-          <a:lnRef idx="2">
-            <a:schemeClr val="accent1">
-              <a:shade val="15000"/>
-            </a:schemeClr>
-          </a:lnRef>
-          <a:fillRef idx="1">
-            <a:schemeClr val="accent1"/>
-          </a:fillRef>
-          <a:effectRef idx="0">
-            <a:schemeClr val="accent1"/>
-          </a:effectRef>
-          <a:fontRef idx="minor">
-            <a:schemeClr val="lt1"/>
-          </a:fontRef>
-        </p:style>
-        <p:txBody>
-          <a:bodyPr rtlCol="0" anchor="ctr"/>
-          <a:lstStyle/>
-          <a:p>
-            <a:pPr algn="ctr"/>
-            <a:endParaRPr lang="vi-VN"/>
-          </a:p>
-        </p:txBody>
-      </p:sp>
-      <p:sp>
-        <p:nvSpPr>
-          <p:cNvPr id="17" name="TextBox 16">
-            <a:extLst>
-              <a:ext uri="{FF2B5EF4-FFF2-40B4-BE49-F238E27FC236}">
-                <a16:creationId xmlns:a16="http://schemas.microsoft.com/office/drawing/2014/main" id="{32CD692C-5B9B-B360-3DD5-2EBD802B9C43}"/>
-              </a:ext>
-            </a:extLst>
-          </p:cNvPr>
-          <p:cNvSpPr txBox="1"/>
-          <p:nvPr/>
-        </p:nvSpPr>
-        <p:spPr>
-          <a:xfrm>
-            <a:off x="6908800" y="5016500"/>
-            <a:ext cx="1676400" cy="369332"/>
-          </a:xfrm>
-          <a:prstGeom prst="rect">
-            <a:avLst/>
-          </a:prstGeom>
-          <a:noFill/>
-        </p:spPr>
-        <p:txBody>
-          <a:bodyPr vert="horz" lIns="0" tIns="0" rIns="0" bIns="0" rtlCol="0">
-            <a:spAutoFit/>
-          </a:bodyPr>
-          <a:lstStyle/>
-          <a:p>
-            <a:r>
-              <a:rPr lang="vi-VN" sz="2400" b="1">
-                <a:solidFill>
-                  <a:srgbClr val="10B981"/>
-                </a:solidFill>
-                <a:latin typeface="Aptos" panose="020B0004020202020204" pitchFamily="34" charset="0"/>
-              </a:rPr>
-              <a:t>0</a:t>
-            </a:r>
-          </a:p>
-        </p:txBody>
-      </p:sp>
-      <p:sp>
-        <p:nvSpPr>
-          <p:cNvPr id="18" name="TextBox 17">
-            <a:extLst>
-              <a:ext uri="{FF2B5EF4-FFF2-40B4-BE49-F238E27FC236}">
-                <a16:creationId xmlns:a16="http://schemas.microsoft.com/office/drawing/2014/main" id="{640D1DC8-A79E-A78E-0F12-390EF2C06807}"/>
-              </a:ext>
-            </a:extLst>
-          </p:cNvPr>
-          <p:cNvSpPr txBox="1"/>
-          <p:nvPr/>
-        </p:nvSpPr>
-        <p:spPr>
-          <a:xfrm>
-            <a:off x="6908800" y="5461000"/>
-            <a:ext cx="1676400" cy="153888"/>
-          </a:xfrm>
-          <a:prstGeom prst="rect">
-            <a:avLst/>
-          </a:prstGeom>
-          <a:noFill/>
-        </p:spPr>
-        <p:txBody>
-          <a:bodyPr vert="horz" lIns="0" tIns="0" rIns="0" bIns="0" rtlCol="0">
-            <a:spAutoFit/>
-          </a:bodyPr>
-          <a:lstStyle/>
-          <a:p>
-            <a:r>
-              <a:rPr lang="vi-VN" sz="1000">
-                <a:solidFill>
-                  <a:srgbClr val="94A3B8"/>
-                </a:solidFill>
-                <a:latin typeface="Aptos" panose="020B0004020202020204" pitchFamily="34" charset="0"/>
-              </a:rPr>
-              <a:t>Errors</a:t>
-            </a:r>
+              <a:rPr lang="en-US" b="1" dirty="0">
+                <a:solidFill>
+                  <a:schemeClr val="bg1"/>
+                </a:solidFill>
+              </a:rPr>
+              <a:t> 1. </a:t>
+            </a:r>
+            <a:r>
+              <a:rPr lang="en-US" b="1" dirty="0" err="1">
+                <a:solidFill>
+                  <a:schemeClr val="bg1"/>
+                </a:solidFill>
+              </a:rPr>
+              <a:t>eosRejectsDuplicateAndCommitsOnce</a:t>
+            </a:r>
+            <a:endParaRPr lang="vi-VN" dirty="0">
+              <a:solidFill>
+                <a:schemeClr val="bg1"/>
+              </a:solidFill>
+            </a:endParaRPr>
+          </a:p>
+          <a:p>
+            <a:r>
+              <a:rPr lang="en-US" dirty="0">
+                <a:solidFill>
+                  <a:schemeClr val="bg1"/>
+                </a:solidFill>
+              </a:rPr>
+              <a:t>     </a:t>
+            </a:r>
+            <a:r>
+              <a:rPr lang="en-US" dirty="0" err="1">
+                <a:solidFill>
+                  <a:schemeClr val="bg1"/>
+                </a:solidFill>
+              </a:rPr>
+              <a:t>Kiểm</a:t>
+            </a:r>
+            <a:r>
+              <a:rPr lang="en-US" dirty="0">
+                <a:solidFill>
+                  <a:schemeClr val="bg1"/>
+                </a:solidFill>
+              </a:rPr>
+              <a:t> </a:t>
+            </a:r>
+            <a:r>
+              <a:rPr lang="en-US" dirty="0" err="1">
+                <a:solidFill>
+                  <a:schemeClr val="bg1"/>
+                </a:solidFill>
+              </a:rPr>
+              <a:t>tra</a:t>
+            </a:r>
+            <a:r>
+              <a:rPr lang="en-US" dirty="0">
+                <a:solidFill>
+                  <a:schemeClr val="bg1"/>
+                </a:solidFill>
+              </a:rPr>
+              <a:t> EOS reject duplicate </a:t>
+            </a:r>
+            <a:r>
+              <a:rPr lang="en-US" dirty="0" err="1">
+                <a:solidFill>
+                  <a:schemeClr val="bg1"/>
+                </a:solidFill>
+              </a:rPr>
+              <a:t>và</a:t>
+            </a:r>
+            <a:r>
+              <a:rPr lang="en-US" dirty="0">
+                <a:solidFill>
+                  <a:schemeClr val="bg1"/>
+                </a:solidFill>
+              </a:rPr>
+              <a:t> </a:t>
+            </a:r>
+            <a:r>
+              <a:rPr lang="en-US" dirty="0" err="1">
+                <a:solidFill>
+                  <a:schemeClr val="bg1"/>
+                </a:solidFill>
+              </a:rPr>
+              <a:t>chỉ</a:t>
+            </a:r>
+            <a:r>
+              <a:rPr lang="en-US" dirty="0">
+                <a:solidFill>
+                  <a:schemeClr val="bg1"/>
+                </a:solidFill>
+              </a:rPr>
+              <a:t> commit 1 transaction.</a:t>
+            </a:r>
+            <a:endParaRPr lang="vi-VN" dirty="0">
+              <a:solidFill>
+                <a:schemeClr val="bg1"/>
+              </a:solidFill>
+            </a:endParaRPr>
+          </a:p>
+          <a:p>
+            <a:r>
+              <a:rPr lang="en-US" b="1" dirty="0">
+                <a:solidFill>
+                  <a:schemeClr val="bg1"/>
+                </a:solidFill>
+              </a:rPr>
+              <a:t>  2. </a:t>
+            </a:r>
+            <a:r>
+              <a:rPr lang="en-US" b="1" dirty="0" err="1">
+                <a:solidFill>
+                  <a:schemeClr val="bg1"/>
+                </a:solidFill>
+              </a:rPr>
+              <a:t>aloProcessesDuplicates</a:t>
+            </a:r>
+            <a:endParaRPr lang="vi-VN" dirty="0">
+              <a:solidFill>
+                <a:schemeClr val="bg1"/>
+              </a:solidFill>
+            </a:endParaRPr>
+          </a:p>
+          <a:p>
+            <a:r>
+              <a:rPr lang="en-US" dirty="0">
+                <a:solidFill>
+                  <a:schemeClr val="bg1"/>
+                </a:solidFill>
+              </a:rPr>
+              <a:t>     </a:t>
+            </a:r>
+            <a:r>
+              <a:rPr lang="en-US" dirty="0" err="1">
+                <a:solidFill>
+                  <a:schemeClr val="bg1"/>
+                </a:solidFill>
+              </a:rPr>
+              <a:t>Kiểm</a:t>
+            </a:r>
+            <a:r>
+              <a:rPr lang="en-US" dirty="0">
+                <a:solidFill>
+                  <a:schemeClr val="bg1"/>
+                </a:solidFill>
+              </a:rPr>
+              <a:t> </a:t>
+            </a:r>
+            <a:r>
+              <a:rPr lang="en-US" dirty="0" err="1">
+                <a:solidFill>
+                  <a:schemeClr val="bg1"/>
+                </a:solidFill>
+              </a:rPr>
+              <a:t>tra</a:t>
+            </a:r>
+            <a:r>
+              <a:rPr lang="en-US" dirty="0">
+                <a:solidFill>
+                  <a:schemeClr val="bg1"/>
+                </a:solidFill>
+              </a:rPr>
+              <a:t> ALO </a:t>
+            </a:r>
+            <a:r>
+              <a:rPr lang="en-US" dirty="0" err="1">
+                <a:solidFill>
+                  <a:schemeClr val="bg1"/>
+                </a:solidFill>
+              </a:rPr>
+              <a:t>xử</a:t>
+            </a:r>
+            <a:r>
+              <a:rPr lang="en-US" dirty="0">
+                <a:solidFill>
+                  <a:schemeClr val="bg1"/>
+                </a:solidFill>
+              </a:rPr>
+              <a:t> </a:t>
+            </a:r>
+            <a:r>
+              <a:rPr lang="en-US" dirty="0" err="1">
+                <a:solidFill>
+                  <a:schemeClr val="bg1"/>
+                </a:solidFill>
+              </a:rPr>
+              <a:t>lý</a:t>
+            </a:r>
+            <a:r>
+              <a:rPr lang="en-US" dirty="0">
+                <a:solidFill>
+                  <a:schemeClr val="bg1"/>
+                </a:solidFill>
+              </a:rPr>
+              <a:t> duplicate </a:t>
+            </a:r>
+            <a:r>
+              <a:rPr lang="en-US" dirty="0" err="1">
+                <a:solidFill>
+                  <a:schemeClr val="bg1"/>
+                </a:solidFill>
+              </a:rPr>
+              <a:t>thành</a:t>
+            </a:r>
+            <a:r>
+              <a:rPr lang="en-US" dirty="0">
+                <a:solidFill>
+                  <a:schemeClr val="bg1"/>
+                </a:solidFill>
+              </a:rPr>
+              <a:t> </a:t>
+            </a:r>
+            <a:r>
+              <a:rPr lang="en-US" dirty="0" err="1">
+                <a:solidFill>
+                  <a:schemeClr val="bg1"/>
+                </a:solidFill>
+              </a:rPr>
+              <a:t>nhiều</a:t>
+            </a:r>
+            <a:r>
+              <a:rPr lang="en-US" dirty="0">
+                <a:solidFill>
+                  <a:schemeClr val="bg1"/>
+                </a:solidFill>
+              </a:rPr>
+              <a:t> transaction </a:t>
+            </a:r>
+            <a:r>
+              <a:rPr lang="en-US" dirty="0" err="1">
+                <a:solidFill>
+                  <a:schemeClr val="bg1"/>
+                </a:solidFill>
+              </a:rPr>
+              <a:t>để</a:t>
+            </a:r>
+            <a:r>
+              <a:rPr lang="en-US" dirty="0">
+                <a:solidFill>
+                  <a:schemeClr val="bg1"/>
+                </a:solidFill>
+              </a:rPr>
+              <a:t> </a:t>
+            </a:r>
+            <a:r>
+              <a:rPr lang="en-US" dirty="0" err="1">
+                <a:solidFill>
+                  <a:schemeClr val="bg1"/>
+                </a:solidFill>
+              </a:rPr>
+              <a:t>làm</a:t>
+            </a:r>
+            <a:r>
+              <a:rPr lang="en-US" dirty="0">
+                <a:solidFill>
+                  <a:schemeClr val="bg1"/>
+                </a:solidFill>
+              </a:rPr>
+              <a:t> baseline.</a:t>
+            </a:r>
+            <a:endParaRPr lang="vi-VN" dirty="0">
+              <a:solidFill>
+                <a:schemeClr val="bg1"/>
+              </a:solidFill>
+            </a:endParaRPr>
+          </a:p>
+          <a:p>
+            <a:r>
+              <a:rPr lang="en-US" b="1" dirty="0">
+                <a:solidFill>
+                  <a:schemeClr val="bg1"/>
+                </a:solidFill>
+              </a:rPr>
+              <a:t>  3. </a:t>
+            </a:r>
+            <a:r>
+              <a:rPr lang="en-US" b="1" dirty="0" err="1">
+                <a:solidFill>
+                  <a:schemeClr val="bg1"/>
+                </a:solidFill>
+              </a:rPr>
+              <a:t>outOfOrderRetryUsesEventTimeWindow</a:t>
+            </a:r>
+            <a:endParaRPr lang="vi-VN" dirty="0">
+              <a:solidFill>
+                <a:schemeClr val="bg1"/>
+              </a:solidFill>
+            </a:endParaRPr>
+          </a:p>
+          <a:p>
+            <a:r>
+              <a:rPr lang="en-US" dirty="0">
+                <a:solidFill>
+                  <a:schemeClr val="bg1"/>
+                </a:solidFill>
+              </a:rPr>
+              <a:t>     </a:t>
+            </a:r>
+            <a:r>
+              <a:rPr lang="en-US" dirty="0" err="1">
+                <a:solidFill>
+                  <a:schemeClr val="bg1"/>
+                </a:solidFill>
+              </a:rPr>
+              <a:t>Kiểm</a:t>
+            </a:r>
+            <a:r>
+              <a:rPr lang="en-US" dirty="0">
+                <a:solidFill>
+                  <a:schemeClr val="bg1"/>
+                </a:solidFill>
+              </a:rPr>
+              <a:t> </a:t>
+            </a:r>
+            <a:r>
+              <a:rPr lang="en-US" dirty="0" err="1">
+                <a:solidFill>
+                  <a:schemeClr val="bg1"/>
+                </a:solidFill>
+              </a:rPr>
+              <a:t>tra</a:t>
+            </a:r>
+            <a:r>
+              <a:rPr lang="en-US" dirty="0">
+                <a:solidFill>
+                  <a:schemeClr val="bg1"/>
+                </a:solidFill>
+              </a:rPr>
+              <a:t> retry </a:t>
+            </a:r>
+            <a:r>
+              <a:rPr lang="en-US" dirty="0" err="1">
+                <a:solidFill>
+                  <a:schemeClr val="bg1"/>
+                </a:solidFill>
+              </a:rPr>
+              <a:t>lệch</a:t>
+            </a:r>
+            <a:r>
+              <a:rPr lang="en-US" dirty="0">
+                <a:solidFill>
+                  <a:schemeClr val="bg1"/>
+                </a:solidFill>
+              </a:rPr>
+              <a:t> </a:t>
+            </a:r>
+            <a:r>
+              <a:rPr lang="en-US" dirty="0" err="1">
+                <a:solidFill>
+                  <a:schemeClr val="bg1"/>
+                </a:solidFill>
+              </a:rPr>
+              <a:t>thứ</a:t>
+            </a:r>
+            <a:r>
+              <a:rPr lang="en-US" dirty="0">
+                <a:solidFill>
+                  <a:schemeClr val="bg1"/>
+                </a:solidFill>
+              </a:rPr>
+              <a:t> </a:t>
+            </a:r>
+            <a:r>
+              <a:rPr lang="en-US" dirty="0" err="1">
+                <a:solidFill>
+                  <a:schemeClr val="bg1"/>
+                </a:solidFill>
+              </a:rPr>
+              <a:t>tự</a:t>
+            </a:r>
+            <a:r>
+              <a:rPr lang="en-US" dirty="0">
+                <a:solidFill>
+                  <a:schemeClr val="bg1"/>
+                </a:solidFill>
+              </a:rPr>
+              <a:t> </a:t>
+            </a:r>
+            <a:r>
+              <a:rPr lang="en-US" dirty="0" err="1">
+                <a:solidFill>
+                  <a:schemeClr val="bg1"/>
+                </a:solidFill>
+              </a:rPr>
+              <a:t>vẫn</a:t>
+            </a:r>
+            <a:r>
+              <a:rPr lang="en-US" dirty="0">
+                <a:solidFill>
+                  <a:schemeClr val="bg1"/>
+                </a:solidFill>
+              </a:rPr>
+              <a:t> </a:t>
+            </a:r>
+            <a:r>
+              <a:rPr lang="en-US" dirty="0" err="1">
+                <a:solidFill>
+                  <a:schemeClr val="bg1"/>
+                </a:solidFill>
+              </a:rPr>
+              <a:t>bị</a:t>
+            </a:r>
+            <a:r>
+              <a:rPr lang="en-US" dirty="0">
+                <a:solidFill>
+                  <a:schemeClr val="bg1"/>
+                </a:solidFill>
+              </a:rPr>
+              <a:t> de-dup </a:t>
+            </a:r>
+            <a:r>
+              <a:rPr lang="en-US" dirty="0" err="1">
+                <a:solidFill>
+                  <a:schemeClr val="bg1"/>
+                </a:solidFill>
+              </a:rPr>
+              <a:t>theo</a:t>
+            </a:r>
+            <a:r>
+              <a:rPr lang="en-US" dirty="0">
+                <a:solidFill>
+                  <a:schemeClr val="bg1"/>
+                </a:solidFill>
+              </a:rPr>
+              <a:t> event-time.</a:t>
+            </a:r>
+            <a:endParaRPr lang="vi-VN" dirty="0">
+              <a:solidFill>
+                <a:schemeClr val="bg1"/>
+              </a:solidFill>
+            </a:endParaRPr>
+          </a:p>
+          <a:p>
+            <a:r>
+              <a:rPr lang="en-US" b="1" dirty="0">
+                <a:solidFill>
+                  <a:schemeClr val="bg1"/>
+                </a:solidFill>
+              </a:rPr>
+              <a:t>  4. </a:t>
+            </a:r>
+            <a:r>
+              <a:rPr lang="en-US" b="1" dirty="0" err="1">
+                <a:solidFill>
+                  <a:schemeClr val="bg1"/>
+                </a:solidFill>
+              </a:rPr>
+              <a:t>concurrentEosDuplicateStillCommitsOnce</a:t>
+            </a:r>
+            <a:endParaRPr lang="vi-VN" dirty="0">
+              <a:solidFill>
+                <a:schemeClr val="bg1"/>
+              </a:solidFill>
+            </a:endParaRPr>
+          </a:p>
+          <a:p>
+            <a:r>
+              <a:rPr lang="en-US" dirty="0">
+                <a:solidFill>
+                  <a:schemeClr val="bg1"/>
+                </a:solidFill>
+              </a:rPr>
+              <a:t>     </a:t>
+            </a:r>
+            <a:r>
+              <a:rPr lang="en-US" dirty="0" err="1">
+                <a:solidFill>
+                  <a:schemeClr val="bg1"/>
+                </a:solidFill>
+              </a:rPr>
+              <a:t>Kiểm</a:t>
+            </a:r>
+            <a:r>
+              <a:rPr lang="en-US" dirty="0">
+                <a:solidFill>
+                  <a:schemeClr val="bg1"/>
+                </a:solidFill>
+              </a:rPr>
+              <a:t> </a:t>
+            </a:r>
+            <a:r>
+              <a:rPr lang="en-US" dirty="0" err="1">
+                <a:solidFill>
+                  <a:schemeClr val="bg1"/>
+                </a:solidFill>
+              </a:rPr>
+              <a:t>tra</a:t>
+            </a:r>
+            <a:r>
+              <a:rPr lang="en-US" dirty="0">
+                <a:solidFill>
+                  <a:schemeClr val="bg1"/>
+                </a:solidFill>
+              </a:rPr>
+              <a:t> concurrent race: </a:t>
+            </a:r>
+            <a:r>
+              <a:rPr lang="en-US" dirty="0" err="1">
+                <a:solidFill>
+                  <a:schemeClr val="bg1"/>
+                </a:solidFill>
+              </a:rPr>
+              <a:t>nhiều</a:t>
+            </a:r>
+            <a:r>
+              <a:rPr lang="en-US" dirty="0">
+                <a:solidFill>
+                  <a:schemeClr val="bg1"/>
+                </a:solidFill>
+              </a:rPr>
+              <a:t> request </a:t>
+            </a:r>
+            <a:r>
+              <a:rPr lang="en-US" dirty="0" err="1">
+                <a:solidFill>
+                  <a:schemeClr val="bg1"/>
+                </a:solidFill>
+              </a:rPr>
+              <a:t>cùng</a:t>
+            </a:r>
+            <a:r>
+              <a:rPr lang="en-US" dirty="0">
+                <a:solidFill>
+                  <a:schemeClr val="bg1"/>
+                </a:solidFill>
+              </a:rPr>
+              <a:t> key </a:t>
+            </a:r>
+            <a:r>
+              <a:rPr lang="en-US" dirty="0" err="1">
+                <a:solidFill>
+                  <a:schemeClr val="bg1"/>
+                </a:solidFill>
+              </a:rPr>
+              <a:t>nhưng</a:t>
+            </a:r>
+            <a:r>
+              <a:rPr lang="en-US" dirty="0">
+                <a:solidFill>
+                  <a:schemeClr val="bg1"/>
+                </a:solidFill>
+              </a:rPr>
+              <a:t> </a:t>
+            </a:r>
+            <a:r>
+              <a:rPr lang="en-US" dirty="0" err="1">
+                <a:solidFill>
+                  <a:schemeClr val="bg1"/>
+                </a:solidFill>
+              </a:rPr>
+              <a:t>chỉ</a:t>
+            </a:r>
+            <a:r>
+              <a:rPr lang="en-US" dirty="0">
+                <a:solidFill>
+                  <a:schemeClr val="bg1"/>
+                </a:solidFill>
+              </a:rPr>
+              <a:t> 1 SUCCESS.</a:t>
+            </a:r>
+            <a:endParaRPr lang="vi-VN" dirty="0">
+              <a:solidFill>
+                <a:schemeClr val="bg1"/>
+              </a:solidFill>
+            </a:endParaRPr>
+          </a:p>
+          <a:p>
+            <a:r>
+              <a:rPr lang="en-US" b="1" dirty="0">
+                <a:solidFill>
+                  <a:schemeClr val="bg1"/>
+                </a:solidFill>
+              </a:rPr>
+              <a:t>  5. </a:t>
+            </a:r>
+            <a:r>
+              <a:rPr lang="en-US" b="1" dirty="0" err="1">
+                <a:solidFill>
+                  <a:schemeClr val="bg1"/>
+                </a:solidFill>
+              </a:rPr>
+              <a:t>nodeFailureRejectsPayment</a:t>
+            </a:r>
+            <a:endParaRPr lang="vi-VN" dirty="0">
+              <a:solidFill>
+                <a:schemeClr val="bg1"/>
+              </a:solidFill>
+            </a:endParaRPr>
+          </a:p>
+          <a:p>
+            <a:r>
+              <a:rPr lang="en-US" dirty="0">
+                <a:solidFill>
+                  <a:schemeClr val="bg1"/>
+                </a:solidFill>
+              </a:rPr>
+              <a:t>     </a:t>
+            </a:r>
+            <a:r>
+              <a:rPr lang="en-US" dirty="0" err="1">
+                <a:solidFill>
+                  <a:schemeClr val="bg1"/>
+                </a:solidFill>
+              </a:rPr>
+              <a:t>Kiểm</a:t>
+            </a:r>
+            <a:r>
+              <a:rPr lang="en-US" dirty="0">
+                <a:solidFill>
+                  <a:schemeClr val="bg1"/>
+                </a:solidFill>
+              </a:rPr>
+              <a:t> </a:t>
+            </a:r>
+            <a:r>
+              <a:rPr lang="en-US" dirty="0" err="1">
+                <a:solidFill>
+                  <a:schemeClr val="bg1"/>
+                </a:solidFill>
+              </a:rPr>
+              <a:t>tra</a:t>
+            </a:r>
+            <a:r>
+              <a:rPr lang="en-US" dirty="0">
+                <a:solidFill>
+                  <a:schemeClr val="bg1"/>
+                </a:solidFill>
+              </a:rPr>
+              <a:t> node FAILED </a:t>
+            </a:r>
+            <a:r>
+              <a:rPr lang="en-US" dirty="0" err="1">
+                <a:solidFill>
+                  <a:schemeClr val="bg1"/>
+                </a:solidFill>
+              </a:rPr>
+              <a:t>thì</a:t>
+            </a:r>
+            <a:r>
+              <a:rPr lang="en-US" dirty="0">
+                <a:solidFill>
+                  <a:schemeClr val="bg1"/>
+                </a:solidFill>
+              </a:rPr>
+              <a:t> payment </a:t>
+            </a:r>
+            <a:r>
+              <a:rPr lang="en-US" dirty="0" err="1">
+                <a:solidFill>
+                  <a:schemeClr val="bg1"/>
+                </a:solidFill>
+              </a:rPr>
+              <a:t>bị</a:t>
+            </a:r>
+            <a:r>
+              <a:rPr lang="en-US" dirty="0">
+                <a:solidFill>
+                  <a:schemeClr val="bg1"/>
+                </a:solidFill>
+              </a:rPr>
+              <a:t> reject 503.</a:t>
+            </a:r>
+            <a:endParaRPr lang="vi-VN" dirty="0">
+              <a:solidFill>
+                <a:schemeClr val="bg1"/>
+              </a:solidFill>
+            </a:endParaRPr>
+          </a:p>
+          <a:p>
+            <a:r>
+              <a:rPr lang="en-US" b="1" dirty="0">
+                <a:solidFill>
+                  <a:schemeClr val="bg1"/>
+                </a:solidFill>
+              </a:rPr>
+              <a:t>  6. </a:t>
+            </a:r>
+            <a:r>
+              <a:rPr lang="en-US" b="1" dirty="0" err="1">
+                <a:solidFill>
+                  <a:schemeClr val="bg1"/>
+                </a:solidFill>
+              </a:rPr>
+              <a:t>benchmarkShowsEosBlocksDuplicatesAndAloDoesNot</a:t>
+            </a:r>
+            <a:endParaRPr lang="vi-VN" dirty="0">
+              <a:solidFill>
+                <a:schemeClr val="bg1"/>
+              </a:solidFill>
+            </a:endParaRPr>
+          </a:p>
+          <a:p>
+            <a:r>
+              <a:rPr lang="en-US" dirty="0">
+                <a:solidFill>
+                  <a:schemeClr val="bg1"/>
+                </a:solidFill>
+              </a:rPr>
+              <a:t>     </a:t>
+            </a:r>
+            <a:r>
+              <a:rPr lang="en-US" dirty="0" err="1">
+                <a:solidFill>
+                  <a:schemeClr val="bg1"/>
+                </a:solidFill>
+              </a:rPr>
+              <a:t>Kiểm</a:t>
+            </a:r>
+            <a:r>
+              <a:rPr lang="en-US" dirty="0">
+                <a:solidFill>
+                  <a:schemeClr val="bg1"/>
+                </a:solidFill>
+              </a:rPr>
+              <a:t> </a:t>
+            </a:r>
+            <a:r>
+              <a:rPr lang="en-US" dirty="0" err="1">
+                <a:solidFill>
+                  <a:schemeClr val="bg1"/>
+                </a:solidFill>
+              </a:rPr>
+              <a:t>tra</a:t>
+            </a:r>
+            <a:r>
+              <a:rPr lang="en-US" dirty="0">
+                <a:solidFill>
+                  <a:schemeClr val="bg1"/>
+                </a:solidFill>
+              </a:rPr>
+              <a:t> benchmark: EOS </a:t>
+            </a:r>
+            <a:r>
+              <a:rPr lang="en-US" dirty="0" err="1">
+                <a:solidFill>
+                  <a:schemeClr val="bg1"/>
+                </a:solidFill>
+              </a:rPr>
+              <a:t>chặn</a:t>
+            </a:r>
+            <a:r>
+              <a:rPr lang="en-US" dirty="0">
+                <a:solidFill>
+                  <a:schemeClr val="bg1"/>
+                </a:solidFill>
+              </a:rPr>
+              <a:t> duplicate, ALO </a:t>
+            </a:r>
+            <a:r>
+              <a:rPr lang="en-US" dirty="0" err="1">
+                <a:solidFill>
+                  <a:schemeClr val="bg1"/>
+                </a:solidFill>
+              </a:rPr>
+              <a:t>không</a:t>
+            </a:r>
+            <a:r>
+              <a:rPr lang="en-US" dirty="0">
+                <a:solidFill>
+                  <a:schemeClr val="bg1"/>
+                </a:solidFill>
+              </a:rPr>
+              <a:t> </a:t>
+            </a:r>
+            <a:r>
+              <a:rPr lang="en-US" dirty="0" err="1">
+                <a:solidFill>
+                  <a:schemeClr val="bg1"/>
+                </a:solidFill>
+              </a:rPr>
+              <a:t>chặn</a:t>
+            </a:r>
+            <a:r>
+              <a:rPr lang="en-US" dirty="0">
+                <a:solidFill>
+                  <a:schemeClr val="bg1"/>
+                </a:solidFill>
+              </a:rPr>
+              <a:t>.</a:t>
+            </a:r>
+            <a:endParaRPr lang="vi-VN" dirty="0">
+              <a:solidFill>
+                <a:schemeClr val="bg1"/>
+              </a:solidFill>
+            </a:endParaRPr>
+          </a:p>
+          <a:p>
+            <a:r>
+              <a:rPr lang="en-US" dirty="0">
+                <a:solidFill>
+                  <a:schemeClr val="bg1"/>
+                </a:solidFill>
+              </a:rPr>
+              <a:t>  </a:t>
+            </a:r>
+            <a:r>
+              <a:rPr lang="en-US" b="1" dirty="0">
+                <a:solidFill>
+                  <a:schemeClr val="bg1"/>
+                </a:solidFill>
+              </a:rPr>
+              <a:t>7. </a:t>
+            </a:r>
+            <a:r>
+              <a:rPr lang="en-US" b="1" dirty="0" err="1">
+                <a:solidFill>
+                  <a:schemeClr val="bg1"/>
+                </a:solidFill>
+              </a:rPr>
+              <a:t>gatewayRoleUsesGatewayPaymentService</a:t>
+            </a:r>
+            <a:endParaRPr lang="vi-VN" dirty="0">
+              <a:solidFill>
+                <a:schemeClr val="bg1"/>
+              </a:solidFill>
+            </a:endParaRPr>
+          </a:p>
+          <a:p>
+            <a:r>
+              <a:rPr lang="en-US" dirty="0">
+                <a:solidFill>
+                  <a:schemeClr val="bg1"/>
+                </a:solidFill>
+              </a:rPr>
+              <a:t>     </a:t>
+            </a:r>
+            <a:r>
+              <a:rPr lang="en-US" dirty="0" err="1">
+                <a:solidFill>
+                  <a:schemeClr val="bg1"/>
+                </a:solidFill>
+              </a:rPr>
+              <a:t>Kiểm</a:t>
+            </a:r>
+            <a:r>
+              <a:rPr lang="en-US" dirty="0">
+                <a:solidFill>
+                  <a:schemeClr val="bg1"/>
+                </a:solidFill>
+              </a:rPr>
+              <a:t> </a:t>
+            </a:r>
+            <a:r>
+              <a:rPr lang="en-US" dirty="0" err="1">
+                <a:solidFill>
+                  <a:schemeClr val="bg1"/>
+                </a:solidFill>
+              </a:rPr>
+              <a:t>tra</a:t>
+            </a:r>
+            <a:r>
+              <a:rPr lang="en-US" dirty="0">
+                <a:solidFill>
+                  <a:schemeClr val="bg1"/>
+                </a:solidFill>
+              </a:rPr>
+              <a:t> profile gateway </a:t>
+            </a:r>
+            <a:r>
+              <a:rPr lang="en-US" dirty="0" err="1">
+                <a:solidFill>
+                  <a:schemeClr val="bg1"/>
+                </a:solidFill>
+              </a:rPr>
+              <a:t>dùng</a:t>
+            </a:r>
+            <a:r>
+              <a:rPr lang="en-US" dirty="0">
+                <a:solidFill>
+                  <a:schemeClr val="bg1"/>
+                </a:solidFill>
+              </a:rPr>
+              <a:t> </a:t>
+            </a:r>
+            <a:r>
+              <a:rPr lang="en-US" dirty="0" err="1">
+                <a:solidFill>
+                  <a:schemeClr val="bg1"/>
+                </a:solidFill>
+              </a:rPr>
+              <a:t>đúng</a:t>
+            </a:r>
+            <a:r>
+              <a:rPr lang="en-US" dirty="0">
+                <a:solidFill>
+                  <a:schemeClr val="bg1"/>
+                </a:solidFill>
+              </a:rPr>
+              <a:t> </a:t>
+            </a:r>
+            <a:r>
+              <a:rPr lang="en-US" dirty="0" err="1">
+                <a:solidFill>
+                  <a:schemeClr val="bg1"/>
+                </a:solidFill>
+              </a:rPr>
+              <a:t>GatewayPaymentService</a:t>
+            </a:r>
+            <a:r>
+              <a:rPr lang="en-US" dirty="0">
+                <a:solidFill>
+                  <a:schemeClr val="bg1"/>
+                </a:solidFill>
+              </a:rPr>
+              <a:t>.</a:t>
+            </a:r>
+            <a:endParaRPr lang="vi-VN" dirty="0">
+              <a:solidFill>
+                <a:schemeClr val="bg1"/>
+              </a:solidFill>
+            </a:endParaRPr>
+          </a:p>
+          <a:p>
+            <a:r>
+              <a:rPr lang="en-US" b="1" dirty="0">
+                <a:solidFill>
+                  <a:schemeClr val="bg1"/>
+                </a:solidFill>
+              </a:rPr>
+              <a:t>  8. </a:t>
+            </a:r>
+            <a:r>
+              <a:rPr lang="en-US" b="1" dirty="0" err="1">
+                <a:solidFill>
+                  <a:schemeClr val="bg1"/>
+                </a:solidFill>
+              </a:rPr>
+              <a:t>configuredNodeOnlyProcessesItsOwnNodeId</a:t>
+            </a:r>
+            <a:endParaRPr lang="vi-VN" dirty="0">
+              <a:solidFill>
+                <a:schemeClr val="bg1"/>
+              </a:solidFill>
+            </a:endParaRPr>
+          </a:p>
+          <a:p>
+            <a:r>
+              <a:rPr lang="en-US" dirty="0">
+                <a:solidFill>
+                  <a:schemeClr val="bg1"/>
+                </a:solidFill>
+              </a:rPr>
+              <a:t>     </a:t>
+            </a:r>
+            <a:r>
+              <a:rPr lang="en-US" dirty="0" err="1">
+                <a:solidFill>
+                  <a:schemeClr val="bg1"/>
+                </a:solidFill>
+              </a:rPr>
+              <a:t>Kiểm</a:t>
+            </a:r>
+            <a:r>
+              <a:rPr lang="en-US" dirty="0">
+                <a:solidFill>
+                  <a:schemeClr val="bg1"/>
+                </a:solidFill>
+              </a:rPr>
+              <a:t> </a:t>
+            </a:r>
+            <a:r>
+              <a:rPr lang="en-US" dirty="0" err="1">
+                <a:solidFill>
+                  <a:schemeClr val="bg1"/>
+                </a:solidFill>
+              </a:rPr>
+              <a:t>tra</a:t>
+            </a:r>
+            <a:r>
+              <a:rPr lang="en-US" dirty="0">
+                <a:solidFill>
+                  <a:schemeClr val="bg1"/>
+                </a:solidFill>
+              </a:rPr>
+              <a:t> node profile </a:t>
+            </a:r>
+            <a:r>
+              <a:rPr lang="en-US" dirty="0" err="1">
+                <a:solidFill>
+                  <a:schemeClr val="bg1"/>
+                </a:solidFill>
+              </a:rPr>
+              <a:t>chỉ</a:t>
+            </a:r>
+            <a:r>
+              <a:rPr lang="en-US" dirty="0">
+                <a:solidFill>
+                  <a:schemeClr val="bg1"/>
+                </a:solidFill>
+              </a:rPr>
+              <a:t> </a:t>
+            </a:r>
+            <a:r>
+              <a:rPr lang="en-US" dirty="0" err="1">
+                <a:solidFill>
+                  <a:schemeClr val="bg1"/>
+                </a:solidFill>
+              </a:rPr>
+              <a:t>xử</a:t>
+            </a:r>
+            <a:r>
+              <a:rPr lang="en-US" dirty="0">
+                <a:solidFill>
+                  <a:schemeClr val="bg1"/>
+                </a:solidFill>
+              </a:rPr>
+              <a:t> </a:t>
+            </a:r>
+            <a:r>
+              <a:rPr lang="en-US" dirty="0" err="1">
+                <a:solidFill>
+                  <a:schemeClr val="bg1"/>
+                </a:solidFill>
+              </a:rPr>
+              <a:t>lý</a:t>
+            </a:r>
+            <a:r>
+              <a:rPr lang="en-US" dirty="0">
+                <a:solidFill>
+                  <a:schemeClr val="bg1"/>
+                </a:solidFill>
+              </a:rPr>
+              <a:t> </a:t>
+            </a:r>
+            <a:r>
+              <a:rPr lang="en-US" dirty="0" err="1">
+                <a:solidFill>
+                  <a:schemeClr val="bg1"/>
+                </a:solidFill>
+              </a:rPr>
+              <a:t>đúng</a:t>
+            </a:r>
+            <a:r>
+              <a:rPr lang="en-US" dirty="0">
+                <a:solidFill>
+                  <a:schemeClr val="bg1"/>
+                </a:solidFill>
+              </a:rPr>
+              <a:t> node-id </a:t>
+            </a:r>
+            <a:r>
+              <a:rPr lang="en-US" dirty="0" err="1">
+                <a:solidFill>
+                  <a:schemeClr val="bg1"/>
+                </a:solidFill>
+              </a:rPr>
+              <a:t>của</a:t>
+            </a:r>
+            <a:r>
+              <a:rPr lang="en-US" dirty="0">
+                <a:solidFill>
+                  <a:schemeClr val="bg1"/>
+                </a:solidFill>
+              </a:rPr>
+              <a:t> </a:t>
+            </a:r>
+            <a:r>
+              <a:rPr lang="en-US" dirty="0" err="1">
+                <a:solidFill>
+                  <a:schemeClr val="bg1"/>
+                </a:solidFill>
+              </a:rPr>
+              <a:t>nó</a:t>
+            </a:r>
+            <a:r>
+              <a:rPr lang="en-US" dirty="0">
+                <a:solidFill>
+                  <a:schemeClr val="bg1"/>
+                </a:solidFill>
+              </a:rPr>
+              <a:t>.</a:t>
+            </a:r>
+            <a:endParaRPr lang="vi-VN" sz="1700" dirty="0">
+              <a:solidFill>
+                <a:schemeClr val="bg1"/>
+              </a:solidFill>
+              <a:latin typeface="Aptos" panose="020B0004020202020204" pitchFamily="34" charset="0"/>
+            </a:endParaRPr>
           </a:p>
         </p:txBody>
       </p:sp>
@@ -7556,7 +8392,7 @@
           <p:cNvPr id="2" name="Rectangle 1">
             <a:extLst>
               <a:ext uri="{FF2B5EF4-FFF2-40B4-BE49-F238E27FC236}">
-                <a16:creationId xmlns:a16="http://schemas.microsoft.com/office/drawing/2014/main" id="{A3AAF378-7296-6831-055A-2705BA93DF53}"/>
+                <a16:creationId xmlns:a16="http://schemas.microsoft.com/office/drawing/2014/main" id="{2C9E50D7-B87E-808B-65A7-EE68DC2CC635}"/>
               </a:ext>
             </a:extLst>
           </p:cNvPr>
@@ -7565,7 +8401,7 @@
         </p:nvSpPr>
         <p:spPr>
           <a:xfrm>
-            <a:off x="0" y="0"/>
+            <a:off x="0" y="39539"/>
             <a:ext cx="12192000" cy="6858000"/>
           </a:xfrm>
           <a:prstGeom prst="rect">
@@ -7624,7 +8460,7 @@
           <p:cNvPr id="3" name="TextBox 2">
             <a:extLst>
               <a:ext uri="{FF2B5EF4-FFF2-40B4-BE49-F238E27FC236}">
-                <a16:creationId xmlns:a16="http://schemas.microsoft.com/office/drawing/2014/main" id="{B8E13759-1E9D-52DE-C28D-F2504C59C8C7}"/>
+                <a16:creationId xmlns:a16="http://schemas.microsoft.com/office/drawing/2014/main" id="{322FA511-4D8D-799F-E4FE-94B4919A2E06}"/>
               </a:ext>
             </a:extLst>
           </p:cNvPr>
@@ -7654,7 +8490,7 @@
                 </a:solidFill>
                 <a:latin typeface="Aptos" panose="020B0004020202020204" pitchFamily="34" charset="0"/>
               </a:rPr>
-              <a:t>05 / EVIDENCE</a:t>
+              <a:t>06 / LIMITS</a:t>
             </a:r>
           </a:p>
         </p:txBody>
@@ -7664,7 +8500,7 @@
           <p:cNvPr id="4" name="TextBox 3">
             <a:extLst>
               <a:ext uri="{FF2B5EF4-FFF2-40B4-BE49-F238E27FC236}">
-                <a16:creationId xmlns:a16="http://schemas.microsoft.com/office/drawing/2014/main" id="{8A232CEC-D23D-668E-E5BE-F194E9229AE1}"/>
+                <a16:creationId xmlns:a16="http://schemas.microsoft.com/office/drawing/2014/main" id="{89C3A201-7587-5072-98F1-8A24A12DCD3C}"/>
               </a:ext>
             </a:extLst>
           </p:cNvPr>
@@ -7694,7 +8530,7 @@
                 </a:solidFill>
                 <a:latin typeface="Aptos" panose="020B0004020202020204" pitchFamily="34" charset="0"/>
               </a:rPr>
-              <a:t>Bằng chứng đo lường</a:t>
+              <a:t>Hạn chế hiện tại</a:t>
             </a:r>
           </a:p>
         </p:txBody>
@@ -7704,7 +8540,7 @@
           <p:cNvPr id="5" name="TextBox 4">
             <a:extLst>
               <a:ext uri="{FF2B5EF4-FFF2-40B4-BE49-F238E27FC236}">
-                <a16:creationId xmlns:a16="http://schemas.microsoft.com/office/drawing/2014/main" id="{1308F4FD-AA77-96CD-2D11-515585CC165F}"/>
+                <a16:creationId xmlns:a16="http://schemas.microsoft.com/office/drawing/2014/main" id="{70F3EE82-70DE-57F9-3D0D-6B56B43E16BA}"/>
               </a:ext>
             </a:extLst>
           </p:cNvPr>
@@ -7734,7 +8570,7 @@
                 </a:solidFill>
                 <a:latin typeface="Aptos" panose="020B0004020202020204" pitchFamily="34" charset="0"/>
               </a:rPr>
-              <a:t>Phần demo chi tiết có thể chạy trực tiếp hoặc mở video; slide chỉ giữ số liệu chứng minh thiết kế.</a:t>
+              <a:t>Thiết kế phù hợp scope môn học, chưa phải production-grade payment platform.</a:t>
             </a:r>
           </a:p>
         </p:txBody>
@@ -7744,7 +8580,7 @@
           <p:cNvPr id="6" name="Rectangle 5">
             <a:extLst>
               <a:ext uri="{FF2B5EF4-FFF2-40B4-BE49-F238E27FC236}">
-                <a16:creationId xmlns:a16="http://schemas.microsoft.com/office/drawing/2014/main" id="{F7C6557E-B126-3109-2DCF-39AB970D958C}"/>
+                <a16:creationId xmlns:a16="http://schemas.microsoft.com/office/drawing/2014/main" id="{C1950389-3891-3784-D090-20188118D379}"/>
               </a:ext>
             </a:extLst>
           </p:cNvPr>
@@ -7795,64 +8631,10 @@
       </p:sp>
       <p:sp>
         <p:nvSpPr>
-          <p:cNvPr id="9" name="Rectangle: Rounded Corners 8">
-            <a:extLst>
-              <a:ext uri="{FF2B5EF4-FFF2-40B4-BE49-F238E27FC236}">
-                <a16:creationId xmlns:a16="http://schemas.microsoft.com/office/drawing/2014/main" id="{31D41953-F90A-EAAC-2128-3980F3BCF957}"/>
-              </a:ext>
-            </a:extLst>
-          </p:cNvPr>
-          <p:cNvSpPr/>
-          <p:nvPr/>
-        </p:nvSpPr>
-        <p:spPr>
-          <a:xfrm>
-            <a:off x="787400" y="2006600"/>
-            <a:ext cx="1905000" cy="965200"/>
-          </a:xfrm>
-          <a:prstGeom prst="roundRect">
-            <a:avLst/>
-          </a:prstGeom>
-          <a:solidFill>
-            <a:srgbClr val="1E293B"/>
-          </a:solidFill>
-          <a:ln w="12700">
-            <a:solidFill>
-              <a:srgbClr val="334155"/>
-            </a:solidFill>
-          </a:ln>
-        </p:spPr>
-        <p:style>
-          <a:lnRef idx="2">
-            <a:schemeClr val="accent1">
-              <a:shade val="15000"/>
-            </a:schemeClr>
-          </a:lnRef>
-          <a:fillRef idx="1">
-            <a:schemeClr val="accent1"/>
-          </a:fillRef>
-          <a:effectRef idx="0">
-            <a:schemeClr val="accent1"/>
-          </a:effectRef>
-          <a:fontRef idx="minor">
-            <a:schemeClr val="lt1"/>
-          </a:fontRef>
-        </p:style>
-        <p:txBody>
-          <a:bodyPr rtlCol="0" anchor="ctr"/>
-          <a:lstStyle/>
-          <a:p>
-            <a:pPr algn="ctr"/>
-            <a:endParaRPr lang="vi-VN"/>
-          </a:p>
-        </p:txBody>
-      </p:sp>
-      <p:sp>
-        <p:nvSpPr>
-          <p:cNvPr id="10" name="TextBox 9">
-            <a:extLst>
-              <a:ext uri="{FF2B5EF4-FFF2-40B4-BE49-F238E27FC236}">
-                <a16:creationId xmlns:a16="http://schemas.microsoft.com/office/drawing/2014/main" id="{82549381-F0DE-AEAD-33DB-5590DD67A5FE}"/>
+          <p:cNvPr id="9" name="TextBox 8">
+            <a:extLst>
+              <a:ext uri="{FF2B5EF4-FFF2-40B4-BE49-F238E27FC236}">
+                <a16:creationId xmlns:a16="http://schemas.microsoft.com/office/drawing/2014/main" id="{25390576-05EA-762F-8180-A1BA2A593E9B}"/>
               </a:ext>
             </a:extLst>
           </p:cNvPr>
@@ -7861,8 +8643,8 @@
         </p:nvSpPr>
         <p:spPr>
           <a:xfrm>
-            <a:off x="965200" y="2171700"/>
-            <a:ext cx="1549400" cy="369332"/>
+            <a:off x="1092200" y="2006600"/>
+            <a:ext cx="9906000" cy="1754326"/>
           </a:xfrm>
           <a:prstGeom prst="rect">
             <a:avLst/>
@@ -7876,935 +8658,34 @@
           <a:lstStyle/>
           <a:p>
             <a:r>
-              <a:rPr lang="vi-VN" sz="2400" b="1">
-                <a:solidFill>
-                  <a:srgbClr val="60A5FA"/>
-                </a:solidFill>
-                <a:latin typeface="Aptos" panose="020B0004020202020204" pitchFamily="34" charset="0"/>
-              </a:rPr>
-              <a:t>43.84</a:t>
-            </a:r>
-          </a:p>
-        </p:txBody>
-      </p:sp>
-      <p:sp>
-        <p:nvSpPr>
-          <p:cNvPr id="11" name="TextBox 10">
-            <a:extLst>
-              <a:ext uri="{FF2B5EF4-FFF2-40B4-BE49-F238E27FC236}">
-                <a16:creationId xmlns:a16="http://schemas.microsoft.com/office/drawing/2014/main" id="{DF955929-9112-409E-74E9-B63A46BA7AE9}"/>
-              </a:ext>
-            </a:extLst>
-          </p:cNvPr>
-          <p:cNvSpPr txBox="1"/>
-          <p:nvPr/>
-        </p:nvSpPr>
-        <p:spPr>
-          <a:xfrm>
-            <a:off x="965200" y="2616200"/>
-            <a:ext cx="1549400" cy="153888"/>
-          </a:xfrm>
-          <a:prstGeom prst="rect">
-            <a:avLst/>
-          </a:prstGeom>
-          <a:noFill/>
-        </p:spPr>
-        <p:txBody>
-          <a:bodyPr vert="horz" lIns="0" tIns="0" rIns="0" bIns="0" rtlCol="0">
-            <a:spAutoFit/>
-          </a:bodyPr>
-          <a:lstStyle/>
-          <a:p>
-            <a:r>
-              <a:rPr lang="vi-VN" sz="1000">
-                <a:solidFill>
-                  <a:srgbClr val="94A3B8"/>
-                </a:solidFill>
-                <a:latin typeface="Aptos" panose="020B0004020202020204" pitchFamily="34" charset="0"/>
-              </a:rPr>
-              <a:t>EOS TPS</a:t>
-            </a:r>
-          </a:p>
-        </p:txBody>
-      </p:sp>
-      <p:sp>
-        <p:nvSpPr>
-          <p:cNvPr id="12" name="Rectangle: Rounded Corners 11">
-            <a:extLst>
-              <a:ext uri="{FF2B5EF4-FFF2-40B4-BE49-F238E27FC236}">
-                <a16:creationId xmlns:a16="http://schemas.microsoft.com/office/drawing/2014/main" id="{0866795F-0A10-A0B8-7EA8-489306172319}"/>
-              </a:ext>
-            </a:extLst>
-          </p:cNvPr>
-          <p:cNvSpPr/>
-          <p:nvPr/>
-        </p:nvSpPr>
-        <p:spPr>
-          <a:xfrm>
-            <a:off x="2921000" y="2006600"/>
-            <a:ext cx="1905000" cy="965200"/>
-          </a:xfrm>
-          <a:prstGeom prst="roundRect">
-            <a:avLst/>
-          </a:prstGeom>
-          <a:solidFill>
-            <a:srgbClr val="1E293B"/>
-          </a:solidFill>
-          <a:ln w="12700">
-            <a:solidFill>
-              <a:srgbClr val="334155"/>
-            </a:solidFill>
-          </a:ln>
-        </p:spPr>
-        <p:style>
-          <a:lnRef idx="2">
-            <a:schemeClr val="accent1">
-              <a:shade val="15000"/>
-            </a:schemeClr>
-          </a:lnRef>
-          <a:fillRef idx="1">
-            <a:schemeClr val="accent1"/>
-          </a:fillRef>
-          <a:effectRef idx="0">
-            <a:schemeClr val="accent1"/>
-          </a:effectRef>
-          <a:fontRef idx="minor">
-            <a:schemeClr val="lt1"/>
-          </a:fontRef>
-        </p:style>
-        <p:txBody>
-          <a:bodyPr rtlCol="0" anchor="ctr"/>
-          <a:lstStyle/>
-          <a:p>
-            <a:pPr algn="ctr"/>
-            <a:endParaRPr lang="vi-VN"/>
-          </a:p>
-        </p:txBody>
-      </p:sp>
-      <p:sp>
-        <p:nvSpPr>
-          <p:cNvPr id="13" name="TextBox 12">
-            <a:extLst>
-              <a:ext uri="{FF2B5EF4-FFF2-40B4-BE49-F238E27FC236}">
-                <a16:creationId xmlns:a16="http://schemas.microsoft.com/office/drawing/2014/main" id="{B6DEAB10-6183-DF7A-D6A5-D52AF63D6074}"/>
-              </a:ext>
-            </a:extLst>
-          </p:cNvPr>
-          <p:cNvSpPr txBox="1"/>
-          <p:nvPr/>
-        </p:nvSpPr>
-        <p:spPr>
-          <a:xfrm>
-            <a:off x="3098800" y="2171700"/>
-            <a:ext cx="1549400" cy="369332"/>
-          </a:xfrm>
-          <a:prstGeom prst="rect">
-            <a:avLst/>
-          </a:prstGeom>
-          <a:noFill/>
-        </p:spPr>
-        <p:txBody>
-          <a:bodyPr vert="horz" lIns="0" tIns="0" rIns="0" bIns="0" rtlCol="0">
-            <a:spAutoFit/>
-          </a:bodyPr>
-          <a:lstStyle/>
-          <a:p>
-            <a:r>
-              <a:rPr lang="vi-VN" sz="2400" b="1">
-                <a:solidFill>
-                  <a:srgbClr val="F59E0B"/>
-                </a:solidFill>
-                <a:latin typeface="Aptos" panose="020B0004020202020204" pitchFamily="34" charset="0"/>
-              </a:rPr>
-              <a:t>45.00</a:t>
-            </a:r>
-          </a:p>
-        </p:txBody>
-      </p:sp>
-      <p:sp>
-        <p:nvSpPr>
-          <p:cNvPr id="14" name="TextBox 13">
-            <a:extLst>
-              <a:ext uri="{FF2B5EF4-FFF2-40B4-BE49-F238E27FC236}">
-                <a16:creationId xmlns:a16="http://schemas.microsoft.com/office/drawing/2014/main" id="{37F51E3C-61CB-3553-66F4-409E29CE16E9}"/>
-              </a:ext>
-            </a:extLst>
-          </p:cNvPr>
-          <p:cNvSpPr txBox="1"/>
-          <p:nvPr/>
-        </p:nvSpPr>
-        <p:spPr>
-          <a:xfrm>
-            <a:off x="3098800" y="2616200"/>
-            <a:ext cx="1549400" cy="153888"/>
-          </a:xfrm>
-          <a:prstGeom prst="rect">
-            <a:avLst/>
-          </a:prstGeom>
-          <a:noFill/>
-        </p:spPr>
-        <p:txBody>
-          <a:bodyPr vert="horz" lIns="0" tIns="0" rIns="0" bIns="0" rtlCol="0">
-            <a:spAutoFit/>
-          </a:bodyPr>
-          <a:lstStyle/>
-          <a:p>
-            <a:r>
-              <a:rPr lang="vi-VN" sz="1000">
-                <a:solidFill>
-                  <a:srgbClr val="94A3B8"/>
-                </a:solidFill>
-                <a:latin typeface="Aptos" panose="020B0004020202020204" pitchFamily="34" charset="0"/>
-              </a:rPr>
-              <a:t>ALO TPS</a:t>
-            </a:r>
-          </a:p>
-        </p:txBody>
-      </p:sp>
-      <p:sp>
-        <p:nvSpPr>
-          <p:cNvPr id="15" name="Rectangle: Rounded Corners 14">
-            <a:extLst>
-              <a:ext uri="{FF2B5EF4-FFF2-40B4-BE49-F238E27FC236}">
-                <a16:creationId xmlns:a16="http://schemas.microsoft.com/office/drawing/2014/main" id="{7F7E89FA-872E-60A9-116F-9CEA2221C087}"/>
-              </a:ext>
-            </a:extLst>
-          </p:cNvPr>
-          <p:cNvSpPr/>
-          <p:nvPr/>
-        </p:nvSpPr>
-        <p:spPr>
-          <a:xfrm>
-            <a:off x="5054600" y="2006600"/>
-            <a:ext cx="2413000" cy="965200"/>
-          </a:xfrm>
-          <a:prstGeom prst="roundRect">
-            <a:avLst/>
-          </a:prstGeom>
-          <a:solidFill>
-            <a:srgbClr val="1E293B"/>
-          </a:solidFill>
-          <a:ln w="12700">
-            <a:solidFill>
-              <a:srgbClr val="334155"/>
-            </a:solidFill>
-          </a:ln>
-        </p:spPr>
-        <p:style>
-          <a:lnRef idx="2">
-            <a:schemeClr val="accent1">
-              <a:shade val="15000"/>
-            </a:schemeClr>
-          </a:lnRef>
-          <a:fillRef idx="1">
-            <a:schemeClr val="accent1"/>
-          </a:fillRef>
-          <a:effectRef idx="0">
-            <a:schemeClr val="accent1"/>
-          </a:effectRef>
-          <a:fontRef idx="minor">
-            <a:schemeClr val="lt1"/>
-          </a:fontRef>
-        </p:style>
-        <p:txBody>
-          <a:bodyPr rtlCol="0" anchor="ctr"/>
-          <a:lstStyle/>
-          <a:p>
-            <a:pPr algn="ctr"/>
-            <a:endParaRPr lang="vi-VN"/>
-          </a:p>
-        </p:txBody>
-      </p:sp>
-      <p:sp>
-        <p:nvSpPr>
-          <p:cNvPr id="16" name="TextBox 15">
-            <a:extLst>
-              <a:ext uri="{FF2B5EF4-FFF2-40B4-BE49-F238E27FC236}">
-                <a16:creationId xmlns:a16="http://schemas.microsoft.com/office/drawing/2014/main" id="{99E1F88F-BE50-1BDC-B230-C5CA984FB750}"/>
-              </a:ext>
-            </a:extLst>
-          </p:cNvPr>
-          <p:cNvSpPr txBox="1"/>
-          <p:nvPr/>
-        </p:nvSpPr>
-        <p:spPr>
-          <a:xfrm>
-            <a:off x="5232400" y="2171700"/>
-            <a:ext cx="2057400" cy="369332"/>
-          </a:xfrm>
-          <a:prstGeom prst="rect">
-            <a:avLst/>
-          </a:prstGeom>
-          <a:noFill/>
-        </p:spPr>
-        <p:txBody>
-          <a:bodyPr vert="horz" lIns="0" tIns="0" rIns="0" bIns="0" rtlCol="0">
-            <a:spAutoFit/>
-          </a:bodyPr>
-          <a:lstStyle/>
-          <a:p>
-            <a:r>
-              <a:rPr lang="vi-VN" sz="2400" b="1">
-                <a:solidFill>
-                  <a:srgbClr val="EF4444"/>
-                </a:solidFill>
-                <a:latin typeface="Aptos" panose="020B0004020202020204" pitchFamily="34" charset="0"/>
-              </a:rPr>
-              <a:t>0 / 50</a:t>
-            </a:r>
-          </a:p>
-        </p:txBody>
-      </p:sp>
-      <p:sp>
-        <p:nvSpPr>
-          <p:cNvPr id="17" name="TextBox 16">
-            <a:extLst>
-              <a:ext uri="{FF2B5EF4-FFF2-40B4-BE49-F238E27FC236}">
-                <a16:creationId xmlns:a16="http://schemas.microsoft.com/office/drawing/2014/main" id="{7CB4E866-8048-9DDC-5694-9595C48945CB}"/>
-              </a:ext>
-            </a:extLst>
-          </p:cNvPr>
-          <p:cNvSpPr txBox="1"/>
-          <p:nvPr/>
-        </p:nvSpPr>
-        <p:spPr>
-          <a:xfrm>
-            <a:off x="5232400" y="2616200"/>
-            <a:ext cx="2057400" cy="153888"/>
-          </a:xfrm>
-          <a:prstGeom prst="rect">
-            <a:avLst/>
-          </a:prstGeom>
-          <a:noFill/>
-        </p:spPr>
-        <p:txBody>
-          <a:bodyPr vert="horz" lIns="0" tIns="0" rIns="0" bIns="0" rtlCol="0">
-            <a:spAutoFit/>
-          </a:bodyPr>
-          <a:lstStyle/>
-          <a:p>
-            <a:r>
-              <a:rPr lang="vi-VN" sz="1000">
-                <a:solidFill>
-                  <a:srgbClr val="94A3B8"/>
-                </a:solidFill>
-                <a:latin typeface="Aptos" panose="020B0004020202020204" pitchFamily="34" charset="0"/>
-              </a:rPr>
-              <a:t>Duplicate charges</a:t>
-            </a:r>
-          </a:p>
-        </p:txBody>
-      </p:sp>
-      <p:sp>
-        <p:nvSpPr>
-          <p:cNvPr id="18" name="Rectangle: Rounded Corners 17">
-            <a:extLst>
-              <a:ext uri="{FF2B5EF4-FFF2-40B4-BE49-F238E27FC236}">
-                <a16:creationId xmlns:a16="http://schemas.microsoft.com/office/drawing/2014/main" id="{08DE042A-455D-5B67-CB3F-E7391F765620}"/>
-              </a:ext>
-            </a:extLst>
-          </p:cNvPr>
-          <p:cNvSpPr/>
-          <p:nvPr/>
-        </p:nvSpPr>
-        <p:spPr>
-          <a:xfrm>
-            <a:off x="7696200" y="2006600"/>
-            <a:ext cx="1905000" cy="965200"/>
-          </a:xfrm>
-          <a:prstGeom prst="roundRect">
-            <a:avLst/>
-          </a:prstGeom>
-          <a:solidFill>
-            <a:srgbClr val="1E293B"/>
-          </a:solidFill>
-          <a:ln w="12700">
-            <a:solidFill>
-              <a:srgbClr val="334155"/>
-            </a:solidFill>
-          </a:ln>
-        </p:spPr>
-        <p:style>
-          <a:lnRef idx="2">
-            <a:schemeClr val="accent1">
-              <a:shade val="15000"/>
-            </a:schemeClr>
-          </a:lnRef>
-          <a:fillRef idx="1">
-            <a:schemeClr val="accent1"/>
-          </a:fillRef>
-          <a:effectRef idx="0">
-            <a:schemeClr val="accent1"/>
-          </a:effectRef>
-          <a:fontRef idx="minor">
-            <a:schemeClr val="lt1"/>
-          </a:fontRef>
-        </p:style>
-        <p:txBody>
-          <a:bodyPr rtlCol="0" anchor="ctr"/>
-          <a:lstStyle/>
-          <a:p>
-            <a:pPr algn="ctr"/>
-            <a:endParaRPr lang="vi-VN"/>
-          </a:p>
-        </p:txBody>
-      </p:sp>
-      <p:sp>
-        <p:nvSpPr>
-          <p:cNvPr id="19" name="TextBox 18">
-            <a:extLst>
-              <a:ext uri="{FF2B5EF4-FFF2-40B4-BE49-F238E27FC236}">
-                <a16:creationId xmlns:a16="http://schemas.microsoft.com/office/drawing/2014/main" id="{3FD15CBF-C891-238E-C661-48F4AA75273F}"/>
-              </a:ext>
-            </a:extLst>
-          </p:cNvPr>
-          <p:cNvSpPr txBox="1"/>
-          <p:nvPr/>
-        </p:nvSpPr>
-        <p:spPr>
-          <a:xfrm>
-            <a:off x="7874000" y="2171700"/>
-            <a:ext cx="1549400" cy="369332"/>
-          </a:xfrm>
-          <a:prstGeom prst="rect">
-            <a:avLst/>
-          </a:prstGeom>
-          <a:noFill/>
-        </p:spPr>
-        <p:txBody>
-          <a:bodyPr vert="horz" lIns="0" tIns="0" rIns="0" bIns="0" rtlCol="0">
-            <a:spAutoFit/>
-          </a:bodyPr>
-          <a:lstStyle/>
-          <a:p>
-            <a:r>
-              <a:rPr lang="vi-VN" sz="2400" b="1">
-                <a:solidFill>
-                  <a:srgbClr val="10B981"/>
-                </a:solidFill>
-                <a:latin typeface="Aptos" panose="020B0004020202020204" pitchFamily="34" charset="0"/>
-              </a:rPr>
-              <a:t>50</a:t>
-            </a:r>
-          </a:p>
-        </p:txBody>
-      </p:sp>
-      <p:sp>
-        <p:nvSpPr>
-          <p:cNvPr id="20" name="TextBox 19">
-            <a:extLst>
-              <a:ext uri="{FF2B5EF4-FFF2-40B4-BE49-F238E27FC236}">
-                <a16:creationId xmlns:a16="http://schemas.microsoft.com/office/drawing/2014/main" id="{3877010A-DF7A-EB6D-5463-E53D28C83702}"/>
-              </a:ext>
-            </a:extLst>
-          </p:cNvPr>
-          <p:cNvSpPr txBox="1"/>
-          <p:nvPr/>
-        </p:nvSpPr>
-        <p:spPr>
-          <a:xfrm>
-            <a:off x="7874000" y="2616200"/>
-            <a:ext cx="1549400" cy="153888"/>
-          </a:xfrm>
-          <a:prstGeom prst="rect">
-            <a:avLst/>
-          </a:prstGeom>
-          <a:noFill/>
-        </p:spPr>
-        <p:txBody>
-          <a:bodyPr vert="horz" lIns="0" tIns="0" rIns="0" bIns="0" rtlCol="0">
-            <a:spAutoFit/>
-          </a:bodyPr>
-          <a:lstStyle/>
-          <a:p>
-            <a:r>
-              <a:rPr lang="vi-VN" sz="1000">
-                <a:solidFill>
-                  <a:srgbClr val="94A3B8"/>
-                </a:solidFill>
-                <a:latin typeface="Aptos" panose="020B0004020202020204" pitchFamily="34" charset="0"/>
-              </a:rPr>
-              <a:t>Duplicates blocked</a:t>
-            </a:r>
-          </a:p>
-        </p:txBody>
-      </p:sp>
-      <p:sp>
-        <p:nvSpPr>
-          <p:cNvPr id="21" name="Rectangle: Rounded Corners 20">
-            <a:extLst>
-              <a:ext uri="{FF2B5EF4-FFF2-40B4-BE49-F238E27FC236}">
-                <a16:creationId xmlns:a16="http://schemas.microsoft.com/office/drawing/2014/main" id="{48BA4365-EEBD-3DEF-6CDE-E12B3DD48499}"/>
-              </a:ext>
-            </a:extLst>
-          </p:cNvPr>
-          <p:cNvSpPr/>
-          <p:nvPr/>
-        </p:nvSpPr>
-        <p:spPr>
-          <a:xfrm>
-            <a:off x="9829800" y="2006600"/>
-            <a:ext cx="1905000" cy="965200"/>
-          </a:xfrm>
-          <a:prstGeom prst="roundRect">
-            <a:avLst/>
-          </a:prstGeom>
-          <a:solidFill>
-            <a:srgbClr val="1E293B"/>
-          </a:solidFill>
-          <a:ln w="12700">
-            <a:solidFill>
-              <a:srgbClr val="334155"/>
-            </a:solidFill>
-          </a:ln>
-        </p:spPr>
-        <p:style>
-          <a:lnRef idx="2">
-            <a:schemeClr val="accent1">
-              <a:shade val="15000"/>
-            </a:schemeClr>
-          </a:lnRef>
-          <a:fillRef idx="1">
-            <a:schemeClr val="accent1"/>
-          </a:fillRef>
-          <a:effectRef idx="0">
-            <a:schemeClr val="accent1"/>
-          </a:effectRef>
-          <a:fontRef idx="minor">
-            <a:schemeClr val="lt1"/>
-          </a:fontRef>
-        </p:style>
-        <p:txBody>
-          <a:bodyPr rtlCol="0" anchor="ctr"/>
-          <a:lstStyle/>
-          <a:p>
-            <a:pPr algn="ctr"/>
-            <a:endParaRPr lang="vi-VN"/>
-          </a:p>
-        </p:txBody>
-      </p:sp>
-      <p:sp>
-        <p:nvSpPr>
-          <p:cNvPr id="22" name="TextBox 21">
-            <a:extLst>
-              <a:ext uri="{FF2B5EF4-FFF2-40B4-BE49-F238E27FC236}">
-                <a16:creationId xmlns:a16="http://schemas.microsoft.com/office/drawing/2014/main" id="{69146616-32E4-EA52-1C31-F24FAFF27AAC}"/>
-              </a:ext>
-            </a:extLst>
-          </p:cNvPr>
-          <p:cNvSpPr txBox="1"/>
-          <p:nvPr/>
-        </p:nvSpPr>
-        <p:spPr>
-          <a:xfrm>
-            <a:off x="10007600" y="2171700"/>
-            <a:ext cx="1549400" cy="369332"/>
-          </a:xfrm>
-          <a:prstGeom prst="rect">
-            <a:avLst/>
-          </a:prstGeom>
-          <a:noFill/>
-        </p:spPr>
-        <p:txBody>
-          <a:bodyPr vert="horz" lIns="0" tIns="0" rIns="0" bIns="0" rtlCol="0">
-            <a:spAutoFit/>
-          </a:bodyPr>
-          <a:lstStyle/>
-          <a:p>
-            <a:r>
-              <a:rPr lang="vi-VN" sz="2400" b="1">
-                <a:solidFill>
-                  <a:srgbClr val="22D3EE"/>
-                </a:solidFill>
-                <a:latin typeface="Aptos" panose="020B0004020202020204" pitchFamily="34" charset="0"/>
-              </a:rPr>
-              <a:t>110 / 110</a:t>
-            </a:r>
-          </a:p>
-        </p:txBody>
-      </p:sp>
-      <p:sp>
-        <p:nvSpPr>
-          <p:cNvPr id="23" name="TextBox 22">
-            <a:extLst>
-              <a:ext uri="{FF2B5EF4-FFF2-40B4-BE49-F238E27FC236}">
-                <a16:creationId xmlns:a16="http://schemas.microsoft.com/office/drawing/2014/main" id="{8BA32D5C-056E-5237-874D-BCB180A9241C}"/>
-              </a:ext>
-            </a:extLst>
-          </p:cNvPr>
-          <p:cNvSpPr txBox="1"/>
-          <p:nvPr/>
-        </p:nvSpPr>
-        <p:spPr>
-          <a:xfrm>
-            <a:off x="10007600" y="2616200"/>
-            <a:ext cx="1549400" cy="153888"/>
-          </a:xfrm>
-          <a:prstGeom prst="rect">
-            <a:avLst/>
-          </a:prstGeom>
-          <a:noFill/>
-        </p:spPr>
-        <p:txBody>
-          <a:bodyPr vert="horz" lIns="0" tIns="0" rIns="0" bIns="0" rtlCol="0">
-            <a:spAutoFit/>
-          </a:bodyPr>
-          <a:lstStyle/>
-          <a:p>
-            <a:r>
-              <a:rPr lang="vi-VN" sz="1000">
-                <a:solidFill>
-                  <a:srgbClr val="94A3B8"/>
-                </a:solidFill>
-                <a:latin typeface="Aptos" panose="020B0004020202020204" pitchFamily="34" charset="0"/>
-              </a:rPr>
-              <a:t>WAL / Success</a:t>
-            </a:r>
-          </a:p>
-        </p:txBody>
-      </p:sp>
-      <p:sp>
-        <p:nvSpPr>
-          <p:cNvPr id="24" name="Rectangle: Rounded Corners 23">
-            <a:extLst>
-              <a:ext uri="{FF2B5EF4-FFF2-40B4-BE49-F238E27FC236}">
-                <a16:creationId xmlns:a16="http://schemas.microsoft.com/office/drawing/2014/main" id="{206B580A-D48E-1E4A-01F8-2729C8BC7143}"/>
-              </a:ext>
-            </a:extLst>
-          </p:cNvPr>
-          <p:cNvSpPr/>
-          <p:nvPr/>
-        </p:nvSpPr>
-        <p:spPr>
-          <a:xfrm>
-            <a:off x="965200" y="3530600"/>
-            <a:ext cx="10261600" cy="1200000"/>
-          </a:xfrm>
-          <a:prstGeom prst="roundRect">
-            <a:avLst/>
-          </a:prstGeom>
-          <a:solidFill>
-            <a:srgbClr val="1E293B"/>
-          </a:solidFill>
-          <a:ln w="12700">
-            <a:solidFill>
-              <a:srgbClr val="334155"/>
-            </a:solidFill>
-          </a:ln>
-        </p:spPr>
-        <p:style>
-          <a:lnRef idx="2">
-            <a:schemeClr val="accent1">
-              <a:shade val="15000"/>
-            </a:schemeClr>
-          </a:lnRef>
-          <a:fillRef idx="1">
-            <a:schemeClr val="accent1"/>
-          </a:fillRef>
-          <a:effectRef idx="0">
-            <a:schemeClr val="accent1"/>
-          </a:effectRef>
-          <a:fontRef idx="minor">
-            <a:schemeClr val="lt1"/>
-          </a:fontRef>
-        </p:style>
-        <p:txBody>
-          <a:bodyPr rtlCol="0" anchor="ctr"/>
-          <a:lstStyle/>
-          <a:p>
-            <a:pPr algn="ctr"/>
-            <a:endParaRPr lang="vi-VN"/>
-          </a:p>
-        </p:txBody>
-      </p:sp>
-      <p:sp>
-        <p:nvSpPr>
-          <p:cNvPr id="25" name="TextBox 24">
-            <a:extLst>
-              <a:ext uri="{FF2B5EF4-FFF2-40B4-BE49-F238E27FC236}">
-                <a16:creationId xmlns:a16="http://schemas.microsoft.com/office/drawing/2014/main" id="{76FC08D4-D5D9-B926-A93A-6EDB3385BC1E}"/>
-              </a:ext>
-            </a:extLst>
-          </p:cNvPr>
-          <p:cNvSpPr txBox="1"/>
-          <p:nvPr/>
-        </p:nvSpPr>
-        <p:spPr>
-          <a:xfrm>
-            <a:off x="1295400" y="3680000"/>
-            <a:ext cx="9000000" cy="307777"/>
-          </a:xfrm>
-          <a:prstGeom prst="rect">
-            <a:avLst/>
-          </a:prstGeom>
-          <a:noFill/>
-        </p:spPr>
-        <p:txBody>
-          <a:bodyPr vert="horz" lIns="0" tIns="0" rIns="0" bIns="0" rtlCol="0">
-            <a:spAutoFit/>
-          </a:bodyPr>
-          <a:lstStyle/>
-          <a:p>
-            <a:r>
-              <a:rPr lang="en-US" sz="1600" b="1">
+              <a:rPr lang="vi-VN" sz="1900" dirty="0">
                 <a:solidFill>
                   <a:srgbClr val="F1F5F9"/>
                 </a:solidFill>
                 <a:latin typeface="Aptos" panose="020B0004020202020204" pitchFamily="34" charset="0"/>
               </a:rPr>
-              <a:t>Latency avg / p50 / p95 / p99</a:t>
-            </a:r>
-            <a:endParaRPr lang="vi-VN" sz="1600" b="1">
+              <a:t>• Global dedup store là coordination point tập trung.
+• Account state được seed giống nhau ở các node để đơn giản hóa demo.
+• Chưa có distributed commit protocol kiểu 2PC cho transfer chạm nhiều shard account.</a:t>
+            </a:r>
+            <a:endParaRPr lang="en-US" sz="1900" dirty="0">
               <a:solidFill>
                 <a:srgbClr val="F1F5F9"/>
               </a:solidFill>
               <a:latin typeface="Aptos" panose="020B0004020202020204" pitchFamily="34" charset="0"/>
             </a:endParaRPr>
           </a:p>
-        </p:txBody>
-      </p:sp>
-      <p:sp>
-        <p:nvSpPr>
-          <p:cNvPr id="26" name="TextBox 25">
-            <a:extLst>
-              <a:ext uri="{FF2B5EF4-FFF2-40B4-BE49-F238E27FC236}">
-                <a16:creationId xmlns:a16="http://schemas.microsoft.com/office/drawing/2014/main" id="{EA371FD1-D94E-930F-EEB7-3D0A6E102699}"/>
-              </a:ext>
-            </a:extLst>
-          </p:cNvPr>
-          <p:cNvSpPr txBox="1"/>
-          <p:nvPr/>
-        </p:nvSpPr>
-        <p:spPr>
-          <a:xfrm>
-            <a:off x="1320800" y="4060000"/>
-            <a:ext cx="4572000" cy="261610"/>
-          </a:xfrm>
-          <a:prstGeom prst="rect">
-            <a:avLst/>
-          </a:prstGeom>
-          <a:noFill/>
-        </p:spPr>
-        <p:txBody>
-          <a:bodyPr vert="horz" lIns="0" tIns="0" rIns="0" bIns="0" rtlCol="0">
-            <a:spAutoFit/>
-          </a:bodyPr>
-          <a:lstStyle/>
-          <a:p>
-            <a:r>
-              <a:rPr lang="es-ES" sz="1700" b="1">
-                <a:solidFill>
-                  <a:srgbClr val="10B981"/>
-                </a:solidFill>
-                <a:latin typeface="Aptos" panose="020B0004020202020204" pitchFamily="34" charset="0"/>
-              </a:rPr>
-              <a:t>EOS: 10.15 / 10.22 / 18.79 / 30.11 ms</a:t>
-            </a:r>
-            <a:endParaRPr lang="vi-VN" sz="1700" b="1">
-              <a:solidFill>
-                <a:srgbClr val="10B981"/>
-              </a:solidFill>
-              <a:latin typeface="Aptos" panose="020B0004020202020204" pitchFamily="34" charset="0"/>
-            </a:endParaRPr>
-          </a:p>
-        </p:txBody>
-      </p:sp>
-      <p:sp>
-        <p:nvSpPr>
-          <p:cNvPr id="27" name="TextBox 26">
-            <a:extLst>
-              <a:ext uri="{FF2B5EF4-FFF2-40B4-BE49-F238E27FC236}">
-                <a16:creationId xmlns:a16="http://schemas.microsoft.com/office/drawing/2014/main" id="{9A7891DD-035E-5BD4-58A1-B7ACF7F72127}"/>
-              </a:ext>
-            </a:extLst>
-          </p:cNvPr>
-          <p:cNvSpPr txBox="1"/>
-          <p:nvPr/>
-        </p:nvSpPr>
-        <p:spPr>
-          <a:xfrm>
-            <a:off x="6604000" y="4060000"/>
-            <a:ext cx="4191000" cy="261610"/>
-          </a:xfrm>
-          <a:prstGeom prst="rect">
-            <a:avLst/>
-          </a:prstGeom>
-          <a:noFill/>
-        </p:spPr>
-        <p:txBody>
-          <a:bodyPr vert="horz" lIns="0" tIns="0" rIns="0" bIns="0" rtlCol="0">
-            <a:spAutoFit/>
-          </a:bodyPr>
-          <a:lstStyle/>
-          <a:p>
-            <a:r>
-              <a:rPr lang="fi-FI" sz="1700" b="1">
-                <a:solidFill>
-                  <a:srgbClr val="F59E0B"/>
-                </a:solidFill>
-                <a:latin typeface="Aptos" panose="020B0004020202020204" pitchFamily="34" charset="0"/>
-              </a:rPr>
-              <a:t>ALO: 3.23 / 2.29 / 9.97 / 18.74 ms</a:t>
-            </a:r>
-            <a:endParaRPr lang="vi-VN" sz="1700" b="1">
-              <a:solidFill>
-                <a:srgbClr val="F59E0B"/>
-              </a:solidFill>
-              <a:latin typeface="Aptos" panose="020B0004020202020204" pitchFamily="34" charset="0"/>
-            </a:endParaRPr>
-          </a:p>
-        </p:txBody>
-      </p:sp>
-      <p:sp>
-        <p:nvSpPr>
-          <p:cNvPr id="50" name="BottleneckBox"/>
-          <p:cNvSpPr/>
-          <p:nvPr/>
-        </p:nvSpPr>
-        <p:spPr>
-          <a:xfrm>
-            <a:off x="965200" y="4850000"/>
-            <a:ext cx="10261600" cy="820000"/>
-          </a:xfrm>
-          <a:prstGeom prst="roundRect">
-            <a:avLst/>
-          </a:prstGeom>
-          <a:solidFill>
-            <a:srgbClr val="1E293B"/>
-          </a:solidFill>
-          <a:ln w="19050">
-            <a:solidFill>
-              <a:srgbClr val="EF4444"/>
-            </a:solidFill>
-          </a:ln>
-        </p:spPr>
-        <p:txBody>
-          <a:bodyPr rtlCol="0" anchor="ctr"/>
-          <a:lstStyle/>
-          <a:p>
-            <a:pPr algn="ctr"/>
-            <a:endParaRPr lang="vi-VN"/>
-          </a:p>
-        </p:txBody>
-      </p:sp>
-      <p:sp>
-        <p:nvSpPr>
-          <p:cNvPr id="51" name="BottleneckLabel"/>
-          <p:cNvSpPr txBox="1"/>
-          <p:nvPr/>
-        </p:nvSpPr>
-        <p:spPr>
-          <a:xfrm>
-            <a:off x="1270000" y="4880000"/>
-            <a:ext cx="2200000" cy="300000"/>
-          </a:xfrm>
-          <a:prstGeom prst="rect">
-            <a:avLst/>
-          </a:prstGeom>
-          <a:noFill/>
-        </p:spPr>
-        <p:txBody>
-          <a:bodyPr vert="horz" lIns="0" tIns="0" rIns="0" bIns="0" rtlCol="0">
-            <a:spAutoFit/>
-          </a:bodyPr>
-          <a:lstStyle/>
-          <a:p>
-            <a:r>
-              <a:rPr lang="en-US" sz="1300" b="1">
-                <a:solidFill>
-                  <a:srgbClr val="EF4444"/>
-                </a:solidFill>
-                <a:latin typeface="Aptos" panose="020B0004020202020204" pitchFamily="34" charset="0"/>
-              </a:rPr>
-              <a:t>⚠ Bottleneck Analysis</a:t>
-            </a:r>
-          </a:p>
-        </p:txBody>
-      </p:sp>
-      <p:sp>
-        <p:nvSpPr>
-          <p:cNvPr id="52" name="BottleneckText"/>
-          <p:cNvSpPr txBox="1"/>
-          <p:nvPr/>
-        </p:nvSpPr>
-        <p:spPr>
-          <a:xfrm>
-            <a:off x="1270000" y="5190000"/>
-            <a:ext cx="9600000" cy="430000"/>
-          </a:xfrm>
-          <a:prstGeom prst="rect">
-            <a:avLst/>
-          </a:prstGeom>
-          <a:noFill/>
-        </p:spPr>
-        <p:txBody>
-          <a:bodyPr vert="horz" lIns="0" tIns="0" rIns="0" bIns="0" rtlCol="0">
-            <a:spAutoFit/>
-          </a:bodyPr>
-          <a:lstStyle/>
-          <a:p>
-            <a:r>
-              <a:rPr lang="en-US" sz="1300">
+          <a:p>
+            <a:r>
+              <a:rPr lang="vi-VN" sz="1900" dirty="0">
                 <a:solidFill>
                   <a:srgbClr val="F1F5F9"/>
                 </a:solidFill>
                 <a:latin typeface="Aptos" panose="020B0004020202020204" pitchFamily="34" charset="0"/>
               </a:rPr>
-              <a:t xml:space="preserve">EOS p99 (30.11ms) cao hơn ALO (18.74ms) </a:t>
-            </a:r>
-            <a:r>
-              <a:rPr lang="en-US" sz="1300" b="1">
-                <a:solidFill>
-                  <a:srgbClr val="EF4444"/>
-                </a:solidFill>
-                <a:latin typeface="Aptos" panose="020B0004020202020204" pitchFamily="34" charset="0"/>
-              </a:rPr>
-              <a:t>1.6×</a:t>
-            </a:r>
-            <a:r>
-              <a:rPr lang="en-US" sz="1300">
-                <a:solidFill>
-                  <a:srgbClr val="F1F5F9"/>
-                </a:solidFill>
-                <a:latin typeface="Aptos" panose="020B0004020202020204" pitchFamily="34" charset="0"/>
-              </a:rPr>
-              <a:t xml:space="preserve"> → overhead tập trung tại </a:t>
-            </a:r>
-            <a:r>
-              <a:rPr lang="en-US" sz="1300" b="1">
-                <a:solidFill>
-                  <a:srgbClr val="10B981"/>
-                </a:solidFill>
-                <a:latin typeface="Aptos" panose="020B0004020202020204" pitchFamily="34" charset="0"/>
-              </a:rPr>
-              <a:t>global dedup claim</a:t>
-            </a:r>
-            <a:r>
-              <a:rPr lang="en-US" sz="1300">
-                <a:solidFill>
-                  <a:srgbClr val="F1F5F9"/>
-                </a:solidFill>
-                <a:latin typeface="Aptos" panose="020B0004020202020204" pitchFamily="34" charset="0"/>
-              </a:rPr>
-              <a:t xml:space="preserve"> + </a:t>
-            </a:r>
-            <a:r>
-              <a:rPr lang="en-US" sz="1300" b="1">
-                <a:solidFill>
-                  <a:srgbClr val="10B981"/>
-                </a:solidFill>
-                <a:latin typeface="Aptos" panose="020B0004020202020204" pitchFamily="34" charset="0"/>
-              </a:rPr>
-              <a:t>WAL write (1.42ms/op)</a:t>
-            </a:r>
-            <a:r>
-              <a:rPr lang="en-US" sz="1300">
-                <a:solidFill>
-                  <a:srgbClr val="F1F5F9"/>
-                </a:solidFill>
-                <a:latin typeface="Aptos" panose="020B0004020202020204" pitchFamily="34" charset="0"/>
-              </a:rPr>
-              <a:t>. Tail latency tăng khi nhiều request tranh claim cùng key.</a:t>
+              <a:t>• Chưa có recovery timeout cho de-dup record PROCESSING nếu node crash trước khi ghi WAL. 
+• Benchmark chạy local, network WAN latency chưa được mô phỏng sâu.
+• Backpressure hiện là simulation counter, chưa phải queue broker thực như Kafka.</a:t>
             </a:r>
           </a:p>
         </p:txBody>
@@ -8812,7 +8693,7 @@
     </p:spTree>
     <p:extLst>
       <p:ext uri="{BB962C8B-B14F-4D97-AF65-F5344CB8AC3E}">
-        <p14:creationId xmlns:p14="http://schemas.microsoft.com/office/powerpoint/2010/main" val="3638270319"/>
+        <p14:creationId xmlns:p14="http://schemas.microsoft.com/office/powerpoint/2010/main" val="3719156880"/>
       </p:ext>
     </p:extLst>
   </p:cSld>
@@ -8844,7 +8725,7 @@
           <p:cNvPr id="2" name="Rectangle 1">
             <a:extLst>
               <a:ext uri="{FF2B5EF4-FFF2-40B4-BE49-F238E27FC236}">
-                <a16:creationId xmlns:a16="http://schemas.microsoft.com/office/drawing/2014/main" id="{60B77606-7F8A-8E30-A585-5313DF23B265}"/>
+                <a16:creationId xmlns:a16="http://schemas.microsoft.com/office/drawing/2014/main" id="{76343256-1592-60D7-8C61-D4BEA9D09ECB}"/>
               </a:ext>
             </a:extLst>
           </p:cNvPr>
@@ -8912,7 +8793,7 @@
           <p:cNvPr id="3" name="TextBox 2">
             <a:extLst>
               <a:ext uri="{FF2B5EF4-FFF2-40B4-BE49-F238E27FC236}">
-                <a16:creationId xmlns:a16="http://schemas.microsoft.com/office/drawing/2014/main" id="{A81278C1-A502-8186-4553-C2722B8258F3}"/>
+                <a16:creationId xmlns:a16="http://schemas.microsoft.com/office/drawing/2014/main" id="{F63959C7-78AE-5FF0-0DFB-6C7624D4A798}"/>
               </a:ext>
             </a:extLst>
           </p:cNvPr>
@@ -8921,8 +8802,8 @@
         </p:nvSpPr>
         <p:spPr>
           <a:xfrm>
-            <a:off x="533400" y="330200"/>
-            <a:ext cx="2286000" cy="169277"/>
+            <a:off x="0" y="1300000"/>
+            <a:ext cx="12192000" cy="830997"/>
           </a:xfrm>
           <a:prstGeom prst="rect">
             <a:avLst/>
@@ -8935,34 +8816,29 @@
           </a:bodyPr>
           <a:lstStyle/>
           <a:p>
-            <a:r>
-              <a:rPr lang="vi-VN" sz="1100" b="1">
+            <a:pPr algn="ctr"/>
+            <a:r>
+              <a:rPr lang="vi-VN" sz="5400" b="1">
                 <a:solidFill>
                   <a:srgbClr val="10B981"/>
                 </a:solidFill>
                 <a:latin typeface="Aptos" panose="020B0004020202020204" pitchFamily="34" charset="0"/>
               </a:rPr>
-              <a:t>05 / WINDOWS</a:t>
-            </a:r>
-          </a:p>
-        </p:txBody>
-      </p:sp>
-      <p:sp>
-        <p:nvSpPr>
-          <p:cNvPr id="4" name="TextBox 3">
-            <a:extLst>
-              <a:ext uri="{FF2B5EF4-FFF2-40B4-BE49-F238E27FC236}">
-                <a16:creationId xmlns:a16="http://schemas.microsoft.com/office/drawing/2014/main" id="{A44CA8A3-C2CB-AAFD-FD82-058D37A84F11}"/>
-              </a:ext>
-            </a:extLst>
-          </p:cNvPr>
+              <a:t>Cảm ơn!</a:t>
+            </a:r>
+          </a:p>
+        </p:txBody>
+      </p:sp>
+      <p:sp>
+        <p:nvSpPr>
+          <p:cNvPr id="10" name="Subtitle"/>
           <p:cNvSpPr txBox="1"/>
           <p:nvPr/>
         </p:nvSpPr>
         <p:spPr>
           <a:xfrm>
-            <a:off x="533400" y="660400"/>
-            <a:ext cx="9906000" cy="461665"/>
+            <a:off x="0" y="2200000"/>
+            <a:ext cx="12192000" cy="300000"/>
           </a:xfrm>
           <a:prstGeom prst="rect">
             <a:avLst/>
@@ -8975,74 +8851,29 @@
           </a:bodyPr>
           <a:lstStyle/>
           <a:p>
-            <a:r>
-              <a:rPr lang="vi-VN" sz="3000" b="1">
-                <a:solidFill>
-                  <a:srgbClr val="F1F5F9"/>
-                </a:solidFill>
-                <a:latin typeface="Aptos" panose="020B0004020202020204" pitchFamily="34" charset="0"/>
-              </a:rPr>
-              <a:t>Bằng chứng event-time window</a:t>
-            </a:r>
-          </a:p>
-        </p:txBody>
-      </p:sp>
-      <p:sp>
-        <p:nvSpPr>
-          <p:cNvPr id="5" name="TextBox 4">
-            <a:extLst>
-              <a:ext uri="{FF2B5EF4-FFF2-40B4-BE49-F238E27FC236}">
-                <a16:creationId xmlns:a16="http://schemas.microsoft.com/office/drawing/2014/main" id="{63AADE92-32B0-9300-483C-0538808419A0}"/>
-              </a:ext>
-            </a:extLst>
-          </p:cNvPr>
-          <p:cNvSpPr txBox="1"/>
-          <p:nvPr/>
-        </p:nvSpPr>
-        <p:spPr>
-          <a:xfrm>
-            <a:off x="558800" y="1270000"/>
-            <a:ext cx="10414000" cy="215444"/>
-          </a:xfrm>
-          <a:prstGeom prst="rect">
-            <a:avLst/>
-          </a:prstGeom>
-          <a:noFill/>
-        </p:spPr>
-        <p:txBody>
-          <a:bodyPr vert="horz" lIns="0" tIns="0" rIns="0" bIns="0" rtlCol="0">
-            <a:spAutoFit/>
-          </a:bodyPr>
-          <a:lstStyle/>
-          <a:p>
-            <a:r>
-              <a:rPr lang="vi-VN" sz="1400">
+            <a:pPr algn="ctr"/>
+            <a:r>
+              <a:rPr lang="vi-VN" sz="1600">
                 <a:solidFill>
                   <a:srgbClr val="94A3B8"/>
                 </a:solidFill>
                 <a:latin typeface="Aptos" panose="020B0004020202020204" pitchFamily="34" charset="0"/>
               </a:rPr>
-              <a:t>TPS và latency theo window dùng để chứng minh benchmark không chỉ đo tổng toàn run.</a:t>
-            </a:r>
-          </a:p>
-        </p:txBody>
-      </p:sp>
-      <p:sp>
-        <p:nvSpPr>
-          <p:cNvPr id="6" name="Rectangle 5">
-            <a:extLst>
-              <a:ext uri="{FF2B5EF4-FFF2-40B4-BE49-F238E27FC236}">
-                <a16:creationId xmlns:a16="http://schemas.microsoft.com/office/drawing/2014/main" id="{A4D21766-87ED-7108-EC6A-0744F1C42F6F}"/>
-              </a:ext>
-            </a:extLst>
-          </p:cNvPr>
+              <a:t>Hội đồng có câu hỏi không?</a:t>
+            </a:r>
+          </a:p>
+        </p:txBody>
+      </p:sp>
+      <p:sp>
+        <p:nvSpPr>
+          <p:cNvPr id="11" name="Divider"/>
           <p:cNvSpPr/>
           <p:nvPr/>
         </p:nvSpPr>
         <p:spPr>
           <a:xfrm>
-            <a:off x="533400" y="1600200"/>
-            <a:ext cx="11125200" cy="12700"/>
+            <a:off x="4064000" y="2700000"/>
+            <a:ext cx="4064000" cy="12700"/>
           </a:xfrm>
           <a:prstGeom prst="rect">
             <a:avLst/>
@@ -9056,22 +8887,6 @@
             </a:solidFill>
           </a:ln>
         </p:spPr>
-        <p:style>
-          <a:lnRef idx="2">
-            <a:schemeClr val="accent1">
-              <a:shade val="15000"/>
-            </a:schemeClr>
-          </a:lnRef>
-          <a:fillRef idx="1">
-            <a:schemeClr val="accent1"/>
-          </a:fillRef>
-          <a:effectRef idx="0">
-            <a:schemeClr val="accent1"/>
-          </a:effectRef>
-          <a:fontRef idx="minor">
-            <a:schemeClr val="lt1"/>
-          </a:fontRef>
-        </p:style>
         <p:txBody>
           <a:bodyPr rtlCol="0" anchor="ctr"/>
           <a:lstStyle/>
@@ -9083,586 +8898,16 @@
       </p:sp>
       <p:sp>
         <p:nvSpPr>
-          <p:cNvPr id="9" name="Rectangle 8">
-            <a:extLst>
-              <a:ext uri="{FF2B5EF4-FFF2-40B4-BE49-F238E27FC236}">
-                <a16:creationId xmlns:a16="http://schemas.microsoft.com/office/drawing/2014/main" id="{ECA74FE1-E2BD-7955-C137-1B36D14BE503}"/>
-              </a:ext>
-            </a:extLst>
-          </p:cNvPr>
-          <p:cNvSpPr/>
-          <p:nvPr/>
-        </p:nvSpPr>
-        <p:spPr>
-          <a:xfrm>
-            <a:off x="787400" y="2032000"/>
-            <a:ext cx="2540000" cy="406400"/>
-          </a:xfrm>
-          <a:prstGeom prst="rect">
-            <a:avLst/>
-          </a:prstGeom>
-          <a:solidFill>
-            <a:srgbClr val="334155"/>
-          </a:solidFill>
-          <a:ln w="12700">
-            <a:solidFill>
-              <a:srgbClr val="475569"/>
-            </a:solidFill>
-          </a:ln>
-        </p:spPr>
-        <p:style>
-          <a:lnRef idx="2">
-            <a:schemeClr val="accent1">
-              <a:shade val="15000"/>
-            </a:schemeClr>
-          </a:lnRef>
-          <a:fillRef idx="1">
-            <a:schemeClr val="accent1"/>
-          </a:fillRef>
-          <a:effectRef idx="0">
-            <a:schemeClr val="accent1"/>
-          </a:effectRef>
-          <a:fontRef idx="minor">
-            <a:schemeClr val="lt1"/>
-          </a:fontRef>
-        </p:style>
-        <p:txBody>
-          <a:bodyPr rtlCol="0" anchor="ctr"/>
-          <a:lstStyle/>
-          <a:p>
-            <a:pPr algn="ctr"/>
-            <a:endParaRPr lang="vi-VN"/>
-          </a:p>
-        </p:txBody>
-      </p:sp>
-      <p:sp>
-        <p:nvSpPr>
-          <p:cNvPr id="10" name="TextBox 9">
-            <a:extLst>
-              <a:ext uri="{FF2B5EF4-FFF2-40B4-BE49-F238E27FC236}">
-                <a16:creationId xmlns:a16="http://schemas.microsoft.com/office/drawing/2014/main" id="{0F97CD80-E6EF-CF09-4FA1-2ECBBE09190C}"/>
-              </a:ext>
-            </a:extLst>
-          </p:cNvPr>
+          <p:cNvPr id="12" name="ProjectInfo"/>
           <p:cNvSpPr txBox="1"/>
           <p:nvPr/>
         </p:nvSpPr>
         <p:spPr>
           <a:xfrm>
-            <a:off x="863600" y="2133600"/>
-            <a:ext cx="2387600" cy="153888"/>
-          </a:xfrm>
-          <a:prstGeom prst="rect">
-            <a:avLst/>
-          </a:prstGeom>
-          <a:noFill/>
-        </p:spPr>
-        <p:txBody>
-          <a:bodyPr vert="horz" lIns="0" tIns="0" rIns="0" bIns="0" rtlCol="0">
-            <a:spAutoFit/>
-          </a:bodyPr>
-          <a:lstStyle/>
-          <a:p>
-            <a:r>
-              <a:rPr lang="vi-VN" sz="1000" b="1">
-                <a:solidFill>
-                  <a:srgbClr val="F1F5F9"/>
-                </a:solidFill>
-                <a:latin typeface="Aptos" panose="020B0004020202020204" pitchFamily="34" charset="0"/>
-              </a:rPr>
-              <a:t>Window</a:t>
-            </a:r>
-          </a:p>
-        </p:txBody>
-      </p:sp>
-      <p:sp>
-        <p:nvSpPr>
-          <p:cNvPr id="11" name="Rectangle 10">
-            <a:extLst>
-              <a:ext uri="{FF2B5EF4-FFF2-40B4-BE49-F238E27FC236}">
-                <a16:creationId xmlns:a16="http://schemas.microsoft.com/office/drawing/2014/main" id="{1B20CC4A-87B1-C473-80A6-90CCF806CE1E}"/>
-              </a:ext>
-            </a:extLst>
-          </p:cNvPr>
-          <p:cNvSpPr/>
-          <p:nvPr/>
-        </p:nvSpPr>
-        <p:spPr>
-          <a:xfrm>
-            <a:off x="3327400" y="2032000"/>
-            <a:ext cx="1371600" cy="406400"/>
-          </a:xfrm>
-          <a:prstGeom prst="rect">
-            <a:avLst/>
-          </a:prstGeom>
-          <a:solidFill>
-            <a:srgbClr val="334155"/>
-          </a:solidFill>
-          <a:ln w="12700">
-            <a:solidFill>
-              <a:srgbClr val="475569"/>
-            </a:solidFill>
-          </a:ln>
-        </p:spPr>
-        <p:style>
-          <a:lnRef idx="2">
-            <a:schemeClr val="accent1">
-              <a:shade val="15000"/>
-            </a:schemeClr>
-          </a:lnRef>
-          <a:fillRef idx="1">
-            <a:schemeClr val="accent1"/>
-          </a:fillRef>
-          <a:effectRef idx="0">
-            <a:schemeClr val="accent1"/>
-          </a:effectRef>
-          <a:fontRef idx="minor">
-            <a:schemeClr val="lt1"/>
-          </a:fontRef>
-        </p:style>
-        <p:txBody>
-          <a:bodyPr rtlCol="0" anchor="ctr"/>
-          <a:lstStyle/>
-          <a:p>
-            <a:pPr algn="ctr"/>
-            <a:endParaRPr lang="vi-VN"/>
-          </a:p>
-        </p:txBody>
-      </p:sp>
-      <p:sp>
-        <p:nvSpPr>
-          <p:cNvPr id="12" name="TextBox 11">
-            <a:extLst>
-              <a:ext uri="{FF2B5EF4-FFF2-40B4-BE49-F238E27FC236}">
-                <a16:creationId xmlns:a16="http://schemas.microsoft.com/office/drawing/2014/main" id="{92E3BB19-4EFB-2C21-8BCB-73CF17AA6B21}"/>
-              </a:ext>
-            </a:extLst>
-          </p:cNvPr>
-          <p:cNvSpPr txBox="1"/>
-          <p:nvPr/>
-        </p:nvSpPr>
-        <p:spPr>
-          <a:xfrm>
-            <a:off x="3403600" y="2133600"/>
-            <a:ext cx="1219200" cy="153888"/>
-          </a:xfrm>
-          <a:prstGeom prst="rect">
-            <a:avLst/>
-          </a:prstGeom>
-          <a:noFill/>
-        </p:spPr>
-        <p:txBody>
-          <a:bodyPr vert="horz" lIns="0" tIns="0" rIns="0" bIns="0" rtlCol="0">
-            <a:spAutoFit/>
-          </a:bodyPr>
-          <a:lstStyle/>
-          <a:p>
-            <a:r>
-              <a:rPr lang="vi-VN" sz="1000" b="1">
-                <a:solidFill>
-                  <a:srgbClr val="F1F5F9"/>
-                </a:solidFill>
-                <a:latin typeface="Aptos" panose="020B0004020202020204" pitchFamily="34" charset="0"/>
-              </a:rPr>
-              <a:t>Events</a:t>
-            </a:r>
-          </a:p>
-        </p:txBody>
-      </p:sp>
-      <p:sp>
-        <p:nvSpPr>
-          <p:cNvPr id="13" name="Rectangle 12">
-            <a:extLst>
-              <a:ext uri="{FF2B5EF4-FFF2-40B4-BE49-F238E27FC236}">
-                <a16:creationId xmlns:a16="http://schemas.microsoft.com/office/drawing/2014/main" id="{DD87B5A7-863F-B15F-BBA8-E43DCC6FD2A4}"/>
-              </a:ext>
-            </a:extLst>
-          </p:cNvPr>
-          <p:cNvSpPr/>
-          <p:nvPr/>
-        </p:nvSpPr>
-        <p:spPr>
-          <a:xfrm>
-            <a:off x="4699000" y="2032000"/>
-            <a:ext cx="1485900" cy="406400"/>
-          </a:xfrm>
-          <a:prstGeom prst="rect">
-            <a:avLst/>
-          </a:prstGeom>
-          <a:solidFill>
-            <a:srgbClr val="334155"/>
-          </a:solidFill>
-          <a:ln w="12700">
-            <a:solidFill>
-              <a:srgbClr val="475569"/>
-            </a:solidFill>
-          </a:ln>
-        </p:spPr>
-        <p:style>
-          <a:lnRef idx="2">
-            <a:schemeClr val="accent1">
-              <a:shade val="15000"/>
-            </a:schemeClr>
-          </a:lnRef>
-          <a:fillRef idx="1">
-            <a:schemeClr val="accent1"/>
-          </a:fillRef>
-          <a:effectRef idx="0">
-            <a:schemeClr val="accent1"/>
-          </a:effectRef>
-          <a:fontRef idx="minor">
-            <a:schemeClr val="lt1"/>
-          </a:fontRef>
-        </p:style>
-        <p:txBody>
-          <a:bodyPr rtlCol="0" anchor="ctr"/>
-          <a:lstStyle/>
-          <a:p>
-            <a:pPr algn="ctr"/>
-            <a:endParaRPr lang="vi-VN"/>
-          </a:p>
-        </p:txBody>
-      </p:sp>
-      <p:sp>
-        <p:nvSpPr>
-          <p:cNvPr id="14" name="TextBox 13">
-            <a:extLst>
-              <a:ext uri="{FF2B5EF4-FFF2-40B4-BE49-F238E27FC236}">
-                <a16:creationId xmlns:a16="http://schemas.microsoft.com/office/drawing/2014/main" id="{50B1A9C1-95C1-694D-B481-1BA7E4C9E496}"/>
-              </a:ext>
-            </a:extLst>
-          </p:cNvPr>
-          <p:cNvSpPr txBox="1"/>
-          <p:nvPr/>
-        </p:nvSpPr>
-        <p:spPr>
-          <a:xfrm>
-            <a:off x="4775200" y="2133600"/>
-            <a:ext cx="1333500" cy="153888"/>
-          </a:xfrm>
-          <a:prstGeom prst="rect">
-            <a:avLst/>
-          </a:prstGeom>
-          <a:noFill/>
-        </p:spPr>
-        <p:txBody>
-          <a:bodyPr vert="horz" lIns="0" tIns="0" rIns="0" bIns="0" rtlCol="0">
-            <a:spAutoFit/>
-          </a:bodyPr>
-          <a:lstStyle/>
-          <a:p>
-            <a:r>
-              <a:rPr lang="vi-VN" sz="1000" b="1">
-                <a:solidFill>
-                  <a:srgbClr val="F1F5F9"/>
-                </a:solidFill>
-                <a:latin typeface="Aptos" panose="020B0004020202020204" pitchFamily="34" charset="0"/>
-              </a:rPr>
-              <a:t>EOS TPS</a:t>
-            </a:r>
-          </a:p>
-        </p:txBody>
-      </p:sp>
-      <p:sp>
-        <p:nvSpPr>
-          <p:cNvPr id="15" name="Rectangle 14">
-            <a:extLst>
-              <a:ext uri="{FF2B5EF4-FFF2-40B4-BE49-F238E27FC236}">
-                <a16:creationId xmlns:a16="http://schemas.microsoft.com/office/drawing/2014/main" id="{DC8E890E-AA56-63B0-7B83-18944FBBBA6E}"/>
-              </a:ext>
-            </a:extLst>
-          </p:cNvPr>
-          <p:cNvSpPr/>
-          <p:nvPr/>
-        </p:nvSpPr>
-        <p:spPr>
-          <a:xfrm>
-            <a:off x="6184900" y="2032000"/>
-            <a:ext cx="1905000" cy="406400"/>
-          </a:xfrm>
-          <a:prstGeom prst="rect">
-            <a:avLst/>
-          </a:prstGeom>
-          <a:solidFill>
-            <a:srgbClr val="334155"/>
-          </a:solidFill>
-          <a:ln w="12700">
-            <a:solidFill>
-              <a:srgbClr val="475569"/>
-            </a:solidFill>
-          </a:ln>
-        </p:spPr>
-        <p:style>
-          <a:lnRef idx="2">
-            <a:schemeClr val="accent1">
-              <a:shade val="15000"/>
-            </a:schemeClr>
-          </a:lnRef>
-          <a:fillRef idx="1">
-            <a:schemeClr val="accent1"/>
-          </a:fillRef>
-          <a:effectRef idx="0">
-            <a:schemeClr val="accent1"/>
-          </a:effectRef>
-          <a:fontRef idx="minor">
-            <a:schemeClr val="lt1"/>
-          </a:fontRef>
-        </p:style>
-        <p:txBody>
-          <a:bodyPr rtlCol="0" anchor="ctr"/>
-          <a:lstStyle/>
-          <a:p>
-            <a:pPr algn="ctr"/>
-            <a:endParaRPr lang="vi-VN"/>
-          </a:p>
-        </p:txBody>
-      </p:sp>
-      <p:sp>
-        <p:nvSpPr>
-          <p:cNvPr id="16" name="TextBox 15">
-            <a:extLst>
-              <a:ext uri="{FF2B5EF4-FFF2-40B4-BE49-F238E27FC236}">
-                <a16:creationId xmlns:a16="http://schemas.microsoft.com/office/drawing/2014/main" id="{E9010549-A6EB-5121-A287-68B18ADBC5F2}"/>
-              </a:ext>
-            </a:extLst>
-          </p:cNvPr>
-          <p:cNvSpPr txBox="1"/>
-          <p:nvPr/>
-        </p:nvSpPr>
-        <p:spPr>
-          <a:xfrm>
-            <a:off x="6261100" y="2133600"/>
-            <a:ext cx="1752600" cy="153888"/>
-          </a:xfrm>
-          <a:prstGeom prst="rect">
-            <a:avLst/>
-          </a:prstGeom>
-          <a:noFill/>
-        </p:spPr>
-        <p:txBody>
-          <a:bodyPr vert="horz" lIns="0" tIns="0" rIns="0" bIns="0" rtlCol="0">
-            <a:spAutoFit/>
-          </a:bodyPr>
-          <a:lstStyle/>
-          <a:p>
-            <a:r>
-              <a:rPr lang="vi-VN" sz="1000" b="1">
-                <a:solidFill>
-                  <a:srgbClr val="F1F5F9"/>
-                </a:solidFill>
-                <a:latin typeface="Aptos" panose="020B0004020202020204" pitchFamily="34" charset="0"/>
-              </a:rPr>
-              <a:t>EOS avg</a:t>
-            </a:r>
-          </a:p>
-        </p:txBody>
-      </p:sp>
-      <p:sp>
-        <p:nvSpPr>
-          <p:cNvPr id="17" name="Rectangle 16">
-            <a:extLst>
-              <a:ext uri="{FF2B5EF4-FFF2-40B4-BE49-F238E27FC236}">
-                <a16:creationId xmlns:a16="http://schemas.microsoft.com/office/drawing/2014/main" id="{400FAF88-F95E-E46E-12DA-CD3705476506}"/>
-              </a:ext>
-            </a:extLst>
-          </p:cNvPr>
-          <p:cNvSpPr/>
-          <p:nvPr/>
-        </p:nvSpPr>
-        <p:spPr>
-          <a:xfrm>
-            <a:off x="8089900" y="2032000"/>
-            <a:ext cx="1485900" cy="406400"/>
-          </a:xfrm>
-          <a:prstGeom prst="rect">
-            <a:avLst/>
-          </a:prstGeom>
-          <a:solidFill>
-            <a:srgbClr val="334155"/>
-          </a:solidFill>
-          <a:ln w="12700">
-            <a:solidFill>
-              <a:srgbClr val="475569"/>
-            </a:solidFill>
-          </a:ln>
-        </p:spPr>
-        <p:style>
-          <a:lnRef idx="2">
-            <a:schemeClr val="accent1">
-              <a:shade val="15000"/>
-            </a:schemeClr>
-          </a:lnRef>
-          <a:fillRef idx="1">
-            <a:schemeClr val="accent1"/>
-          </a:fillRef>
-          <a:effectRef idx="0">
-            <a:schemeClr val="accent1"/>
-          </a:effectRef>
-          <a:fontRef idx="minor">
-            <a:schemeClr val="lt1"/>
-          </a:fontRef>
-        </p:style>
-        <p:txBody>
-          <a:bodyPr rtlCol="0" anchor="ctr"/>
-          <a:lstStyle/>
-          <a:p>
-            <a:pPr algn="ctr"/>
-            <a:endParaRPr lang="vi-VN"/>
-          </a:p>
-        </p:txBody>
-      </p:sp>
-      <p:sp>
-        <p:nvSpPr>
-          <p:cNvPr id="18" name="TextBox 17">
-            <a:extLst>
-              <a:ext uri="{FF2B5EF4-FFF2-40B4-BE49-F238E27FC236}">
-                <a16:creationId xmlns:a16="http://schemas.microsoft.com/office/drawing/2014/main" id="{8C90F305-AF76-27A2-9518-85ACD2FC4F79}"/>
-              </a:ext>
-            </a:extLst>
-          </p:cNvPr>
-          <p:cNvSpPr txBox="1"/>
-          <p:nvPr/>
-        </p:nvSpPr>
-        <p:spPr>
-          <a:xfrm>
-            <a:off x="8166100" y="2133600"/>
-            <a:ext cx="1333500" cy="153888"/>
-          </a:xfrm>
-          <a:prstGeom prst="rect">
-            <a:avLst/>
-          </a:prstGeom>
-          <a:noFill/>
-        </p:spPr>
-        <p:txBody>
-          <a:bodyPr vert="horz" lIns="0" tIns="0" rIns="0" bIns="0" rtlCol="0">
-            <a:spAutoFit/>
-          </a:bodyPr>
-          <a:lstStyle/>
-          <a:p>
-            <a:r>
-              <a:rPr lang="vi-VN" sz="1000" b="1">
-                <a:solidFill>
-                  <a:srgbClr val="F1F5F9"/>
-                </a:solidFill>
-                <a:latin typeface="Aptos" panose="020B0004020202020204" pitchFamily="34" charset="0"/>
-              </a:rPr>
-              <a:t>ALO TPS</a:t>
-            </a:r>
-          </a:p>
-        </p:txBody>
-      </p:sp>
-      <p:sp>
-        <p:nvSpPr>
-          <p:cNvPr id="19" name="Rectangle 18">
-            <a:extLst>
-              <a:ext uri="{FF2B5EF4-FFF2-40B4-BE49-F238E27FC236}">
-                <a16:creationId xmlns:a16="http://schemas.microsoft.com/office/drawing/2014/main" id="{B263AF7E-6CBC-6B38-F872-35749F6E0457}"/>
-              </a:ext>
-            </a:extLst>
-          </p:cNvPr>
-          <p:cNvSpPr/>
-          <p:nvPr/>
-        </p:nvSpPr>
-        <p:spPr>
-          <a:xfrm>
-            <a:off x="9575800" y="2032000"/>
-            <a:ext cx="1803400" cy="406400"/>
-          </a:xfrm>
-          <a:prstGeom prst="rect">
-            <a:avLst/>
-          </a:prstGeom>
-          <a:solidFill>
-            <a:srgbClr val="334155"/>
-          </a:solidFill>
-          <a:ln w="12700">
-            <a:solidFill>
-              <a:srgbClr val="475569"/>
-            </a:solidFill>
-          </a:ln>
-        </p:spPr>
-        <p:style>
-          <a:lnRef idx="2">
-            <a:schemeClr val="accent1">
-              <a:shade val="15000"/>
-            </a:schemeClr>
-          </a:lnRef>
-          <a:fillRef idx="1">
-            <a:schemeClr val="accent1"/>
-          </a:fillRef>
-          <a:effectRef idx="0">
-            <a:schemeClr val="accent1"/>
-          </a:effectRef>
-          <a:fontRef idx="minor">
-            <a:schemeClr val="lt1"/>
-          </a:fontRef>
-        </p:style>
-        <p:txBody>
-          <a:bodyPr rtlCol="0" anchor="ctr"/>
-          <a:lstStyle/>
-          <a:p>
-            <a:pPr algn="ctr"/>
-            <a:endParaRPr lang="vi-VN"/>
-          </a:p>
-        </p:txBody>
-      </p:sp>
-      <p:sp>
-        <p:nvSpPr>
-          <p:cNvPr id="20" name="TextBox 19">
-            <a:extLst>
-              <a:ext uri="{FF2B5EF4-FFF2-40B4-BE49-F238E27FC236}">
-                <a16:creationId xmlns:a16="http://schemas.microsoft.com/office/drawing/2014/main" id="{96747005-FD1E-8B14-FCB5-6CC5FD54EB2D}"/>
-              </a:ext>
-            </a:extLst>
-          </p:cNvPr>
-          <p:cNvSpPr txBox="1"/>
-          <p:nvPr/>
-        </p:nvSpPr>
-        <p:spPr>
-          <a:xfrm>
-            <a:off x="9652000" y="2133600"/>
-            <a:ext cx="1651000" cy="153888"/>
-          </a:xfrm>
-          <a:prstGeom prst="rect">
-            <a:avLst/>
-          </a:prstGeom>
-          <a:noFill/>
-        </p:spPr>
-        <p:txBody>
-          <a:bodyPr vert="horz" lIns="0" tIns="0" rIns="0" bIns="0" rtlCol="0">
-            <a:spAutoFit/>
-          </a:bodyPr>
-          <a:lstStyle/>
-          <a:p>
-            <a:r>
-              <a:rPr lang="vi-VN" sz="1000" b="1">
-                <a:solidFill>
-                  <a:srgbClr val="F1F5F9"/>
-                </a:solidFill>
-                <a:latin typeface="Aptos" panose="020B0004020202020204" pitchFamily="34" charset="0"/>
-              </a:rPr>
-              <a:t>ALO avg</a:t>
-            </a:r>
-          </a:p>
-        </p:txBody>
-      </p:sp>
-      <p:sp>
-        <p:nvSpPr>
-          <p:cNvPr id="21" name="Rectangle 20">
-            <a:extLst>
-              <a:ext uri="{FF2B5EF4-FFF2-40B4-BE49-F238E27FC236}">
-                <a16:creationId xmlns:a16="http://schemas.microsoft.com/office/drawing/2014/main" id="{1660A9D5-D525-69BF-E75F-70C683C62FDF}"/>
-              </a:ext>
-            </a:extLst>
-          </p:cNvPr>
-          <p:cNvSpPr/>
-          <p:nvPr/>
-        </p:nvSpPr>
-        <p:spPr>
-          <a:xfrm>
-            <a:off x="787400" y="2438400"/>
-            <a:ext cx="2540000" cy="406400"/>
-          </a:xfrm>
-          <a:prstGeom prst="rect">
+            <a:off x="1524000" y="2800000"/>
+            <a:ext cx="9144000" cy="900000"/>
+          </a:xfrm>
+          <a:prstGeom prst="roundRect">
             <a:avLst/>
           </a:prstGeom>
           <a:solidFill>
@@ -9674,2793 +8919,31 @@
             </a:solidFill>
           </a:ln>
         </p:spPr>
-        <p:style>
-          <a:lnRef idx="2">
-            <a:schemeClr val="accent1">
-              <a:shade val="15000"/>
-            </a:schemeClr>
-          </a:lnRef>
-          <a:fillRef idx="1">
-            <a:schemeClr val="accent1"/>
-          </a:fillRef>
-          <a:effectRef idx="0">
-            <a:schemeClr val="accent1"/>
-          </a:effectRef>
-          <a:fontRef idx="minor">
-            <a:schemeClr val="lt1"/>
-          </a:fontRef>
-        </p:style>
-        <p:txBody>
-          <a:bodyPr rtlCol="0" anchor="ctr"/>
+        <p:txBody>
+          <a:bodyPr lIns="228600" tIns="91440" rIns="228600" bIns="91440" rtlCol="0" anchor="ctr"/>
           <a:lstStyle/>
           <a:p>
             <a:pPr algn="ctr"/>
-            <a:endParaRPr lang="vi-VN"/>
-          </a:p>
-        </p:txBody>
-      </p:sp>
-      <p:sp>
-        <p:nvSpPr>
-          <p:cNvPr id="22" name="TextBox 21">
-            <a:extLst>
-              <a:ext uri="{FF2B5EF4-FFF2-40B4-BE49-F238E27FC236}">
-                <a16:creationId xmlns:a16="http://schemas.microsoft.com/office/drawing/2014/main" id="{81AC4FF6-E865-A734-F16C-BCEDBFCBFF44}"/>
-              </a:ext>
-            </a:extLst>
-          </p:cNvPr>
-          <p:cNvSpPr txBox="1"/>
-          <p:nvPr/>
-        </p:nvSpPr>
-        <p:spPr>
-          <a:xfrm>
-            <a:off x="863600" y="2540000"/>
-            <a:ext cx="2387600" cy="153888"/>
-          </a:xfrm>
-          <a:prstGeom prst="rect">
-            <a:avLst/>
-          </a:prstGeom>
-          <a:noFill/>
-        </p:spPr>
-        <p:txBody>
-          <a:bodyPr vert="horz" lIns="0" tIns="0" rIns="0" bIns="0" rtlCol="0">
-            <a:spAutoFit/>
-          </a:bodyPr>
-          <a:lstStyle/>
-          <a:p>
-            <a:r>
-              <a:rPr lang="vi-VN" sz="1000">
+            <a:r>
+              <a:rPr lang="vi-VN" sz="1300" b="1">
                 <a:solidFill>
                   <a:srgbClr val="F1F5F9"/>
                 </a:solidFill>
                 <a:latin typeface="Aptos" panose="020B0004020202020204" pitchFamily="34" charset="0"/>
               </a:rPr>
-              <a:t>20:15:50-20:16:00</a:t>
-            </a:r>
-          </a:p>
-        </p:txBody>
-      </p:sp>
-      <p:sp>
-        <p:nvSpPr>
-          <p:cNvPr id="23" name="Rectangle 22">
-            <a:extLst>
-              <a:ext uri="{FF2B5EF4-FFF2-40B4-BE49-F238E27FC236}">
-                <a16:creationId xmlns:a16="http://schemas.microsoft.com/office/drawing/2014/main" id="{5B99E312-959B-FB65-CD54-99C90853BB29}"/>
-              </a:ext>
-            </a:extLst>
-          </p:cNvPr>
-          <p:cNvSpPr/>
-          <p:nvPr/>
-        </p:nvSpPr>
-        <p:spPr>
-          <a:xfrm>
-            <a:off x="3327400" y="2438400"/>
-            <a:ext cx="1371600" cy="406400"/>
-          </a:xfrm>
-          <a:prstGeom prst="rect">
-            <a:avLst/>
-          </a:prstGeom>
-          <a:solidFill>
-            <a:srgbClr val="1E293B"/>
-          </a:solidFill>
-          <a:ln w="12700">
-            <a:solidFill>
-              <a:srgbClr val="334155"/>
-            </a:solidFill>
-          </a:ln>
-        </p:spPr>
-        <p:style>
-          <a:lnRef idx="2">
-            <a:schemeClr val="accent1">
-              <a:shade val="15000"/>
-            </a:schemeClr>
-          </a:lnRef>
-          <a:fillRef idx="1">
-            <a:schemeClr val="accent1"/>
-          </a:fillRef>
-          <a:effectRef idx="0">
-            <a:schemeClr val="accent1"/>
-          </a:effectRef>
-          <a:fontRef idx="minor">
-            <a:schemeClr val="lt1"/>
-          </a:fontRef>
-        </p:style>
-        <p:txBody>
-          <a:bodyPr rtlCol="0" anchor="ctr"/>
-          <a:lstStyle/>
+              <a:t>Nguyễn Hoài Phương  ·  N23DCCN183  ·  D23CQCN03-N</a:t>
+            </a:r>
+          </a:p>
           <a:p>
             <a:pPr algn="ctr"/>
-            <a:endParaRPr lang="vi-VN"/>
-          </a:p>
-        </p:txBody>
-      </p:sp>
-      <p:sp>
-        <p:nvSpPr>
-          <p:cNvPr id="24" name="TextBox 23">
-            <a:extLst>
-              <a:ext uri="{FF2B5EF4-FFF2-40B4-BE49-F238E27FC236}">
-                <a16:creationId xmlns:a16="http://schemas.microsoft.com/office/drawing/2014/main" id="{4AAFC924-1446-5079-2FDE-C42A1805F355}"/>
-              </a:ext>
-            </a:extLst>
-          </p:cNvPr>
-          <p:cNvSpPr txBox="1"/>
-          <p:nvPr/>
-        </p:nvSpPr>
-        <p:spPr>
-          <a:xfrm>
-            <a:off x="3403600" y="2540000"/>
-            <a:ext cx="1219200" cy="153888"/>
-          </a:xfrm>
-          <a:prstGeom prst="rect">
-            <a:avLst/>
-          </a:prstGeom>
-          <a:noFill/>
-        </p:spPr>
-        <p:txBody>
-          <a:bodyPr vert="horz" lIns="0" tIns="0" rIns="0" bIns="0" rtlCol="0">
-            <a:spAutoFit/>
-          </a:bodyPr>
-          <a:lstStyle/>
-          <a:p>
-            <a:r>
-              <a:rPr lang="vi-VN" sz="1000">
-                <a:solidFill>
-                  <a:srgbClr val="F1F5F9"/>
-                </a:solidFill>
-                <a:latin typeface="Aptos" panose="020B0004020202020204" pitchFamily="34" charset="0"/>
-              </a:rPr>
-              <a:t>15</a:t>
-            </a:r>
-          </a:p>
-        </p:txBody>
-      </p:sp>
-      <p:sp>
-        <p:nvSpPr>
-          <p:cNvPr id="25" name="Rectangle 24">
-            <a:extLst>
-              <a:ext uri="{FF2B5EF4-FFF2-40B4-BE49-F238E27FC236}">
-                <a16:creationId xmlns:a16="http://schemas.microsoft.com/office/drawing/2014/main" id="{BB005382-77F6-899C-9190-333E0CDD08AB}"/>
-              </a:ext>
-            </a:extLst>
-          </p:cNvPr>
-          <p:cNvSpPr/>
-          <p:nvPr/>
-        </p:nvSpPr>
-        <p:spPr>
-          <a:xfrm>
-            <a:off x="4699000" y="2438400"/>
-            <a:ext cx="1485900" cy="406400"/>
-          </a:xfrm>
-          <a:prstGeom prst="rect">
-            <a:avLst/>
-          </a:prstGeom>
-          <a:solidFill>
-            <a:srgbClr val="1E293B"/>
-          </a:solidFill>
-          <a:ln w="12700">
-            <a:solidFill>
-              <a:srgbClr val="334155"/>
-            </a:solidFill>
-          </a:ln>
-        </p:spPr>
-        <p:style>
-          <a:lnRef idx="2">
-            <a:schemeClr val="accent1">
-              <a:shade val="15000"/>
-            </a:schemeClr>
-          </a:lnRef>
-          <a:fillRef idx="1">
-            <a:schemeClr val="accent1"/>
-          </a:fillRef>
-          <a:effectRef idx="0">
-            <a:schemeClr val="accent1"/>
-          </a:effectRef>
-          <a:fontRef idx="minor">
-            <a:schemeClr val="lt1"/>
-          </a:fontRef>
-        </p:style>
-        <p:txBody>
-          <a:bodyPr rtlCol="0" anchor="ctr"/>
-          <a:lstStyle/>
-          <a:p>
-            <a:pPr algn="ctr"/>
-            <a:endParaRPr lang="vi-VN"/>
-          </a:p>
-        </p:txBody>
-      </p:sp>
-      <p:sp>
-        <p:nvSpPr>
-          <p:cNvPr id="26" name="TextBox 25">
-            <a:extLst>
-              <a:ext uri="{FF2B5EF4-FFF2-40B4-BE49-F238E27FC236}">
-                <a16:creationId xmlns:a16="http://schemas.microsoft.com/office/drawing/2014/main" id="{F481F2BD-8D86-1B10-1CF4-77BEB5351ACA}"/>
-              </a:ext>
-            </a:extLst>
-          </p:cNvPr>
-          <p:cNvSpPr txBox="1"/>
-          <p:nvPr/>
-        </p:nvSpPr>
-        <p:spPr>
-          <a:xfrm>
-            <a:off x="4775200" y="2540000"/>
-            <a:ext cx="1333500" cy="153888"/>
-          </a:xfrm>
-          <a:prstGeom prst="rect">
-            <a:avLst/>
-          </a:prstGeom>
-          <a:noFill/>
-        </p:spPr>
-        <p:txBody>
-          <a:bodyPr vert="horz" lIns="0" tIns="0" rIns="0" bIns="0" rtlCol="0">
-            <a:spAutoFit/>
-          </a:bodyPr>
-          <a:lstStyle/>
-          <a:p>
-            <a:r>
-              <a:rPr lang="vi-VN" sz="1000">
-                <a:solidFill>
-                  <a:srgbClr val="F1F5F9"/>
-                </a:solidFill>
-                <a:latin typeface="Aptos" panose="020B0004020202020204" pitchFamily="34" charset="0"/>
-              </a:rPr>
-              <a:t>1.50</a:t>
-            </a:r>
-          </a:p>
-        </p:txBody>
-      </p:sp>
-      <p:sp>
-        <p:nvSpPr>
-          <p:cNvPr id="27" name="Rectangle 26">
-            <a:extLst>
-              <a:ext uri="{FF2B5EF4-FFF2-40B4-BE49-F238E27FC236}">
-                <a16:creationId xmlns:a16="http://schemas.microsoft.com/office/drawing/2014/main" id="{111B0DF3-94EE-BA95-901D-9DE31E20F216}"/>
-              </a:ext>
-            </a:extLst>
-          </p:cNvPr>
-          <p:cNvSpPr/>
-          <p:nvPr/>
-        </p:nvSpPr>
-        <p:spPr>
-          <a:xfrm>
-            <a:off x="6184900" y="2438400"/>
-            <a:ext cx="1905000" cy="406400"/>
-          </a:xfrm>
-          <a:prstGeom prst="rect">
-            <a:avLst/>
-          </a:prstGeom>
-          <a:solidFill>
-            <a:srgbClr val="1E293B"/>
-          </a:solidFill>
-          <a:ln w="12700">
-            <a:solidFill>
-              <a:srgbClr val="334155"/>
-            </a:solidFill>
-          </a:ln>
-        </p:spPr>
-        <p:style>
-          <a:lnRef idx="2">
-            <a:schemeClr val="accent1">
-              <a:shade val="15000"/>
-            </a:schemeClr>
-          </a:lnRef>
-          <a:fillRef idx="1">
-            <a:schemeClr val="accent1"/>
-          </a:fillRef>
-          <a:effectRef idx="0">
-            <a:schemeClr val="accent1"/>
-          </a:effectRef>
-          <a:fontRef idx="minor">
-            <a:schemeClr val="lt1"/>
-          </a:fontRef>
-        </p:style>
-        <p:txBody>
-          <a:bodyPr rtlCol="0" anchor="ctr"/>
-          <a:lstStyle/>
-          <a:p>
-            <a:pPr algn="ctr"/>
-            <a:endParaRPr lang="vi-VN"/>
-          </a:p>
-        </p:txBody>
-      </p:sp>
-      <p:sp>
-        <p:nvSpPr>
-          <p:cNvPr id="28" name="TextBox 27">
-            <a:extLst>
-              <a:ext uri="{FF2B5EF4-FFF2-40B4-BE49-F238E27FC236}">
-                <a16:creationId xmlns:a16="http://schemas.microsoft.com/office/drawing/2014/main" id="{DA54A2C2-0AFA-4DAF-2669-AD02CCB07991}"/>
-              </a:ext>
-            </a:extLst>
-          </p:cNvPr>
-          <p:cNvSpPr txBox="1"/>
-          <p:nvPr/>
-        </p:nvSpPr>
-        <p:spPr>
-          <a:xfrm>
-            <a:off x="6261100" y="2540000"/>
-            <a:ext cx="1752600" cy="153888"/>
-          </a:xfrm>
-          <a:prstGeom prst="rect">
-            <a:avLst/>
-          </a:prstGeom>
-          <a:noFill/>
-        </p:spPr>
-        <p:txBody>
-          <a:bodyPr vert="horz" lIns="0" tIns="0" rIns="0" bIns="0" rtlCol="0">
-            <a:spAutoFit/>
-          </a:bodyPr>
-          <a:lstStyle/>
-          <a:p>
-            <a:r>
-              <a:rPr lang="vi-VN" sz="1000">
-                <a:solidFill>
-                  <a:srgbClr val="F1F5F9"/>
-                </a:solidFill>
-                <a:latin typeface="Aptos" panose="020B0004020202020204" pitchFamily="34" charset="0"/>
-              </a:rPr>
-              <a:t>12.58ms</a:t>
-            </a:r>
-          </a:p>
-        </p:txBody>
-      </p:sp>
-      <p:sp>
-        <p:nvSpPr>
-          <p:cNvPr id="29" name="Rectangle 28">
-            <a:extLst>
-              <a:ext uri="{FF2B5EF4-FFF2-40B4-BE49-F238E27FC236}">
-                <a16:creationId xmlns:a16="http://schemas.microsoft.com/office/drawing/2014/main" id="{4FEA5010-AF3E-B242-5E04-45FE1B6577DC}"/>
-              </a:ext>
-            </a:extLst>
-          </p:cNvPr>
-          <p:cNvSpPr/>
-          <p:nvPr/>
-        </p:nvSpPr>
-        <p:spPr>
-          <a:xfrm>
-            <a:off x="8089900" y="2438400"/>
-            <a:ext cx="1485900" cy="406400"/>
-          </a:xfrm>
-          <a:prstGeom prst="rect">
-            <a:avLst/>
-          </a:prstGeom>
-          <a:solidFill>
-            <a:srgbClr val="1E293B"/>
-          </a:solidFill>
-          <a:ln w="12700">
-            <a:solidFill>
-              <a:srgbClr val="334155"/>
-            </a:solidFill>
-          </a:ln>
-        </p:spPr>
-        <p:style>
-          <a:lnRef idx="2">
-            <a:schemeClr val="accent1">
-              <a:shade val="15000"/>
-            </a:schemeClr>
-          </a:lnRef>
-          <a:fillRef idx="1">
-            <a:schemeClr val="accent1"/>
-          </a:fillRef>
-          <a:effectRef idx="0">
-            <a:schemeClr val="accent1"/>
-          </a:effectRef>
-          <a:fontRef idx="minor">
-            <a:schemeClr val="lt1"/>
-          </a:fontRef>
-        </p:style>
-        <p:txBody>
-          <a:bodyPr rtlCol="0" anchor="ctr"/>
-          <a:lstStyle/>
-          <a:p>
-            <a:pPr algn="ctr"/>
-            <a:endParaRPr lang="vi-VN"/>
-          </a:p>
-        </p:txBody>
-      </p:sp>
-      <p:sp>
-        <p:nvSpPr>
-          <p:cNvPr id="30" name="TextBox 29">
-            <a:extLst>
-              <a:ext uri="{FF2B5EF4-FFF2-40B4-BE49-F238E27FC236}">
-                <a16:creationId xmlns:a16="http://schemas.microsoft.com/office/drawing/2014/main" id="{CE242F5B-67E6-9FD4-3077-78DDA6E3D664}"/>
-              </a:ext>
-            </a:extLst>
-          </p:cNvPr>
-          <p:cNvSpPr txBox="1"/>
-          <p:nvPr/>
-        </p:nvSpPr>
-        <p:spPr>
-          <a:xfrm>
-            <a:off x="8166100" y="2540000"/>
-            <a:ext cx="1333500" cy="153888"/>
-          </a:xfrm>
-          <a:prstGeom prst="rect">
-            <a:avLst/>
-          </a:prstGeom>
-          <a:noFill/>
-        </p:spPr>
-        <p:txBody>
-          <a:bodyPr vert="horz" lIns="0" tIns="0" rIns="0" bIns="0" rtlCol="0">
-            <a:spAutoFit/>
-          </a:bodyPr>
-          <a:lstStyle/>
-          <a:p>
-            <a:r>
-              <a:rPr lang="vi-VN" sz="1000">
-                <a:solidFill>
-                  <a:srgbClr val="F1F5F9"/>
-                </a:solidFill>
-                <a:latin typeface="Aptos" panose="020B0004020202020204" pitchFamily="34" charset="0"/>
-              </a:rPr>
-              <a:t>1.50</a:t>
-            </a:r>
-          </a:p>
-        </p:txBody>
-      </p:sp>
-      <p:sp>
-        <p:nvSpPr>
-          <p:cNvPr id="31" name="Rectangle 30">
-            <a:extLst>
-              <a:ext uri="{FF2B5EF4-FFF2-40B4-BE49-F238E27FC236}">
-                <a16:creationId xmlns:a16="http://schemas.microsoft.com/office/drawing/2014/main" id="{8A6E3126-9216-BFA0-F4FB-5D77343FB6FF}"/>
-              </a:ext>
-            </a:extLst>
-          </p:cNvPr>
-          <p:cNvSpPr/>
-          <p:nvPr/>
-        </p:nvSpPr>
-        <p:spPr>
-          <a:xfrm>
-            <a:off x="9575800" y="2438400"/>
-            <a:ext cx="1803400" cy="406400"/>
-          </a:xfrm>
-          <a:prstGeom prst="rect">
-            <a:avLst/>
-          </a:prstGeom>
-          <a:solidFill>
-            <a:srgbClr val="1E293B"/>
-          </a:solidFill>
-          <a:ln w="12700">
-            <a:solidFill>
-              <a:srgbClr val="334155"/>
-            </a:solidFill>
-          </a:ln>
-        </p:spPr>
-        <p:style>
-          <a:lnRef idx="2">
-            <a:schemeClr val="accent1">
-              <a:shade val="15000"/>
-            </a:schemeClr>
-          </a:lnRef>
-          <a:fillRef idx="1">
-            <a:schemeClr val="accent1"/>
-          </a:fillRef>
-          <a:effectRef idx="0">
-            <a:schemeClr val="accent1"/>
-          </a:effectRef>
-          <a:fontRef idx="minor">
-            <a:schemeClr val="lt1"/>
-          </a:fontRef>
-        </p:style>
-        <p:txBody>
-          <a:bodyPr rtlCol="0" anchor="ctr"/>
-          <a:lstStyle/>
-          <a:p>
-            <a:pPr algn="ctr"/>
-            <a:endParaRPr lang="vi-VN"/>
-          </a:p>
-        </p:txBody>
-      </p:sp>
-      <p:sp>
-        <p:nvSpPr>
-          <p:cNvPr id="32" name="TextBox 31">
-            <a:extLst>
-              <a:ext uri="{FF2B5EF4-FFF2-40B4-BE49-F238E27FC236}">
-                <a16:creationId xmlns:a16="http://schemas.microsoft.com/office/drawing/2014/main" id="{759C5FFC-CFE4-6E65-21F6-24BCB871DBD2}"/>
-              </a:ext>
-            </a:extLst>
-          </p:cNvPr>
-          <p:cNvSpPr txBox="1"/>
-          <p:nvPr/>
-        </p:nvSpPr>
-        <p:spPr>
-          <a:xfrm>
-            <a:off x="9652000" y="2540000"/>
-            <a:ext cx="1651000" cy="153888"/>
-          </a:xfrm>
-          <a:prstGeom prst="rect">
-            <a:avLst/>
-          </a:prstGeom>
-          <a:noFill/>
-        </p:spPr>
-        <p:txBody>
-          <a:bodyPr vert="horz" lIns="0" tIns="0" rIns="0" bIns="0" rtlCol="0">
-            <a:spAutoFit/>
-          </a:bodyPr>
-          <a:lstStyle/>
-          <a:p>
-            <a:r>
-              <a:rPr lang="vi-VN" sz="1000">
-                <a:solidFill>
-                  <a:srgbClr val="F1F5F9"/>
-                </a:solidFill>
-                <a:latin typeface="Aptos" panose="020B0004020202020204" pitchFamily="34" charset="0"/>
-              </a:rPr>
-              <a:t>3.71ms</a:t>
-            </a:r>
-          </a:p>
-        </p:txBody>
-      </p:sp>
-      <p:sp>
-        <p:nvSpPr>
-          <p:cNvPr id="33" name="Rectangle 32">
-            <a:extLst>
-              <a:ext uri="{FF2B5EF4-FFF2-40B4-BE49-F238E27FC236}">
-                <a16:creationId xmlns:a16="http://schemas.microsoft.com/office/drawing/2014/main" id="{BF47D8EB-3FA6-360E-9694-C0EC69DF5E4F}"/>
-              </a:ext>
-            </a:extLst>
-          </p:cNvPr>
-          <p:cNvSpPr/>
-          <p:nvPr/>
-        </p:nvSpPr>
-        <p:spPr>
-          <a:xfrm>
-            <a:off x="787400" y="2844800"/>
-            <a:ext cx="2540000" cy="406400"/>
-          </a:xfrm>
-          <a:prstGeom prst="rect">
-            <a:avLst/>
-          </a:prstGeom>
-          <a:solidFill>
-            <a:srgbClr val="1E293B"/>
-          </a:solidFill>
-          <a:ln w="12700">
-            <a:solidFill>
-              <a:srgbClr val="334155"/>
-            </a:solidFill>
-          </a:ln>
-        </p:spPr>
-        <p:style>
-          <a:lnRef idx="2">
-            <a:schemeClr val="accent1">
-              <a:shade val="15000"/>
-            </a:schemeClr>
-          </a:lnRef>
-          <a:fillRef idx="1">
-            <a:schemeClr val="accent1"/>
-          </a:fillRef>
-          <a:effectRef idx="0">
-            <a:schemeClr val="accent1"/>
-          </a:effectRef>
-          <a:fontRef idx="minor">
-            <a:schemeClr val="lt1"/>
-          </a:fontRef>
-        </p:style>
-        <p:txBody>
-          <a:bodyPr rtlCol="0" anchor="ctr"/>
-          <a:lstStyle/>
-          <a:p>
-            <a:pPr algn="ctr"/>
-            <a:endParaRPr lang="vi-VN"/>
-          </a:p>
-        </p:txBody>
-      </p:sp>
-      <p:sp>
-        <p:nvSpPr>
-          <p:cNvPr id="34" name="TextBox 33">
-            <a:extLst>
-              <a:ext uri="{FF2B5EF4-FFF2-40B4-BE49-F238E27FC236}">
-                <a16:creationId xmlns:a16="http://schemas.microsoft.com/office/drawing/2014/main" id="{769D510C-395C-A679-E72B-2DD52E77FD08}"/>
-              </a:ext>
-            </a:extLst>
-          </p:cNvPr>
-          <p:cNvSpPr txBox="1"/>
-          <p:nvPr/>
-        </p:nvSpPr>
-        <p:spPr>
-          <a:xfrm>
-            <a:off x="863600" y="2946400"/>
-            <a:ext cx="2387600" cy="153888"/>
-          </a:xfrm>
-          <a:prstGeom prst="rect">
-            <a:avLst/>
-          </a:prstGeom>
-          <a:noFill/>
-        </p:spPr>
-        <p:txBody>
-          <a:bodyPr vert="horz" lIns="0" tIns="0" rIns="0" bIns="0" rtlCol="0">
-            <a:spAutoFit/>
-          </a:bodyPr>
-          <a:lstStyle/>
-          <a:p>
-            <a:r>
-              <a:rPr lang="vi-VN" sz="1000">
-                <a:solidFill>
-                  <a:srgbClr val="F1F5F9"/>
-                </a:solidFill>
-                <a:latin typeface="Aptos" panose="020B0004020202020204" pitchFamily="34" charset="0"/>
-              </a:rPr>
-              <a:t>20:16:00-20:16:10</a:t>
-            </a:r>
-          </a:p>
-        </p:txBody>
-      </p:sp>
-      <p:sp>
-        <p:nvSpPr>
-          <p:cNvPr id="35" name="Rectangle 34">
-            <a:extLst>
-              <a:ext uri="{FF2B5EF4-FFF2-40B4-BE49-F238E27FC236}">
-                <a16:creationId xmlns:a16="http://schemas.microsoft.com/office/drawing/2014/main" id="{E9ED3E5E-0C10-513E-8128-D05A8881D770}"/>
-              </a:ext>
-            </a:extLst>
-          </p:cNvPr>
-          <p:cNvSpPr/>
-          <p:nvPr/>
-        </p:nvSpPr>
-        <p:spPr>
-          <a:xfrm>
-            <a:off x="3327400" y="2844800"/>
-            <a:ext cx="1371600" cy="406400"/>
-          </a:xfrm>
-          <a:prstGeom prst="rect">
-            <a:avLst/>
-          </a:prstGeom>
-          <a:solidFill>
-            <a:srgbClr val="1E293B"/>
-          </a:solidFill>
-          <a:ln w="12700">
-            <a:solidFill>
-              <a:srgbClr val="334155"/>
-            </a:solidFill>
-          </a:ln>
-        </p:spPr>
-        <p:style>
-          <a:lnRef idx="2">
-            <a:schemeClr val="accent1">
-              <a:shade val="15000"/>
-            </a:schemeClr>
-          </a:lnRef>
-          <a:fillRef idx="1">
-            <a:schemeClr val="accent1"/>
-          </a:fillRef>
-          <a:effectRef idx="0">
-            <a:schemeClr val="accent1"/>
-          </a:effectRef>
-          <a:fontRef idx="minor">
-            <a:schemeClr val="lt1"/>
-          </a:fontRef>
-        </p:style>
-        <p:txBody>
-          <a:bodyPr rtlCol="0" anchor="ctr"/>
-          <a:lstStyle/>
-          <a:p>
-            <a:pPr algn="ctr"/>
-            <a:endParaRPr lang="vi-VN"/>
-          </a:p>
-        </p:txBody>
-      </p:sp>
-      <p:sp>
-        <p:nvSpPr>
-          <p:cNvPr id="36" name="TextBox 35">
-            <a:extLst>
-              <a:ext uri="{FF2B5EF4-FFF2-40B4-BE49-F238E27FC236}">
-                <a16:creationId xmlns:a16="http://schemas.microsoft.com/office/drawing/2014/main" id="{1904CC63-0580-4759-7B8B-01C2BEB9C51C}"/>
-              </a:ext>
-            </a:extLst>
-          </p:cNvPr>
-          <p:cNvSpPr txBox="1"/>
-          <p:nvPr/>
-        </p:nvSpPr>
-        <p:spPr>
-          <a:xfrm>
-            <a:off x="3403600" y="2946400"/>
-            <a:ext cx="1219200" cy="153888"/>
-          </a:xfrm>
-          <a:prstGeom prst="rect">
-            <a:avLst/>
-          </a:prstGeom>
-          <a:noFill/>
-        </p:spPr>
-        <p:txBody>
-          <a:bodyPr vert="horz" lIns="0" tIns="0" rIns="0" bIns="0" rtlCol="0">
-            <a:spAutoFit/>
-          </a:bodyPr>
-          <a:lstStyle/>
-          <a:p>
-            <a:r>
-              <a:rPr lang="vi-VN" sz="1000">
-                <a:solidFill>
-                  <a:srgbClr val="F1F5F9"/>
-                </a:solidFill>
-                <a:latin typeface="Aptos" panose="020B0004020202020204" pitchFamily="34" charset="0"/>
-              </a:rPr>
-              <a:t>36</a:t>
-            </a:r>
-          </a:p>
-        </p:txBody>
-      </p:sp>
-      <p:sp>
-        <p:nvSpPr>
-          <p:cNvPr id="37" name="Rectangle 36">
-            <a:extLst>
-              <a:ext uri="{FF2B5EF4-FFF2-40B4-BE49-F238E27FC236}">
-                <a16:creationId xmlns:a16="http://schemas.microsoft.com/office/drawing/2014/main" id="{178AB5FF-2199-EE29-BB8B-7604B5446F7C}"/>
-              </a:ext>
-            </a:extLst>
-          </p:cNvPr>
-          <p:cNvSpPr/>
-          <p:nvPr/>
-        </p:nvSpPr>
-        <p:spPr>
-          <a:xfrm>
-            <a:off x="4699000" y="2844800"/>
-            <a:ext cx="1485900" cy="406400"/>
-          </a:xfrm>
-          <a:prstGeom prst="rect">
-            <a:avLst/>
-          </a:prstGeom>
-          <a:solidFill>
-            <a:srgbClr val="1E293B"/>
-          </a:solidFill>
-          <a:ln w="12700">
-            <a:solidFill>
-              <a:srgbClr val="334155"/>
-            </a:solidFill>
-          </a:ln>
-        </p:spPr>
-        <p:style>
-          <a:lnRef idx="2">
-            <a:schemeClr val="accent1">
-              <a:shade val="15000"/>
-            </a:schemeClr>
-          </a:lnRef>
-          <a:fillRef idx="1">
-            <a:schemeClr val="accent1"/>
-          </a:fillRef>
-          <a:effectRef idx="0">
-            <a:schemeClr val="accent1"/>
-          </a:effectRef>
-          <a:fontRef idx="minor">
-            <a:schemeClr val="lt1"/>
-          </a:fontRef>
-        </p:style>
-        <p:txBody>
-          <a:bodyPr rtlCol="0" anchor="ctr"/>
-          <a:lstStyle/>
-          <a:p>
-            <a:pPr algn="ctr"/>
-            <a:endParaRPr lang="vi-VN"/>
-          </a:p>
-        </p:txBody>
-      </p:sp>
-      <p:sp>
-        <p:nvSpPr>
-          <p:cNvPr id="38" name="TextBox 37">
-            <a:extLst>
-              <a:ext uri="{FF2B5EF4-FFF2-40B4-BE49-F238E27FC236}">
-                <a16:creationId xmlns:a16="http://schemas.microsoft.com/office/drawing/2014/main" id="{5FDB7224-5D99-449F-C067-2BB4911E6F9A}"/>
-              </a:ext>
-            </a:extLst>
-          </p:cNvPr>
-          <p:cNvSpPr txBox="1"/>
-          <p:nvPr/>
-        </p:nvSpPr>
-        <p:spPr>
-          <a:xfrm>
-            <a:off x="4775200" y="2946400"/>
-            <a:ext cx="1333500" cy="153888"/>
-          </a:xfrm>
-          <a:prstGeom prst="rect">
-            <a:avLst/>
-          </a:prstGeom>
-          <a:noFill/>
-        </p:spPr>
-        <p:txBody>
-          <a:bodyPr vert="horz" lIns="0" tIns="0" rIns="0" bIns="0" rtlCol="0">
-            <a:spAutoFit/>
-          </a:bodyPr>
-          <a:lstStyle/>
-          <a:p>
-            <a:r>
-              <a:rPr lang="vi-VN" sz="1000">
-                <a:solidFill>
-                  <a:srgbClr val="F1F5F9"/>
-                </a:solidFill>
-                <a:latin typeface="Aptos" panose="020B0004020202020204" pitchFamily="34" charset="0"/>
-              </a:rPr>
-              <a:t>3.60</a:t>
-            </a:r>
-          </a:p>
-        </p:txBody>
-      </p:sp>
-      <p:sp>
-        <p:nvSpPr>
-          <p:cNvPr id="39" name="Rectangle 38">
-            <a:extLst>
-              <a:ext uri="{FF2B5EF4-FFF2-40B4-BE49-F238E27FC236}">
-                <a16:creationId xmlns:a16="http://schemas.microsoft.com/office/drawing/2014/main" id="{44EC4EDE-D56F-39D2-7636-FD66732DB369}"/>
-              </a:ext>
-            </a:extLst>
-          </p:cNvPr>
-          <p:cNvSpPr/>
-          <p:nvPr/>
-        </p:nvSpPr>
-        <p:spPr>
-          <a:xfrm>
-            <a:off x="6184900" y="2844800"/>
-            <a:ext cx="1905000" cy="406400"/>
-          </a:xfrm>
-          <a:prstGeom prst="rect">
-            <a:avLst/>
-          </a:prstGeom>
-          <a:solidFill>
-            <a:srgbClr val="1E293B"/>
-          </a:solidFill>
-          <a:ln w="12700">
-            <a:solidFill>
-              <a:srgbClr val="334155"/>
-            </a:solidFill>
-          </a:ln>
-        </p:spPr>
-        <p:style>
-          <a:lnRef idx="2">
-            <a:schemeClr val="accent1">
-              <a:shade val="15000"/>
-            </a:schemeClr>
-          </a:lnRef>
-          <a:fillRef idx="1">
-            <a:schemeClr val="accent1"/>
-          </a:fillRef>
-          <a:effectRef idx="0">
-            <a:schemeClr val="accent1"/>
-          </a:effectRef>
-          <a:fontRef idx="minor">
-            <a:schemeClr val="lt1"/>
-          </a:fontRef>
-        </p:style>
-        <p:txBody>
-          <a:bodyPr rtlCol="0" anchor="ctr"/>
-          <a:lstStyle/>
-          <a:p>
-            <a:pPr algn="ctr"/>
-            <a:endParaRPr lang="vi-VN"/>
-          </a:p>
-        </p:txBody>
-      </p:sp>
-      <p:sp>
-        <p:nvSpPr>
-          <p:cNvPr id="40" name="TextBox 39">
-            <a:extLst>
-              <a:ext uri="{FF2B5EF4-FFF2-40B4-BE49-F238E27FC236}">
-                <a16:creationId xmlns:a16="http://schemas.microsoft.com/office/drawing/2014/main" id="{DA45D0AA-255A-B475-0867-519D00769C69}"/>
-              </a:ext>
-            </a:extLst>
-          </p:cNvPr>
-          <p:cNvSpPr txBox="1"/>
-          <p:nvPr/>
-        </p:nvSpPr>
-        <p:spPr>
-          <a:xfrm>
-            <a:off x="6261100" y="2946400"/>
-            <a:ext cx="1752600" cy="153888"/>
-          </a:xfrm>
-          <a:prstGeom prst="rect">
-            <a:avLst/>
-          </a:prstGeom>
-          <a:noFill/>
-        </p:spPr>
-        <p:txBody>
-          <a:bodyPr vert="horz" lIns="0" tIns="0" rIns="0" bIns="0" rtlCol="0">
-            <a:spAutoFit/>
-          </a:bodyPr>
-          <a:lstStyle/>
-          <a:p>
-            <a:r>
-              <a:rPr lang="vi-VN" sz="1000">
-                <a:solidFill>
-                  <a:srgbClr val="F1F5F9"/>
-                </a:solidFill>
-                <a:latin typeface="Aptos" panose="020B0004020202020204" pitchFamily="34" charset="0"/>
-              </a:rPr>
-              <a:t>9.78ms</a:t>
-            </a:r>
-          </a:p>
-        </p:txBody>
-      </p:sp>
-      <p:sp>
-        <p:nvSpPr>
-          <p:cNvPr id="41" name="Rectangle 40">
-            <a:extLst>
-              <a:ext uri="{FF2B5EF4-FFF2-40B4-BE49-F238E27FC236}">
-                <a16:creationId xmlns:a16="http://schemas.microsoft.com/office/drawing/2014/main" id="{E00A6A03-D6E7-A633-B070-CE350EDCBB5A}"/>
-              </a:ext>
-            </a:extLst>
-          </p:cNvPr>
-          <p:cNvSpPr/>
-          <p:nvPr/>
-        </p:nvSpPr>
-        <p:spPr>
-          <a:xfrm>
-            <a:off x="8089900" y="2844800"/>
-            <a:ext cx="1485900" cy="406400"/>
-          </a:xfrm>
-          <a:prstGeom prst="rect">
-            <a:avLst/>
-          </a:prstGeom>
-          <a:solidFill>
-            <a:srgbClr val="1E293B"/>
-          </a:solidFill>
-          <a:ln w="12700">
-            <a:solidFill>
-              <a:srgbClr val="334155"/>
-            </a:solidFill>
-          </a:ln>
-        </p:spPr>
-        <p:style>
-          <a:lnRef idx="2">
-            <a:schemeClr val="accent1">
-              <a:shade val="15000"/>
-            </a:schemeClr>
-          </a:lnRef>
-          <a:fillRef idx="1">
-            <a:schemeClr val="accent1"/>
-          </a:fillRef>
-          <a:effectRef idx="0">
-            <a:schemeClr val="accent1"/>
-          </a:effectRef>
-          <a:fontRef idx="minor">
-            <a:schemeClr val="lt1"/>
-          </a:fontRef>
-        </p:style>
-        <p:txBody>
-          <a:bodyPr rtlCol="0" anchor="ctr"/>
-          <a:lstStyle/>
-          <a:p>
-            <a:pPr algn="ctr"/>
-            <a:endParaRPr lang="vi-VN"/>
-          </a:p>
-        </p:txBody>
-      </p:sp>
-      <p:sp>
-        <p:nvSpPr>
-          <p:cNvPr id="42" name="TextBox 41">
-            <a:extLst>
-              <a:ext uri="{FF2B5EF4-FFF2-40B4-BE49-F238E27FC236}">
-                <a16:creationId xmlns:a16="http://schemas.microsoft.com/office/drawing/2014/main" id="{CE6F58F5-AB56-0CA8-FEEC-0AB55FED3F58}"/>
-              </a:ext>
-            </a:extLst>
-          </p:cNvPr>
-          <p:cNvSpPr txBox="1"/>
-          <p:nvPr/>
-        </p:nvSpPr>
-        <p:spPr>
-          <a:xfrm>
-            <a:off x="8166100" y="2946400"/>
-            <a:ext cx="1333500" cy="153888"/>
-          </a:xfrm>
-          <a:prstGeom prst="rect">
-            <a:avLst/>
-          </a:prstGeom>
-          <a:noFill/>
-        </p:spPr>
-        <p:txBody>
-          <a:bodyPr vert="horz" lIns="0" tIns="0" rIns="0" bIns="0" rtlCol="0">
-            <a:spAutoFit/>
-          </a:bodyPr>
-          <a:lstStyle/>
-          <a:p>
-            <a:r>
-              <a:rPr lang="vi-VN" sz="1000">
-                <a:solidFill>
-                  <a:srgbClr val="F1F5F9"/>
-                </a:solidFill>
-                <a:latin typeface="Aptos" panose="020B0004020202020204" pitchFamily="34" charset="0"/>
-              </a:rPr>
-              <a:t>3.60</a:t>
-            </a:r>
-          </a:p>
-        </p:txBody>
-      </p:sp>
-      <p:sp>
-        <p:nvSpPr>
-          <p:cNvPr id="43" name="Rectangle 42">
-            <a:extLst>
-              <a:ext uri="{FF2B5EF4-FFF2-40B4-BE49-F238E27FC236}">
-                <a16:creationId xmlns:a16="http://schemas.microsoft.com/office/drawing/2014/main" id="{22F11C76-03C9-9623-25DB-FD5B8058D7FC}"/>
-              </a:ext>
-            </a:extLst>
-          </p:cNvPr>
-          <p:cNvSpPr/>
-          <p:nvPr/>
-        </p:nvSpPr>
-        <p:spPr>
-          <a:xfrm>
-            <a:off x="9575800" y="2844800"/>
-            <a:ext cx="1803400" cy="406400"/>
-          </a:xfrm>
-          <a:prstGeom prst="rect">
-            <a:avLst/>
-          </a:prstGeom>
-          <a:solidFill>
-            <a:srgbClr val="1E293B"/>
-          </a:solidFill>
-          <a:ln w="12700">
-            <a:solidFill>
-              <a:srgbClr val="334155"/>
-            </a:solidFill>
-          </a:ln>
-        </p:spPr>
-        <p:style>
-          <a:lnRef idx="2">
-            <a:schemeClr val="accent1">
-              <a:shade val="15000"/>
-            </a:schemeClr>
-          </a:lnRef>
-          <a:fillRef idx="1">
-            <a:schemeClr val="accent1"/>
-          </a:fillRef>
-          <a:effectRef idx="0">
-            <a:schemeClr val="accent1"/>
-          </a:effectRef>
-          <a:fontRef idx="minor">
-            <a:schemeClr val="lt1"/>
-          </a:fontRef>
-        </p:style>
-        <p:txBody>
-          <a:bodyPr rtlCol="0" anchor="ctr"/>
-          <a:lstStyle/>
-          <a:p>
-            <a:pPr algn="ctr"/>
-            <a:endParaRPr lang="vi-VN"/>
-          </a:p>
-        </p:txBody>
-      </p:sp>
-      <p:sp>
-        <p:nvSpPr>
-          <p:cNvPr id="44" name="TextBox 43">
-            <a:extLst>
-              <a:ext uri="{FF2B5EF4-FFF2-40B4-BE49-F238E27FC236}">
-                <a16:creationId xmlns:a16="http://schemas.microsoft.com/office/drawing/2014/main" id="{53EBBCE3-7982-E927-AD31-D13E83710619}"/>
-              </a:ext>
-            </a:extLst>
-          </p:cNvPr>
-          <p:cNvSpPr txBox="1"/>
-          <p:nvPr/>
-        </p:nvSpPr>
-        <p:spPr>
-          <a:xfrm>
-            <a:off x="9652000" y="2946400"/>
-            <a:ext cx="1651000" cy="153888"/>
-          </a:xfrm>
-          <a:prstGeom prst="rect">
-            <a:avLst/>
-          </a:prstGeom>
-          <a:noFill/>
-        </p:spPr>
-        <p:txBody>
-          <a:bodyPr vert="horz" lIns="0" tIns="0" rIns="0" bIns="0" rtlCol="0">
-            <a:spAutoFit/>
-          </a:bodyPr>
-          <a:lstStyle/>
-          <a:p>
-            <a:r>
-              <a:rPr lang="vi-VN" sz="1000">
-                <a:solidFill>
-                  <a:srgbClr val="F1F5F9"/>
-                </a:solidFill>
-                <a:latin typeface="Aptos" panose="020B0004020202020204" pitchFamily="34" charset="0"/>
-              </a:rPr>
-              <a:t>5.82ms</a:t>
-            </a:r>
-          </a:p>
-        </p:txBody>
-      </p:sp>
-      <p:sp>
-        <p:nvSpPr>
-          <p:cNvPr id="45" name="Rectangle 44">
-            <a:extLst>
-              <a:ext uri="{FF2B5EF4-FFF2-40B4-BE49-F238E27FC236}">
-                <a16:creationId xmlns:a16="http://schemas.microsoft.com/office/drawing/2014/main" id="{E2AF8BB5-4071-9645-E5A1-34426F0572A6}"/>
-              </a:ext>
-            </a:extLst>
-          </p:cNvPr>
-          <p:cNvSpPr/>
-          <p:nvPr/>
-        </p:nvSpPr>
-        <p:spPr>
-          <a:xfrm>
-            <a:off x="787400" y="3251200"/>
-            <a:ext cx="2540000" cy="406400"/>
-          </a:xfrm>
-          <a:prstGeom prst="rect">
-            <a:avLst/>
-          </a:prstGeom>
-          <a:solidFill>
-            <a:srgbClr val="1E293B"/>
-          </a:solidFill>
-          <a:ln w="12700">
-            <a:solidFill>
-              <a:srgbClr val="334155"/>
-            </a:solidFill>
-          </a:ln>
-        </p:spPr>
-        <p:style>
-          <a:lnRef idx="2">
-            <a:schemeClr val="accent1">
-              <a:shade val="15000"/>
-            </a:schemeClr>
-          </a:lnRef>
-          <a:fillRef idx="1">
-            <a:schemeClr val="accent1"/>
-          </a:fillRef>
-          <a:effectRef idx="0">
-            <a:schemeClr val="accent1"/>
-          </a:effectRef>
-          <a:fontRef idx="minor">
-            <a:schemeClr val="lt1"/>
-          </a:fontRef>
-        </p:style>
-        <p:txBody>
-          <a:bodyPr rtlCol="0" anchor="ctr"/>
-          <a:lstStyle/>
-          <a:p>
-            <a:pPr algn="ctr"/>
-            <a:endParaRPr lang="vi-VN"/>
-          </a:p>
-        </p:txBody>
-      </p:sp>
-      <p:sp>
-        <p:nvSpPr>
-          <p:cNvPr id="46" name="TextBox 45">
-            <a:extLst>
-              <a:ext uri="{FF2B5EF4-FFF2-40B4-BE49-F238E27FC236}">
-                <a16:creationId xmlns:a16="http://schemas.microsoft.com/office/drawing/2014/main" id="{DAD9D874-6507-3860-2EF1-54BC3EBF5328}"/>
-              </a:ext>
-            </a:extLst>
-          </p:cNvPr>
-          <p:cNvSpPr txBox="1"/>
-          <p:nvPr/>
-        </p:nvSpPr>
-        <p:spPr>
-          <a:xfrm>
-            <a:off x="863600" y="3352800"/>
-            <a:ext cx="2387600" cy="153888"/>
-          </a:xfrm>
-          <a:prstGeom prst="rect">
-            <a:avLst/>
-          </a:prstGeom>
-          <a:noFill/>
-        </p:spPr>
-        <p:txBody>
-          <a:bodyPr vert="horz" lIns="0" tIns="0" rIns="0" bIns="0" rtlCol="0">
-            <a:spAutoFit/>
-          </a:bodyPr>
-          <a:lstStyle/>
-          <a:p>
-            <a:r>
-              <a:rPr lang="vi-VN" sz="1000">
-                <a:solidFill>
-                  <a:srgbClr val="F1F5F9"/>
-                </a:solidFill>
-                <a:latin typeface="Aptos" panose="020B0004020202020204" pitchFamily="34" charset="0"/>
-              </a:rPr>
-              <a:t>20:16:10-20:16:20</a:t>
-            </a:r>
-          </a:p>
-        </p:txBody>
-      </p:sp>
-      <p:sp>
-        <p:nvSpPr>
-          <p:cNvPr id="47" name="Rectangle 46">
-            <a:extLst>
-              <a:ext uri="{FF2B5EF4-FFF2-40B4-BE49-F238E27FC236}">
-                <a16:creationId xmlns:a16="http://schemas.microsoft.com/office/drawing/2014/main" id="{2F606DF9-C131-5C0F-AF59-B06172BF9DDF}"/>
-              </a:ext>
-            </a:extLst>
-          </p:cNvPr>
-          <p:cNvSpPr/>
-          <p:nvPr/>
-        </p:nvSpPr>
-        <p:spPr>
-          <a:xfrm>
-            <a:off x="3327400" y="3251200"/>
-            <a:ext cx="1371600" cy="406400"/>
-          </a:xfrm>
-          <a:prstGeom prst="rect">
-            <a:avLst/>
-          </a:prstGeom>
-          <a:solidFill>
-            <a:srgbClr val="1E293B"/>
-          </a:solidFill>
-          <a:ln w="12700">
-            <a:solidFill>
-              <a:srgbClr val="334155"/>
-            </a:solidFill>
-          </a:ln>
-        </p:spPr>
-        <p:style>
-          <a:lnRef idx="2">
-            <a:schemeClr val="accent1">
-              <a:shade val="15000"/>
-            </a:schemeClr>
-          </a:lnRef>
-          <a:fillRef idx="1">
-            <a:schemeClr val="accent1"/>
-          </a:fillRef>
-          <a:effectRef idx="0">
-            <a:schemeClr val="accent1"/>
-          </a:effectRef>
-          <a:fontRef idx="minor">
-            <a:schemeClr val="lt1"/>
-          </a:fontRef>
-        </p:style>
-        <p:txBody>
-          <a:bodyPr rtlCol="0" anchor="ctr"/>
-          <a:lstStyle/>
-          <a:p>
-            <a:pPr algn="ctr"/>
-            <a:endParaRPr lang="vi-VN"/>
-          </a:p>
-        </p:txBody>
-      </p:sp>
-      <p:sp>
-        <p:nvSpPr>
-          <p:cNvPr id="48" name="TextBox 47">
-            <a:extLst>
-              <a:ext uri="{FF2B5EF4-FFF2-40B4-BE49-F238E27FC236}">
-                <a16:creationId xmlns:a16="http://schemas.microsoft.com/office/drawing/2014/main" id="{DC227097-0AFB-0496-47E9-385DE2B9C0C4}"/>
-              </a:ext>
-            </a:extLst>
-          </p:cNvPr>
-          <p:cNvSpPr txBox="1"/>
-          <p:nvPr/>
-        </p:nvSpPr>
-        <p:spPr>
-          <a:xfrm>
-            <a:off x="3403600" y="3352800"/>
-            <a:ext cx="1219200" cy="153888"/>
-          </a:xfrm>
-          <a:prstGeom prst="rect">
-            <a:avLst/>
-          </a:prstGeom>
-          <a:noFill/>
-        </p:spPr>
-        <p:txBody>
-          <a:bodyPr vert="horz" lIns="0" tIns="0" rIns="0" bIns="0" rtlCol="0">
-            <a:spAutoFit/>
-          </a:bodyPr>
-          <a:lstStyle/>
-          <a:p>
-            <a:r>
-              <a:rPr lang="vi-VN" sz="1000">
-                <a:solidFill>
-                  <a:srgbClr val="F1F5F9"/>
-                </a:solidFill>
-                <a:latin typeface="Aptos" panose="020B0004020202020204" pitchFamily="34" charset="0"/>
-              </a:rPr>
-              <a:t>43</a:t>
-            </a:r>
-          </a:p>
-        </p:txBody>
-      </p:sp>
-      <p:sp>
-        <p:nvSpPr>
-          <p:cNvPr id="49" name="Rectangle 48">
-            <a:extLst>
-              <a:ext uri="{FF2B5EF4-FFF2-40B4-BE49-F238E27FC236}">
-                <a16:creationId xmlns:a16="http://schemas.microsoft.com/office/drawing/2014/main" id="{86B4B8F5-EEB8-CC7E-5852-95BE51C8A4E9}"/>
-              </a:ext>
-            </a:extLst>
-          </p:cNvPr>
-          <p:cNvSpPr/>
-          <p:nvPr/>
-        </p:nvSpPr>
-        <p:spPr>
-          <a:xfrm>
-            <a:off x="4699000" y="3251200"/>
-            <a:ext cx="1485900" cy="406400"/>
-          </a:xfrm>
-          <a:prstGeom prst="rect">
-            <a:avLst/>
-          </a:prstGeom>
-          <a:solidFill>
-            <a:srgbClr val="1E293B"/>
-          </a:solidFill>
-          <a:ln w="12700">
-            <a:solidFill>
-              <a:srgbClr val="334155"/>
-            </a:solidFill>
-          </a:ln>
-        </p:spPr>
-        <p:style>
-          <a:lnRef idx="2">
-            <a:schemeClr val="accent1">
-              <a:shade val="15000"/>
-            </a:schemeClr>
-          </a:lnRef>
-          <a:fillRef idx="1">
-            <a:schemeClr val="accent1"/>
-          </a:fillRef>
-          <a:effectRef idx="0">
-            <a:schemeClr val="accent1"/>
-          </a:effectRef>
-          <a:fontRef idx="minor">
-            <a:schemeClr val="lt1"/>
-          </a:fontRef>
-        </p:style>
-        <p:txBody>
-          <a:bodyPr rtlCol="0" anchor="ctr"/>
-          <a:lstStyle/>
-          <a:p>
-            <a:pPr algn="ctr"/>
-            <a:endParaRPr lang="vi-VN"/>
-          </a:p>
-        </p:txBody>
-      </p:sp>
-      <p:sp>
-        <p:nvSpPr>
-          <p:cNvPr id="50" name="TextBox 49">
-            <a:extLst>
-              <a:ext uri="{FF2B5EF4-FFF2-40B4-BE49-F238E27FC236}">
-                <a16:creationId xmlns:a16="http://schemas.microsoft.com/office/drawing/2014/main" id="{EB501B61-8FA0-CA11-9009-FC0EB902EDC5}"/>
-              </a:ext>
-            </a:extLst>
-          </p:cNvPr>
-          <p:cNvSpPr txBox="1"/>
-          <p:nvPr/>
-        </p:nvSpPr>
-        <p:spPr>
-          <a:xfrm>
-            <a:off x="4775200" y="3352800"/>
-            <a:ext cx="1333500" cy="153888"/>
-          </a:xfrm>
-          <a:prstGeom prst="rect">
-            <a:avLst/>
-          </a:prstGeom>
-          <a:noFill/>
-        </p:spPr>
-        <p:txBody>
-          <a:bodyPr vert="horz" lIns="0" tIns="0" rIns="0" bIns="0" rtlCol="0">
-            <a:spAutoFit/>
-          </a:bodyPr>
-          <a:lstStyle/>
-          <a:p>
-            <a:r>
-              <a:rPr lang="vi-VN" sz="1000">
-                <a:solidFill>
-                  <a:srgbClr val="F1F5F9"/>
-                </a:solidFill>
-                <a:latin typeface="Aptos" panose="020B0004020202020204" pitchFamily="34" charset="0"/>
-              </a:rPr>
-              <a:t>4.30</a:t>
-            </a:r>
-          </a:p>
-        </p:txBody>
-      </p:sp>
-      <p:sp>
-        <p:nvSpPr>
-          <p:cNvPr id="51" name="Rectangle 50">
-            <a:extLst>
-              <a:ext uri="{FF2B5EF4-FFF2-40B4-BE49-F238E27FC236}">
-                <a16:creationId xmlns:a16="http://schemas.microsoft.com/office/drawing/2014/main" id="{E786F8D0-F761-B815-88B4-0615E521E072}"/>
-              </a:ext>
-            </a:extLst>
-          </p:cNvPr>
-          <p:cNvSpPr/>
-          <p:nvPr/>
-        </p:nvSpPr>
-        <p:spPr>
-          <a:xfrm>
-            <a:off x="6184900" y="3251200"/>
-            <a:ext cx="1905000" cy="406400"/>
-          </a:xfrm>
-          <a:prstGeom prst="rect">
-            <a:avLst/>
-          </a:prstGeom>
-          <a:solidFill>
-            <a:srgbClr val="1E293B"/>
-          </a:solidFill>
-          <a:ln w="12700">
-            <a:solidFill>
-              <a:srgbClr val="334155"/>
-            </a:solidFill>
-          </a:ln>
-        </p:spPr>
-        <p:style>
-          <a:lnRef idx="2">
-            <a:schemeClr val="accent1">
-              <a:shade val="15000"/>
-            </a:schemeClr>
-          </a:lnRef>
-          <a:fillRef idx="1">
-            <a:schemeClr val="accent1"/>
-          </a:fillRef>
-          <a:effectRef idx="0">
-            <a:schemeClr val="accent1"/>
-          </a:effectRef>
-          <a:fontRef idx="minor">
-            <a:schemeClr val="lt1"/>
-          </a:fontRef>
-        </p:style>
-        <p:txBody>
-          <a:bodyPr rtlCol="0" anchor="ctr"/>
-          <a:lstStyle/>
-          <a:p>
-            <a:pPr algn="ctr"/>
-            <a:endParaRPr lang="vi-VN"/>
-          </a:p>
-        </p:txBody>
-      </p:sp>
-      <p:sp>
-        <p:nvSpPr>
-          <p:cNvPr id="52" name="TextBox 51">
-            <a:extLst>
-              <a:ext uri="{FF2B5EF4-FFF2-40B4-BE49-F238E27FC236}">
-                <a16:creationId xmlns:a16="http://schemas.microsoft.com/office/drawing/2014/main" id="{66540A05-67D5-E1E9-BFB2-21CFEC133648}"/>
-              </a:ext>
-            </a:extLst>
-          </p:cNvPr>
-          <p:cNvSpPr txBox="1"/>
-          <p:nvPr/>
-        </p:nvSpPr>
-        <p:spPr>
-          <a:xfrm>
-            <a:off x="6261100" y="3352800"/>
-            <a:ext cx="1752600" cy="153888"/>
-          </a:xfrm>
-          <a:prstGeom prst="rect">
-            <a:avLst/>
-          </a:prstGeom>
-          <a:noFill/>
-        </p:spPr>
-        <p:txBody>
-          <a:bodyPr vert="horz" lIns="0" tIns="0" rIns="0" bIns="0" rtlCol="0">
-            <a:spAutoFit/>
-          </a:bodyPr>
-          <a:lstStyle/>
-          <a:p>
-            <a:r>
-              <a:rPr lang="vi-VN" sz="1000">
-                <a:solidFill>
-                  <a:srgbClr val="F1F5F9"/>
-                </a:solidFill>
-                <a:latin typeface="Aptos" panose="020B0004020202020204" pitchFamily="34" charset="0"/>
-              </a:rPr>
-              <a:t>11.06ms</a:t>
-            </a:r>
-          </a:p>
-        </p:txBody>
-      </p:sp>
-      <p:sp>
-        <p:nvSpPr>
-          <p:cNvPr id="53" name="Rectangle 52">
-            <a:extLst>
-              <a:ext uri="{FF2B5EF4-FFF2-40B4-BE49-F238E27FC236}">
-                <a16:creationId xmlns:a16="http://schemas.microsoft.com/office/drawing/2014/main" id="{0D115793-C903-9496-D311-4CAE7E347EF7}"/>
-              </a:ext>
-            </a:extLst>
-          </p:cNvPr>
-          <p:cNvSpPr/>
-          <p:nvPr/>
-        </p:nvSpPr>
-        <p:spPr>
-          <a:xfrm>
-            <a:off x="8089900" y="3251200"/>
-            <a:ext cx="1485900" cy="406400"/>
-          </a:xfrm>
-          <a:prstGeom prst="rect">
-            <a:avLst/>
-          </a:prstGeom>
-          <a:solidFill>
-            <a:srgbClr val="1E293B"/>
-          </a:solidFill>
-          <a:ln w="12700">
-            <a:solidFill>
-              <a:srgbClr val="334155"/>
-            </a:solidFill>
-          </a:ln>
-        </p:spPr>
-        <p:style>
-          <a:lnRef idx="2">
-            <a:schemeClr val="accent1">
-              <a:shade val="15000"/>
-            </a:schemeClr>
-          </a:lnRef>
-          <a:fillRef idx="1">
-            <a:schemeClr val="accent1"/>
-          </a:fillRef>
-          <a:effectRef idx="0">
-            <a:schemeClr val="accent1"/>
-          </a:effectRef>
-          <a:fontRef idx="minor">
-            <a:schemeClr val="lt1"/>
-          </a:fontRef>
-        </p:style>
-        <p:txBody>
-          <a:bodyPr rtlCol="0" anchor="ctr"/>
-          <a:lstStyle/>
-          <a:p>
-            <a:pPr algn="ctr"/>
-            <a:endParaRPr lang="vi-VN"/>
-          </a:p>
-        </p:txBody>
-      </p:sp>
-      <p:sp>
-        <p:nvSpPr>
-          <p:cNvPr id="54" name="TextBox 53">
-            <a:extLst>
-              <a:ext uri="{FF2B5EF4-FFF2-40B4-BE49-F238E27FC236}">
-                <a16:creationId xmlns:a16="http://schemas.microsoft.com/office/drawing/2014/main" id="{DF188ECC-9764-36DC-8006-7CFD29FBFA69}"/>
-              </a:ext>
-            </a:extLst>
-          </p:cNvPr>
-          <p:cNvSpPr txBox="1"/>
-          <p:nvPr/>
-        </p:nvSpPr>
-        <p:spPr>
-          <a:xfrm>
-            <a:off x="8166100" y="3352800"/>
-            <a:ext cx="1333500" cy="153888"/>
-          </a:xfrm>
-          <a:prstGeom prst="rect">
-            <a:avLst/>
-          </a:prstGeom>
-          <a:noFill/>
-        </p:spPr>
-        <p:txBody>
-          <a:bodyPr vert="horz" lIns="0" tIns="0" rIns="0" bIns="0" rtlCol="0">
-            <a:spAutoFit/>
-          </a:bodyPr>
-          <a:lstStyle/>
-          <a:p>
-            <a:r>
-              <a:rPr lang="vi-VN" sz="1000">
-                <a:solidFill>
-                  <a:srgbClr val="F1F5F9"/>
-                </a:solidFill>
-                <a:latin typeface="Aptos" panose="020B0004020202020204" pitchFamily="34" charset="0"/>
-              </a:rPr>
-              <a:t>4.30</a:t>
-            </a:r>
-          </a:p>
-        </p:txBody>
-      </p:sp>
-      <p:sp>
-        <p:nvSpPr>
-          <p:cNvPr id="55" name="Rectangle 54">
-            <a:extLst>
-              <a:ext uri="{FF2B5EF4-FFF2-40B4-BE49-F238E27FC236}">
-                <a16:creationId xmlns:a16="http://schemas.microsoft.com/office/drawing/2014/main" id="{1995B0A0-FF42-0162-34F2-25AD223597A9}"/>
-              </a:ext>
-            </a:extLst>
-          </p:cNvPr>
-          <p:cNvSpPr/>
-          <p:nvPr/>
-        </p:nvSpPr>
-        <p:spPr>
-          <a:xfrm>
-            <a:off x="9575800" y="3251200"/>
-            <a:ext cx="1803400" cy="406400"/>
-          </a:xfrm>
-          <a:prstGeom prst="rect">
-            <a:avLst/>
-          </a:prstGeom>
-          <a:solidFill>
-            <a:srgbClr val="1E293B"/>
-          </a:solidFill>
-          <a:ln w="12700">
-            <a:solidFill>
-              <a:srgbClr val="334155"/>
-            </a:solidFill>
-          </a:ln>
-        </p:spPr>
-        <p:style>
-          <a:lnRef idx="2">
-            <a:schemeClr val="accent1">
-              <a:shade val="15000"/>
-            </a:schemeClr>
-          </a:lnRef>
-          <a:fillRef idx="1">
-            <a:schemeClr val="accent1"/>
-          </a:fillRef>
-          <a:effectRef idx="0">
-            <a:schemeClr val="accent1"/>
-          </a:effectRef>
-          <a:fontRef idx="minor">
-            <a:schemeClr val="lt1"/>
-          </a:fontRef>
-        </p:style>
-        <p:txBody>
-          <a:bodyPr rtlCol="0" anchor="ctr"/>
-          <a:lstStyle/>
-          <a:p>
-            <a:pPr algn="ctr"/>
-            <a:endParaRPr lang="vi-VN"/>
-          </a:p>
-        </p:txBody>
-      </p:sp>
-      <p:sp>
-        <p:nvSpPr>
-          <p:cNvPr id="56" name="TextBox 55">
-            <a:extLst>
-              <a:ext uri="{FF2B5EF4-FFF2-40B4-BE49-F238E27FC236}">
-                <a16:creationId xmlns:a16="http://schemas.microsoft.com/office/drawing/2014/main" id="{BBE829BE-EA8B-F592-FC7E-48FE9D6DF87E}"/>
-              </a:ext>
-            </a:extLst>
-          </p:cNvPr>
-          <p:cNvSpPr txBox="1"/>
-          <p:nvPr/>
-        </p:nvSpPr>
-        <p:spPr>
-          <a:xfrm>
-            <a:off x="9652000" y="3352800"/>
-            <a:ext cx="1651000" cy="153888"/>
-          </a:xfrm>
-          <a:prstGeom prst="rect">
-            <a:avLst/>
-          </a:prstGeom>
-          <a:noFill/>
-        </p:spPr>
-        <p:txBody>
-          <a:bodyPr vert="horz" lIns="0" tIns="0" rIns="0" bIns="0" rtlCol="0">
-            <a:spAutoFit/>
-          </a:bodyPr>
-          <a:lstStyle/>
-          <a:p>
-            <a:r>
-              <a:rPr lang="vi-VN" sz="1000">
-                <a:solidFill>
-                  <a:srgbClr val="F1F5F9"/>
-                </a:solidFill>
-                <a:latin typeface="Aptos" panose="020B0004020202020204" pitchFamily="34" charset="0"/>
-              </a:rPr>
-              <a:t>3.32ms</a:t>
-            </a:r>
-          </a:p>
-        </p:txBody>
-      </p:sp>
-      <p:sp>
-        <p:nvSpPr>
-          <p:cNvPr id="57" name="Rectangle 56">
-            <a:extLst>
-              <a:ext uri="{FF2B5EF4-FFF2-40B4-BE49-F238E27FC236}">
-                <a16:creationId xmlns:a16="http://schemas.microsoft.com/office/drawing/2014/main" id="{CBE0AE6C-18F4-85A3-1448-97DD71B81BE7}"/>
-              </a:ext>
-            </a:extLst>
-          </p:cNvPr>
-          <p:cNvSpPr/>
-          <p:nvPr/>
-        </p:nvSpPr>
-        <p:spPr>
-          <a:xfrm>
-            <a:off x="787400" y="3657600"/>
-            <a:ext cx="2540000" cy="406400"/>
-          </a:xfrm>
-          <a:prstGeom prst="rect">
-            <a:avLst/>
-          </a:prstGeom>
-          <a:solidFill>
-            <a:srgbClr val="1E293B"/>
-          </a:solidFill>
-          <a:ln w="12700">
-            <a:solidFill>
-              <a:srgbClr val="334155"/>
-            </a:solidFill>
-          </a:ln>
-        </p:spPr>
-        <p:style>
-          <a:lnRef idx="2">
-            <a:schemeClr val="accent1">
-              <a:shade val="15000"/>
-            </a:schemeClr>
-          </a:lnRef>
-          <a:fillRef idx="1">
-            <a:schemeClr val="accent1"/>
-          </a:fillRef>
-          <a:effectRef idx="0">
-            <a:schemeClr val="accent1"/>
-          </a:effectRef>
-          <a:fontRef idx="minor">
-            <a:schemeClr val="lt1"/>
-          </a:fontRef>
-        </p:style>
-        <p:txBody>
-          <a:bodyPr rtlCol="0" anchor="ctr"/>
-          <a:lstStyle/>
-          <a:p>
-            <a:pPr algn="ctr"/>
-            <a:endParaRPr lang="vi-VN"/>
-          </a:p>
-        </p:txBody>
-      </p:sp>
-      <p:sp>
-        <p:nvSpPr>
-          <p:cNvPr id="58" name="TextBox 57">
-            <a:extLst>
-              <a:ext uri="{FF2B5EF4-FFF2-40B4-BE49-F238E27FC236}">
-                <a16:creationId xmlns:a16="http://schemas.microsoft.com/office/drawing/2014/main" id="{7A4D21D3-C3EC-A6B8-A9ED-882B702D2AD1}"/>
-              </a:ext>
-            </a:extLst>
-          </p:cNvPr>
-          <p:cNvSpPr txBox="1"/>
-          <p:nvPr/>
-        </p:nvSpPr>
-        <p:spPr>
-          <a:xfrm>
-            <a:off x="863600" y="3759200"/>
-            <a:ext cx="2387600" cy="153888"/>
-          </a:xfrm>
-          <a:prstGeom prst="rect">
-            <a:avLst/>
-          </a:prstGeom>
-          <a:noFill/>
-        </p:spPr>
-        <p:txBody>
-          <a:bodyPr vert="horz" lIns="0" tIns="0" rIns="0" bIns="0" rtlCol="0">
-            <a:spAutoFit/>
-          </a:bodyPr>
-          <a:lstStyle/>
-          <a:p>
-            <a:r>
-              <a:rPr lang="vi-VN" sz="1000">
-                <a:solidFill>
-                  <a:srgbClr val="F1F5F9"/>
-                </a:solidFill>
-                <a:latin typeface="Aptos" panose="020B0004020202020204" pitchFamily="34" charset="0"/>
-              </a:rPr>
-              <a:t>20:16:20-20:16:30</a:t>
-            </a:r>
-          </a:p>
-        </p:txBody>
-      </p:sp>
-      <p:sp>
-        <p:nvSpPr>
-          <p:cNvPr id="59" name="Rectangle 58">
-            <a:extLst>
-              <a:ext uri="{FF2B5EF4-FFF2-40B4-BE49-F238E27FC236}">
-                <a16:creationId xmlns:a16="http://schemas.microsoft.com/office/drawing/2014/main" id="{E86833C3-8ECA-84E4-7FEF-4366C2BBD6A9}"/>
-              </a:ext>
-            </a:extLst>
-          </p:cNvPr>
-          <p:cNvSpPr/>
-          <p:nvPr/>
-        </p:nvSpPr>
-        <p:spPr>
-          <a:xfrm>
-            <a:off x="3327400" y="3657600"/>
-            <a:ext cx="1371600" cy="406400"/>
-          </a:xfrm>
-          <a:prstGeom prst="rect">
-            <a:avLst/>
-          </a:prstGeom>
-          <a:solidFill>
-            <a:srgbClr val="1E293B"/>
-          </a:solidFill>
-          <a:ln w="12700">
-            <a:solidFill>
-              <a:srgbClr val="334155"/>
-            </a:solidFill>
-          </a:ln>
-        </p:spPr>
-        <p:style>
-          <a:lnRef idx="2">
-            <a:schemeClr val="accent1">
-              <a:shade val="15000"/>
-            </a:schemeClr>
-          </a:lnRef>
-          <a:fillRef idx="1">
-            <a:schemeClr val="accent1"/>
-          </a:fillRef>
-          <a:effectRef idx="0">
-            <a:schemeClr val="accent1"/>
-          </a:effectRef>
-          <a:fontRef idx="minor">
-            <a:schemeClr val="lt1"/>
-          </a:fontRef>
-        </p:style>
-        <p:txBody>
-          <a:bodyPr rtlCol="0" anchor="ctr"/>
-          <a:lstStyle/>
-          <a:p>
-            <a:pPr algn="ctr"/>
-            <a:endParaRPr lang="vi-VN"/>
-          </a:p>
-        </p:txBody>
-      </p:sp>
-      <p:sp>
-        <p:nvSpPr>
-          <p:cNvPr id="60" name="TextBox 59">
-            <a:extLst>
-              <a:ext uri="{FF2B5EF4-FFF2-40B4-BE49-F238E27FC236}">
-                <a16:creationId xmlns:a16="http://schemas.microsoft.com/office/drawing/2014/main" id="{D1401F37-3968-CA0C-8555-B0BEF2A80899}"/>
-              </a:ext>
-            </a:extLst>
-          </p:cNvPr>
-          <p:cNvSpPr txBox="1"/>
-          <p:nvPr/>
-        </p:nvSpPr>
-        <p:spPr>
-          <a:xfrm>
-            <a:off x="3403600" y="3759200"/>
-            <a:ext cx="1219200" cy="153888"/>
-          </a:xfrm>
-          <a:prstGeom prst="rect">
-            <a:avLst/>
-          </a:prstGeom>
-          <a:noFill/>
-        </p:spPr>
-        <p:txBody>
-          <a:bodyPr vert="horz" lIns="0" tIns="0" rIns="0" bIns="0" rtlCol="0">
-            <a:spAutoFit/>
-          </a:bodyPr>
-          <a:lstStyle/>
-          <a:p>
-            <a:r>
-              <a:rPr lang="vi-VN" sz="1000">
-                <a:solidFill>
-                  <a:srgbClr val="F1F5F9"/>
-                </a:solidFill>
-                <a:latin typeface="Aptos" panose="020B0004020202020204" pitchFamily="34" charset="0"/>
-              </a:rPr>
-              <a:t>38</a:t>
-            </a:r>
-          </a:p>
-        </p:txBody>
-      </p:sp>
-      <p:sp>
-        <p:nvSpPr>
-          <p:cNvPr id="61" name="Rectangle 60">
-            <a:extLst>
-              <a:ext uri="{FF2B5EF4-FFF2-40B4-BE49-F238E27FC236}">
-                <a16:creationId xmlns:a16="http://schemas.microsoft.com/office/drawing/2014/main" id="{E46AE130-E7EB-E96C-E790-223325A99C88}"/>
-              </a:ext>
-            </a:extLst>
-          </p:cNvPr>
-          <p:cNvSpPr/>
-          <p:nvPr/>
-        </p:nvSpPr>
-        <p:spPr>
-          <a:xfrm>
-            <a:off x="4699000" y="3657600"/>
-            <a:ext cx="1485900" cy="406400"/>
-          </a:xfrm>
-          <a:prstGeom prst="rect">
-            <a:avLst/>
-          </a:prstGeom>
-          <a:solidFill>
-            <a:srgbClr val="1E293B"/>
-          </a:solidFill>
-          <a:ln w="12700">
-            <a:solidFill>
-              <a:srgbClr val="334155"/>
-            </a:solidFill>
-          </a:ln>
-        </p:spPr>
-        <p:style>
-          <a:lnRef idx="2">
-            <a:schemeClr val="accent1">
-              <a:shade val="15000"/>
-            </a:schemeClr>
-          </a:lnRef>
-          <a:fillRef idx="1">
-            <a:schemeClr val="accent1"/>
-          </a:fillRef>
-          <a:effectRef idx="0">
-            <a:schemeClr val="accent1"/>
-          </a:effectRef>
-          <a:fontRef idx="minor">
-            <a:schemeClr val="lt1"/>
-          </a:fontRef>
-        </p:style>
-        <p:txBody>
-          <a:bodyPr rtlCol="0" anchor="ctr"/>
-          <a:lstStyle/>
-          <a:p>
-            <a:pPr algn="ctr"/>
-            <a:endParaRPr lang="vi-VN"/>
-          </a:p>
-        </p:txBody>
-      </p:sp>
-      <p:sp>
-        <p:nvSpPr>
-          <p:cNvPr id="62" name="TextBox 61">
-            <a:extLst>
-              <a:ext uri="{FF2B5EF4-FFF2-40B4-BE49-F238E27FC236}">
-                <a16:creationId xmlns:a16="http://schemas.microsoft.com/office/drawing/2014/main" id="{BE59062C-2BB8-3A2F-D611-A013BA0BA8AA}"/>
-              </a:ext>
-            </a:extLst>
-          </p:cNvPr>
-          <p:cNvSpPr txBox="1"/>
-          <p:nvPr/>
-        </p:nvSpPr>
-        <p:spPr>
-          <a:xfrm>
-            <a:off x="4775200" y="3759200"/>
-            <a:ext cx="1333500" cy="153888"/>
-          </a:xfrm>
-          <a:prstGeom prst="rect">
-            <a:avLst/>
-          </a:prstGeom>
-          <a:noFill/>
-        </p:spPr>
-        <p:txBody>
-          <a:bodyPr vert="horz" lIns="0" tIns="0" rIns="0" bIns="0" rtlCol="0">
-            <a:spAutoFit/>
-          </a:bodyPr>
-          <a:lstStyle/>
-          <a:p>
-            <a:r>
-              <a:rPr lang="vi-VN" sz="1000">
-                <a:solidFill>
-                  <a:srgbClr val="F1F5F9"/>
-                </a:solidFill>
-                <a:latin typeface="Aptos" panose="020B0004020202020204" pitchFamily="34" charset="0"/>
-              </a:rPr>
-              <a:t>3.80</a:t>
-            </a:r>
-          </a:p>
-        </p:txBody>
-      </p:sp>
-      <p:sp>
-        <p:nvSpPr>
-          <p:cNvPr id="63" name="Rectangle 62">
-            <a:extLst>
-              <a:ext uri="{FF2B5EF4-FFF2-40B4-BE49-F238E27FC236}">
-                <a16:creationId xmlns:a16="http://schemas.microsoft.com/office/drawing/2014/main" id="{F0C62939-9AC7-3B40-A560-79D43CBBE854}"/>
-              </a:ext>
-            </a:extLst>
-          </p:cNvPr>
-          <p:cNvSpPr/>
-          <p:nvPr/>
-        </p:nvSpPr>
-        <p:spPr>
-          <a:xfrm>
-            <a:off x="6184900" y="3657600"/>
-            <a:ext cx="1905000" cy="406400"/>
-          </a:xfrm>
-          <a:prstGeom prst="rect">
-            <a:avLst/>
-          </a:prstGeom>
-          <a:solidFill>
-            <a:srgbClr val="1E293B"/>
-          </a:solidFill>
-          <a:ln w="12700">
-            <a:solidFill>
-              <a:srgbClr val="334155"/>
-            </a:solidFill>
-          </a:ln>
-        </p:spPr>
-        <p:style>
-          <a:lnRef idx="2">
-            <a:schemeClr val="accent1">
-              <a:shade val="15000"/>
-            </a:schemeClr>
-          </a:lnRef>
-          <a:fillRef idx="1">
-            <a:schemeClr val="accent1"/>
-          </a:fillRef>
-          <a:effectRef idx="0">
-            <a:schemeClr val="accent1"/>
-          </a:effectRef>
-          <a:fontRef idx="minor">
-            <a:schemeClr val="lt1"/>
-          </a:fontRef>
-        </p:style>
-        <p:txBody>
-          <a:bodyPr rtlCol="0" anchor="ctr"/>
-          <a:lstStyle/>
-          <a:p>
-            <a:pPr algn="ctr"/>
-            <a:endParaRPr lang="vi-VN"/>
-          </a:p>
-        </p:txBody>
-      </p:sp>
-      <p:sp>
-        <p:nvSpPr>
-          <p:cNvPr id="64" name="TextBox 63">
-            <a:extLst>
-              <a:ext uri="{FF2B5EF4-FFF2-40B4-BE49-F238E27FC236}">
-                <a16:creationId xmlns:a16="http://schemas.microsoft.com/office/drawing/2014/main" id="{73CF2B55-FDF5-7430-5538-CDF5D1700922}"/>
-              </a:ext>
-            </a:extLst>
-          </p:cNvPr>
-          <p:cNvSpPr txBox="1"/>
-          <p:nvPr/>
-        </p:nvSpPr>
-        <p:spPr>
-          <a:xfrm>
-            <a:off x="6261100" y="3759200"/>
-            <a:ext cx="1752600" cy="153888"/>
-          </a:xfrm>
-          <a:prstGeom prst="rect">
-            <a:avLst/>
-          </a:prstGeom>
-          <a:noFill/>
-        </p:spPr>
-        <p:txBody>
-          <a:bodyPr vert="horz" lIns="0" tIns="0" rIns="0" bIns="0" rtlCol="0">
-            <a:spAutoFit/>
-          </a:bodyPr>
-          <a:lstStyle/>
-          <a:p>
-            <a:r>
-              <a:rPr lang="vi-VN" sz="1000">
-                <a:solidFill>
-                  <a:srgbClr val="F1F5F9"/>
-                </a:solidFill>
-                <a:latin typeface="Aptos" panose="020B0004020202020204" pitchFamily="34" charset="0"/>
-              </a:rPr>
-              <a:t>9.08ms</a:t>
-            </a:r>
-          </a:p>
-        </p:txBody>
-      </p:sp>
-      <p:sp>
-        <p:nvSpPr>
-          <p:cNvPr id="65" name="Rectangle 64">
-            <a:extLst>
-              <a:ext uri="{FF2B5EF4-FFF2-40B4-BE49-F238E27FC236}">
-                <a16:creationId xmlns:a16="http://schemas.microsoft.com/office/drawing/2014/main" id="{B620F887-DEA0-25BC-29EC-1B001539F0EB}"/>
-              </a:ext>
-            </a:extLst>
-          </p:cNvPr>
-          <p:cNvSpPr/>
-          <p:nvPr/>
-        </p:nvSpPr>
-        <p:spPr>
-          <a:xfrm>
-            <a:off x="8089900" y="3657600"/>
-            <a:ext cx="1485900" cy="406400"/>
-          </a:xfrm>
-          <a:prstGeom prst="rect">
-            <a:avLst/>
-          </a:prstGeom>
-          <a:solidFill>
-            <a:srgbClr val="1E293B"/>
-          </a:solidFill>
-          <a:ln w="12700">
-            <a:solidFill>
-              <a:srgbClr val="334155"/>
-            </a:solidFill>
-          </a:ln>
-        </p:spPr>
-        <p:style>
-          <a:lnRef idx="2">
-            <a:schemeClr val="accent1">
-              <a:shade val="15000"/>
-            </a:schemeClr>
-          </a:lnRef>
-          <a:fillRef idx="1">
-            <a:schemeClr val="accent1"/>
-          </a:fillRef>
-          <a:effectRef idx="0">
-            <a:schemeClr val="accent1"/>
-          </a:effectRef>
-          <a:fontRef idx="minor">
-            <a:schemeClr val="lt1"/>
-          </a:fontRef>
-        </p:style>
-        <p:txBody>
-          <a:bodyPr rtlCol="0" anchor="ctr"/>
-          <a:lstStyle/>
-          <a:p>
-            <a:pPr algn="ctr"/>
-            <a:endParaRPr lang="vi-VN"/>
-          </a:p>
-        </p:txBody>
-      </p:sp>
-      <p:sp>
-        <p:nvSpPr>
-          <p:cNvPr id="66" name="TextBox 65">
-            <a:extLst>
-              <a:ext uri="{FF2B5EF4-FFF2-40B4-BE49-F238E27FC236}">
-                <a16:creationId xmlns:a16="http://schemas.microsoft.com/office/drawing/2014/main" id="{E1695484-3BFD-4725-1C2A-64CFF1E9B2B5}"/>
-              </a:ext>
-            </a:extLst>
-          </p:cNvPr>
-          <p:cNvSpPr txBox="1"/>
-          <p:nvPr/>
-        </p:nvSpPr>
-        <p:spPr>
-          <a:xfrm>
-            <a:off x="8166100" y="3759200"/>
-            <a:ext cx="1333500" cy="153888"/>
-          </a:xfrm>
-          <a:prstGeom prst="rect">
-            <a:avLst/>
-          </a:prstGeom>
-          <a:noFill/>
-        </p:spPr>
-        <p:txBody>
-          <a:bodyPr vert="horz" lIns="0" tIns="0" rIns="0" bIns="0" rtlCol="0">
-            <a:spAutoFit/>
-          </a:bodyPr>
-          <a:lstStyle/>
-          <a:p>
-            <a:r>
-              <a:rPr lang="vi-VN" sz="1000">
-                <a:solidFill>
-                  <a:srgbClr val="F1F5F9"/>
-                </a:solidFill>
-                <a:latin typeface="Aptos" panose="020B0004020202020204" pitchFamily="34" charset="0"/>
-              </a:rPr>
-              <a:t>3.80</a:t>
-            </a:r>
-          </a:p>
-        </p:txBody>
-      </p:sp>
-      <p:sp>
-        <p:nvSpPr>
-          <p:cNvPr id="67" name="Rectangle 66">
-            <a:extLst>
-              <a:ext uri="{FF2B5EF4-FFF2-40B4-BE49-F238E27FC236}">
-                <a16:creationId xmlns:a16="http://schemas.microsoft.com/office/drawing/2014/main" id="{E53026E9-54C0-0900-65AB-9FE62563D170}"/>
-              </a:ext>
-            </a:extLst>
-          </p:cNvPr>
-          <p:cNvSpPr/>
-          <p:nvPr/>
-        </p:nvSpPr>
-        <p:spPr>
-          <a:xfrm>
-            <a:off x="9575800" y="3657600"/>
-            <a:ext cx="1803400" cy="406400"/>
-          </a:xfrm>
-          <a:prstGeom prst="rect">
-            <a:avLst/>
-          </a:prstGeom>
-          <a:solidFill>
-            <a:srgbClr val="1E293B"/>
-          </a:solidFill>
-          <a:ln w="12700">
-            <a:solidFill>
-              <a:srgbClr val="334155"/>
-            </a:solidFill>
-          </a:ln>
-        </p:spPr>
-        <p:style>
-          <a:lnRef idx="2">
-            <a:schemeClr val="accent1">
-              <a:shade val="15000"/>
-            </a:schemeClr>
-          </a:lnRef>
-          <a:fillRef idx="1">
-            <a:schemeClr val="accent1"/>
-          </a:fillRef>
-          <a:effectRef idx="0">
-            <a:schemeClr val="accent1"/>
-          </a:effectRef>
-          <a:fontRef idx="minor">
-            <a:schemeClr val="lt1"/>
-          </a:fontRef>
-        </p:style>
-        <p:txBody>
-          <a:bodyPr rtlCol="0" anchor="ctr"/>
-          <a:lstStyle/>
-          <a:p>
-            <a:pPr algn="ctr"/>
-            <a:endParaRPr lang="vi-VN"/>
-          </a:p>
-        </p:txBody>
-      </p:sp>
-      <p:sp>
-        <p:nvSpPr>
-          <p:cNvPr id="68" name="TextBox 67">
-            <a:extLst>
-              <a:ext uri="{FF2B5EF4-FFF2-40B4-BE49-F238E27FC236}">
-                <a16:creationId xmlns:a16="http://schemas.microsoft.com/office/drawing/2014/main" id="{38EA182F-936D-D0A6-F28A-055C3A269227}"/>
-              </a:ext>
-            </a:extLst>
-          </p:cNvPr>
-          <p:cNvSpPr txBox="1"/>
-          <p:nvPr/>
-        </p:nvSpPr>
-        <p:spPr>
-          <a:xfrm>
-            <a:off x="9652000" y="3759200"/>
-            <a:ext cx="1651000" cy="153888"/>
-          </a:xfrm>
-          <a:prstGeom prst="rect">
-            <a:avLst/>
-          </a:prstGeom>
-          <a:noFill/>
-        </p:spPr>
-        <p:txBody>
-          <a:bodyPr vert="horz" lIns="0" tIns="0" rIns="0" bIns="0" rtlCol="0">
-            <a:spAutoFit/>
-          </a:bodyPr>
-          <a:lstStyle/>
-          <a:p>
-            <a:r>
-              <a:rPr lang="vi-VN" sz="1000">
-                <a:solidFill>
-                  <a:srgbClr val="F1F5F9"/>
-                </a:solidFill>
-                <a:latin typeface="Aptos" panose="020B0004020202020204" pitchFamily="34" charset="0"/>
-              </a:rPr>
-              <a:t>1.89ms</a:t>
-            </a:r>
-          </a:p>
-        </p:txBody>
-      </p:sp>
-      <p:sp>
-        <p:nvSpPr>
-          <p:cNvPr id="69" name="Rectangle 68">
-            <a:extLst>
-              <a:ext uri="{FF2B5EF4-FFF2-40B4-BE49-F238E27FC236}">
-                <a16:creationId xmlns:a16="http://schemas.microsoft.com/office/drawing/2014/main" id="{D933B928-0402-8686-43BE-5A4F007F2A46}"/>
-              </a:ext>
-            </a:extLst>
-          </p:cNvPr>
-          <p:cNvSpPr/>
-          <p:nvPr/>
-        </p:nvSpPr>
-        <p:spPr>
-          <a:xfrm>
-            <a:off x="787400" y="4064000"/>
-            <a:ext cx="2540000" cy="406400"/>
-          </a:xfrm>
-          <a:prstGeom prst="rect">
-            <a:avLst/>
-          </a:prstGeom>
-          <a:solidFill>
-            <a:srgbClr val="1E293B"/>
-          </a:solidFill>
-          <a:ln w="12700">
-            <a:solidFill>
-              <a:srgbClr val="334155"/>
-            </a:solidFill>
-          </a:ln>
-        </p:spPr>
-        <p:style>
-          <a:lnRef idx="2">
-            <a:schemeClr val="accent1">
-              <a:shade val="15000"/>
-            </a:schemeClr>
-          </a:lnRef>
-          <a:fillRef idx="1">
-            <a:schemeClr val="accent1"/>
-          </a:fillRef>
-          <a:effectRef idx="0">
-            <a:schemeClr val="accent1"/>
-          </a:effectRef>
-          <a:fontRef idx="minor">
-            <a:schemeClr val="lt1"/>
-          </a:fontRef>
-        </p:style>
-        <p:txBody>
-          <a:bodyPr rtlCol="0" anchor="ctr"/>
-          <a:lstStyle/>
-          <a:p>
-            <a:pPr algn="ctr"/>
-            <a:endParaRPr lang="vi-VN"/>
-          </a:p>
-        </p:txBody>
-      </p:sp>
-      <p:sp>
-        <p:nvSpPr>
-          <p:cNvPr id="70" name="TextBox 69">
-            <a:extLst>
-              <a:ext uri="{FF2B5EF4-FFF2-40B4-BE49-F238E27FC236}">
-                <a16:creationId xmlns:a16="http://schemas.microsoft.com/office/drawing/2014/main" id="{B4A1C39D-8E4D-1EA6-5850-D3B5960337E0}"/>
-              </a:ext>
-            </a:extLst>
-          </p:cNvPr>
-          <p:cNvSpPr txBox="1"/>
-          <p:nvPr/>
-        </p:nvSpPr>
-        <p:spPr>
-          <a:xfrm>
-            <a:off x="863600" y="4165600"/>
-            <a:ext cx="2387600" cy="153888"/>
-          </a:xfrm>
-          <a:prstGeom prst="rect">
-            <a:avLst/>
-          </a:prstGeom>
-          <a:noFill/>
-        </p:spPr>
-        <p:txBody>
-          <a:bodyPr vert="horz" lIns="0" tIns="0" rIns="0" bIns="0" rtlCol="0">
-            <a:spAutoFit/>
-          </a:bodyPr>
-          <a:lstStyle/>
-          <a:p>
-            <a:r>
-              <a:rPr lang="vi-VN" sz="1000">
-                <a:solidFill>
-                  <a:srgbClr val="F1F5F9"/>
-                </a:solidFill>
-                <a:latin typeface="Aptos" panose="020B0004020202020204" pitchFamily="34" charset="0"/>
-              </a:rPr>
-              <a:t>20:16:30-20:16:40</a:t>
-            </a:r>
-          </a:p>
-        </p:txBody>
-      </p:sp>
-      <p:sp>
-        <p:nvSpPr>
-          <p:cNvPr id="71" name="Rectangle 70">
-            <a:extLst>
-              <a:ext uri="{FF2B5EF4-FFF2-40B4-BE49-F238E27FC236}">
-                <a16:creationId xmlns:a16="http://schemas.microsoft.com/office/drawing/2014/main" id="{ED738366-F8D6-F4A6-0840-98D15FB3105D}"/>
-              </a:ext>
-            </a:extLst>
-          </p:cNvPr>
-          <p:cNvSpPr/>
-          <p:nvPr/>
-        </p:nvSpPr>
-        <p:spPr>
-          <a:xfrm>
-            <a:off x="3327400" y="4064000"/>
-            <a:ext cx="1371600" cy="406400"/>
-          </a:xfrm>
-          <a:prstGeom prst="rect">
-            <a:avLst/>
-          </a:prstGeom>
-          <a:solidFill>
-            <a:srgbClr val="1E293B"/>
-          </a:solidFill>
-          <a:ln w="12700">
-            <a:solidFill>
-              <a:srgbClr val="334155"/>
-            </a:solidFill>
-          </a:ln>
-        </p:spPr>
-        <p:style>
-          <a:lnRef idx="2">
-            <a:schemeClr val="accent1">
-              <a:shade val="15000"/>
-            </a:schemeClr>
-          </a:lnRef>
-          <a:fillRef idx="1">
-            <a:schemeClr val="accent1"/>
-          </a:fillRef>
-          <a:effectRef idx="0">
-            <a:schemeClr val="accent1"/>
-          </a:effectRef>
-          <a:fontRef idx="minor">
-            <a:schemeClr val="lt1"/>
-          </a:fontRef>
-        </p:style>
-        <p:txBody>
-          <a:bodyPr rtlCol="0" anchor="ctr"/>
-          <a:lstStyle/>
-          <a:p>
-            <a:pPr algn="ctr"/>
-            <a:endParaRPr lang="vi-VN"/>
-          </a:p>
-        </p:txBody>
-      </p:sp>
-      <p:sp>
-        <p:nvSpPr>
-          <p:cNvPr id="72" name="TextBox 71">
-            <a:extLst>
-              <a:ext uri="{FF2B5EF4-FFF2-40B4-BE49-F238E27FC236}">
-                <a16:creationId xmlns:a16="http://schemas.microsoft.com/office/drawing/2014/main" id="{B5BCBEEF-889F-B39E-8F11-E0432153EED4}"/>
-              </a:ext>
-            </a:extLst>
-          </p:cNvPr>
-          <p:cNvSpPr txBox="1"/>
-          <p:nvPr/>
-        </p:nvSpPr>
-        <p:spPr>
-          <a:xfrm>
-            <a:off x="3403600" y="4165600"/>
-            <a:ext cx="1219200" cy="153888"/>
-          </a:xfrm>
-          <a:prstGeom prst="rect">
-            <a:avLst/>
-          </a:prstGeom>
-          <a:noFill/>
-        </p:spPr>
-        <p:txBody>
-          <a:bodyPr vert="horz" lIns="0" tIns="0" rIns="0" bIns="0" rtlCol="0">
-            <a:spAutoFit/>
-          </a:bodyPr>
-          <a:lstStyle/>
-          <a:p>
-            <a:r>
-              <a:rPr lang="vi-VN" sz="1000">
-                <a:solidFill>
-                  <a:srgbClr val="F1F5F9"/>
-                </a:solidFill>
-                <a:latin typeface="Aptos" panose="020B0004020202020204" pitchFamily="34" charset="0"/>
-              </a:rPr>
-              <a:t>28</a:t>
-            </a:r>
-          </a:p>
-        </p:txBody>
-      </p:sp>
-      <p:sp>
-        <p:nvSpPr>
-          <p:cNvPr id="73" name="Rectangle 72">
-            <a:extLst>
-              <a:ext uri="{FF2B5EF4-FFF2-40B4-BE49-F238E27FC236}">
-                <a16:creationId xmlns:a16="http://schemas.microsoft.com/office/drawing/2014/main" id="{E4423BC4-F0B8-9279-B2F5-E599900231A2}"/>
-              </a:ext>
-            </a:extLst>
-          </p:cNvPr>
-          <p:cNvSpPr/>
-          <p:nvPr/>
-        </p:nvSpPr>
-        <p:spPr>
-          <a:xfrm>
-            <a:off x="4699000" y="4064000"/>
-            <a:ext cx="1485900" cy="406400"/>
-          </a:xfrm>
-          <a:prstGeom prst="rect">
-            <a:avLst/>
-          </a:prstGeom>
-          <a:solidFill>
-            <a:srgbClr val="1E293B"/>
-          </a:solidFill>
-          <a:ln w="12700">
-            <a:solidFill>
-              <a:srgbClr val="334155"/>
-            </a:solidFill>
-          </a:ln>
-        </p:spPr>
-        <p:style>
-          <a:lnRef idx="2">
-            <a:schemeClr val="accent1">
-              <a:shade val="15000"/>
-            </a:schemeClr>
-          </a:lnRef>
-          <a:fillRef idx="1">
-            <a:schemeClr val="accent1"/>
-          </a:fillRef>
-          <a:effectRef idx="0">
-            <a:schemeClr val="accent1"/>
-          </a:effectRef>
-          <a:fontRef idx="minor">
-            <a:schemeClr val="lt1"/>
-          </a:fontRef>
-        </p:style>
-        <p:txBody>
-          <a:bodyPr rtlCol="0" anchor="ctr"/>
-          <a:lstStyle/>
-          <a:p>
-            <a:pPr algn="ctr"/>
-            <a:endParaRPr lang="vi-VN"/>
-          </a:p>
-        </p:txBody>
-      </p:sp>
-      <p:sp>
-        <p:nvSpPr>
-          <p:cNvPr id="74" name="TextBox 73">
-            <a:extLst>
-              <a:ext uri="{FF2B5EF4-FFF2-40B4-BE49-F238E27FC236}">
-                <a16:creationId xmlns:a16="http://schemas.microsoft.com/office/drawing/2014/main" id="{F527CE53-88E0-7CB4-C1ED-C486F3C6572B}"/>
-              </a:ext>
-            </a:extLst>
-          </p:cNvPr>
-          <p:cNvSpPr txBox="1"/>
-          <p:nvPr/>
-        </p:nvSpPr>
-        <p:spPr>
-          <a:xfrm>
-            <a:off x="4775200" y="4165600"/>
-            <a:ext cx="1333500" cy="153888"/>
-          </a:xfrm>
-          <a:prstGeom prst="rect">
-            <a:avLst/>
-          </a:prstGeom>
-          <a:noFill/>
-        </p:spPr>
-        <p:txBody>
-          <a:bodyPr vert="horz" lIns="0" tIns="0" rIns="0" bIns="0" rtlCol="0">
-            <a:spAutoFit/>
-          </a:bodyPr>
-          <a:lstStyle/>
-          <a:p>
-            <a:r>
-              <a:rPr lang="vi-VN" sz="1000">
-                <a:solidFill>
-                  <a:srgbClr val="F1F5F9"/>
-                </a:solidFill>
-                <a:latin typeface="Aptos" panose="020B0004020202020204" pitchFamily="34" charset="0"/>
-              </a:rPr>
-              <a:t>2.80</a:t>
-            </a:r>
-          </a:p>
-        </p:txBody>
-      </p:sp>
-      <p:sp>
-        <p:nvSpPr>
-          <p:cNvPr id="75" name="Rectangle 74">
-            <a:extLst>
-              <a:ext uri="{FF2B5EF4-FFF2-40B4-BE49-F238E27FC236}">
-                <a16:creationId xmlns:a16="http://schemas.microsoft.com/office/drawing/2014/main" id="{94D8F0C9-7B64-D262-60B4-5348892621CA}"/>
-              </a:ext>
-            </a:extLst>
-          </p:cNvPr>
-          <p:cNvSpPr/>
-          <p:nvPr/>
-        </p:nvSpPr>
-        <p:spPr>
-          <a:xfrm>
-            <a:off x="6184900" y="4064000"/>
-            <a:ext cx="1905000" cy="406400"/>
-          </a:xfrm>
-          <a:prstGeom prst="rect">
-            <a:avLst/>
-          </a:prstGeom>
-          <a:solidFill>
-            <a:srgbClr val="1E293B"/>
-          </a:solidFill>
-          <a:ln w="12700">
-            <a:solidFill>
-              <a:srgbClr val="334155"/>
-            </a:solidFill>
-          </a:ln>
-        </p:spPr>
-        <p:style>
-          <a:lnRef idx="2">
-            <a:schemeClr val="accent1">
-              <a:shade val="15000"/>
-            </a:schemeClr>
-          </a:lnRef>
-          <a:fillRef idx="1">
-            <a:schemeClr val="accent1"/>
-          </a:fillRef>
-          <a:effectRef idx="0">
-            <a:schemeClr val="accent1"/>
-          </a:effectRef>
-          <a:fontRef idx="minor">
-            <a:schemeClr val="lt1"/>
-          </a:fontRef>
-        </p:style>
-        <p:txBody>
-          <a:bodyPr rtlCol="0" anchor="ctr"/>
-          <a:lstStyle/>
-          <a:p>
-            <a:pPr algn="ctr"/>
-            <a:endParaRPr lang="vi-VN"/>
-          </a:p>
-        </p:txBody>
-      </p:sp>
-      <p:sp>
-        <p:nvSpPr>
-          <p:cNvPr id="76" name="TextBox 75">
-            <a:extLst>
-              <a:ext uri="{FF2B5EF4-FFF2-40B4-BE49-F238E27FC236}">
-                <a16:creationId xmlns:a16="http://schemas.microsoft.com/office/drawing/2014/main" id="{D240BE62-20D1-0013-9ED0-A8FBA60DB737}"/>
-              </a:ext>
-            </a:extLst>
-          </p:cNvPr>
-          <p:cNvSpPr txBox="1"/>
-          <p:nvPr/>
-        </p:nvSpPr>
-        <p:spPr>
-          <a:xfrm>
-            <a:off x="6261100" y="4165600"/>
-            <a:ext cx="1752600" cy="153888"/>
-          </a:xfrm>
-          <a:prstGeom prst="rect">
-            <a:avLst/>
-          </a:prstGeom>
-          <a:noFill/>
-        </p:spPr>
-        <p:txBody>
-          <a:bodyPr vert="horz" lIns="0" tIns="0" rIns="0" bIns="0" rtlCol="0">
-            <a:spAutoFit/>
-          </a:bodyPr>
-          <a:lstStyle/>
-          <a:p>
-            <a:r>
-              <a:rPr lang="vi-VN" sz="1000">
-                <a:solidFill>
-                  <a:srgbClr val="F1F5F9"/>
-                </a:solidFill>
-                <a:latin typeface="Aptos" panose="020B0004020202020204" pitchFamily="34" charset="0"/>
-              </a:rPr>
-              <a:t>9.39ms</a:t>
-            </a:r>
-          </a:p>
-        </p:txBody>
-      </p:sp>
-      <p:sp>
-        <p:nvSpPr>
-          <p:cNvPr id="77" name="Rectangle 76">
-            <a:extLst>
-              <a:ext uri="{FF2B5EF4-FFF2-40B4-BE49-F238E27FC236}">
-                <a16:creationId xmlns:a16="http://schemas.microsoft.com/office/drawing/2014/main" id="{4C6E84EF-C17B-9162-6D61-7745423A5056}"/>
-              </a:ext>
-            </a:extLst>
-          </p:cNvPr>
-          <p:cNvSpPr/>
-          <p:nvPr/>
-        </p:nvSpPr>
-        <p:spPr>
-          <a:xfrm>
-            <a:off x="8089900" y="4064000"/>
-            <a:ext cx="1485900" cy="406400"/>
-          </a:xfrm>
-          <a:prstGeom prst="rect">
-            <a:avLst/>
-          </a:prstGeom>
-          <a:solidFill>
-            <a:srgbClr val="1E293B"/>
-          </a:solidFill>
-          <a:ln w="12700">
-            <a:solidFill>
-              <a:srgbClr val="334155"/>
-            </a:solidFill>
-          </a:ln>
-        </p:spPr>
-        <p:style>
-          <a:lnRef idx="2">
-            <a:schemeClr val="accent1">
-              <a:shade val="15000"/>
-            </a:schemeClr>
-          </a:lnRef>
-          <a:fillRef idx="1">
-            <a:schemeClr val="accent1"/>
-          </a:fillRef>
-          <a:effectRef idx="0">
-            <a:schemeClr val="accent1"/>
-          </a:effectRef>
-          <a:fontRef idx="minor">
-            <a:schemeClr val="lt1"/>
-          </a:fontRef>
-        </p:style>
-        <p:txBody>
-          <a:bodyPr rtlCol="0" anchor="ctr"/>
-          <a:lstStyle/>
-          <a:p>
-            <a:pPr algn="ctr"/>
-            <a:endParaRPr lang="vi-VN"/>
-          </a:p>
-        </p:txBody>
-      </p:sp>
-      <p:sp>
-        <p:nvSpPr>
-          <p:cNvPr id="78" name="TextBox 77">
-            <a:extLst>
-              <a:ext uri="{FF2B5EF4-FFF2-40B4-BE49-F238E27FC236}">
-                <a16:creationId xmlns:a16="http://schemas.microsoft.com/office/drawing/2014/main" id="{3916B0DE-A530-3E95-E549-7271A33640AA}"/>
-              </a:ext>
-            </a:extLst>
-          </p:cNvPr>
-          <p:cNvSpPr txBox="1"/>
-          <p:nvPr/>
-        </p:nvSpPr>
-        <p:spPr>
-          <a:xfrm>
-            <a:off x="8166100" y="4165600"/>
-            <a:ext cx="1333500" cy="153888"/>
-          </a:xfrm>
-          <a:prstGeom prst="rect">
-            <a:avLst/>
-          </a:prstGeom>
-          <a:noFill/>
-        </p:spPr>
-        <p:txBody>
-          <a:bodyPr vert="horz" lIns="0" tIns="0" rIns="0" bIns="0" rtlCol="0">
-            <a:spAutoFit/>
-          </a:bodyPr>
-          <a:lstStyle/>
-          <a:p>
-            <a:r>
-              <a:rPr lang="vi-VN" sz="1000">
-                <a:solidFill>
-                  <a:srgbClr val="F1F5F9"/>
-                </a:solidFill>
-                <a:latin typeface="Aptos" panose="020B0004020202020204" pitchFamily="34" charset="0"/>
-              </a:rPr>
-              <a:t>2.80</a:t>
-            </a:r>
-          </a:p>
-        </p:txBody>
-      </p:sp>
-      <p:sp>
-        <p:nvSpPr>
-          <p:cNvPr id="79" name="Rectangle 78">
-            <a:extLst>
-              <a:ext uri="{FF2B5EF4-FFF2-40B4-BE49-F238E27FC236}">
-                <a16:creationId xmlns:a16="http://schemas.microsoft.com/office/drawing/2014/main" id="{8D26E210-B1EA-C797-A765-0D690327E91D}"/>
-              </a:ext>
-            </a:extLst>
-          </p:cNvPr>
-          <p:cNvSpPr/>
-          <p:nvPr/>
-        </p:nvSpPr>
-        <p:spPr>
-          <a:xfrm>
-            <a:off x="9575800" y="4064000"/>
-            <a:ext cx="1803400" cy="406400"/>
-          </a:xfrm>
-          <a:prstGeom prst="rect">
-            <a:avLst/>
-          </a:prstGeom>
-          <a:solidFill>
-            <a:srgbClr val="1E293B"/>
-          </a:solidFill>
-          <a:ln w="12700">
-            <a:solidFill>
-              <a:srgbClr val="334155"/>
-            </a:solidFill>
-          </a:ln>
-        </p:spPr>
-        <p:style>
-          <a:lnRef idx="2">
-            <a:schemeClr val="accent1">
-              <a:shade val="15000"/>
-            </a:schemeClr>
-          </a:lnRef>
-          <a:fillRef idx="1">
-            <a:schemeClr val="accent1"/>
-          </a:fillRef>
-          <a:effectRef idx="0">
-            <a:schemeClr val="accent1"/>
-          </a:effectRef>
-          <a:fontRef idx="minor">
-            <a:schemeClr val="lt1"/>
-          </a:fontRef>
-        </p:style>
-        <p:txBody>
-          <a:bodyPr rtlCol="0" anchor="ctr"/>
-          <a:lstStyle/>
-          <a:p>
-            <a:pPr algn="ctr"/>
-            <a:endParaRPr lang="vi-VN"/>
-          </a:p>
-        </p:txBody>
-      </p:sp>
-      <p:sp>
-        <p:nvSpPr>
-          <p:cNvPr id="80" name="TextBox 79">
-            <a:extLst>
-              <a:ext uri="{FF2B5EF4-FFF2-40B4-BE49-F238E27FC236}">
-                <a16:creationId xmlns:a16="http://schemas.microsoft.com/office/drawing/2014/main" id="{71A93232-9B4F-6967-547A-262D419A3EF7}"/>
-              </a:ext>
-            </a:extLst>
-          </p:cNvPr>
-          <p:cNvSpPr txBox="1"/>
-          <p:nvPr/>
-        </p:nvSpPr>
-        <p:spPr>
-          <a:xfrm>
-            <a:off x="9652000" y="4165600"/>
-            <a:ext cx="1651000" cy="153888"/>
-          </a:xfrm>
-          <a:prstGeom prst="rect">
-            <a:avLst/>
-          </a:prstGeom>
-          <a:noFill/>
-        </p:spPr>
-        <p:txBody>
-          <a:bodyPr vert="horz" lIns="0" tIns="0" rIns="0" bIns="0" rtlCol="0">
-            <a:spAutoFit/>
-          </a:bodyPr>
-          <a:lstStyle/>
-          <a:p>
-            <a:r>
-              <a:rPr lang="vi-VN" sz="1000">
-                <a:solidFill>
-                  <a:srgbClr val="F1F5F9"/>
-                </a:solidFill>
-                <a:latin typeface="Aptos" panose="020B0004020202020204" pitchFamily="34" charset="0"/>
-              </a:rPr>
-              <a:t>1.34ms</a:t>
+            <a:r>
+              <a:rPr lang="vi-VN" sz="1100">
+                <a:solidFill>
+                  <a:srgbClr val="10B981"/>
+                </a:solidFill>
+                <a:latin typeface="Aptos" panose="020B0004020202020204" pitchFamily="34" charset="0"/>
+              </a:rPr>
+              <a:t>Đề tài #117  ·  Java 21 + Spring Boot + H2 + React + Vite  ·  GVHD: Lê Hà Thanh</a:t>
             </a:r>
           </a:p>
         </p:txBody>
@@ -12468,1052 +8951,7 @@
     </p:spTree>
     <p:extLst>
       <p:ext uri="{BB962C8B-B14F-4D97-AF65-F5344CB8AC3E}">
-        <p14:creationId xmlns:p14="http://schemas.microsoft.com/office/powerpoint/2010/main" val="3845612374"/>
-      </p:ext>
-    </p:extLst>
-  </p:cSld>
-  <p:clrMapOvr>
-    <a:masterClrMapping/>
-  </p:clrMapOvr>
-</p:sld>
-</file>
-
-<file path=ppt/slides/slide17.xml><?xml version="1.0" encoding="utf-8"?>
-<p:sld xmlns:a="http://schemas.openxmlformats.org/drawingml/2006/main" xmlns:r="http://schemas.openxmlformats.org/officeDocument/2006/relationships" xmlns:p="http://schemas.openxmlformats.org/presentationml/2006/main">
-  <p:cSld>
-    <p:spTree>
-      <p:nvGrpSpPr>
-        <p:cNvPr id="1" name=""/>
-        <p:cNvGrpSpPr/>
-        <p:nvPr/>
-      </p:nvGrpSpPr>
-      <p:grpSpPr>
-        <a:xfrm>
-          <a:off x="0" y="0"/>
-          <a:ext cx="0" cy="0"/>
-          <a:chOff x="0" y="0"/>
-          <a:chExt cx="0" cy="0"/>
-        </a:xfrm>
-      </p:grpSpPr>
-      <p:sp>
-        <p:nvSpPr>
-          <p:cNvPr id="2" name="Rectangle 1">
-            <a:extLst>
-              <a:ext uri="{FF2B5EF4-FFF2-40B4-BE49-F238E27FC236}">
-                <a16:creationId xmlns:a16="http://schemas.microsoft.com/office/drawing/2014/main" id="{93D4E9A2-6104-6773-53C7-745D14887412}"/>
-              </a:ext>
-            </a:extLst>
-          </p:cNvPr>
-          <p:cNvSpPr/>
-          <p:nvPr/>
-        </p:nvSpPr>
-        <p:spPr>
-          <a:xfrm>
-            <a:off x="0" y="0"/>
-            <a:ext cx="12192000" cy="6858000"/>
-          </a:xfrm>
-          <a:prstGeom prst="rect">
-            <a:avLst/>
-          </a:prstGeom>
-          <a:solidFill>
-            <a:srgbClr val="0F172A"/>
-          </a:solidFill>
-          <a:ln w="12700" cap="flat" cmpd="sng" algn="ctr">
-            <a:noFill/>
-            <a:prstDash val="solid"/>
-            <a:miter lim="800000"/>
-          </a:ln>
-          <a:effectLst/>
-          <a:extLst>
-            <a:ext uri="{91240B29-F687-4F45-9708-019B960494DF}">
-              <a14:hiddenLine xmlns:a14="http://schemas.microsoft.com/office/drawing/2010/main" w="12700" cap="flat" cmpd="sng" algn="ctr">
-                <a:solidFill>
-                  <a:schemeClr val="accent1">
-                    <a:shade val="15000"/>
-                  </a:schemeClr>
-                </a:solidFill>
-                <a:prstDash val="solid"/>
-                <a:miter lim="800000"/>
-              </a14:hiddenLine>
-            </a:ext>
-          </a:extLst>
-        </p:spPr>
-        <p:style>
-          <a:lnRef idx="2">
-            <a:schemeClr val="accent1">
-              <a:shade val="15000"/>
-            </a:schemeClr>
-          </a:lnRef>
-          <a:fillRef idx="1">
-            <a:schemeClr val="accent1"/>
-          </a:fillRef>
-          <a:effectRef idx="0">
-            <a:schemeClr val="accent1"/>
-          </a:effectRef>
-          <a:fontRef idx="minor">
-            <a:schemeClr val="lt1"/>
-          </a:fontRef>
-        </p:style>
-        <p:txBody>
-          <a:bodyPr rtlCol="0" anchor="ctr"/>
-          <a:lstStyle/>
-          <a:p>
-            <a:pPr algn="ctr"/>
-            <a:endParaRPr lang="vi-VN"/>
-          </a:p>
-        </p:txBody>
-      </p:sp>
-      <p:sp>
-        <p:nvSpPr>
-          <p:cNvPr id="3" name="TextBox 2">
-            <a:extLst>
-              <a:ext uri="{FF2B5EF4-FFF2-40B4-BE49-F238E27FC236}">
-                <a16:creationId xmlns:a16="http://schemas.microsoft.com/office/drawing/2014/main" id="{4D01C286-2A04-14DC-A97D-2E846B0875D7}"/>
-              </a:ext>
-            </a:extLst>
-          </p:cNvPr>
-          <p:cNvSpPr txBox="1"/>
-          <p:nvPr/>
-        </p:nvSpPr>
-        <p:spPr>
-          <a:xfrm>
-            <a:off x="533400" y="330200"/>
-            <a:ext cx="2286000" cy="169277"/>
-          </a:xfrm>
-          <a:prstGeom prst="rect">
-            <a:avLst/>
-          </a:prstGeom>
-          <a:noFill/>
-        </p:spPr>
-        <p:txBody>
-          <a:bodyPr vert="horz" lIns="0" tIns="0" rIns="0" bIns="0" rtlCol="0">
-            <a:spAutoFit/>
-          </a:bodyPr>
-          <a:lstStyle/>
-          <a:p>
-            <a:r>
-              <a:rPr lang="vi-VN" sz="1100" b="1">
-                <a:solidFill>
-                  <a:srgbClr val="10B981"/>
-                </a:solidFill>
-                <a:latin typeface="Aptos" panose="020B0004020202020204" pitchFamily="34" charset="0"/>
-              </a:rPr>
-              <a:t>05 / LIVE DEMO</a:t>
-            </a:r>
-          </a:p>
-        </p:txBody>
-      </p:sp>
-      <p:sp>
-        <p:nvSpPr>
-          <p:cNvPr id="4" name="TextBox 3">
-            <a:extLst>
-              <a:ext uri="{FF2B5EF4-FFF2-40B4-BE49-F238E27FC236}">
-                <a16:creationId xmlns:a16="http://schemas.microsoft.com/office/drawing/2014/main" id="{03B3D4CF-EAB9-4A46-FA1C-DCDBB13D531A}"/>
-              </a:ext>
-            </a:extLst>
-          </p:cNvPr>
-          <p:cNvSpPr txBox="1"/>
-          <p:nvPr/>
-        </p:nvSpPr>
-        <p:spPr>
-          <a:xfrm>
-            <a:off x="533400" y="660400"/>
-            <a:ext cx="9906000" cy="461665"/>
-          </a:xfrm>
-          <a:prstGeom prst="rect">
-            <a:avLst/>
-          </a:prstGeom>
-          <a:noFill/>
-        </p:spPr>
-        <p:txBody>
-          <a:bodyPr vert="horz" lIns="0" tIns="0" rIns="0" bIns="0" rtlCol="0">
-            <a:spAutoFit/>
-          </a:bodyPr>
-          <a:lstStyle/>
-          <a:p>
-            <a:r>
-              <a:rPr lang="vi-VN" sz="3000" b="1">
-                <a:solidFill>
-                  <a:srgbClr val="F1F5F9"/>
-                </a:solidFill>
-                <a:latin typeface="Aptos" panose="020B0004020202020204" pitchFamily="34" charset="0"/>
-              </a:rPr>
-              <a:t>Kịch bản demo trực tiếp hoặc video</a:t>
-            </a:r>
-          </a:p>
-        </p:txBody>
-      </p:sp>
-      <p:sp>
-        <p:nvSpPr>
-          <p:cNvPr id="5" name="TextBox 4">
-            <a:extLst>
-              <a:ext uri="{FF2B5EF4-FFF2-40B4-BE49-F238E27FC236}">
-                <a16:creationId xmlns:a16="http://schemas.microsoft.com/office/drawing/2014/main" id="{3C90BCC5-A6C1-E4C3-D26F-06EEA7B16400}"/>
-              </a:ext>
-            </a:extLst>
-          </p:cNvPr>
-          <p:cNvSpPr txBox="1"/>
-          <p:nvPr/>
-        </p:nvSpPr>
-        <p:spPr>
-          <a:xfrm>
-            <a:off x="558800" y="1270000"/>
-            <a:ext cx="10414000" cy="215444"/>
-          </a:xfrm>
-          <a:prstGeom prst="rect">
-            <a:avLst/>
-          </a:prstGeom>
-          <a:noFill/>
-        </p:spPr>
-        <p:txBody>
-          <a:bodyPr vert="horz" lIns="0" tIns="0" rIns="0" bIns="0" rtlCol="0">
-            <a:spAutoFit/>
-          </a:bodyPr>
-          <a:lstStyle/>
-          <a:p>
-            <a:r>
-              <a:rPr lang="vi-VN" sz="1400">
-                <a:solidFill>
-                  <a:srgbClr val="94A3B8"/>
-                </a:solidFill>
-                <a:latin typeface="Aptos" panose="020B0004020202020204" pitchFamily="34" charset="0"/>
-              </a:rPr>
-              <a:t>Slide này chỉ là checklist thao tác; không cần trình bày dài nếu đã có video/chạy live.</a:t>
-            </a:r>
-          </a:p>
-        </p:txBody>
-      </p:sp>
-      <p:sp>
-        <p:nvSpPr>
-          <p:cNvPr id="6" name="Rectangle 5">
-            <a:extLst>
-              <a:ext uri="{FF2B5EF4-FFF2-40B4-BE49-F238E27FC236}">
-                <a16:creationId xmlns:a16="http://schemas.microsoft.com/office/drawing/2014/main" id="{4B7D7574-1300-C0A5-75B5-3A6BF5418569}"/>
-              </a:ext>
-            </a:extLst>
-          </p:cNvPr>
-          <p:cNvSpPr/>
-          <p:nvPr/>
-        </p:nvSpPr>
-        <p:spPr>
-          <a:xfrm>
-            <a:off x="533400" y="1600200"/>
-            <a:ext cx="11125200" cy="12700"/>
-          </a:xfrm>
-          <a:prstGeom prst="rect">
-            <a:avLst/>
-          </a:prstGeom>
-          <a:solidFill>
-            <a:srgbClr val="334155"/>
-          </a:solidFill>
-          <a:ln w="12700">
-            <a:solidFill>
-              <a:srgbClr val="334155"/>
-            </a:solidFill>
-          </a:ln>
-        </p:spPr>
-        <p:style>
-          <a:lnRef idx="2">
-            <a:schemeClr val="accent1">
-              <a:shade val="15000"/>
-            </a:schemeClr>
-          </a:lnRef>
-          <a:fillRef idx="1">
-            <a:schemeClr val="accent1"/>
-          </a:fillRef>
-          <a:effectRef idx="0">
-            <a:schemeClr val="accent1"/>
-          </a:effectRef>
-          <a:fontRef idx="minor">
-            <a:schemeClr val="lt1"/>
-          </a:fontRef>
-        </p:style>
-        <p:txBody>
-          <a:bodyPr rtlCol="0" anchor="ctr"/>
-          <a:lstStyle/>
-          <a:p>
-            <a:pPr algn="ctr"/>
-            <a:endParaRPr lang="vi-VN"/>
-          </a:p>
-        </p:txBody>
-      </p:sp>
-      <p:sp>
-        <p:nvSpPr>
-          <p:cNvPr id="9" name="TextBox 8">
-            <a:extLst>
-              <a:ext uri="{FF2B5EF4-FFF2-40B4-BE49-F238E27FC236}">
-                <a16:creationId xmlns:a16="http://schemas.microsoft.com/office/drawing/2014/main" id="{8703D2F0-A540-D609-CF1B-DF3B278F9510}"/>
-              </a:ext>
-            </a:extLst>
-          </p:cNvPr>
-          <p:cNvSpPr txBox="1"/>
-          <p:nvPr/>
-        </p:nvSpPr>
-        <p:spPr>
-          <a:xfrm>
-            <a:off x="1143000" y="2006600"/>
-            <a:ext cx="10033000" cy="1661993"/>
-          </a:xfrm>
-          <a:prstGeom prst="rect">
-            <a:avLst/>
-          </a:prstGeom>
-          <a:noFill/>
-        </p:spPr>
-        <p:txBody>
-          <a:bodyPr vert="horz" lIns="0" tIns="0" rIns="0" bIns="0" rtlCol="0">
-            <a:spAutoFit/>
-          </a:bodyPr>
-          <a:lstStyle/>
-          <a:p>
-            <a:r>
-              <a:rPr lang="vi-VN">
-                <a:solidFill>
-                  <a:srgbClr val="F1F5F9"/>
-                </a:solidFill>
-                <a:latin typeface="Aptos" panose="020B0004020202020204" pitchFamily="34" charset="0"/>
-              </a:rPr>
-              <a:t>• 1. Mở http://localhost:8080, xác nhận Gateway và 3 node ACTIVE.
-• 2. Run Compare với 160 events, duplicate 30%, window 10s.
-• 3. Chỉ vào Duplicate Charges 0/50, Duplicates Blocked 50 và WAL / Success 100%.
-• 4. Chạy Retry Sim EOS để chứng minh duplicate cross-node bị reject.
-• 5. Toggle một node FAILED để thấy payment tới node đó bị reject.
-• 6. Bấm Replay WAL để demo recovery endpoint.</a:t>
-            </a:r>
-          </a:p>
-        </p:txBody>
-      </p:sp>
-    </p:spTree>
-    <p:extLst>
-      <p:ext uri="{BB962C8B-B14F-4D97-AF65-F5344CB8AC3E}">
-        <p14:creationId xmlns:p14="http://schemas.microsoft.com/office/powerpoint/2010/main" val="2750481648"/>
-      </p:ext>
-    </p:extLst>
-  </p:cSld>
-  <p:clrMapOvr>
-    <a:masterClrMapping/>
-  </p:clrMapOvr>
-</p:sld>
-</file>
-
-<file path=ppt/slides/slide18.xml><?xml version="1.0" encoding="utf-8"?>
-<p:sld xmlns:a="http://schemas.openxmlformats.org/drawingml/2006/main" xmlns:r="http://schemas.openxmlformats.org/officeDocument/2006/relationships" xmlns:p="http://schemas.openxmlformats.org/presentationml/2006/main">
-  <p:cSld>
-    <p:spTree>
-      <p:nvGrpSpPr>
-        <p:cNvPr id="1" name=""/>
-        <p:cNvGrpSpPr/>
-        <p:nvPr/>
-      </p:nvGrpSpPr>
-      <p:grpSpPr>
-        <a:xfrm>
-          <a:off x="0" y="0"/>
-          <a:ext cx="0" cy="0"/>
-          <a:chOff x="0" y="0"/>
-          <a:chExt cx="0" cy="0"/>
-        </a:xfrm>
-      </p:grpSpPr>
-      <p:sp>
-        <p:nvSpPr>
-          <p:cNvPr id="2" name="Rectangle 1">
-            <a:extLst>
-              <a:ext uri="{FF2B5EF4-FFF2-40B4-BE49-F238E27FC236}">
-                <a16:creationId xmlns:a16="http://schemas.microsoft.com/office/drawing/2014/main" id="{79FE02D8-890F-9265-8225-5665E2F7888C}"/>
-              </a:ext>
-            </a:extLst>
-          </p:cNvPr>
-          <p:cNvSpPr/>
-          <p:nvPr/>
-        </p:nvSpPr>
-        <p:spPr>
-          <a:xfrm>
-            <a:off x="0" y="0"/>
-            <a:ext cx="12192000" cy="6858000"/>
-          </a:xfrm>
-          <a:prstGeom prst="rect">
-            <a:avLst/>
-          </a:prstGeom>
-          <a:solidFill>
-            <a:srgbClr val="0F172A"/>
-          </a:solidFill>
-          <a:ln w="12700" cap="flat" cmpd="sng" algn="ctr">
-            <a:noFill/>
-            <a:prstDash val="solid"/>
-            <a:miter lim="800000"/>
-          </a:ln>
-          <a:effectLst/>
-          <a:extLst>
-            <a:ext uri="{91240B29-F687-4F45-9708-019B960494DF}">
-              <a14:hiddenLine xmlns:a14="http://schemas.microsoft.com/office/drawing/2010/main" w="12700" cap="flat" cmpd="sng" algn="ctr">
-                <a:solidFill>
-                  <a:schemeClr val="accent1">
-                    <a:shade val="15000"/>
-                  </a:schemeClr>
-                </a:solidFill>
-                <a:prstDash val="solid"/>
-                <a:miter lim="800000"/>
-              </a14:hiddenLine>
-            </a:ext>
-          </a:extLst>
-        </p:spPr>
-        <p:style>
-          <a:lnRef idx="2">
-            <a:schemeClr val="accent1">
-              <a:shade val="15000"/>
-            </a:schemeClr>
-          </a:lnRef>
-          <a:fillRef idx="1">
-            <a:schemeClr val="accent1"/>
-          </a:fillRef>
-          <a:effectRef idx="0">
-            <a:schemeClr val="accent1"/>
-          </a:effectRef>
-          <a:fontRef idx="minor">
-            <a:schemeClr val="lt1"/>
-          </a:fontRef>
-        </p:style>
-        <p:txBody>
-          <a:bodyPr rtlCol="0" anchor="ctr"/>
-          <a:lstStyle/>
-          <a:p>
-            <a:pPr algn="ctr"/>
-            <a:endParaRPr lang="vi-VN"/>
-          </a:p>
-        </p:txBody>
-      </p:sp>
-      <p:sp>
-        <p:nvSpPr>
-          <p:cNvPr id="3" name="TextBox 2">
-            <a:extLst>
-              <a:ext uri="{FF2B5EF4-FFF2-40B4-BE49-F238E27FC236}">
-                <a16:creationId xmlns:a16="http://schemas.microsoft.com/office/drawing/2014/main" id="{59D96A52-996B-61A7-0D99-6428B4966B42}"/>
-              </a:ext>
-            </a:extLst>
-          </p:cNvPr>
-          <p:cNvSpPr txBox="1"/>
-          <p:nvPr/>
-        </p:nvSpPr>
-        <p:spPr>
-          <a:xfrm>
-            <a:off x="533400" y="330200"/>
-            <a:ext cx="2286000" cy="169277"/>
-          </a:xfrm>
-          <a:prstGeom prst="rect">
-            <a:avLst/>
-          </a:prstGeom>
-          <a:noFill/>
-        </p:spPr>
-        <p:txBody>
-          <a:bodyPr vert="horz" lIns="0" tIns="0" rIns="0" bIns="0" rtlCol="0">
-            <a:spAutoFit/>
-          </a:bodyPr>
-          <a:lstStyle/>
-          <a:p>
-            <a:r>
-              <a:rPr lang="vi-VN" sz="1100" b="1">
-                <a:solidFill>
-                  <a:srgbClr val="10B981"/>
-                </a:solidFill>
-                <a:latin typeface="Aptos" panose="020B0004020202020204" pitchFamily="34" charset="0"/>
-              </a:rPr>
-              <a:t>06 / CODE MAP</a:t>
-            </a:r>
-          </a:p>
-        </p:txBody>
-      </p:sp>
-      <p:sp>
-        <p:nvSpPr>
-          <p:cNvPr id="4" name="TextBox 3">
-            <a:extLst>
-              <a:ext uri="{FF2B5EF4-FFF2-40B4-BE49-F238E27FC236}">
-                <a16:creationId xmlns:a16="http://schemas.microsoft.com/office/drawing/2014/main" id="{80A6246F-FA35-BF9A-BBA6-CA44D138EA47}"/>
-              </a:ext>
-            </a:extLst>
-          </p:cNvPr>
-          <p:cNvSpPr txBox="1"/>
-          <p:nvPr/>
-        </p:nvSpPr>
-        <p:spPr>
-          <a:xfrm>
-            <a:off x="533400" y="660400"/>
-            <a:ext cx="9906000" cy="461665"/>
-          </a:xfrm>
-          <a:prstGeom prst="rect">
-            <a:avLst/>
-          </a:prstGeom>
-          <a:noFill/>
-        </p:spPr>
-        <p:txBody>
-          <a:bodyPr vert="horz" lIns="0" tIns="0" rIns="0" bIns="0" rtlCol="0">
-            <a:spAutoFit/>
-          </a:bodyPr>
-          <a:lstStyle/>
-          <a:p>
-            <a:r>
-              <a:rPr lang="vi-VN" sz="3000" b="1">
-                <a:solidFill>
-                  <a:srgbClr val="F1F5F9"/>
-                </a:solidFill>
-                <a:latin typeface="Aptos" panose="020B0004020202020204" pitchFamily="34" charset="0"/>
-              </a:rPr>
-              <a:t>Mapping slide với mã nguồn</a:t>
-            </a:r>
-          </a:p>
-        </p:txBody>
-      </p:sp>
-      <p:sp>
-        <p:nvSpPr>
-          <p:cNvPr id="5" name="TextBox 4">
-            <a:extLst>
-              <a:ext uri="{FF2B5EF4-FFF2-40B4-BE49-F238E27FC236}">
-                <a16:creationId xmlns:a16="http://schemas.microsoft.com/office/drawing/2014/main" id="{37CF6F09-4DB8-3D76-D9E6-9F2E24168909}"/>
-              </a:ext>
-            </a:extLst>
-          </p:cNvPr>
-          <p:cNvSpPr txBox="1"/>
-          <p:nvPr/>
-        </p:nvSpPr>
-        <p:spPr>
-          <a:xfrm>
-            <a:off x="558800" y="1270000"/>
-            <a:ext cx="10414000" cy="215444"/>
-          </a:xfrm>
-          <a:prstGeom prst="rect">
-            <a:avLst/>
-          </a:prstGeom>
-          <a:noFill/>
-        </p:spPr>
-        <p:txBody>
-          <a:bodyPr vert="horz" lIns="0" tIns="0" rIns="0" bIns="0" rtlCol="0">
-            <a:spAutoFit/>
-          </a:bodyPr>
-          <a:lstStyle/>
-          <a:p>
-            <a:r>
-              <a:rPr lang="vi-VN" sz="1400">
-                <a:solidFill>
-                  <a:srgbClr val="94A3B8"/>
-                </a:solidFill>
-                <a:latin typeface="Aptos" panose="020B0004020202020204" pitchFamily="34" charset="0"/>
-              </a:rPr>
-              <a:t>Các file chính để hội đồng kiểm tra nhanh.</a:t>
-            </a:r>
-          </a:p>
-        </p:txBody>
-      </p:sp>
-      <p:sp>
-        <p:nvSpPr>
-          <p:cNvPr id="6" name="Rectangle 5">
-            <a:extLst>
-              <a:ext uri="{FF2B5EF4-FFF2-40B4-BE49-F238E27FC236}">
-                <a16:creationId xmlns:a16="http://schemas.microsoft.com/office/drawing/2014/main" id="{EBCA9B68-213B-08E7-ECB7-405D626FF376}"/>
-              </a:ext>
-            </a:extLst>
-          </p:cNvPr>
-          <p:cNvSpPr/>
-          <p:nvPr/>
-        </p:nvSpPr>
-        <p:spPr>
-          <a:xfrm>
-            <a:off x="533400" y="1600200"/>
-            <a:ext cx="11125200" cy="12700"/>
-          </a:xfrm>
-          <a:prstGeom prst="rect">
-            <a:avLst/>
-          </a:prstGeom>
-          <a:solidFill>
-            <a:srgbClr val="334155"/>
-          </a:solidFill>
-          <a:ln w="12700">
-            <a:solidFill>
-              <a:srgbClr val="334155"/>
-            </a:solidFill>
-          </a:ln>
-        </p:spPr>
-        <p:style>
-          <a:lnRef idx="2">
-            <a:schemeClr val="accent1">
-              <a:shade val="15000"/>
-            </a:schemeClr>
-          </a:lnRef>
-          <a:fillRef idx="1">
-            <a:schemeClr val="accent1"/>
-          </a:fillRef>
-          <a:effectRef idx="0">
-            <a:schemeClr val="accent1"/>
-          </a:effectRef>
-          <a:fontRef idx="minor">
-            <a:schemeClr val="lt1"/>
-          </a:fontRef>
-        </p:style>
-        <p:txBody>
-          <a:bodyPr rtlCol="0" anchor="ctr"/>
-          <a:lstStyle/>
-          <a:p>
-            <a:pPr algn="ctr"/>
-            <a:endParaRPr lang="vi-VN"/>
-          </a:p>
-        </p:txBody>
-      </p:sp>
-      <p:sp>
-        <p:nvSpPr>
-          <p:cNvPr id="9" name="TextBox 8">
-            <a:extLst>
-              <a:ext uri="{FF2B5EF4-FFF2-40B4-BE49-F238E27FC236}">
-                <a16:creationId xmlns:a16="http://schemas.microsoft.com/office/drawing/2014/main" id="{F8CB59C6-CA64-29E9-1C84-187C2CE1CB8E}"/>
-              </a:ext>
-            </a:extLst>
-          </p:cNvPr>
-          <p:cNvSpPr txBox="1"/>
-          <p:nvPr/>
-        </p:nvSpPr>
-        <p:spPr>
-          <a:xfrm>
-            <a:off x="990600" y="2006600"/>
-            <a:ext cx="10160000" cy="1569660"/>
-          </a:xfrm>
-          <a:prstGeom prst="rect">
-            <a:avLst/>
-          </a:prstGeom>
-          <a:noFill/>
-        </p:spPr>
-        <p:txBody>
-          <a:bodyPr vert="horz" lIns="0" tIns="0" rIns="0" bIns="0" rtlCol="0">
-            <a:spAutoFit/>
-          </a:bodyPr>
-          <a:lstStyle/>
-          <a:p>
-            <a:r>
-              <a:rPr lang="vi-VN" sz="1700">
-                <a:solidFill>
-                  <a:srgbClr val="F1F5F9"/>
-                </a:solidFill>
-                <a:latin typeface="Aptos" panose="020B0004020202020204" pitchFamily="34" charset="0"/>
-              </a:rPr>
-              <a:t>• GatewayPaymentService.java: route node, aggregate stats, benchmark distributed.
-• PaymentStreamService.java: EOS/ALO processing, WAL, event-time benchmark.
-• GlobalDeduplicationStore.java: atomic claim global idempotency key.
-• BenchmarkPanel.jsx + StatsGrid.jsx: dashboard metrics.
-• PaymentStreamServiceTests.java: test duplicate, race condition, node failure, benchmark.
-• application-node-a/b/c.yml + application-gateway.yml: multi-process config.</a:t>
-            </a:r>
-          </a:p>
-        </p:txBody>
-      </p:sp>
-    </p:spTree>
-    <p:extLst>
-      <p:ext uri="{BB962C8B-B14F-4D97-AF65-F5344CB8AC3E}">
-        <p14:creationId xmlns:p14="http://schemas.microsoft.com/office/powerpoint/2010/main" val="3370941235"/>
-      </p:ext>
-    </p:extLst>
-  </p:cSld>
-  <p:clrMapOvr>
-    <a:masterClrMapping/>
-  </p:clrMapOvr>
-</p:sld>
-</file>
-
-<file path=ppt/slides/slide19.xml><?xml version="1.0" encoding="utf-8"?>
-<p:sld xmlns:a="http://schemas.openxmlformats.org/drawingml/2006/main" xmlns:r="http://schemas.openxmlformats.org/officeDocument/2006/relationships" xmlns:p="http://schemas.openxmlformats.org/presentationml/2006/main">
-  <p:cSld>
-    <p:spTree>
-      <p:nvGrpSpPr>
-        <p:cNvPr id="1" name=""/>
-        <p:cNvGrpSpPr/>
-        <p:nvPr/>
-      </p:nvGrpSpPr>
-      <p:grpSpPr>
-        <a:xfrm>
-          <a:off x="0" y="0"/>
-          <a:ext cx="0" cy="0"/>
-          <a:chOff x="0" y="0"/>
-          <a:chExt cx="0" cy="0"/>
-        </a:xfrm>
-      </p:grpSpPr>
-      <p:sp>
-        <p:nvSpPr>
-          <p:cNvPr id="2" name="Rectangle 1">
-            <a:extLst>
-              <a:ext uri="{FF2B5EF4-FFF2-40B4-BE49-F238E27FC236}">
-                <a16:creationId xmlns:a16="http://schemas.microsoft.com/office/drawing/2014/main" id="{2C9E50D7-B87E-808B-65A7-EE68DC2CC635}"/>
-              </a:ext>
-            </a:extLst>
-          </p:cNvPr>
-          <p:cNvSpPr/>
-          <p:nvPr/>
-        </p:nvSpPr>
-        <p:spPr>
-          <a:xfrm>
-            <a:off x="0" y="0"/>
-            <a:ext cx="12192000" cy="6858000"/>
-          </a:xfrm>
-          <a:prstGeom prst="rect">
-            <a:avLst/>
-          </a:prstGeom>
-          <a:solidFill>
-            <a:srgbClr val="0F172A"/>
-          </a:solidFill>
-          <a:ln w="12700" cap="flat" cmpd="sng" algn="ctr">
-            <a:noFill/>
-            <a:prstDash val="solid"/>
-            <a:miter lim="800000"/>
-          </a:ln>
-          <a:effectLst/>
-          <a:extLst>
-            <a:ext uri="{91240B29-F687-4F45-9708-019B960494DF}">
-              <a14:hiddenLine xmlns:a14="http://schemas.microsoft.com/office/drawing/2010/main" w="12700" cap="flat" cmpd="sng" algn="ctr">
-                <a:solidFill>
-                  <a:schemeClr val="accent1">
-                    <a:shade val="15000"/>
-                  </a:schemeClr>
-                </a:solidFill>
-                <a:prstDash val="solid"/>
-                <a:miter lim="800000"/>
-              </a14:hiddenLine>
-            </a:ext>
-          </a:extLst>
-        </p:spPr>
-        <p:style>
-          <a:lnRef idx="2">
-            <a:schemeClr val="accent1">
-              <a:shade val="15000"/>
-            </a:schemeClr>
-          </a:lnRef>
-          <a:fillRef idx="1">
-            <a:schemeClr val="accent1"/>
-          </a:fillRef>
-          <a:effectRef idx="0">
-            <a:schemeClr val="accent1"/>
-          </a:effectRef>
-          <a:fontRef idx="minor">
-            <a:schemeClr val="lt1"/>
-          </a:fontRef>
-        </p:style>
-        <p:txBody>
-          <a:bodyPr rtlCol="0" anchor="ctr"/>
-          <a:lstStyle/>
-          <a:p>
-            <a:pPr algn="ctr"/>
-            <a:endParaRPr lang="vi-VN"/>
-          </a:p>
-        </p:txBody>
-      </p:sp>
-      <p:sp>
-        <p:nvSpPr>
-          <p:cNvPr id="3" name="TextBox 2">
-            <a:extLst>
-              <a:ext uri="{FF2B5EF4-FFF2-40B4-BE49-F238E27FC236}">
-                <a16:creationId xmlns:a16="http://schemas.microsoft.com/office/drawing/2014/main" id="{322FA511-4D8D-799F-E4FE-94B4919A2E06}"/>
-              </a:ext>
-            </a:extLst>
-          </p:cNvPr>
-          <p:cNvSpPr txBox="1"/>
-          <p:nvPr/>
-        </p:nvSpPr>
-        <p:spPr>
-          <a:xfrm>
-            <a:off x="533400" y="330200"/>
-            <a:ext cx="2286000" cy="169277"/>
-          </a:xfrm>
-          <a:prstGeom prst="rect">
-            <a:avLst/>
-          </a:prstGeom>
-          <a:noFill/>
-        </p:spPr>
-        <p:txBody>
-          <a:bodyPr vert="horz" lIns="0" tIns="0" rIns="0" bIns="0" rtlCol="0">
-            <a:spAutoFit/>
-          </a:bodyPr>
-          <a:lstStyle/>
-          <a:p>
-            <a:r>
-              <a:rPr lang="vi-VN" sz="1100" b="1">
-                <a:solidFill>
-                  <a:srgbClr val="10B981"/>
-                </a:solidFill>
-                <a:latin typeface="Aptos" panose="020B0004020202020204" pitchFamily="34" charset="0"/>
-              </a:rPr>
-              <a:t>06 / LIMITS</a:t>
-            </a:r>
-          </a:p>
-        </p:txBody>
-      </p:sp>
-      <p:sp>
-        <p:nvSpPr>
-          <p:cNvPr id="4" name="TextBox 3">
-            <a:extLst>
-              <a:ext uri="{FF2B5EF4-FFF2-40B4-BE49-F238E27FC236}">
-                <a16:creationId xmlns:a16="http://schemas.microsoft.com/office/drawing/2014/main" id="{89C3A201-7587-5072-98F1-8A24A12DCD3C}"/>
-              </a:ext>
-            </a:extLst>
-          </p:cNvPr>
-          <p:cNvSpPr txBox="1"/>
-          <p:nvPr/>
-        </p:nvSpPr>
-        <p:spPr>
-          <a:xfrm>
-            <a:off x="533400" y="660400"/>
-            <a:ext cx="9906000" cy="461665"/>
-          </a:xfrm>
-          <a:prstGeom prst="rect">
-            <a:avLst/>
-          </a:prstGeom>
-          <a:noFill/>
-        </p:spPr>
-        <p:txBody>
-          <a:bodyPr vert="horz" lIns="0" tIns="0" rIns="0" bIns="0" rtlCol="0">
-            <a:spAutoFit/>
-          </a:bodyPr>
-          <a:lstStyle/>
-          <a:p>
-            <a:r>
-              <a:rPr lang="vi-VN" sz="3000" b="1">
-                <a:solidFill>
-                  <a:srgbClr val="F1F5F9"/>
-                </a:solidFill>
-                <a:latin typeface="Aptos" panose="020B0004020202020204" pitchFamily="34" charset="0"/>
-              </a:rPr>
-              <a:t>Hạn chế hiện tại</a:t>
-            </a:r>
-          </a:p>
-        </p:txBody>
-      </p:sp>
-      <p:sp>
-        <p:nvSpPr>
-          <p:cNvPr id="5" name="TextBox 4">
-            <a:extLst>
-              <a:ext uri="{FF2B5EF4-FFF2-40B4-BE49-F238E27FC236}">
-                <a16:creationId xmlns:a16="http://schemas.microsoft.com/office/drawing/2014/main" id="{70F3EE82-70DE-57F9-3D0D-6B56B43E16BA}"/>
-              </a:ext>
-            </a:extLst>
-          </p:cNvPr>
-          <p:cNvSpPr txBox="1"/>
-          <p:nvPr/>
-        </p:nvSpPr>
-        <p:spPr>
-          <a:xfrm>
-            <a:off x="558800" y="1270000"/>
-            <a:ext cx="10414000" cy="215444"/>
-          </a:xfrm>
-          <a:prstGeom prst="rect">
-            <a:avLst/>
-          </a:prstGeom>
-          <a:noFill/>
-        </p:spPr>
-        <p:txBody>
-          <a:bodyPr vert="horz" lIns="0" tIns="0" rIns="0" bIns="0" rtlCol="0">
-            <a:spAutoFit/>
-          </a:bodyPr>
-          <a:lstStyle/>
-          <a:p>
-            <a:r>
-              <a:rPr lang="vi-VN" sz="1400">
-                <a:solidFill>
-                  <a:srgbClr val="94A3B8"/>
-                </a:solidFill>
-                <a:latin typeface="Aptos" panose="020B0004020202020204" pitchFamily="34" charset="0"/>
-              </a:rPr>
-              <a:t>Thiết kế phù hợp scope môn học, chưa phải production-grade payment platform.</a:t>
-            </a:r>
-          </a:p>
-        </p:txBody>
-      </p:sp>
-      <p:sp>
-        <p:nvSpPr>
-          <p:cNvPr id="6" name="Rectangle 5">
-            <a:extLst>
-              <a:ext uri="{FF2B5EF4-FFF2-40B4-BE49-F238E27FC236}">
-                <a16:creationId xmlns:a16="http://schemas.microsoft.com/office/drawing/2014/main" id="{C1950389-3891-3784-D090-20188118D379}"/>
-              </a:ext>
-            </a:extLst>
-          </p:cNvPr>
-          <p:cNvSpPr/>
-          <p:nvPr/>
-        </p:nvSpPr>
-        <p:spPr>
-          <a:xfrm>
-            <a:off x="533400" y="1600200"/>
-            <a:ext cx="11125200" cy="12700"/>
-          </a:xfrm>
-          <a:prstGeom prst="rect">
-            <a:avLst/>
-          </a:prstGeom>
-          <a:solidFill>
-            <a:srgbClr val="334155"/>
-          </a:solidFill>
-          <a:ln w="12700">
-            <a:solidFill>
-              <a:srgbClr val="334155"/>
-            </a:solidFill>
-          </a:ln>
-        </p:spPr>
-        <p:style>
-          <a:lnRef idx="2">
-            <a:schemeClr val="accent1">
-              <a:shade val="15000"/>
-            </a:schemeClr>
-          </a:lnRef>
-          <a:fillRef idx="1">
-            <a:schemeClr val="accent1"/>
-          </a:fillRef>
-          <a:effectRef idx="0">
-            <a:schemeClr val="accent1"/>
-          </a:effectRef>
-          <a:fontRef idx="minor">
-            <a:schemeClr val="lt1"/>
-          </a:fontRef>
-        </p:style>
-        <p:txBody>
-          <a:bodyPr rtlCol="0" anchor="ctr"/>
-          <a:lstStyle/>
-          <a:p>
-            <a:pPr algn="ctr"/>
-            <a:endParaRPr lang="vi-VN"/>
-          </a:p>
-        </p:txBody>
-      </p:sp>
-      <p:sp>
-        <p:nvSpPr>
-          <p:cNvPr id="9" name="TextBox 8">
-            <a:extLst>
-              <a:ext uri="{FF2B5EF4-FFF2-40B4-BE49-F238E27FC236}">
-                <a16:creationId xmlns:a16="http://schemas.microsoft.com/office/drawing/2014/main" id="{25390576-05EA-762F-8180-A1BA2A593E9B}"/>
-              </a:ext>
-            </a:extLst>
-          </p:cNvPr>
-          <p:cNvSpPr txBox="1"/>
-          <p:nvPr/>
-        </p:nvSpPr>
-        <p:spPr>
-          <a:xfrm>
-            <a:off x="1092200" y="2006600"/>
-            <a:ext cx="9906000" cy="1461939"/>
-          </a:xfrm>
-          <a:prstGeom prst="rect">
-            <a:avLst/>
-          </a:prstGeom>
-          <a:noFill/>
-        </p:spPr>
-        <p:txBody>
-          <a:bodyPr vert="horz" lIns="0" tIns="0" rIns="0" bIns="0" rtlCol="0">
-            <a:spAutoFit/>
-          </a:bodyPr>
-          <a:lstStyle/>
-          <a:p>
-            <a:r>
-              <a:rPr lang="vi-VN" sz="1900">
-                <a:solidFill>
-                  <a:srgbClr val="F1F5F9"/>
-                </a:solidFill>
-                <a:latin typeface="Aptos" panose="020B0004020202020204" pitchFamily="34" charset="0"/>
-              </a:rPr>
-              <a:t>• Global dedup store là coordination point tập trung.
-• Account state được seed giống nhau ở các node để đơn giản hóa demo.
-• Chưa có distributed commit protocol kiểu 2PC cho transfer chạm nhiều shard account.
-• Benchmark chạy local, network WAN latency chưa được mô phỏng sâu.
-• Backpressure hiện là simulation counter, chưa phải queue broker thực như Kafka.</a:t>
-            </a:r>
-          </a:p>
-        </p:txBody>
-      </p:sp>
-      <p:sp>
-        <p:nvSpPr>
-          <p:cNvPr id="10" name="Rectangle: Rounded Corners 9">
-            <a:extLst>
-              <a:ext uri="{FF2B5EF4-FFF2-40B4-BE49-F238E27FC236}">
-                <a16:creationId xmlns:a16="http://schemas.microsoft.com/office/drawing/2014/main" id="{5339D7C3-614B-3179-B77D-BAE74A7A90C4}"/>
-              </a:ext>
-            </a:extLst>
-          </p:cNvPr>
-          <p:cNvSpPr/>
-          <p:nvPr/>
-        </p:nvSpPr>
-        <p:spPr>
-          <a:xfrm>
-            <a:off x="1168400" y="4470400"/>
-            <a:ext cx="9855200" cy="736600"/>
-          </a:xfrm>
-          <a:prstGeom prst="roundRect">
-            <a:avLst/>
-          </a:prstGeom>
-          <a:solidFill>
-            <a:srgbClr val="1E293B"/>
-          </a:solidFill>
-          <a:ln w="12700">
-            <a:solidFill>
-              <a:srgbClr val="F59E0B"/>
-            </a:solidFill>
-          </a:ln>
-        </p:spPr>
-        <p:style>
-          <a:lnRef idx="2">
-            <a:schemeClr val="accent1">
-              <a:shade val="15000"/>
-            </a:schemeClr>
-          </a:lnRef>
-          <a:fillRef idx="1">
-            <a:schemeClr val="accent1"/>
-          </a:fillRef>
-          <a:effectRef idx="0">
-            <a:schemeClr val="accent1"/>
-          </a:effectRef>
-          <a:fontRef idx="minor">
-            <a:schemeClr val="lt1"/>
-          </a:fontRef>
-        </p:style>
-        <p:txBody>
-          <a:bodyPr rtlCol="0" anchor="ctr"/>
-          <a:lstStyle/>
-          <a:p>
-            <a:pPr algn="ctr"/>
-            <a:endParaRPr lang="vi-VN"/>
-          </a:p>
-        </p:txBody>
-      </p:sp>
-      <p:sp>
-        <p:nvSpPr>
-          <p:cNvPr id="11" name="TextBox 10">
-            <a:extLst>
-              <a:ext uri="{FF2B5EF4-FFF2-40B4-BE49-F238E27FC236}">
-                <a16:creationId xmlns:a16="http://schemas.microsoft.com/office/drawing/2014/main" id="{859C0079-9222-A1AE-CCDC-C5DED4AF7F35}"/>
-              </a:ext>
-            </a:extLst>
-          </p:cNvPr>
-          <p:cNvSpPr txBox="1"/>
-          <p:nvPr/>
-        </p:nvSpPr>
-        <p:spPr>
-          <a:xfrm>
-            <a:off x="1422400" y="4699000"/>
-            <a:ext cx="9347200" cy="492443"/>
-          </a:xfrm>
-          <a:prstGeom prst="rect">
-            <a:avLst/>
-          </a:prstGeom>
-          <a:noFill/>
-        </p:spPr>
-        <p:txBody>
-          <a:bodyPr vert="horz" lIns="0" tIns="0" rIns="0" bIns="0" rtlCol="0">
-            <a:spAutoFit/>
-          </a:bodyPr>
-          <a:lstStyle/>
-          <a:p>
-            <a:pPr algn="ctr"/>
-            <a:r>
-              <a:rPr lang="vi-VN" sz="1600" b="1">
-                <a:solidFill>
-                  <a:srgbClr val="F1F5F9"/>
-                </a:solidFill>
-                <a:latin typeface="Aptos" panose="020B0004020202020204" pitchFamily="34" charset="0"/>
-              </a:rPr>
-              <a:t>Các hạn chế này không phá mục tiêu chính: chứng minh EOS/idempotent payment trên kiến trúc phân tán demo.</a:t>
-            </a:r>
-          </a:p>
-        </p:txBody>
-      </p:sp>
-    </p:spTree>
-    <p:extLst>
-      <p:ext uri="{BB962C8B-B14F-4D97-AF65-F5344CB8AC3E}">
-        <p14:creationId xmlns:p14="http://schemas.microsoft.com/office/powerpoint/2010/main" val="3719156880"/>
+        <p14:creationId xmlns:p14="http://schemas.microsoft.com/office/powerpoint/2010/main" val="3602141254"/>
       </p:ext>
     </p:extLst>
   </p:cSld>
@@ -14204,7 +9642,7 @@
           <a:lstStyle/>
           <a:p>
             <a:r>
-              <a:rPr lang="vi-VN" sz="1500" b="1">
+              <a:rPr lang="vi-VN" sz="1500" b="1" dirty="0">
                 <a:solidFill>
                   <a:srgbClr val="F1F5F9"/>
                 </a:solidFill>
@@ -14215,7 +9653,7 @@
           </a:p>
           <a:p>
             <a:r>
-              <a:rPr lang="vi-VN" sz="1100">
+              <a:rPr lang="vi-VN" sz="1100" dirty="0">
                 <a:solidFill>
                   <a:srgbClr val="94A3B8"/>
                 </a:solidFill>
@@ -14412,7 +9850,7 @@
         <p:spPr>
           <a:xfrm>
             <a:off x="7162800" y="3459200"/>
-            <a:ext cx="4420000" cy="560000"/>
+            <a:ext cx="4420000" cy="400110"/>
           </a:xfrm>
           <a:prstGeom prst="rect">
             <a:avLst/>
@@ -14426,18 +9864,18 @@
           <a:lstStyle/>
           <a:p>
             <a:r>
-              <a:rPr lang="vi-VN" sz="1500" b="1">
+              <a:rPr lang="vi-VN" sz="1500" b="1" dirty="0">
                 <a:solidFill>
                   <a:srgbClr val="F1F5F9"/>
                 </a:solidFill>
                 <a:latin typeface="Aptos" panose="020B0004020202020204" pitchFamily="34" charset="0"/>
               </a:rPr>
-              <a:t>Demo, Test &amp; Hướng mở rộng</a:t>
-            </a:r>
-          </a:p>
-          <a:p>
-            <a:r>
-              <a:rPr lang="vi-VN" sz="1100">
+              <a:t>Demo, Test </a:t>
+            </a:r>
+          </a:p>
+          <a:p>
+            <a:r>
+              <a:rPr lang="vi-VN" sz="1100" dirty="0">
                 <a:solidFill>
                   <a:srgbClr val="94A3B8"/>
                 </a:solidFill>
@@ -14452,264 +9890,6 @@
     <p:extLst>
       <p:ext uri="{BB962C8B-B14F-4D97-AF65-F5344CB8AC3E}">
         <p14:creationId xmlns:p14="http://schemas.microsoft.com/office/powerpoint/2010/main" val="2774081603"/>
-      </p:ext>
-    </p:extLst>
-  </p:cSld>
-  <p:clrMapOvr>
-    <a:masterClrMapping/>
-  </p:clrMapOvr>
-</p:sld>
-</file>
-
-<file path=ppt/slides/slide20.xml><?xml version="1.0" encoding="utf-8"?>
-<p:sld xmlns:a="http://schemas.openxmlformats.org/drawingml/2006/main" xmlns:r="http://schemas.openxmlformats.org/officeDocument/2006/relationships" xmlns:p="http://schemas.openxmlformats.org/presentationml/2006/main">
-  <p:cSld>
-    <p:spTree>
-      <p:nvGrpSpPr>
-        <p:cNvPr id="1" name=""/>
-        <p:cNvGrpSpPr/>
-        <p:nvPr/>
-      </p:nvGrpSpPr>
-      <p:grpSpPr>
-        <a:xfrm>
-          <a:off x="0" y="0"/>
-          <a:ext cx="0" cy="0"/>
-          <a:chOff x="0" y="0"/>
-          <a:chExt cx="0" cy="0"/>
-        </a:xfrm>
-      </p:grpSpPr>
-      <p:sp>
-        <p:nvSpPr>
-          <p:cNvPr id="2" name="Rectangle 1">
-            <a:extLst>
-              <a:ext uri="{FF2B5EF4-FFF2-40B4-BE49-F238E27FC236}">
-                <a16:creationId xmlns:a16="http://schemas.microsoft.com/office/drawing/2014/main" id="{76343256-1592-60D7-8C61-D4BEA9D09ECB}"/>
-              </a:ext>
-            </a:extLst>
-          </p:cNvPr>
-          <p:cNvSpPr/>
-          <p:nvPr/>
-        </p:nvSpPr>
-        <p:spPr>
-          <a:xfrm>
-            <a:off x="0" y="0"/>
-            <a:ext cx="12192000" cy="6858000"/>
-          </a:xfrm>
-          <a:prstGeom prst="rect">
-            <a:avLst/>
-          </a:prstGeom>
-          <a:solidFill>
-            <a:srgbClr val="0F172A"/>
-          </a:solidFill>
-          <a:ln w="12700" cap="flat" cmpd="sng" algn="ctr">
-            <a:noFill/>
-            <a:prstDash val="solid"/>
-            <a:miter lim="800000"/>
-          </a:ln>
-          <a:effectLst/>
-          <a:extLst>
-            <a:ext uri="{91240B29-F687-4F45-9708-019B960494DF}">
-              <a14:hiddenLine xmlns:a14="http://schemas.microsoft.com/office/drawing/2010/main" w="12700" cap="flat" cmpd="sng" algn="ctr">
-                <a:solidFill>
-                  <a:schemeClr val="accent1">
-                    <a:shade val="15000"/>
-                  </a:schemeClr>
-                </a:solidFill>
-                <a:prstDash val="solid"/>
-                <a:miter lim="800000"/>
-              </a14:hiddenLine>
-            </a:ext>
-          </a:extLst>
-        </p:spPr>
-        <p:style>
-          <a:lnRef idx="2">
-            <a:schemeClr val="accent1">
-              <a:shade val="15000"/>
-            </a:schemeClr>
-          </a:lnRef>
-          <a:fillRef idx="1">
-            <a:schemeClr val="accent1"/>
-          </a:fillRef>
-          <a:effectRef idx="0">
-            <a:schemeClr val="accent1"/>
-          </a:effectRef>
-          <a:fontRef idx="minor">
-            <a:schemeClr val="lt1"/>
-          </a:fontRef>
-        </p:style>
-        <p:txBody>
-          <a:bodyPr rtlCol="0" anchor="ctr"/>
-          <a:lstStyle/>
-          <a:p>
-            <a:pPr algn="ctr"/>
-            <a:endParaRPr lang="vi-VN"/>
-          </a:p>
-        </p:txBody>
-      </p:sp>
-      <p:sp>
-        <p:nvSpPr>
-          <p:cNvPr id="3" name="TextBox 2">
-            <a:extLst>
-              <a:ext uri="{FF2B5EF4-FFF2-40B4-BE49-F238E27FC236}">
-                <a16:creationId xmlns:a16="http://schemas.microsoft.com/office/drawing/2014/main" id="{F63959C7-78AE-5FF0-0DFB-6C7624D4A798}"/>
-              </a:ext>
-            </a:extLst>
-          </p:cNvPr>
-          <p:cNvSpPr txBox="1"/>
-          <p:nvPr/>
-        </p:nvSpPr>
-        <p:spPr>
-          <a:xfrm>
-            <a:off x="0" y="1300000"/>
-            <a:ext cx="12192000" cy="830997"/>
-          </a:xfrm>
-          <a:prstGeom prst="rect">
-            <a:avLst/>
-          </a:prstGeom>
-          <a:noFill/>
-        </p:spPr>
-        <p:txBody>
-          <a:bodyPr vert="horz" lIns="0" tIns="0" rIns="0" bIns="0" rtlCol="0">
-            <a:spAutoFit/>
-          </a:bodyPr>
-          <a:lstStyle/>
-          <a:p>
-            <a:pPr algn="ctr"/>
-            <a:r>
-              <a:rPr lang="vi-VN" sz="5400" b="1">
-                <a:solidFill>
-                  <a:srgbClr val="10B981"/>
-                </a:solidFill>
-                <a:latin typeface="Aptos" panose="020B0004020202020204" pitchFamily="34" charset="0"/>
-              </a:rPr>
-              <a:t>Cảm ơn!</a:t>
-            </a:r>
-          </a:p>
-        </p:txBody>
-      </p:sp>
-      <p:sp>
-        <p:nvSpPr>
-          <p:cNvPr id="10" name="Subtitle"/>
-          <p:cNvSpPr txBox="1"/>
-          <p:nvPr/>
-        </p:nvSpPr>
-        <p:spPr>
-          <a:xfrm>
-            <a:off x="0" y="2200000"/>
-            <a:ext cx="12192000" cy="300000"/>
-          </a:xfrm>
-          <a:prstGeom prst="rect">
-            <a:avLst/>
-          </a:prstGeom>
-          <a:noFill/>
-        </p:spPr>
-        <p:txBody>
-          <a:bodyPr vert="horz" lIns="0" tIns="0" rIns="0" bIns="0" rtlCol="0">
-            <a:spAutoFit/>
-          </a:bodyPr>
-          <a:lstStyle/>
-          <a:p>
-            <a:pPr algn="ctr"/>
-            <a:r>
-              <a:rPr lang="vi-VN" sz="1600">
-                <a:solidFill>
-                  <a:srgbClr val="94A3B8"/>
-                </a:solidFill>
-                <a:latin typeface="Aptos" panose="020B0004020202020204" pitchFamily="34" charset="0"/>
-              </a:rPr>
-              <a:t>Hội đồng có câu hỏi không?</a:t>
-            </a:r>
-          </a:p>
-        </p:txBody>
-      </p:sp>
-      <p:sp>
-        <p:nvSpPr>
-          <p:cNvPr id="11" name="Divider"/>
-          <p:cNvSpPr/>
-          <p:nvPr/>
-        </p:nvSpPr>
-        <p:spPr>
-          <a:xfrm>
-            <a:off x="4064000" y="2700000"/>
-            <a:ext cx="4064000" cy="12700"/>
-          </a:xfrm>
-          <a:prstGeom prst="rect">
-            <a:avLst/>
-          </a:prstGeom>
-          <a:solidFill>
-            <a:srgbClr val="334155"/>
-          </a:solidFill>
-          <a:ln w="12700">
-            <a:solidFill>
-              <a:srgbClr val="334155"/>
-            </a:solidFill>
-          </a:ln>
-        </p:spPr>
-        <p:txBody>
-          <a:bodyPr rtlCol="0" anchor="ctr"/>
-          <a:lstStyle/>
-          <a:p>
-            <a:pPr algn="ctr"/>
-            <a:endParaRPr lang="vi-VN"/>
-          </a:p>
-        </p:txBody>
-      </p:sp>
-      <p:sp>
-        <p:nvSpPr>
-          <p:cNvPr id="12" name="ProjectInfo"/>
-          <p:cNvSpPr txBox="1"/>
-          <p:nvPr/>
-        </p:nvSpPr>
-        <p:spPr>
-          <a:xfrm>
-            <a:off x="1524000" y="2800000"/>
-            <a:ext cx="9144000" cy="900000"/>
-          </a:xfrm>
-          <a:prstGeom prst="roundRect">
-            <a:avLst/>
-          </a:prstGeom>
-          <a:solidFill>
-            <a:srgbClr val="1E293B"/>
-          </a:solidFill>
-          <a:ln w="12700">
-            <a:solidFill>
-              <a:srgbClr val="334155"/>
-            </a:solidFill>
-          </a:ln>
-        </p:spPr>
-        <p:txBody>
-          <a:bodyPr rtlCol="0" anchor="ctr" lIns="228600" tIns="91440" rIns="228600" bIns="91440"/>
-          <a:lstStyle/>
-          <a:p>
-            <a:pPr algn="ctr"/>
-            <a:r>
-              <a:rPr lang="vi-VN" sz="1300" b="1">
-                <a:solidFill>
-                  <a:srgbClr val="F1F5F9"/>
-                </a:solidFill>
-                <a:latin typeface="Aptos" panose="020B0004020202020204" pitchFamily="34" charset="0"/>
-              </a:rPr>
-              <a:t>Nguyễn Hoài Phương  ·  N23DCCN183  ·  D23CQCN03-N</a:t>
-            </a:r>
-          </a:p>
-          <a:p>
-            <a:pPr algn="ctr"/>
-            <a:r>
-              <a:rPr lang="vi-VN" sz="1100">
-                <a:solidFill>
-                  <a:srgbClr val="10B981"/>
-                </a:solidFill>
-                <a:latin typeface="Aptos" panose="020B0004020202020204" pitchFamily="34" charset="0"/>
-              </a:rPr>
-              <a:t>Đề tài #117  ·  Java 21 + Spring Boot + H2 + React + Vite  ·  GVHD: Lê Hà Thanh</a:t>
-            </a:r>
-          </a:p>
-        </p:txBody>
-      </p:sp>
-    </p:spTree>
-    <p:extLst>
-      <p:ext uri="{BB962C8B-B14F-4D97-AF65-F5344CB8AC3E}">
-        <p14:creationId xmlns:p14="http://schemas.microsoft.com/office/powerpoint/2010/main" val="3602141254"/>
       </p:ext>
     </p:extLst>
   </p:cSld>
@@ -15352,7 +10532,7 @@
           <a:lstStyle/>
           <a:p>
             <a:pPr algn="ctr"/>
-            <a:endParaRPr lang="vi-VN"/>
+            <a:endParaRPr lang="vi-VN" dirty="0"/>
           </a:p>
         </p:txBody>
       </p:sp>
@@ -16095,7 +11275,7 @@
           <a:lstStyle/>
           <a:p>
             <a:r>
-              <a:rPr lang="vi-VN" sz="1900">
+              <a:rPr lang="vi-VN" sz="1900" dirty="0">
                 <a:solidFill>
                   <a:srgbClr val="F1F5F9"/>
                 </a:solidFill>
@@ -16980,6 +12160,313 @@
           </a:p>
         </p:txBody>
       </p:sp>
+      <p:cxnSp>
+        <p:nvCxnSpPr>
+          <p:cNvPr id="8" name="Straight Arrow Connector 7">
+            <a:extLst>
+              <a:ext uri="{FF2B5EF4-FFF2-40B4-BE49-F238E27FC236}">
+                <a16:creationId xmlns:a16="http://schemas.microsoft.com/office/drawing/2014/main" id="{CC71AABF-77DD-31AB-72F6-2D0C8EF4E654}"/>
+              </a:ext>
+            </a:extLst>
+          </p:cNvPr>
+          <p:cNvCxnSpPr>
+            <a:cxnSpLocks/>
+            <a:stCxn id="10" idx="2"/>
+            <a:endCxn id="11" idx="0"/>
+          </p:cNvCxnSpPr>
+          <p:nvPr/>
+        </p:nvCxnSpPr>
+        <p:spPr>
+          <a:xfrm>
+            <a:off x="6096000" y="2268210"/>
+            <a:ext cx="0" cy="347990"/>
+          </a:xfrm>
+          <a:prstGeom prst="straightConnector1">
+            <a:avLst/>
+          </a:prstGeom>
+          <a:ln w="28575">
+            <a:tailEnd type="triangle"/>
+          </a:ln>
+        </p:spPr>
+        <p:style>
+          <a:lnRef idx="1">
+            <a:schemeClr val="accent2"/>
+          </a:lnRef>
+          <a:fillRef idx="0">
+            <a:schemeClr val="accent2"/>
+          </a:fillRef>
+          <a:effectRef idx="0">
+            <a:schemeClr val="accent2"/>
+          </a:effectRef>
+          <a:fontRef idx="minor">
+            <a:schemeClr val="tx1"/>
+          </a:fontRef>
+        </p:style>
+      </p:cxnSp>
+      <p:cxnSp>
+        <p:nvCxnSpPr>
+          <p:cNvPr id="24" name="Connector: Elbow 23">
+            <a:extLst>
+              <a:ext uri="{FF2B5EF4-FFF2-40B4-BE49-F238E27FC236}">
+                <a16:creationId xmlns:a16="http://schemas.microsoft.com/office/drawing/2014/main" id="{8675D53B-2258-015E-3A01-B6B9BEDFA800}"/>
+              </a:ext>
+            </a:extLst>
+          </p:cNvPr>
+          <p:cNvCxnSpPr>
+            <a:cxnSpLocks/>
+            <a:stCxn id="11" idx="3"/>
+            <a:endCxn id="17" idx="0"/>
+          </p:cNvCxnSpPr>
+          <p:nvPr/>
+        </p:nvCxnSpPr>
+        <p:spPr>
+          <a:xfrm>
+            <a:off x="7239000" y="2984500"/>
+            <a:ext cx="2730500" cy="1028700"/>
+          </a:xfrm>
+          <a:prstGeom prst="bentConnector2">
+            <a:avLst/>
+          </a:prstGeom>
+          <a:ln w="28575">
+            <a:tailEnd type="triangle"/>
+          </a:ln>
+        </p:spPr>
+        <p:style>
+          <a:lnRef idx="1">
+            <a:schemeClr val="accent2"/>
+          </a:lnRef>
+          <a:fillRef idx="0">
+            <a:schemeClr val="accent2"/>
+          </a:fillRef>
+          <a:effectRef idx="0">
+            <a:schemeClr val="accent2"/>
+          </a:effectRef>
+          <a:fontRef idx="minor">
+            <a:schemeClr val="tx1"/>
+          </a:fontRef>
+        </p:style>
+      </p:cxnSp>
+      <p:cxnSp>
+        <p:nvCxnSpPr>
+          <p:cNvPr id="28" name="Connector: Elbow 27">
+            <a:extLst>
+              <a:ext uri="{FF2B5EF4-FFF2-40B4-BE49-F238E27FC236}">
+                <a16:creationId xmlns:a16="http://schemas.microsoft.com/office/drawing/2014/main" id="{BA622285-0397-1616-9ADE-F0B28960BDB4}"/>
+              </a:ext>
+            </a:extLst>
+          </p:cNvPr>
+          <p:cNvCxnSpPr>
+            <a:cxnSpLocks/>
+            <a:stCxn id="11" idx="1"/>
+            <a:endCxn id="13" idx="0"/>
+          </p:cNvCxnSpPr>
+          <p:nvPr/>
+        </p:nvCxnSpPr>
+        <p:spPr>
+          <a:xfrm rot="10800000" flipV="1">
+            <a:off x="2222500" y="2984500"/>
+            <a:ext cx="2730500" cy="1028700"/>
+          </a:xfrm>
+          <a:prstGeom prst="bentConnector2">
+            <a:avLst/>
+          </a:prstGeom>
+          <a:ln w="28575">
+            <a:tailEnd type="triangle"/>
+          </a:ln>
+        </p:spPr>
+        <p:style>
+          <a:lnRef idx="1">
+            <a:schemeClr val="accent2"/>
+          </a:lnRef>
+          <a:fillRef idx="0">
+            <a:schemeClr val="accent2"/>
+          </a:fillRef>
+          <a:effectRef idx="0">
+            <a:schemeClr val="accent2"/>
+          </a:effectRef>
+          <a:fontRef idx="minor">
+            <a:schemeClr val="tx1"/>
+          </a:fontRef>
+        </p:style>
+      </p:cxnSp>
+      <p:cxnSp>
+        <p:nvCxnSpPr>
+          <p:cNvPr id="32" name="Straight Arrow Connector 31">
+            <a:extLst>
+              <a:ext uri="{FF2B5EF4-FFF2-40B4-BE49-F238E27FC236}">
+                <a16:creationId xmlns:a16="http://schemas.microsoft.com/office/drawing/2014/main" id="{966550A1-E2F2-3669-3367-ECAA48DDA035}"/>
+              </a:ext>
+            </a:extLst>
+          </p:cNvPr>
+          <p:cNvCxnSpPr>
+            <a:cxnSpLocks/>
+            <a:stCxn id="11" idx="2"/>
+            <a:endCxn id="15" idx="0"/>
+          </p:cNvCxnSpPr>
+          <p:nvPr/>
+        </p:nvCxnSpPr>
+        <p:spPr>
+          <a:xfrm>
+            <a:off x="6096000" y="3352800"/>
+            <a:ext cx="0" cy="660400"/>
+          </a:xfrm>
+          <a:prstGeom prst="straightConnector1">
+            <a:avLst/>
+          </a:prstGeom>
+          <a:ln w="28575">
+            <a:solidFill>
+              <a:schemeClr val="accent2"/>
+            </a:solidFill>
+            <a:tailEnd type="triangle"/>
+          </a:ln>
+        </p:spPr>
+        <p:style>
+          <a:lnRef idx="1">
+            <a:schemeClr val="accent2"/>
+          </a:lnRef>
+          <a:fillRef idx="0">
+            <a:schemeClr val="accent2"/>
+          </a:fillRef>
+          <a:effectRef idx="0">
+            <a:schemeClr val="accent2"/>
+          </a:effectRef>
+          <a:fontRef idx="minor">
+            <a:schemeClr val="tx1"/>
+          </a:fontRef>
+        </p:style>
+      </p:cxnSp>
+      <p:cxnSp>
+        <p:nvCxnSpPr>
+          <p:cNvPr id="35" name="Connector: Elbow 34">
+            <a:extLst>
+              <a:ext uri="{FF2B5EF4-FFF2-40B4-BE49-F238E27FC236}">
+                <a16:creationId xmlns:a16="http://schemas.microsoft.com/office/drawing/2014/main" id="{39731B93-F496-0F68-C3EB-3BFA8C41C90A}"/>
+              </a:ext>
+            </a:extLst>
+          </p:cNvPr>
+          <p:cNvCxnSpPr>
+            <a:cxnSpLocks/>
+            <a:stCxn id="13" idx="2"/>
+            <a:endCxn id="19" idx="1"/>
+          </p:cNvCxnSpPr>
+          <p:nvPr/>
+        </p:nvCxnSpPr>
+        <p:spPr>
+          <a:xfrm rot="16200000" flipH="1">
+            <a:off x="2635250" y="4489450"/>
+            <a:ext cx="762000" cy="1587500"/>
+          </a:xfrm>
+          <a:prstGeom prst="bentConnector2">
+            <a:avLst/>
+          </a:prstGeom>
+          <a:ln w="28575">
+            <a:tailEnd type="triangle"/>
+          </a:ln>
+        </p:spPr>
+        <p:style>
+          <a:lnRef idx="1">
+            <a:schemeClr val="accent2"/>
+          </a:lnRef>
+          <a:fillRef idx="0">
+            <a:schemeClr val="accent2"/>
+          </a:fillRef>
+          <a:effectRef idx="0">
+            <a:schemeClr val="accent2"/>
+          </a:effectRef>
+          <a:fontRef idx="minor">
+            <a:schemeClr val="tx1"/>
+          </a:fontRef>
+        </p:style>
+      </p:cxnSp>
+      <p:cxnSp>
+        <p:nvCxnSpPr>
+          <p:cNvPr id="38" name="Connector: Elbow 37">
+            <a:extLst>
+              <a:ext uri="{FF2B5EF4-FFF2-40B4-BE49-F238E27FC236}">
+                <a16:creationId xmlns:a16="http://schemas.microsoft.com/office/drawing/2014/main" id="{B3A43DD8-6832-7B8C-D69D-782015692910}"/>
+              </a:ext>
+            </a:extLst>
+          </p:cNvPr>
+          <p:cNvCxnSpPr>
+            <a:cxnSpLocks/>
+            <a:stCxn id="17" idx="2"/>
+            <a:endCxn id="19" idx="3"/>
+          </p:cNvCxnSpPr>
+          <p:nvPr/>
+        </p:nvCxnSpPr>
+        <p:spPr>
+          <a:xfrm rot="5400000">
+            <a:off x="8794750" y="4489450"/>
+            <a:ext cx="762000" cy="1587500"/>
+          </a:xfrm>
+          <a:prstGeom prst="bentConnector2">
+            <a:avLst/>
+          </a:prstGeom>
+          <a:ln w="28575">
+            <a:tailEnd type="triangle"/>
+          </a:ln>
+        </p:spPr>
+        <p:style>
+          <a:lnRef idx="1">
+            <a:schemeClr val="accent2"/>
+          </a:lnRef>
+          <a:fillRef idx="0">
+            <a:schemeClr val="accent2"/>
+          </a:fillRef>
+          <a:effectRef idx="0">
+            <a:schemeClr val="accent2"/>
+          </a:effectRef>
+          <a:fontRef idx="minor">
+            <a:schemeClr val="tx1"/>
+          </a:fontRef>
+        </p:style>
+      </p:cxnSp>
+      <p:cxnSp>
+        <p:nvCxnSpPr>
+          <p:cNvPr id="44" name="Straight Arrow Connector 43">
+            <a:extLst>
+              <a:ext uri="{FF2B5EF4-FFF2-40B4-BE49-F238E27FC236}">
+                <a16:creationId xmlns:a16="http://schemas.microsoft.com/office/drawing/2014/main" id="{7364164F-EADF-38A1-215A-CFA423A75261}"/>
+              </a:ext>
+            </a:extLst>
+          </p:cNvPr>
+          <p:cNvCxnSpPr>
+            <a:cxnSpLocks/>
+            <a:stCxn id="15" idx="2"/>
+            <a:endCxn id="19" idx="0"/>
+          </p:cNvCxnSpPr>
+          <p:nvPr/>
+        </p:nvCxnSpPr>
+        <p:spPr>
+          <a:xfrm>
+            <a:off x="6096000" y="4902200"/>
+            <a:ext cx="0" cy="406400"/>
+          </a:xfrm>
+          <a:prstGeom prst="straightConnector1">
+            <a:avLst/>
+          </a:prstGeom>
+          <a:ln w="28575">
+            <a:solidFill>
+              <a:schemeClr val="accent2"/>
+            </a:solidFill>
+            <a:tailEnd type="triangle"/>
+          </a:ln>
+        </p:spPr>
+        <p:style>
+          <a:lnRef idx="1">
+            <a:schemeClr val="accent2"/>
+          </a:lnRef>
+          <a:fillRef idx="0">
+            <a:schemeClr val="accent2"/>
+          </a:fillRef>
+          <a:effectRef idx="0">
+            <a:schemeClr val="accent2"/>
+          </a:effectRef>
+          <a:fontRef idx="minor">
+            <a:schemeClr val="tx1"/>
+          </a:fontRef>
+        </p:style>
+      </p:cxnSp>
     </p:spTree>
     <p:extLst>
       <p:ext uri="{BB962C8B-B14F-4D97-AF65-F5344CB8AC3E}">
@@ -17481,7 +12968,7 @@
           <a:lstStyle/>
           <a:p>
             <a:r>
-              <a:rPr lang="vi-VN" sz="2200" b="1">
+              <a:rPr lang="vi-VN" sz="2200" b="1" dirty="0">
                 <a:solidFill>
                   <a:srgbClr val="F59E0B"/>
                 </a:solidFill>
@@ -18742,15 +14229,24 @@
           <a:p>
             <a:pPr algn="ctr"/>
             <a:r>
-              <a:rPr lang="fr-FR" b="1">
+              <a:rPr lang="fr-FR" b="1" dirty="0" err="1">
                 <a:solidFill>
                   <a:srgbClr val="F1F5F9"/>
                 </a:solidFill>
                 <a:latin typeface="Aptos" panose="020B0004020202020204" pitchFamily="34" charset="0"/>
               </a:rPr>
-              <a:t>Total_Time = T_CPU * #instructions + T_IO * #disk_IOs + T_MSG * #messages + T_TR * #bytes_transferred</a:t>
-            </a:r>
-            <a:endParaRPr lang="vi-VN" b="1">
+              <a:t>Total_Time</a:t>
+            </a:r>
+            <a:r>
+              <a:rPr lang="fr-FR" b="1" dirty="0">
+                <a:solidFill>
+                  <a:srgbClr val="F1F5F9"/>
+                </a:solidFill>
+                <a:latin typeface="Aptos" panose="020B0004020202020204" pitchFamily="34" charset="0"/>
+              </a:rPr>
+              <a:t> = T_CPU * #instructions + T_IO * #disk_IOs + T_MSG * #messages + T_TR * #bytes_transferred</a:t>
+            </a:r>
+            <a:endParaRPr lang="vi-VN" b="1" dirty="0">
               <a:solidFill>
                 <a:srgbClr val="F1F5F9"/>
               </a:solidFill>
@@ -18774,7 +14270,7 @@
         <p:spPr>
           <a:xfrm>
             <a:off x="1092200" y="3530600"/>
-            <a:ext cx="4572000" cy="1498600"/>
+            <a:ext cx="4572000" cy="1746884"/>
           </a:xfrm>
           <a:prstGeom prst="roundRect">
             <a:avLst/>
@@ -18921,8 +14417,8 @@
         </p:nvSpPr>
         <p:spPr>
           <a:xfrm>
-            <a:off x="6527800" y="3530600"/>
-            <a:ext cx="4572000" cy="1498600"/>
+            <a:off x="6527800" y="3530599"/>
+            <a:ext cx="4572000" cy="1746885"/>
           </a:xfrm>
           <a:prstGeom prst="roundRect">
             <a:avLst/>
@@ -19030,7 +14526,7 @@
           <a:lstStyle/>
           <a:p>
             <a:r>
-              <a:rPr lang="vi-VN" sz="1600">
+              <a:rPr lang="vi-VN" sz="1600" dirty="0">
                 <a:solidFill>
                   <a:srgbClr val="F1F5F9"/>
                 </a:solidFill>
@@ -19494,14 +14990,47 @@
           <a:p>
             <a:pPr algn="ctr"/>
             <a:r>
-              <a:rPr lang="vi-VN" sz="1300" b="1">
+              <a:rPr lang="vi-VN" sz="1300" b="1" dirty="0">
                 <a:solidFill>
                   <a:srgbClr val="F1F5F9"/>
                 </a:solidFill>
                 <a:latin typeface="Aptos" panose="020B0004020202020204" pitchFamily="34" charset="0"/>
               </a:rPr>
-              <a:t>2. Global dedup lookup</a:t>
-            </a:r>
+              <a:t>2. </a:t>
+            </a:r>
+            <a:r>
+              <a:rPr lang="en-US" sz="1300" b="1" dirty="0">
+                <a:solidFill>
+                  <a:srgbClr val="F1F5F9"/>
+                </a:solidFill>
+                <a:latin typeface="Aptos" panose="020B0004020202020204" pitchFamily="34" charset="0"/>
+              </a:rPr>
+              <a:t>Atomic </a:t>
+            </a:r>
+            <a:r>
+              <a:rPr lang="en-US" sz="1300" b="1" dirty="0" err="1">
+                <a:solidFill>
+                  <a:srgbClr val="F1F5F9"/>
+                </a:solidFill>
+                <a:latin typeface="Aptos" panose="020B0004020202020204" pitchFamily="34" charset="0"/>
+              </a:rPr>
+              <a:t>dedup</a:t>
+            </a:r>
+            <a:r>
+              <a:rPr lang="en-US" sz="1300" b="1" dirty="0">
+                <a:solidFill>
+                  <a:srgbClr val="F1F5F9"/>
+                </a:solidFill>
+                <a:latin typeface="Aptos" panose="020B0004020202020204" pitchFamily="34" charset="0"/>
+              </a:rPr>
+              <a:t> check + claim</a:t>
+            </a:r>
+            <a:endParaRPr lang="vi-VN" sz="1300" b="1" dirty="0">
+              <a:solidFill>
+                <a:srgbClr val="F1F5F9"/>
+              </a:solidFill>
+              <a:latin typeface="Aptos" panose="020B0004020202020204" pitchFamily="34" charset="0"/>
+            </a:endParaRPr>
           </a:p>
         </p:txBody>
       </p:sp>
@@ -19589,15 +15118,15 @@
           <a:p>
             <a:pPr algn="ctr"/>
             <a:r>
-              <a:rPr lang="en-US" sz="1300" b="1">
+              <a:rPr lang="en-US" sz="1300" b="1" dirty="0">
                 <a:solidFill>
                   <a:srgbClr val="F1F5F9"/>
                 </a:solidFill>
                 <a:latin typeface="Aptos" panose="020B0004020202020204" pitchFamily="34" charset="0"/>
               </a:rPr>
-              <a:t>3. Atomic claim idempotency_key</a:t>
-            </a:r>
-            <a:endParaRPr lang="vi-VN" sz="1300" b="1">
+              <a:t>3. Write WAL PENDING</a:t>
+            </a:r>
+            <a:endParaRPr lang="vi-VN" sz="1300" b="1" dirty="0">
               <a:solidFill>
                 <a:srgbClr val="F1F5F9"/>
               </a:solidFill>
@@ -19690,13 +15219,13 @@
           <a:p>
             <a:pPr algn="ctr"/>
             <a:r>
-              <a:rPr lang="vi-VN" sz="1300" b="1">
+              <a:rPr lang="vi-VN" sz="1300" b="1" dirty="0">
                 <a:solidFill>
                   <a:srgbClr val="F1F5F9"/>
                 </a:solidFill>
                 <a:latin typeface="Aptos" panose="020B0004020202020204" pitchFamily="34" charset="0"/>
               </a:rPr>
-              <a:t>4. Write WAL PENDING</a:t>
+              <a:t>4. Local ACID Transaction</a:t>
             </a:r>
           </a:p>
         </p:txBody>
@@ -19770,7 +15299,7 @@
         <p:spPr>
           <a:xfrm>
             <a:off x="8280400" y="2717800"/>
-            <a:ext cx="1397000" cy="600164"/>
+            <a:ext cx="1397000" cy="400110"/>
           </a:xfrm>
           <a:prstGeom prst="rect">
             <a:avLst/>
@@ -19785,13 +15314,13 @@
           <a:p>
             <a:pPr algn="ctr"/>
             <a:r>
-              <a:rPr lang="vi-VN" sz="1300" b="1">
+              <a:rPr lang="vi-VN" sz="1300" b="1" dirty="0">
                 <a:solidFill>
                   <a:srgbClr val="F1F5F9"/>
                 </a:solidFill>
                 <a:latin typeface="Aptos" panose="020B0004020202020204" pitchFamily="34" charset="0"/>
               </a:rPr>
-              <a:t>5. Update balances + transaction</a:t>
+              <a:t>5. Complete dedup SUCCESS</a:t>
             </a:r>
           </a:p>
         </p:txBody>
@@ -19865,7 +15394,7 @@
         <p:spPr>
           <a:xfrm>
             <a:off x="10121900" y="2717800"/>
-            <a:ext cx="1397000" cy="600164"/>
+            <a:ext cx="1397000" cy="400110"/>
           </a:xfrm>
           <a:prstGeom prst="rect">
             <a:avLst/>
@@ -19880,15 +15409,15 @@
           <a:p>
             <a:pPr algn="ctr"/>
             <a:r>
-              <a:rPr lang="en-US" sz="1300" b="1">
+              <a:rPr lang="en-US" sz="1300" b="1" dirty="0">
                 <a:solidFill>
                   <a:srgbClr val="F1F5F9"/>
                 </a:solidFill>
                 <a:latin typeface="Aptos" panose="020B0004020202020204" pitchFamily="34" charset="0"/>
               </a:rPr>
-              <a:t>6. Complete dedup + WAL COMMITTED</a:t>
-            </a:r>
-            <a:endParaRPr lang="vi-VN" sz="1300" b="1">
+              <a:t>6. Mark WAL COMMITTED</a:t>
+            </a:r>
+            <a:endParaRPr lang="vi-VN" sz="1300" b="1" dirty="0">
               <a:solidFill>
                 <a:srgbClr val="F1F5F9"/>
               </a:solidFill>

--- a/docs/EOS_Payment_Improved.pptx
+++ b/docs/EOS_Payment_Improved.pptx
@@ -9870,10 +9870,19 @@
                 </a:solidFill>
                 <a:latin typeface="Aptos" panose="020B0004020202020204" pitchFamily="34" charset="0"/>
               </a:rPr>
-              <a:t>Demo, Test </a:t>
-            </a:r>
-          </a:p>
-          <a:p>
+              <a:t>Demo</a:t>
+            </a:r>
+          </a:p>
+          <a:p>
+            <a:r>
+              <a:rPr lang="en-US" sz="1100" dirty="0">
+                <a:solidFill>
+                  <a:srgbClr val="94A3B8"/>
+                </a:solidFill>
+                <a:latin typeface="Aptos" panose="020B0004020202020204" pitchFamily="34" charset="0"/>
+              </a:rPr>
+              <a:t>Demo</a:t>
+            </a:r>
             <a:r>
               <a:rPr lang="vi-VN" sz="1100" dirty="0">
                 <a:solidFill>
@@ -9881,7 +9890,7 @@
                 </a:solidFill>
                 <a:latin typeface="Aptos" panose="020B0004020202020204" pitchFamily="34" charset="0"/>
               </a:rPr>
-              <a:t>Kiểm thử, hạn chế, hướng phát triển</a:t>
+              <a:t>, hạn chế, hướng phát triển</a:t>
             </a:r>
           </a:p>
         </p:txBody>

--- a/docs/EOS_Payment_Improved.pptx
+++ b/docs/EOS_Payment_Improved.pptx
@@ -3861,25 +3861,7 @@
               <a:t>Client
 Gateway
 NODE_A  NODE_B  NODE_C
-Global </a:t>
-            </a:r>
-            <a:r>
-              <a:rPr lang="en-US" sz="2400" b="1" dirty="0" err="1">
-                <a:solidFill>
-                  <a:srgbClr val="F1F5F9"/>
-                </a:solidFill>
-                <a:latin typeface="Aptos" panose="020B0004020202020204" pitchFamily="34" charset="0"/>
-              </a:rPr>
-              <a:t>Dedup</a:t>
-            </a:r>
-            <a:r>
-              <a:rPr lang="en-US" sz="2400" b="1" dirty="0">
-                <a:solidFill>
-                  <a:srgbClr val="F1F5F9"/>
-                </a:solidFill>
-                <a:latin typeface="Aptos" panose="020B0004020202020204" pitchFamily="34" charset="0"/>
-              </a:rPr>
-              <a:t> </a:t>
+Global De-dup </a:t>
             </a:r>
           </a:p>
           <a:p>

--- a/docs/EOS_Payment_Improved.pptx
+++ b/docs/EOS_Payment_Improved.pptx
@@ -8,19 +8,18 @@
     <p:sldId id="256" r:id="rId2"/>
     <p:sldId id="257" r:id="rId3"/>
     <p:sldId id="258" r:id="rId4"/>
-    <p:sldId id="259" r:id="rId5"/>
-    <p:sldId id="260" r:id="rId6"/>
-    <p:sldId id="261" r:id="rId7"/>
-    <p:sldId id="262" r:id="rId8"/>
-    <p:sldId id="263" r:id="rId9"/>
-    <p:sldId id="264" r:id="rId10"/>
-    <p:sldId id="265" r:id="rId11"/>
-    <p:sldId id="266" r:id="rId12"/>
-    <p:sldId id="267" r:id="rId13"/>
-    <p:sldId id="268" r:id="rId14"/>
-    <p:sldId id="269" r:id="rId15"/>
-    <p:sldId id="274" r:id="rId16"/>
-    <p:sldId id="276" r:id="rId17"/>
+    <p:sldId id="260" r:id="rId5"/>
+    <p:sldId id="261" r:id="rId6"/>
+    <p:sldId id="262" r:id="rId7"/>
+    <p:sldId id="263" r:id="rId8"/>
+    <p:sldId id="264" r:id="rId9"/>
+    <p:sldId id="265" r:id="rId10"/>
+    <p:sldId id="266" r:id="rId11"/>
+    <p:sldId id="267" r:id="rId12"/>
+    <p:sldId id="268" r:id="rId13"/>
+    <p:sldId id="269" r:id="rId14"/>
+    <p:sldId id="274" r:id="rId15"/>
+    <p:sldId id="276" r:id="rId16"/>
   </p:sldIdLst>
   <p:sldSz cx="12192000" cy="6858000"/>
   <p:notesSz cx="6858000" cy="9144000"/>
@@ -276,7 +275,7 @@
           <a:p>
             <a:fld id="{BC37747E-FE7D-4488-9C1D-2D2E2936D1F7}" type="datetimeFigureOut">
               <a:rPr lang="vi-VN" smtClean="0"/>
-              <a:t>02/06/2026</a:t>
+              <a:t>03/06/2026</a:t>
             </a:fld>
             <a:endParaRPr lang="vi-VN"/>
           </a:p>
@@ -476,7 +475,7 @@
           <a:p>
             <a:fld id="{BC37747E-FE7D-4488-9C1D-2D2E2936D1F7}" type="datetimeFigureOut">
               <a:rPr lang="vi-VN" smtClean="0"/>
-              <a:t>02/06/2026</a:t>
+              <a:t>03/06/2026</a:t>
             </a:fld>
             <a:endParaRPr lang="vi-VN"/>
           </a:p>
@@ -686,7 +685,7 @@
           <a:p>
             <a:fld id="{BC37747E-FE7D-4488-9C1D-2D2E2936D1F7}" type="datetimeFigureOut">
               <a:rPr lang="vi-VN" smtClean="0"/>
-              <a:t>02/06/2026</a:t>
+              <a:t>03/06/2026</a:t>
             </a:fld>
             <a:endParaRPr lang="vi-VN"/>
           </a:p>
@@ -886,7 +885,7 @@
           <a:p>
             <a:fld id="{BC37747E-FE7D-4488-9C1D-2D2E2936D1F7}" type="datetimeFigureOut">
               <a:rPr lang="vi-VN" smtClean="0"/>
-              <a:t>02/06/2026</a:t>
+              <a:t>03/06/2026</a:t>
             </a:fld>
             <a:endParaRPr lang="vi-VN"/>
           </a:p>
@@ -1162,7 +1161,7 @@
           <a:p>
             <a:fld id="{BC37747E-FE7D-4488-9C1D-2D2E2936D1F7}" type="datetimeFigureOut">
               <a:rPr lang="vi-VN" smtClean="0"/>
-              <a:t>02/06/2026</a:t>
+              <a:t>03/06/2026</a:t>
             </a:fld>
             <a:endParaRPr lang="vi-VN"/>
           </a:p>
@@ -1430,7 +1429,7 @@
           <a:p>
             <a:fld id="{BC37747E-FE7D-4488-9C1D-2D2E2936D1F7}" type="datetimeFigureOut">
               <a:rPr lang="vi-VN" smtClean="0"/>
-              <a:t>02/06/2026</a:t>
+              <a:t>03/06/2026</a:t>
             </a:fld>
             <a:endParaRPr lang="vi-VN"/>
           </a:p>
@@ -1845,7 +1844,7 @@
           <a:p>
             <a:fld id="{BC37747E-FE7D-4488-9C1D-2D2E2936D1F7}" type="datetimeFigureOut">
               <a:rPr lang="vi-VN" smtClean="0"/>
-              <a:t>02/06/2026</a:t>
+              <a:t>03/06/2026</a:t>
             </a:fld>
             <a:endParaRPr lang="vi-VN"/>
           </a:p>
@@ -1987,7 +1986,7 @@
           <a:p>
             <a:fld id="{BC37747E-FE7D-4488-9C1D-2D2E2936D1F7}" type="datetimeFigureOut">
               <a:rPr lang="vi-VN" smtClean="0"/>
-              <a:t>02/06/2026</a:t>
+              <a:t>03/06/2026</a:t>
             </a:fld>
             <a:endParaRPr lang="vi-VN"/>
           </a:p>
@@ -2100,7 +2099,7 @@
           <a:p>
             <a:fld id="{BC37747E-FE7D-4488-9C1D-2D2E2936D1F7}" type="datetimeFigureOut">
               <a:rPr lang="vi-VN" smtClean="0"/>
-              <a:t>02/06/2026</a:t>
+              <a:t>03/06/2026</a:t>
             </a:fld>
             <a:endParaRPr lang="vi-VN"/>
           </a:p>
@@ -2413,7 +2412,7 @@
           <a:p>
             <a:fld id="{BC37747E-FE7D-4488-9C1D-2D2E2936D1F7}" type="datetimeFigureOut">
               <a:rPr lang="vi-VN" smtClean="0"/>
-              <a:t>02/06/2026</a:t>
+              <a:t>03/06/2026</a:t>
             </a:fld>
             <a:endParaRPr lang="vi-VN"/>
           </a:p>
@@ -2702,7 +2701,7 @@
           <a:p>
             <a:fld id="{BC37747E-FE7D-4488-9C1D-2D2E2936D1F7}" type="datetimeFigureOut">
               <a:rPr lang="vi-VN" smtClean="0"/>
-              <a:t>02/06/2026</a:t>
+              <a:t>03/06/2026</a:t>
             </a:fld>
             <a:endParaRPr lang="vi-VN"/>
           </a:p>
@@ -2945,7 +2944,7 @@
           <a:p>
             <a:fld id="{BC37747E-FE7D-4488-9C1D-2D2E2936D1F7}" type="datetimeFigureOut">
               <a:rPr lang="vi-VN" smtClean="0"/>
-              <a:t>02/06/2026</a:t>
+              <a:t>03/06/2026</a:t>
             </a:fld>
             <a:endParaRPr lang="vi-VN"/>
           </a:p>
@@ -3959,7 +3958,7 @@
           <p:cNvPr id="2" name="Rectangle 1">
             <a:extLst>
               <a:ext uri="{FF2B5EF4-FFF2-40B4-BE49-F238E27FC236}">
-                <a16:creationId xmlns:a16="http://schemas.microsoft.com/office/drawing/2014/main" id="{407F8EF9-BFBA-C97D-3A4F-025889ACBF1C}"/>
+                <a16:creationId xmlns:a16="http://schemas.microsoft.com/office/drawing/2014/main" id="{494EBAE0-739B-3E58-877D-55640DE59310}"/>
               </a:ext>
             </a:extLst>
           </p:cNvPr>
@@ -4027,7 +4026,7 @@
           <p:cNvPr id="3" name="TextBox 2">
             <a:extLst>
               <a:ext uri="{FF2B5EF4-FFF2-40B4-BE49-F238E27FC236}">
-                <a16:creationId xmlns:a16="http://schemas.microsoft.com/office/drawing/2014/main" id="{19158A17-F5AA-F92A-CBD0-6AD12AD6CFB8}"/>
+                <a16:creationId xmlns:a16="http://schemas.microsoft.com/office/drawing/2014/main" id="{1EF93D0D-A77C-6FC7-316D-D5F6E68AD49A}"/>
               </a:ext>
             </a:extLst>
           </p:cNvPr>
@@ -4057,7 +4056,7 @@
                 </a:solidFill>
                 <a:latin typeface="Aptos" panose="020B0004020202020204" pitchFamily="34" charset="0"/>
               </a:rPr>
-              <a:t>04 / DEDUP</a:t>
+              <a:t>04 / WAL</a:t>
             </a:r>
           </a:p>
         </p:txBody>
@@ -4067,7 +4066,7 @@
           <p:cNvPr id="4" name="TextBox 3">
             <a:extLst>
               <a:ext uri="{FF2B5EF4-FFF2-40B4-BE49-F238E27FC236}">
-                <a16:creationId xmlns:a16="http://schemas.microsoft.com/office/drawing/2014/main" id="{6C07264B-9DA3-2516-6D20-0DF721984B94}"/>
+                <a16:creationId xmlns:a16="http://schemas.microsoft.com/office/drawing/2014/main" id="{9EBBBB7F-F208-40C8-8507-969D30DF3D53}"/>
               </a:ext>
             </a:extLst>
           </p:cNvPr>
@@ -4097,7 +4096,7 @@
                 </a:solidFill>
                 <a:latin typeface="Aptos" panose="020B0004020202020204" pitchFamily="34" charset="0"/>
               </a:rPr>
-              <a:t>Global idempotency key</a:t>
+              <a:t>Write-Ahead Log và recovery</a:t>
             </a:r>
           </a:p>
         </p:txBody>
@@ -4107,7 +4106,7 @@
           <p:cNvPr id="5" name="TextBox 4">
             <a:extLst>
               <a:ext uri="{FF2B5EF4-FFF2-40B4-BE49-F238E27FC236}">
-                <a16:creationId xmlns:a16="http://schemas.microsoft.com/office/drawing/2014/main" id="{B762A149-0C71-CD30-09EB-BB659CAF7158}"/>
+                <a16:creationId xmlns:a16="http://schemas.microsoft.com/office/drawing/2014/main" id="{2E3B3276-119A-C843-F357-08A4D6AAA109}"/>
               </a:ext>
             </a:extLst>
           </p:cNvPr>
@@ -4137,7 +4136,7 @@
                 </a:solidFill>
                 <a:latin typeface="Aptos" panose="020B0004020202020204" pitchFamily="34" charset="0"/>
               </a:rPr>
-              <a:t>Điểm kiểm soát nhỏ nhưng quyết định correctness toàn hệ thống.</a:t>
+              <a:t>WAL bảo vệ trạng thái khi lỗi xảy ra giữa claim key và commit transaction.</a:t>
             </a:r>
           </a:p>
         </p:txBody>
@@ -4147,7 +4146,7 @@
           <p:cNvPr id="6" name="Rectangle 5">
             <a:extLst>
               <a:ext uri="{FF2B5EF4-FFF2-40B4-BE49-F238E27FC236}">
-                <a16:creationId xmlns:a16="http://schemas.microsoft.com/office/drawing/2014/main" id="{63431FCC-48B5-54B2-F8CC-051850E06A20}"/>
+                <a16:creationId xmlns:a16="http://schemas.microsoft.com/office/drawing/2014/main" id="{E41E461C-2118-A75C-3EE1-61F66EC7D5C9}"/>
               </a:ext>
             </a:extLst>
           </p:cNvPr>
@@ -4201,7 +4200,7 @@
           <p:cNvPr id="9" name="Rectangle: Rounded Corners 8">
             <a:extLst>
               <a:ext uri="{FF2B5EF4-FFF2-40B4-BE49-F238E27FC236}">
-                <a16:creationId xmlns:a16="http://schemas.microsoft.com/office/drawing/2014/main" id="{4985599B-B031-590E-A6AE-9C8CCFFD7575}"/>
+                <a16:creationId xmlns:a16="http://schemas.microsoft.com/office/drawing/2014/main" id="{70333749-82B4-82C2-351D-0371C777C727}"/>
               </a:ext>
             </a:extLst>
           </p:cNvPr>
@@ -4210,8 +4209,8 @@
         </p:nvSpPr>
         <p:spPr>
           <a:xfrm>
-            <a:off x="914400" y="2032000"/>
-            <a:ext cx="4572000" cy="2794000"/>
+            <a:off x="889000" y="2006600"/>
+            <a:ext cx="10414000" cy="1041400"/>
           </a:xfrm>
           <a:prstGeom prst="roundRect">
             <a:avLst/>
@@ -4255,7 +4254,7 @@
           <p:cNvPr id="10" name="TextBox 9">
             <a:extLst>
               <a:ext uri="{FF2B5EF4-FFF2-40B4-BE49-F238E27FC236}">
-                <a16:creationId xmlns:a16="http://schemas.microsoft.com/office/drawing/2014/main" id="{18B3655F-17E1-8991-A17B-99F0F62BA5B3}"/>
+                <a16:creationId xmlns:a16="http://schemas.microsoft.com/office/drawing/2014/main" id="{76A68BD9-6B58-4A99-1830-3DE28840061C}"/>
               </a:ext>
             </a:extLst>
           </p:cNvPr>
@@ -4264,8 +4263,8 @@
         </p:nvSpPr>
         <p:spPr>
           <a:xfrm>
-            <a:off x="1244600" y="2336800"/>
-            <a:ext cx="3810000" cy="338554"/>
+            <a:off x="1219200" y="2387600"/>
+            <a:ext cx="9652000" cy="615553"/>
           </a:xfrm>
           <a:prstGeom prst="rect">
             <a:avLst/>
@@ -4278,14 +4277,15 @@
           </a:bodyPr>
           <a:lstStyle/>
           <a:p>
-            <a:r>
-              <a:rPr lang="vi-VN" sz="2200" b="1">
-                <a:solidFill>
-                  <a:srgbClr val="F59E0B"/>
-                </a:solidFill>
-                <a:latin typeface="Aptos" panose="020B0004020202020204" pitchFamily="34" charset="0"/>
-              </a:rPr>
-              <a:t>GlobalDeduplicationStore</a:t>
+            <a:pPr algn="ctr"/>
+            <a:r>
+              <a:rPr lang="vi-VN" sz="2000" b="1">
+                <a:solidFill>
+                  <a:srgbClr val="10B981"/>
+                </a:solidFill>
+                <a:latin typeface="Aptos" panose="020B0004020202020204" pitchFamily="34" charset="0"/>
+              </a:rPr>
+              <a:t>Rule: ghi WAL PENDING trước khi thay đổi balance, sau commit đánh dấu COMMITTED.</a:t>
             </a:r>
           </a:p>
         </p:txBody>
@@ -4295,7 +4295,7 @@
           <p:cNvPr id="11" name="TextBox 10">
             <a:extLst>
               <a:ext uri="{FF2B5EF4-FFF2-40B4-BE49-F238E27FC236}">
-                <a16:creationId xmlns:a16="http://schemas.microsoft.com/office/drawing/2014/main" id="{A561747F-5695-2AFA-841E-8B8AC8FA1018}"/>
+                <a16:creationId xmlns:a16="http://schemas.microsoft.com/office/drawing/2014/main" id="{D4D3F365-9600-F8A1-B9F0-B71F236868B3}"/>
               </a:ext>
             </a:extLst>
           </p:cNvPr>
@@ -4304,8 +4304,8 @@
         </p:nvSpPr>
         <p:spPr>
           <a:xfrm>
-            <a:off x="1320800" y="2946400"/>
-            <a:ext cx="3708400" cy="1308050"/>
+            <a:off x="1320800" y="3581400"/>
+            <a:ext cx="9906000" cy="1107996"/>
           </a:xfrm>
           <a:prstGeom prst="rect">
             <a:avLst/>
@@ -4319,153 +4319,16 @@
           <a:lstStyle/>
           <a:p>
             <a:r>
-              <a:rPr lang="vi-VN" sz="1700">
+              <a:rPr lang="vi-VN">
                 <a:solidFill>
                   <a:srgbClr val="F1F5F9"/>
                 </a:solidFill>
                 <a:latin typeface="Aptos" panose="020B0004020202020204" pitchFamily="34" charset="0"/>
               </a:rPr>
-              <a:t>• idempotency_key là primary key
-• claimOrExisting() dùng insert atomic
-• completeSuccess() lưu result_data
-• deleteExpired() dùng event-time window</a:t>
-            </a:r>
-          </a:p>
-        </p:txBody>
-      </p:sp>
-      <p:sp>
-        <p:nvSpPr>
-          <p:cNvPr id="12" name="Rectangle: Rounded Corners 11">
-            <a:extLst>
-              <a:ext uri="{FF2B5EF4-FFF2-40B4-BE49-F238E27FC236}">
-                <a16:creationId xmlns:a16="http://schemas.microsoft.com/office/drawing/2014/main" id="{6BA1B64B-301A-A5DC-FD80-3E403DD9329B}"/>
-              </a:ext>
-            </a:extLst>
-          </p:cNvPr>
-          <p:cNvSpPr/>
-          <p:nvPr/>
-        </p:nvSpPr>
-        <p:spPr>
-          <a:xfrm>
-            <a:off x="6705600" y="2032000"/>
-            <a:ext cx="4318000" cy="2794000"/>
-          </a:xfrm>
-          <a:prstGeom prst="roundRect">
-            <a:avLst/>
-          </a:prstGeom>
-          <a:solidFill>
-            <a:srgbClr val="1E293B"/>
-          </a:solidFill>
-          <a:ln w="12700">
-            <a:solidFill>
-              <a:srgbClr val="334155"/>
-            </a:solidFill>
-          </a:ln>
-        </p:spPr>
-        <p:style>
-          <a:lnRef idx="2">
-            <a:schemeClr val="accent1">
-              <a:shade val="15000"/>
-            </a:schemeClr>
-          </a:lnRef>
-          <a:fillRef idx="1">
-            <a:schemeClr val="accent1"/>
-          </a:fillRef>
-          <a:effectRef idx="0">
-            <a:schemeClr val="accent1"/>
-          </a:effectRef>
-          <a:fontRef idx="minor">
-            <a:schemeClr val="lt1"/>
-          </a:fontRef>
-        </p:style>
-        <p:txBody>
-          <a:bodyPr rtlCol="0" anchor="ctr"/>
-          <a:lstStyle/>
-          <a:p>
-            <a:pPr algn="ctr"/>
-            <a:endParaRPr lang="vi-VN"/>
-          </a:p>
-        </p:txBody>
-      </p:sp>
-      <p:sp>
-        <p:nvSpPr>
-          <p:cNvPr id="13" name="TextBox 12">
-            <a:extLst>
-              <a:ext uri="{FF2B5EF4-FFF2-40B4-BE49-F238E27FC236}">
-                <a16:creationId xmlns:a16="http://schemas.microsoft.com/office/drawing/2014/main" id="{4398AD1D-01F6-3F0F-992A-0E24FC5E783F}"/>
-              </a:ext>
-            </a:extLst>
-          </p:cNvPr>
-          <p:cNvSpPr txBox="1"/>
-          <p:nvPr/>
-        </p:nvSpPr>
-        <p:spPr>
-          <a:xfrm>
-            <a:off x="7035800" y="2336800"/>
-            <a:ext cx="3302000" cy="338554"/>
-          </a:xfrm>
-          <a:prstGeom prst="rect">
-            <a:avLst/>
-          </a:prstGeom>
-          <a:noFill/>
-        </p:spPr>
-        <p:txBody>
-          <a:bodyPr vert="horz" lIns="0" tIns="0" rIns="0" bIns="0" rtlCol="0">
-            <a:spAutoFit/>
-          </a:bodyPr>
-          <a:lstStyle/>
-          <a:p>
-            <a:r>
-              <a:rPr lang="vi-VN" sz="2200" b="1">
-                <a:solidFill>
-                  <a:srgbClr val="22D3EE"/>
-                </a:solidFill>
-                <a:latin typeface="Aptos" panose="020B0004020202020204" pitchFamily="34" charset="0"/>
-              </a:rPr>
-              <a:t>Kịch bản cross-node</a:t>
-            </a:r>
-          </a:p>
-        </p:txBody>
-      </p:sp>
-      <p:sp>
-        <p:nvSpPr>
-          <p:cNvPr id="14" name="TextBox 13">
-            <a:extLst>
-              <a:ext uri="{FF2B5EF4-FFF2-40B4-BE49-F238E27FC236}">
-                <a16:creationId xmlns:a16="http://schemas.microsoft.com/office/drawing/2014/main" id="{86A173B4-5335-7C5C-F8E9-8D5A51479291}"/>
-              </a:ext>
-            </a:extLst>
-          </p:cNvPr>
-          <p:cNvSpPr txBox="1"/>
-          <p:nvPr/>
-        </p:nvSpPr>
-        <p:spPr>
-          <a:xfrm>
-            <a:off x="7112000" y="2946400"/>
-            <a:ext cx="3175000" cy="1308050"/>
-          </a:xfrm>
-          <a:prstGeom prst="rect">
-            <a:avLst/>
-          </a:prstGeom>
-          <a:noFill/>
-        </p:spPr>
-        <p:txBody>
-          <a:bodyPr vert="horz" lIns="0" tIns="0" rIns="0" bIns="0" rtlCol="0">
-            <a:spAutoFit/>
-          </a:bodyPr>
-          <a:lstStyle/>
-          <a:p>
-            <a:r>
-              <a:rPr lang="vi-VN" sz="1700">
-                <a:solidFill>
-                  <a:srgbClr val="F1F5F9"/>
-                </a:solidFill>
-                <a:latin typeface="Aptos" panose="020B0004020202020204" pitchFamily="34" charset="0"/>
-              </a:rPr>
-              <a:t>• Request 1 -&gt; NODE_B -&gt; SUCCESS
-• Request 2 cùng key -&gt; NODE_C
-• NODE_C thấy key đã claim
-• Kết quả: DUPLICATE_REJECTED</a:t>
+              <a:t>• wal_log_entry lưu before/after balance, nodeId, paymentId, idempotencyKey.
+• Replay WAL quét PENDING và kiểm tra transaction tương ứng.
+• Nếu transaction đã tồn tại: COMMITTED; nếu không: ROLLED_BACK.
+• Dashboard có nút Replay WAL để demo recovery path.</a:t>
             </a:r>
           </a:p>
         </p:txBody>
@@ -4473,7 +4336,7 @@
     </p:spTree>
     <p:extLst>
       <p:ext uri="{BB962C8B-B14F-4D97-AF65-F5344CB8AC3E}">
-        <p14:creationId xmlns:p14="http://schemas.microsoft.com/office/powerpoint/2010/main" val="2784200470"/>
+        <p14:creationId xmlns:p14="http://schemas.microsoft.com/office/powerpoint/2010/main" val="2519050645"/>
       </p:ext>
     </p:extLst>
   </p:cSld>
@@ -4505,7 +4368,7 @@
           <p:cNvPr id="2" name="Rectangle 1">
             <a:extLst>
               <a:ext uri="{FF2B5EF4-FFF2-40B4-BE49-F238E27FC236}">
-                <a16:creationId xmlns:a16="http://schemas.microsoft.com/office/drawing/2014/main" id="{494EBAE0-739B-3E58-877D-55640DE59310}"/>
+                <a16:creationId xmlns:a16="http://schemas.microsoft.com/office/drawing/2014/main" id="{994CEFB8-146C-221C-2DAD-C3D5EC397980}"/>
               </a:ext>
             </a:extLst>
           </p:cNvPr>
@@ -4573,7 +4436,7 @@
           <p:cNvPr id="3" name="TextBox 2">
             <a:extLst>
               <a:ext uri="{FF2B5EF4-FFF2-40B4-BE49-F238E27FC236}">
-                <a16:creationId xmlns:a16="http://schemas.microsoft.com/office/drawing/2014/main" id="{1EF93D0D-A77C-6FC7-316D-D5F6E68AD49A}"/>
+                <a16:creationId xmlns:a16="http://schemas.microsoft.com/office/drawing/2014/main" id="{1469C208-9FEA-2F8B-5FA1-548766F4B099}"/>
               </a:ext>
             </a:extLst>
           </p:cNvPr>
@@ -4603,7 +4466,7 @@
                 </a:solidFill>
                 <a:latin typeface="Aptos" panose="020B0004020202020204" pitchFamily="34" charset="0"/>
               </a:rPr>
-              <a:t>04 / WAL</a:t>
+              <a:t>04 / STREAM</a:t>
             </a:r>
           </a:p>
         </p:txBody>
@@ -4613,7 +4476,7 @@
           <p:cNvPr id="4" name="TextBox 3">
             <a:extLst>
               <a:ext uri="{FF2B5EF4-FFF2-40B4-BE49-F238E27FC236}">
-                <a16:creationId xmlns:a16="http://schemas.microsoft.com/office/drawing/2014/main" id="{9EBBBB7F-F208-40C8-8507-969D30DF3D53}"/>
+                <a16:creationId xmlns:a16="http://schemas.microsoft.com/office/drawing/2014/main" id="{022CA110-5F1A-7566-F3D2-BCBFD9945E48}"/>
               </a:ext>
             </a:extLst>
           </p:cNvPr>
@@ -4643,7 +4506,7 @@
                 </a:solidFill>
                 <a:latin typeface="Aptos" panose="020B0004020202020204" pitchFamily="34" charset="0"/>
               </a:rPr>
-              <a:t>Write-Ahead Log và recovery</a:t>
+              <a:t>Event-time stream processing</a:t>
             </a:r>
           </a:p>
         </p:txBody>
@@ -4653,7 +4516,7 @@
           <p:cNvPr id="5" name="TextBox 4">
             <a:extLst>
               <a:ext uri="{FF2B5EF4-FFF2-40B4-BE49-F238E27FC236}">
-                <a16:creationId xmlns:a16="http://schemas.microsoft.com/office/drawing/2014/main" id="{2E3B3276-119A-C843-F357-08A4D6AAA109}"/>
+                <a16:creationId xmlns:a16="http://schemas.microsoft.com/office/drawing/2014/main" id="{204D08F6-43F4-0BCC-0EF0-7B95142E047A}"/>
               </a:ext>
             </a:extLst>
           </p:cNvPr>
@@ -4683,7 +4546,7 @@
                 </a:solidFill>
                 <a:latin typeface="Aptos" panose="020B0004020202020204" pitchFamily="34" charset="0"/>
               </a:rPr>
-              <a:t>WAL bảo vệ trạng thái khi lỗi xảy ra giữa claim key và commit transaction.</a:t>
+              <a:t>Benchmark không chỉ bắn request tuần tự; nó tạo disorder có kiểm soát.</a:t>
             </a:r>
           </a:p>
         </p:txBody>
@@ -4693,7 +4556,7 @@
           <p:cNvPr id="6" name="Rectangle 5">
             <a:extLst>
               <a:ext uri="{FF2B5EF4-FFF2-40B4-BE49-F238E27FC236}">
-                <a16:creationId xmlns:a16="http://schemas.microsoft.com/office/drawing/2014/main" id="{E41E461C-2118-A75C-3EE1-61F66EC7D5C9}"/>
+                <a16:creationId xmlns:a16="http://schemas.microsoft.com/office/drawing/2014/main" id="{D482AEDC-0EA4-7A2D-202F-7AAEEDE47722}"/>
               </a:ext>
             </a:extLst>
           </p:cNvPr>
@@ -4747,7 +4610,7 @@
           <p:cNvPr id="9" name="Rectangle: Rounded Corners 8">
             <a:extLst>
               <a:ext uri="{FF2B5EF4-FFF2-40B4-BE49-F238E27FC236}">
-                <a16:creationId xmlns:a16="http://schemas.microsoft.com/office/drawing/2014/main" id="{70333749-82B4-82C2-351D-0371C777C727}"/>
+                <a16:creationId xmlns:a16="http://schemas.microsoft.com/office/drawing/2014/main" id="{45915ED6-1742-62B5-5028-44A6197658D6}"/>
               </a:ext>
             </a:extLst>
           </p:cNvPr>
@@ -4756,8 +4619,8 @@
         </p:nvSpPr>
         <p:spPr>
           <a:xfrm>
-            <a:off x="889000" y="2006600"/>
-            <a:ext cx="10414000" cy="1041400"/>
+            <a:off x="939800" y="2006600"/>
+            <a:ext cx="2413000" cy="965200"/>
           </a:xfrm>
           <a:prstGeom prst="roundRect">
             <a:avLst/>
@@ -4801,7 +4664,7 @@
           <p:cNvPr id="10" name="TextBox 9">
             <a:extLst>
               <a:ext uri="{FF2B5EF4-FFF2-40B4-BE49-F238E27FC236}">
-                <a16:creationId xmlns:a16="http://schemas.microsoft.com/office/drawing/2014/main" id="{76A68BD9-6B58-4A99-1830-3DE28840061C}"/>
+                <a16:creationId xmlns:a16="http://schemas.microsoft.com/office/drawing/2014/main" id="{A0F68872-FAC7-F35D-9026-1BFC5A8F9D8A}"/>
               </a:ext>
             </a:extLst>
           </p:cNvPr>
@@ -4810,8 +4673,8 @@
         </p:nvSpPr>
         <p:spPr>
           <a:xfrm>
-            <a:off x="1219200" y="2387600"/>
-            <a:ext cx="9652000" cy="615553"/>
+            <a:off x="1117600" y="2171700"/>
+            <a:ext cx="2057400" cy="369332"/>
           </a:xfrm>
           <a:prstGeom prst="rect">
             <a:avLst/>
@@ -4824,15 +4687,14 @@
           </a:bodyPr>
           <a:lstStyle/>
           <a:p>
-            <a:pPr algn="ctr"/>
-            <a:r>
-              <a:rPr lang="vi-VN" sz="2000" b="1">
-                <a:solidFill>
-                  <a:srgbClr val="10B981"/>
-                </a:solidFill>
-                <a:latin typeface="Aptos" panose="020B0004020202020204" pitchFamily="34" charset="0"/>
-              </a:rPr>
-              <a:t>Rule: ghi WAL PENDING trước khi thay đổi balance, sau commit đánh dấu COMMITTED.</a:t>
+            <a:r>
+              <a:rPr lang="vi-VN" sz="2400" b="1">
+                <a:solidFill>
+                  <a:srgbClr val="EF4444"/>
+                </a:solidFill>
+                <a:latin typeface="Aptos" panose="020B0004020202020204" pitchFamily="34" charset="0"/>
+              </a:rPr>
+              <a:t>73</a:t>
             </a:r>
           </a:p>
         </p:txBody>
@@ -4842,7 +4704,7 @@
           <p:cNvPr id="11" name="TextBox 10">
             <a:extLst>
               <a:ext uri="{FF2B5EF4-FFF2-40B4-BE49-F238E27FC236}">
-                <a16:creationId xmlns:a16="http://schemas.microsoft.com/office/drawing/2014/main" id="{D4D3F365-9600-F8A1-B9F0-B71F236868B3}"/>
+                <a16:creationId xmlns:a16="http://schemas.microsoft.com/office/drawing/2014/main" id="{314EAB4C-CF83-B11A-7B9C-BA115769414C}"/>
               </a:ext>
             </a:extLst>
           </p:cNvPr>
@@ -4851,8 +4713,8 @@
         </p:nvSpPr>
         <p:spPr>
           <a:xfrm>
-            <a:off x="1320800" y="3581400"/>
-            <a:ext cx="9906000" cy="1107996"/>
+            <a:off x="1117600" y="2616200"/>
+            <a:ext cx="2057400" cy="153888"/>
           </a:xfrm>
           <a:prstGeom prst="rect">
             <a:avLst/>
@@ -4866,16 +4728,459 @@
           <a:lstStyle/>
           <a:p>
             <a:r>
+              <a:rPr lang="vi-VN" sz="1000">
+                <a:solidFill>
+                  <a:srgbClr val="94A3B8"/>
+                </a:solidFill>
+                <a:latin typeface="Aptos" panose="020B0004020202020204" pitchFamily="34" charset="0"/>
+              </a:rPr>
+              <a:t>Out-of-order</a:t>
+            </a:r>
+          </a:p>
+        </p:txBody>
+      </p:sp>
+      <p:sp>
+        <p:nvSpPr>
+          <p:cNvPr id="12" name="Rectangle: Rounded Corners 11">
+            <a:extLst>
+              <a:ext uri="{FF2B5EF4-FFF2-40B4-BE49-F238E27FC236}">
+                <a16:creationId xmlns:a16="http://schemas.microsoft.com/office/drawing/2014/main" id="{53F718EA-DAB5-A49A-3850-B6F3ACA1E6E3}"/>
+              </a:ext>
+            </a:extLst>
+          </p:cNvPr>
+          <p:cNvSpPr/>
+          <p:nvPr/>
+        </p:nvSpPr>
+        <p:spPr>
+          <a:xfrm>
+            <a:off x="3708400" y="2006600"/>
+            <a:ext cx="2413000" cy="965200"/>
+          </a:xfrm>
+          <a:prstGeom prst="roundRect">
+            <a:avLst/>
+          </a:prstGeom>
+          <a:solidFill>
+            <a:srgbClr val="1E293B"/>
+          </a:solidFill>
+          <a:ln w="12700">
+            <a:solidFill>
+              <a:srgbClr val="334155"/>
+            </a:solidFill>
+          </a:ln>
+        </p:spPr>
+        <p:style>
+          <a:lnRef idx="2">
+            <a:schemeClr val="accent1">
+              <a:shade val="15000"/>
+            </a:schemeClr>
+          </a:lnRef>
+          <a:fillRef idx="1">
+            <a:schemeClr val="accent1"/>
+          </a:fillRef>
+          <a:effectRef idx="0">
+            <a:schemeClr val="accent1"/>
+          </a:effectRef>
+          <a:fontRef idx="minor">
+            <a:schemeClr val="lt1"/>
+          </a:fontRef>
+        </p:style>
+        <p:txBody>
+          <a:bodyPr rtlCol="0" anchor="ctr"/>
+          <a:lstStyle/>
+          <a:p>
+            <a:pPr algn="ctr"/>
+            <a:endParaRPr lang="vi-VN"/>
+          </a:p>
+        </p:txBody>
+      </p:sp>
+      <p:sp>
+        <p:nvSpPr>
+          <p:cNvPr id="13" name="TextBox 12">
+            <a:extLst>
+              <a:ext uri="{FF2B5EF4-FFF2-40B4-BE49-F238E27FC236}">
+                <a16:creationId xmlns:a16="http://schemas.microsoft.com/office/drawing/2014/main" id="{6422A16C-8430-8EDE-A7BA-C876A9F6A04F}"/>
+              </a:ext>
+            </a:extLst>
+          </p:cNvPr>
+          <p:cNvSpPr txBox="1"/>
+          <p:nvPr/>
+        </p:nvSpPr>
+        <p:spPr>
+          <a:xfrm>
+            <a:off x="3886200" y="2171700"/>
+            <a:ext cx="2057400" cy="369332"/>
+          </a:xfrm>
+          <a:prstGeom prst="rect">
+            <a:avLst/>
+          </a:prstGeom>
+          <a:noFill/>
+        </p:spPr>
+        <p:txBody>
+          <a:bodyPr vert="horz" lIns="0" tIns="0" rIns="0" bIns="0" rtlCol="0">
+            <a:spAutoFit/>
+          </a:bodyPr>
+          <a:lstStyle/>
+          <a:p>
+            <a:r>
+              <a:rPr lang="vi-VN" sz="2400" b="1">
+                <a:solidFill>
+                  <a:srgbClr val="EF4444"/>
+                </a:solidFill>
+                <a:latin typeface="Aptos" panose="020B0004020202020204" pitchFamily="34" charset="0"/>
+              </a:rPr>
+              <a:t>8</a:t>
+            </a:r>
+          </a:p>
+        </p:txBody>
+      </p:sp>
+      <p:sp>
+        <p:nvSpPr>
+          <p:cNvPr id="14" name="TextBox 13">
+            <a:extLst>
+              <a:ext uri="{FF2B5EF4-FFF2-40B4-BE49-F238E27FC236}">
+                <a16:creationId xmlns:a16="http://schemas.microsoft.com/office/drawing/2014/main" id="{97C5D911-643E-66C6-0480-B87374F146C8}"/>
+              </a:ext>
+            </a:extLst>
+          </p:cNvPr>
+          <p:cNvSpPr txBox="1"/>
+          <p:nvPr/>
+        </p:nvSpPr>
+        <p:spPr>
+          <a:xfrm>
+            <a:off x="3886200" y="2616200"/>
+            <a:ext cx="2057400" cy="153888"/>
+          </a:xfrm>
+          <a:prstGeom prst="rect">
+            <a:avLst/>
+          </a:prstGeom>
+          <a:noFill/>
+        </p:spPr>
+        <p:txBody>
+          <a:bodyPr vert="horz" lIns="0" tIns="0" rIns="0" bIns="0" rtlCol="0">
+            <a:spAutoFit/>
+          </a:bodyPr>
+          <a:lstStyle/>
+          <a:p>
+            <a:r>
+              <a:rPr lang="vi-VN" sz="1000">
+                <a:solidFill>
+                  <a:srgbClr val="94A3B8"/>
+                </a:solidFill>
+                <a:latin typeface="Aptos" panose="020B0004020202020204" pitchFamily="34" charset="0"/>
+              </a:rPr>
+              <a:t>Late events</a:t>
+            </a:r>
+          </a:p>
+        </p:txBody>
+      </p:sp>
+      <p:sp>
+        <p:nvSpPr>
+          <p:cNvPr id="15" name="Rectangle: Rounded Corners 14">
+            <a:extLst>
+              <a:ext uri="{FF2B5EF4-FFF2-40B4-BE49-F238E27FC236}">
+                <a16:creationId xmlns:a16="http://schemas.microsoft.com/office/drawing/2014/main" id="{4A26FEE3-AF3E-1127-992A-ABBA09F3D7D5}"/>
+              </a:ext>
+            </a:extLst>
+          </p:cNvPr>
+          <p:cNvSpPr/>
+          <p:nvPr/>
+        </p:nvSpPr>
+        <p:spPr>
+          <a:xfrm>
+            <a:off x="6477000" y="2006600"/>
+            <a:ext cx="2921000" cy="965200"/>
+          </a:xfrm>
+          <a:prstGeom prst="roundRect">
+            <a:avLst/>
+          </a:prstGeom>
+          <a:solidFill>
+            <a:srgbClr val="1E293B"/>
+          </a:solidFill>
+          <a:ln w="12700">
+            <a:solidFill>
+              <a:srgbClr val="334155"/>
+            </a:solidFill>
+          </a:ln>
+        </p:spPr>
+        <p:style>
+          <a:lnRef idx="2">
+            <a:schemeClr val="accent1">
+              <a:shade val="15000"/>
+            </a:schemeClr>
+          </a:lnRef>
+          <a:fillRef idx="1">
+            <a:schemeClr val="accent1"/>
+          </a:fillRef>
+          <a:effectRef idx="0">
+            <a:schemeClr val="accent1"/>
+          </a:effectRef>
+          <a:fontRef idx="minor">
+            <a:schemeClr val="lt1"/>
+          </a:fontRef>
+        </p:style>
+        <p:txBody>
+          <a:bodyPr rtlCol="0" anchor="ctr"/>
+          <a:lstStyle/>
+          <a:p>
+            <a:pPr algn="ctr"/>
+            <a:endParaRPr lang="vi-VN"/>
+          </a:p>
+        </p:txBody>
+      </p:sp>
+      <p:sp>
+        <p:nvSpPr>
+          <p:cNvPr id="16" name="TextBox 15">
+            <a:extLst>
+              <a:ext uri="{FF2B5EF4-FFF2-40B4-BE49-F238E27FC236}">
+                <a16:creationId xmlns:a16="http://schemas.microsoft.com/office/drawing/2014/main" id="{3FDAB527-E39C-9B34-8ECA-3E0AE1262ADB}"/>
+              </a:ext>
+            </a:extLst>
+          </p:cNvPr>
+          <p:cNvSpPr txBox="1"/>
+          <p:nvPr/>
+        </p:nvSpPr>
+        <p:spPr>
+          <a:xfrm>
+            <a:off x="6654800" y="2171700"/>
+            <a:ext cx="2565400" cy="369332"/>
+          </a:xfrm>
+          <a:prstGeom prst="rect">
+            <a:avLst/>
+          </a:prstGeom>
+          <a:noFill/>
+        </p:spPr>
+        <p:txBody>
+          <a:bodyPr vert="horz" lIns="0" tIns="0" rIns="0" bIns="0" rtlCol="0">
+            <a:spAutoFit/>
+          </a:bodyPr>
+          <a:lstStyle/>
+          <a:p>
+            <a:r>
+              <a:rPr lang="vi-VN" sz="2400" b="1">
+                <a:solidFill>
+                  <a:srgbClr val="F59E0B"/>
+                </a:solidFill>
+                <a:latin typeface="Aptos" panose="020B0004020202020204" pitchFamily="34" charset="0"/>
+              </a:rPr>
+              <a:t>6</a:t>
+            </a:r>
+          </a:p>
+        </p:txBody>
+      </p:sp>
+      <p:sp>
+        <p:nvSpPr>
+          <p:cNvPr id="17" name="TextBox 16">
+            <a:extLst>
+              <a:ext uri="{FF2B5EF4-FFF2-40B4-BE49-F238E27FC236}">
+                <a16:creationId xmlns:a16="http://schemas.microsoft.com/office/drawing/2014/main" id="{E0C49261-1851-8BB3-424D-E0C0A2DCC349}"/>
+              </a:ext>
+            </a:extLst>
+          </p:cNvPr>
+          <p:cNvSpPr txBox="1"/>
+          <p:nvPr/>
+        </p:nvSpPr>
+        <p:spPr>
+          <a:xfrm>
+            <a:off x="6654800" y="2616200"/>
+            <a:ext cx="2565400" cy="153888"/>
+          </a:xfrm>
+          <a:prstGeom prst="rect">
+            <a:avLst/>
+          </a:prstGeom>
+          <a:noFill/>
+        </p:spPr>
+        <p:txBody>
+          <a:bodyPr vert="horz" lIns="0" tIns="0" rIns="0" bIns="0" rtlCol="0">
+            <a:spAutoFit/>
+          </a:bodyPr>
+          <a:lstStyle/>
+          <a:p>
+            <a:r>
+              <a:rPr lang="vi-VN" sz="1000">
+                <a:solidFill>
+                  <a:srgbClr val="94A3B8"/>
+                </a:solidFill>
+                <a:latin typeface="Aptos" panose="020B0004020202020204" pitchFamily="34" charset="0"/>
+              </a:rPr>
+              <a:t>Backpressure delayed</a:t>
+            </a:r>
+          </a:p>
+        </p:txBody>
+      </p:sp>
+      <p:sp>
+        <p:nvSpPr>
+          <p:cNvPr id="18" name="Rectangle: Rounded Corners 17">
+            <a:extLst>
+              <a:ext uri="{FF2B5EF4-FFF2-40B4-BE49-F238E27FC236}">
+                <a16:creationId xmlns:a16="http://schemas.microsoft.com/office/drawing/2014/main" id="{8FF4D73B-F3A0-E65A-AD46-EB425F77EEE9}"/>
+              </a:ext>
+            </a:extLst>
+          </p:cNvPr>
+          <p:cNvSpPr/>
+          <p:nvPr/>
+        </p:nvSpPr>
+        <p:spPr>
+          <a:xfrm>
+            <a:off x="9753600" y="2006600"/>
+            <a:ext cx="1600200" cy="965200"/>
+          </a:xfrm>
+          <a:prstGeom prst="roundRect">
+            <a:avLst/>
+          </a:prstGeom>
+          <a:solidFill>
+            <a:srgbClr val="1E293B"/>
+          </a:solidFill>
+          <a:ln w="12700">
+            <a:solidFill>
+              <a:srgbClr val="334155"/>
+            </a:solidFill>
+          </a:ln>
+        </p:spPr>
+        <p:style>
+          <a:lnRef idx="2">
+            <a:schemeClr val="accent1">
+              <a:shade val="15000"/>
+            </a:schemeClr>
+          </a:lnRef>
+          <a:fillRef idx="1">
+            <a:schemeClr val="accent1"/>
+          </a:fillRef>
+          <a:effectRef idx="0">
+            <a:schemeClr val="accent1"/>
+          </a:effectRef>
+          <a:fontRef idx="minor">
+            <a:schemeClr val="lt1"/>
+          </a:fontRef>
+        </p:style>
+        <p:txBody>
+          <a:bodyPr rtlCol="0" anchor="ctr"/>
+          <a:lstStyle/>
+          <a:p>
+            <a:pPr algn="ctr"/>
+            <a:endParaRPr lang="vi-VN"/>
+          </a:p>
+        </p:txBody>
+      </p:sp>
+      <p:sp>
+        <p:nvSpPr>
+          <p:cNvPr id="19" name="TextBox 18">
+            <a:extLst>
+              <a:ext uri="{FF2B5EF4-FFF2-40B4-BE49-F238E27FC236}">
+                <a16:creationId xmlns:a16="http://schemas.microsoft.com/office/drawing/2014/main" id="{B0D41854-D127-28A6-F3B9-396AEF745AE1}"/>
+              </a:ext>
+            </a:extLst>
+          </p:cNvPr>
+          <p:cNvSpPr txBox="1"/>
+          <p:nvPr/>
+        </p:nvSpPr>
+        <p:spPr>
+          <a:xfrm>
+            <a:off x="9931400" y="2171700"/>
+            <a:ext cx="1244600" cy="369332"/>
+          </a:xfrm>
+          <a:prstGeom prst="rect">
+            <a:avLst/>
+          </a:prstGeom>
+          <a:noFill/>
+        </p:spPr>
+        <p:txBody>
+          <a:bodyPr vert="horz" lIns="0" tIns="0" rIns="0" bIns="0" rtlCol="0">
+            <a:spAutoFit/>
+          </a:bodyPr>
+          <a:lstStyle/>
+          <a:p>
+            <a:r>
+              <a:rPr lang="vi-VN" sz="2400" b="1">
+                <a:solidFill>
+                  <a:srgbClr val="22D3EE"/>
+                </a:solidFill>
+                <a:latin typeface="Aptos" panose="020B0004020202020204" pitchFamily="34" charset="0"/>
+              </a:rPr>
+              <a:t>10s</a:t>
+            </a:r>
+          </a:p>
+        </p:txBody>
+      </p:sp>
+      <p:sp>
+        <p:nvSpPr>
+          <p:cNvPr id="20" name="TextBox 19">
+            <a:extLst>
+              <a:ext uri="{FF2B5EF4-FFF2-40B4-BE49-F238E27FC236}">
+                <a16:creationId xmlns:a16="http://schemas.microsoft.com/office/drawing/2014/main" id="{DA583E13-7092-A1A6-ED16-C0CDE66AA420}"/>
+              </a:ext>
+            </a:extLst>
+          </p:cNvPr>
+          <p:cNvSpPr txBox="1"/>
+          <p:nvPr/>
+        </p:nvSpPr>
+        <p:spPr>
+          <a:xfrm>
+            <a:off x="9931400" y="2616200"/>
+            <a:ext cx="1244600" cy="153888"/>
+          </a:xfrm>
+          <a:prstGeom prst="rect">
+            <a:avLst/>
+          </a:prstGeom>
+          <a:noFill/>
+        </p:spPr>
+        <p:txBody>
+          <a:bodyPr vert="horz" lIns="0" tIns="0" rIns="0" bIns="0" rtlCol="0">
+            <a:spAutoFit/>
+          </a:bodyPr>
+          <a:lstStyle/>
+          <a:p>
+            <a:r>
+              <a:rPr lang="vi-VN" sz="1000">
+                <a:solidFill>
+                  <a:srgbClr val="94A3B8"/>
+                </a:solidFill>
+                <a:latin typeface="Aptos" panose="020B0004020202020204" pitchFamily="34" charset="0"/>
+              </a:rPr>
+              <a:t>Window size</a:t>
+            </a:r>
+          </a:p>
+        </p:txBody>
+      </p:sp>
+      <p:sp>
+        <p:nvSpPr>
+          <p:cNvPr id="21" name="TextBox 20">
+            <a:extLst>
+              <a:ext uri="{FF2B5EF4-FFF2-40B4-BE49-F238E27FC236}">
+                <a16:creationId xmlns:a16="http://schemas.microsoft.com/office/drawing/2014/main" id="{3E99502E-10D6-69BC-9445-51FEDF9F71D5}"/>
+              </a:ext>
+            </a:extLst>
+          </p:cNvPr>
+          <p:cNvSpPr txBox="1"/>
+          <p:nvPr/>
+        </p:nvSpPr>
+        <p:spPr>
+          <a:xfrm>
+            <a:off x="1168400" y="3606800"/>
+            <a:ext cx="9906000" cy="1384995"/>
+          </a:xfrm>
+          <a:prstGeom prst="rect">
+            <a:avLst/>
+          </a:prstGeom>
+          <a:noFill/>
+        </p:spPr>
+        <p:txBody>
+          <a:bodyPr vert="horz" lIns="0" tIns="0" rIns="0" bIns="0" rtlCol="0">
+            <a:spAutoFit/>
+          </a:bodyPr>
+          <a:lstStyle/>
+          <a:p>
+            <a:r>
               <a:rPr lang="vi-VN">
                 <a:solidFill>
                   <a:srgbClr val="F1F5F9"/>
                 </a:solidFill>
                 <a:latin typeface="Aptos" panose="020B0004020202020204" pitchFamily="34" charset="0"/>
               </a:rPr>
-              <a:t>• wal_log_entry lưu before/after balance, nodeId, paymentId, idempotencyKey.
-• Replay WAL quét PENDING và kiểm tra transaction tương ứng.
-• Nếu transaction đã tồn tại: COMMITTED; nếu không: ROLLED_BACK.
-• Dashboard có nút Replay WAL để demo recovery path.</a:t>
+              <a:t>• eventTimeMs dùng để tính tumbling window.
+• processingTimeMs dùng để đo event lag.
+• watermark = maxEventTime - allowedLatenessMs.
+• lateEvents tăng khi eventTimeMs nhỏ hơn watermark.
+• backpressureDelayed mô phỏng nghẽn khi vượt max-in-flight events.</a:t>
             </a:r>
           </a:p>
         </p:txBody>
@@ -4883,7 +5188,7 @@
     </p:spTree>
     <p:extLst>
       <p:ext uri="{BB962C8B-B14F-4D97-AF65-F5344CB8AC3E}">
-        <p14:creationId xmlns:p14="http://schemas.microsoft.com/office/powerpoint/2010/main" val="2519050645"/>
+        <p14:creationId xmlns:p14="http://schemas.microsoft.com/office/powerpoint/2010/main" val="3324969749"/>
       </p:ext>
     </p:extLst>
   </p:cSld>
@@ -4915,7 +5220,7 @@
           <p:cNvPr id="2" name="Rectangle 1">
             <a:extLst>
               <a:ext uri="{FF2B5EF4-FFF2-40B4-BE49-F238E27FC236}">
-                <a16:creationId xmlns:a16="http://schemas.microsoft.com/office/drawing/2014/main" id="{994CEFB8-146C-221C-2DAD-C3D5EC397980}"/>
+                <a16:creationId xmlns:a16="http://schemas.microsoft.com/office/drawing/2014/main" id="{8E040408-4063-4CD9-E194-BEDD6B309A80}"/>
               </a:ext>
             </a:extLst>
           </p:cNvPr>
@@ -4983,7 +5288,7 @@
           <p:cNvPr id="3" name="TextBox 2">
             <a:extLst>
               <a:ext uri="{FF2B5EF4-FFF2-40B4-BE49-F238E27FC236}">
-                <a16:creationId xmlns:a16="http://schemas.microsoft.com/office/drawing/2014/main" id="{1469C208-9FEA-2F8B-5FA1-548766F4B099}"/>
+                <a16:creationId xmlns:a16="http://schemas.microsoft.com/office/drawing/2014/main" id="{54A71FBA-17C7-7F8D-7645-DB1821FD2403}"/>
               </a:ext>
             </a:extLst>
           </p:cNvPr>
@@ -5013,7 +5318,7 @@
                 </a:solidFill>
                 <a:latin typeface="Aptos" panose="020B0004020202020204" pitchFamily="34" charset="0"/>
               </a:rPr>
-              <a:t>04 / STREAM</a:t>
+              <a:t>05 / METRICS</a:t>
             </a:r>
           </a:p>
         </p:txBody>
@@ -5023,7 +5328,7 @@
           <p:cNvPr id="4" name="TextBox 3">
             <a:extLst>
               <a:ext uri="{FF2B5EF4-FFF2-40B4-BE49-F238E27FC236}">
-                <a16:creationId xmlns:a16="http://schemas.microsoft.com/office/drawing/2014/main" id="{022CA110-5F1A-7566-F3D2-BCBFD9945E48}"/>
+                <a16:creationId xmlns:a16="http://schemas.microsoft.com/office/drawing/2014/main" id="{ABF0CC2F-A875-A6B3-D0B6-8347BF68AE63}"/>
               </a:ext>
             </a:extLst>
           </p:cNvPr>
@@ -5053,7 +5358,7 @@
                 </a:solidFill>
                 <a:latin typeface="Aptos" panose="020B0004020202020204" pitchFamily="34" charset="0"/>
               </a:rPr>
-              <a:t>Event-time stream processing</a:t>
+              <a:t>Benchmark metrics checklist</a:t>
             </a:r>
           </a:p>
         </p:txBody>
@@ -5063,7 +5368,7 @@
           <p:cNvPr id="5" name="TextBox 4">
             <a:extLst>
               <a:ext uri="{FF2B5EF4-FFF2-40B4-BE49-F238E27FC236}">
-                <a16:creationId xmlns:a16="http://schemas.microsoft.com/office/drawing/2014/main" id="{204D08F6-43F4-0BCC-0EF0-7B95142E047A}"/>
+                <a16:creationId xmlns:a16="http://schemas.microsoft.com/office/drawing/2014/main" id="{2FF0F27D-0486-86E9-6A0A-167DDA0BC4AB}"/>
               </a:ext>
             </a:extLst>
           </p:cNvPr>
@@ -5093,7 +5398,7 @@
                 </a:solidFill>
                 <a:latin typeface="Aptos" panose="020B0004020202020204" pitchFamily="34" charset="0"/>
               </a:rPr>
-              <a:t>Benchmark không chỉ bắn request tuần tự; nó tạo disorder có kiểm soát.</a:t>
+              <a:t>Các chỉ số được đo trực tiếp từ BenchmarkRun và StreamWindow.</a:t>
             </a:r>
           </a:p>
         </p:txBody>
@@ -5103,7 +5408,7 @@
           <p:cNvPr id="6" name="Rectangle 5">
             <a:extLst>
               <a:ext uri="{FF2B5EF4-FFF2-40B4-BE49-F238E27FC236}">
-                <a16:creationId xmlns:a16="http://schemas.microsoft.com/office/drawing/2014/main" id="{D482AEDC-0EA4-7A2D-202F-7AAEEDE47722}"/>
+                <a16:creationId xmlns:a16="http://schemas.microsoft.com/office/drawing/2014/main" id="{DFD19B33-D8BE-03A6-0E60-F292990D35E5}"/>
               </a:ext>
             </a:extLst>
           </p:cNvPr>
@@ -5157,7 +5462,7 @@
           <p:cNvPr id="9" name="Rectangle: Rounded Corners 8">
             <a:extLst>
               <a:ext uri="{FF2B5EF4-FFF2-40B4-BE49-F238E27FC236}">
-                <a16:creationId xmlns:a16="http://schemas.microsoft.com/office/drawing/2014/main" id="{45915ED6-1742-62B5-5028-44A6197658D6}"/>
+                <a16:creationId xmlns:a16="http://schemas.microsoft.com/office/drawing/2014/main" id="{A637E52B-864C-BFA1-A8E6-E43CA3157119}"/>
               </a:ext>
             </a:extLst>
           </p:cNvPr>
@@ -5166,8 +5471,8 @@
         </p:nvSpPr>
         <p:spPr>
           <a:xfrm>
-            <a:off x="939800" y="2006600"/>
-            <a:ext cx="2413000" cy="965200"/>
+            <a:off x="787400" y="2006600"/>
+            <a:ext cx="2032000" cy="965200"/>
           </a:xfrm>
           <a:prstGeom prst="roundRect">
             <a:avLst/>
@@ -5211,7 +5516,7 @@
           <p:cNvPr id="10" name="TextBox 9">
             <a:extLst>
               <a:ext uri="{FF2B5EF4-FFF2-40B4-BE49-F238E27FC236}">
-                <a16:creationId xmlns:a16="http://schemas.microsoft.com/office/drawing/2014/main" id="{A0F68872-FAC7-F35D-9026-1BFC5A8F9D8A}"/>
+                <a16:creationId xmlns:a16="http://schemas.microsoft.com/office/drawing/2014/main" id="{D03B5FF3-06A8-DC57-4ED3-B07900D333BE}"/>
               </a:ext>
             </a:extLst>
           </p:cNvPr>
@@ -5220,8 +5525,8 @@
         </p:nvSpPr>
         <p:spPr>
           <a:xfrm>
-            <a:off x="1117600" y="2171700"/>
-            <a:ext cx="2057400" cy="369332"/>
+            <a:off x="965200" y="2171700"/>
+            <a:ext cx="1676400" cy="369332"/>
           </a:xfrm>
           <a:prstGeom prst="rect">
             <a:avLst/>
@@ -5237,11 +5542,11 @@
             <a:r>
               <a:rPr lang="vi-VN" sz="2400" b="1">
                 <a:solidFill>
-                  <a:srgbClr val="EF4444"/>
-                </a:solidFill>
-                <a:latin typeface="Aptos" panose="020B0004020202020204" pitchFamily="34" charset="0"/>
-              </a:rPr>
-              <a:t>73</a:t>
+                  <a:srgbClr val="60A5FA"/>
+                </a:solidFill>
+                <a:latin typeface="Aptos" panose="020B0004020202020204" pitchFamily="34" charset="0"/>
+              </a:rPr>
+              <a:t>TPS</a:t>
             </a:r>
           </a:p>
         </p:txBody>
@@ -5251,7 +5556,7 @@
           <p:cNvPr id="11" name="TextBox 10">
             <a:extLst>
               <a:ext uri="{FF2B5EF4-FFF2-40B4-BE49-F238E27FC236}">
-                <a16:creationId xmlns:a16="http://schemas.microsoft.com/office/drawing/2014/main" id="{314EAB4C-CF83-B11A-7B9C-BA115769414C}"/>
+                <a16:creationId xmlns:a16="http://schemas.microsoft.com/office/drawing/2014/main" id="{5D52C6CC-1819-6D28-0E1E-72A5F66FC59A}"/>
               </a:ext>
             </a:extLst>
           </p:cNvPr>
@@ -5260,8 +5565,8 @@
         </p:nvSpPr>
         <p:spPr>
           <a:xfrm>
-            <a:off x="1117600" y="2616200"/>
-            <a:ext cx="2057400" cy="153888"/>
+            <a:off x="965200" y="2616200"/>
+            <a:ext cx="1676400" cy="153888"/>
           </a:xfrm>
           <a:prstGeom prst="rect">
             <a:avLst/>
@@ -5281,7 +5586,7 @@
                 </a:solidFill>
                 <a:latin typeface="Aptos" panose="020B0004020202020204" pitchFamily="34" charset="0"/>
               </a:rPr>
-              <a:t>Out-of-order</a:t>
+              <a:t>Throughput</a:t>
             </a:r>
           </a:p>
         </p:txBody>
@@ -5291,7 +5596,7 @@
           <p:cNvPr id="12" name="Rectangle: Rounded Corners 11">
             <a:extLst>
               <a:ext uri="{FF2B5EF4-FFF2-40B4-BE49-F238E27FC236}">
-                <a16:creationId xmlns:a16="http://schemas.microsoft.com/office/drawing/2014/main" id="{53F718EA-DAB5-A49A-3850-B6F3ACA1E6E3}"/>
+                <a16:creationId xmlns:a16="http://schemas.microsoft.com/office/drawing/2014/main" id="{82D503C5-2A5D-1488-D671-D6D32CD82344}"/>
               </a:ext>
             </a:extLst>
           </p:cNvPr>
@@ -5300,8 +5605,8 @@
         </p:nvSpPr>
         <p:spPr>
           <a:xfrm>
-            <a:off x="3708400" y="2006600"/>
-            <a:ext cx="2413000" cy="965200"/>
+            <a:off x="3073400" y="2006600"/>
+            <a:ext cx="2667000" cy="965200"/>
           </a:xfrm>
           <a:prstGeom prst="roundRect">
             <a:avLst/>
@@ -5345,7 +5650,7 @@
           <p:cNvPr id="13" name="TextBox 12">
             <a:extLst>
               <a:ext uri="{FF2B5EF4-FFF2-40B4-BE49-F238E27FC236}">
-                <a16:creationId xmlns:a16="http://schemas.microsoft.com/office/drawing/2014/main" id="{6422A16C-8430-8EDE-A7BA-C876A9F6A04F}"/>
+                <a16:creationId xmlns:a16="http://schemas.microsoft.com/office/drawing/2014/main" id="{16C7D2B4-3623-6113-248C-56383CB0FEA9}"/>
               </a:ext>
             </a:extLst>
           </p:cNvPr>
@@ -5354,8 +5659,8 @@
         </p:nvSpPr>
         <p:spPr>
           <a:xfrm>
-            <a:off x="3886200" y="2171700"/>
-            <a:ext cx="2057400" cy="369332"/>
+            <a:off x="3251200" y="2171700"/>
+            <a:ext cx="2311400" cy="369332"/>
           </a:xfrm>
           <a:prstGeom prst="rect">
             <a:avLst/>
@@ -5369,13 +5674,13 @@
           <a:lstStyle/>
           <a:p>
             <a:r>
-              <a:rPr lang="vi-VN" sz="2400" b="1">
-                <a:solidFill>
-                  <a:srgbClr val="EF4444"/>
-                </a:solidFill>
-                <a:latin typeface="Aptos" panose="020B0004020202020204" pitchFamily="34" charset="0"/>
-              </a:rPr>
-              <a:t>8</a:t>
+              <a:rPr lang="vi-VN" sz="1900" b="1" dirty="0">
+                <a:solidFill>
+                  <a:srgbClr val="22D3EE"/>
+                </a:solidFill>
+                <a:latin typeface="Aptos" panose="020B0004020202020204" pitchFamily="34" charset="0"/>
+              </a:rPr>
+              <a:t>avg/p50/p95/p99</a:t>
             </a:r>
           </a:p>
         </p:txBody>
@@ -5385,7 +5690,7 @@
           <p:cNvPr id="14" name="TextBox 13">
             <a:extLst>
               <a:ext uri="{FF2B5EF4-FFF2-40B4-BE49-F238E27FC236}">
-                <a16:creationId xmlns:a16="http://schemas.microsoft.com/office/drawing/2014/main" id="{97C5D911-643E-66C6-0480-B87374F146C8}"/>
+                <a16:creationId xmlns:a16="http://schemas.microsoft.com/office/drawing/2014/main" id="{B1792F75-FC83-4376-7564-A6AF6AA700F1}"/>
               </a:ext>
             </a:extLst>
           </p:cNvPr>
@@ -5394,8 +5699,8 @@
         </p:nvSpPr>
         <p:spPr>
           <a:xfrm>
-            <a:off x="3886200" y="2616200"/>
-            <a:ext cx="2057400" cy="153888"/>
+            <a:off x="3251200" y="2616200"/>
+            <a:ext cx="2311400" cy="153888"/>
           </a:xfrm>
           <a:prstGeom prst="rect">
             <a:avLst/>
@@ -5415,7 +5720,7 @@
                 </a:solidFill>
                 <a:latin typeface="Aptos" panose="020B0004020202020204" pitchFamily="34" charset="0"/>
               </a:rPr>
-              <a:t>Late events</a:t>
+              <a:t>Latency</a:t>
             </a:r>
           </a:p>
         </p:txBody>
@@ -5425,7 +5730,7 @@
           <p:cNvPr id="15" name="Rectangle: Rounded Corners 14">
             <a:extLst>
               <a:ext uri="{FF2B5EF4-FFF2-40B4-BE49-F238E27FC236}">
-                <a16:creationId xmlns:a16="http://schemas.microsoft.com/office/drawing/2014/main" id="{4A26FEE3-AF3E-1127-992A-ABBA09F3D7D5}"/>
+                <a16:creationId xmlns:a16="http://schemas.microsoft.com/office/drawing/2014/main" id="{24062B57-C49F-635B-EC5E-CB8B1C038284}"/>
               </a:ext>
             </a:extLst>
           </p:cNvPr>
@@ -5434,8 +5739,8 @@
         </p:nvSpPr>
         <p:spPr>
           <a:xfrm>
-            <a:off x="6477000" y="2006600"/>
-            <a:ext cx="2921000" cy="965200"/>
+            <a:off x="5994400" y="2006600"/>
+            <a:ext cx="2413000" cy="965200"/>
           </a:xfrm>
           <a:prstGeom prst="roundRect">
             <a:avLst/>
@@ -5479,7 +5784,7 @@
           <p:cNvPr id="16" name="TextBox 15">
             <a:extLst>
               <a:ext uri="{FF2B5EF4-FFF2-40B4-BE49-F238E27FC236}">
-                <a16:creationId xmlns:a16="http://schemas.microsoft.com/office/drawing/2014/main" id="{3FDAB527-E39C-9B34-8ECA-3E0AE1262ADB}"/>
+                <a16:creationId xmlns:a16="http://schemas.microsoft.com/office/drawing/2014/main" id="{6D5A1F34-A536-BFA7-4D95-5F62AC6EF1C2}"/>
               </a:ext>
             </a:extLst>
           </p:cNvPr>
@@ -5488,8 +5793,8 @@
         </p:nvSpPr>
         <p:spPr>
           <a:xfrm>
-            <a:off x="6654800" y="2171700"/>
-            <a:ext cx="2565400" cy="369332"/>
+            <a:off x="6172200" y="2171700"/>
+            <a:ext cx="2057400" cy="369332"/>
           </a:xfrm>
           <a:prstGeom prst="rect">
             <a:avLst/>
@@ -5503,13 +5808,13 @@
           <a:lstStyle/>
           <a:p>
             <a:r>
-              <a:rPr lang="vi-VN" sz="2400" b="1">
-                <a:solidFill>
-                  <a:srgbClr val="F59E0B"/>
-                </a:solidFill>
-                <a:latin typeface="Aptos" panose="020B0004020202020204" pitchFamily="34" charset="0"/>
-              </a:rPr>
-              <a:t>6</a:t>
+              <a:rPr lang="vi-VN" sz="2400" b="1" dirty="0">
+                <a:solidFill>
+                  <a:srgbClr val="EF4444"/>
+                </a:solidFill>
+                <a:latin typeface="Aptos" panose="020B0004020202020204" pitchFamily="34" charset="0"/>
+              </a:rPr>
+              <a:t>ALO risk</a:t>
             </a:r>
           </a:p>
         </p:txBody>
@@ -5519,7 +5824,7 @@
           <p:cNvPr id="17" name="TextBox 16">
             <a:extLst>
               <a:ext uri="{FF2B5EF4-FFF2-40B4-BE49-F238E27FC236}">
-                <a16:creationId xmlns:a16="http://schemas.microsoft.com/office/drawing/2014/main" id="{E0C49261-1851-8BB3-424D-E0C0A2DCC349}"/>
+                <a16:creationId xmlns:a16="http://schemas.microsoft.com/office/drawing/2014/main" id="{90958C8C-11C8-17E4-D7C6-8628EDB8CBB8}"/>
               </a:ext>
             </a:extLst>
           </p:cNvPr>
@@ -5528,8 +5833,8 @@
         </p:nvSpPr>
         <p:spPr>
           <a:xfrm>
-            <a:off x="6654800" y="2616200"/>
-            <a:ext cx="2565400" cy="153888"/>
+            <a:off x="6172200" y="2616200"/>
+            <a:ext cx="2057400" cy="153888"/>
           </a:xfrm>
           <a:prstGeom prst="rect">
             <a:avLst/>
@@ -5549,7 +5854,7 @@
                 </a:solidFill>
                 <a:latin typeface="Aptos" panose="020B0004020202020204" pitchFamily="34" charset="0"/>
               </a:rPr>
-              <a:t>Backpressure delayed</a:t>
+              <a:t>Duplicate charges</a:t>
             </a:r>
           </a:p>
         </p:txBody>
@@ -5559,7 +5864,7 @@
           <p:cNvPr id="18" name="Rectangle: Rounded Corners 17">
             <a:extLst>
               <a:ext uri="{FF2B5EF4-FFF2-40B4-BE49-F238E27FC236}">
-                <a16:creationId xmlns:a16="http://schemas.microsoft.com/office/drawing/2014/main" id="{8FF4D73B-F3A0-E65A-AD46-EB425F77EEE9}"/>
+                <a16:creationId xmlns:a16="http://schemas.microsoft.com/office/drawing/2014/main" id="{695FFBA8-DB58-8510-A1C2-B99886848D03}"/>
               </a:ext>
             </a:extLst>
           </p:cNvPr>
@@ -5568,8 +5873,8 @@
         </p:nvSpPr>
         <p:spPr>
           <a:xfrm>
-            <a:off x="9753600" y="2006600"/>
-            <a:ext cx="1600200" cy="965200"/>
+            <a:off x="8661400" y="2006600"/>
+            <a:ext cx="2667000" cy="965200"/>
           </a:xfrm>
           <a:prstGeom prst="roundRect">
             <a:avLst/>
@@ -5613,7 +5918,7 @@
           <p:cNvPr id="19" name="TextBox 18">
             <a:extLst>
               <a:ext uri="{FF2B5EF4-FFF2-40B4-BE49-F238E27FC236}">
-                <a16:creationId xmlns:a16="http://schemas.microsoft.com/office/drawing/2014/main" id="{B0D41854-D127-28A6-F3B9-396AEF745AE1}"/>
+                <a16:creationId xmlns:a16="http://schemas.microsoft.com/office/drawing/2014/main" id="{8F71325F-6867-7D5B-90A3-7D39FAE78446}"/>
               </a:ext>
             </a:extLst>
           </p:cNvPr>
@@ -5622,8 +5927,8 @@
         </p:nvSpPr>
         <p:spPr>
           <a:xfrm>
-            <a:off x="9931400" y="2171700"/>
-            <a:ext cx="1244600" cy="369332"/>
+            <a:off x="8839200" y="2171700"/>
+            <a:ext cx="2311400" cy="369332"/>
           </a:xfrm>
           <a:prstGeom prst="rect">
             <a:avLst/>
@@ -5639,11 +5944,11 @@
             <a:r>
               <a:rPr lang="vi-VN" sz="2400" b="1">
                 <a:solidFill>
-                  <a:srgbClr val="22D3EE"/>
-                </a:solidFill>
-                <a:latin typeface="Aptos" panose="020B0004020202020204" pitchFamily="34" charset="0"/>
-              </a:rPr>
-              <a:t>10s</a:t>
+                  <a:srgbClr val="10B981"/>
+                </a:solidFill>
+                <a:latin typeface="Aptos" panose="020B0004020202020204" pitchFamily="34" charset="0"/>
+              </a:rPr>
+              <a:t>EOS reject</a:t>
             </a:r>
           </a:p>
         </p:txBody>
@@ -5653,7 +5958,7 @@
           <p:cNvPr id="20" name="TextBox 19">
             <a:extLst>
               <a:ext uri="{FF2B5EF4-FFF2-40B4-BE49-F238E27FC236}">
-                <a16:creationId xmlns:a16="http://schemas.microsoft.com/office/drawing/2014/main" id="{DA583E13-7092-A1A6-ED16-C0CDE66AA420}"/>
+                <a16:creationId xmlns:a16="http://schemas.microsoft.com/office/drawing/2014/main" id="{7B823DDE-9C52-CE6B-0E71-F9B23C457EF0}"/>
               </a:ext>
             </a:extLst>
           </p:cNvPr>
@@ -5662,8 +5967,8 @@
         </p:nvSpPr>
         <p:spPr>
           <a:xfrm>
-            <a:off x="9931400" y="2616200"/>
-            <a:ext cx="1244600" cy="153888"/>
+            <a:off x="8839200" y="2616200"/>
+            <a:ext cx="2311400" cy="153888"/>
           </a:xfrm>
           <a:prstGeom prst="rect">
             <a:avLst/>
@@ -5683,17 +5988,71 @@
                 </a:solidFill>
                 <a:latin typeface="Aptos" panose="020B0004020202020204" pitchFamily="34" charset="0"/>
               </a:rPr>
-              <a:t>Window size</a:t>
-            </a:r>
-          </a:p>
-        </p:txBody>
-      </p:sp>
-      <p:sp>
-        <p:nvSpPr>
-          <p:cNvPr id="21" name="TextBox 20">
-            <a:extLst>
-              <a:ext uri="{FF2B5EF4-FFF2-40B4-BE49-F238E27FC236}">
-                <a16:creationId xmlns:a16="http://schemas.microsoft.com/office/drawing/2014/main" id="{3E99502E-10D6-69BC-9445-51FEDF9F71D5}"/>
+              <a:t>Duplicates blocked</a:t>
+            </a:r>
+          </a:p>
+        </p:txBody>
+      </p:sp>
+      <p:sp>
+        <p:nvSpPr>
+          <p:cNvPr id="21" name="Rectangle: Rounded Corners 20">
+            <a:extLst>
+              <a:ext uri="{FF2B5EF4-FFF2-40B4-BE49-F238E27FC236}">
+                <a16:creationId xmlns:a16="http://schemas.microsoft.com/office/drawing/2014/main" id="{AB5F48BD-1922-4DE1-D902-48786C73E6BA}"/>
+              </a:ext>
+            </a:extLst>
+          </p:cNvPr>
+          <p:cNvSpPr/>
+          <p:nvPr/>
+        </p:nvSpPr>
+        <p:spPr>
+          <a:xfrm>
+            <a:off x="2032000" y="3530600"/>
+            <a:ext cx="2667000" cy="965200"/>
+          </a:xfrm>
+          <a:prstGeom prst="roundRect">
+            <a:avLst/>
+          </a:prstGeom>
+          <a:solidFill>
+            <a:srgbClr val="1E293B"/>
+          </a:solidFill>
+          <a:ln w="12700">
+            <a:solidFill>
+              <a:srgbClr val="334155"/>
+            </a:solidFill>
+          </a:ln>
+        </p:spPr>
+        <p:style>
+          <a:lnRef idx="2">
+            <a:schemeClr val="accent1">
+              <a:shade val="15000"/>
+            </a:schemeClr>
+          </a:lnRef>
+          <a:fillRef idx="1">
+            <a:schemeClr val="accent1"/>
+          </a:fillRef>
+          <a:effectRef idx="0">
+            <a:schemeClr val="accent1"/>
+          </a:effectRef>
+          <a:fontRef idx="minor">
+            <a:schemeClr val="lt1"/>
+          </a:fontRef>
+        </p:style>
+        <p:txBody>
+          <a:bodyPr rtlCol="0" anchor="ctr"/>
+          <a:lstStyle/>
+          <a:p>
+            <a:pPr algn="ctr"/>
+            <a:endParaRPr lang="vi-VN"/>
+          </a:p>
+        </p:txBody>
+      </p:sp>
+      <p:sp>
+        <p:nvSpPr>
+          <p:cNvPr id="22" name="TextBox 21">
+            <a:extLst>
+              <a:ext uri="{FF2B5EF4-FFF2-40B4-BE49-F238E27FC236}">
+                <a16:creationId xmlns:a16="http://schemas.microsoft.com/office/drawing/2014/main" id="{94A8D4F1-48D9-85AF-1317-E6BBEFF735F9}"/>
               </a:ext>
             </a:extLst>
           </p:cNvPr>
@@ -5702,8 +6061,8 @@
         </p:nvSpPr>
         <p:spPr>
           <a:xfrm>
-            <a:off x="1168400" y="3606800"/>
-            <a:ext cx="9906000" cy="1384995"/>
+            <a:off x="2209800" y="3695700"/>
+            <a:ext cx="2311400" cy="369332"/>
           </a:xfrm>
           <a:prstGeom prst="rect">
             <a:avLst/>
@@ -5717,17 +6076,321 @@
           <a:lstStyle/>
           <a:p>
             <a:r>
-              <a:rPr lang="vi-VN">
-                <a:solidFill>
-                  <a:srgbClr val="F1F5F9"/>
-                </a:solidFill>
-                <a:latin typeface="Aptos" panose="020B0004020202020204" pitchFamily="34" charset="0"/>
-              </a:rPr>
-              <a:t>• eventTimeMs dùng để tính tumbling window.
-• processingTimeMs dùng để đo event lag.
-• watermark = maxEventTime - allowedLatenessMs.
-• lateEvents tăng khi eventTimeMs nhỏ hơn watermark.
-• backpressureDelayed mô phỏng nghẽn khi vượt max-in-flight events.</a:t>
+              <a:rPr lang="vi-VN" sz="2400" b="1">
+                <a:solidFill>
+                  <a:srgbClr val="F59E0B"/>
+                </a:solidFill>
+                <a:latin typeface="Aptos" panose="020B0004020202020204" pitchFamily="34" charset="0"/>
+              </a:rPr>
+              <a:t>1.42 ms</a:t>
+            </a:r>
+          </a:p>
+        </p:txBody>
+      </p:sp>
+      <p:sp>
+        <p:nvSpPr>
+          <p:cNvPr id="23" name="TextBox 22">
+            <a:extLst>
+              <a:ext uri="{FF2B5EF4-FFF2-40B4-BE49-F238E27FC236}">
+                <a16:creationId xmlns:a16="http://schemas.microsoft.com/office/drawing/2014/main" id="{4E6B8077-4785-1056-22D7-220A73B30637}"/>
+              </a:ext>
+            </a:extLst>
+          </p:cNvPr>
+          <p:cNvSpPr txBox="1"/>
+          <p:nvPr/>
+        </p:nvSpPr>
+        <p:spPr>
+          <a:xfrm>
+            <a:off x="2209800" y="4140200"/>
+            <a:ext cx="2311400" cy="153888"/>
+          </a:xfrm>
+          <a:prstGeom prst="rect">
+            <a:avLst/>
+          </a:prstGeom>
+          <a:noFill/>
+        </p:spPr>
+        <p:txBody>
+          <a:bodyPr vert="horz" lIns="0" tIns="0" rIns="0" bIns="0" rtlCol="0">
+            <a:spAutoFit/>
+          </a:bodyPr>
+          <a:lstStyle/>
+          <a:p>
+            <a:r>
+              <a:rPr lang="vi-VN" sz="1000">
+                <a:solidFill>
+                  <a:srgbClr val="94A3B8"/>
+                </a:solidFill>
+                <a:latin typeface="Aptos" panose="020B0004020202020204" pitchFamily="34" charset="0"/>
+              </a:rPr>
+              <a:t>WAL write latency</a:t>
+            </a:r>
+          </a:p>
+        </p:txBody>
+      </p:sp>
+      <p:sp>
+        <p:nvSpPr>
+          <p:cNvPr id="24" name="Rectangle: Rounded Corners 23">
+            <a:extLst>
+              <a:ext uri="{FF2B5EF4-FFF2-40B4-BE49-F238E27FC236}">
+                <a16:creationId xmlns:a16="http://schemas.microsoft.com/office/drawing/2014/main" id="{126EFE39-2819-B592-60C7-B530B474C72B}"/>
+              </a:ext>
+            </a:extLst>
+          </p:cNvPr>
+          <p:cNvSpPr/>
+          <p:nvPr/>
+        </p:nvSpPr>
+        <p:spPr>
+          <a:xfrm>
+            <a:off x="5016500" y="3530600"/>
+            <a:ext cx="2794000" cy="965200"/>
+          </a:xfrm>
+          <a:prstGeom prst="roundRect">
+            <a:avLst/>
+          </a:prstGeom>
+          <a:solidFill>
+            <a:srgbClr val="1E293B"/>
+          </a:solidFill>
+          <a:ln w="12700">
+            <a:solidFill>
+              <a:srgbClr val="334155"/>
+            </a:solidFill>
+          </a:ln>
+        </p:spPr>
+        <p:style>
+          <a:lnRef idx="2">
+            <a:schemeClr val="accent1">
+              <a:shade val="15000"/>
+            </a:schemeClr>
+          </a:lnRef>
+          <a:fillRef idx="1">
+            <a:schemeClr val="accent1"/>
+          </a:fillRef>
+          <a:effectRef idx="0">
+            <a:schemeClr val="accent1"/>
+          </a:effectRef>
+          <a:fontRef idx="minor">
+            <a:schemeClr val="lt1"/>
+          </a:fontRef>
+        </p:style>
+        <p:txBody>
+          <a:bodyPr rtlCol="0" anchor="ctr"/>
+          <a:lstStyle/>
+          <a:p>
+            <a:pPr algn="ctr"/>
+            <a:endParaRPr lang="vi-VN"/>
+          </a:p>
+        </p:txBody>
+      </p:sp>
+      <p:sp>
+        <p:nvSpPr>
+          <p:cNvPr id="25" name="TextBox 24">
+            <a:extLst>
+              <a:ext uri="{FF2B5EF4-FFF2-40B4-BE49-F238E27FC236}">
+                <a16:creationId xmlns:a16="http://schemas.microsoft.com/office/drawing/2014/main" id="{26402144-5A47-5C3A-6F0B-8E3B0F71DCD2}"/>
+              </a:ext>
+            </a:extLst>
+          </p:cNvPr>
+          <p:cNvSpPr txBox="1"/>
+          <p:nvPr/>
+        </p:nvSpPr>
+        <p:spPr>
+          <a:xfrm>
+            <a:off x="5194300" y="3695700"/>
+            <a:ext cx="2438400" cy="369332"/>
+          </a:xfrm>
+          <a:prstGeom prst="rect">
+            <a:avLst/>
+          </a:prstGeom>
+          <a:noFill/>
+        </p:spPr>
+        <p:txBody>
+          <a:bodyPr vert="horz" lIns="0" tIns="0" rIns="0" bIns="0" rtlCol="0">
+            <a:spAutoFit/>
+          </a:bodyPr>
+          <a:lstStyle/>
+          <a:p>
+            <a:r>
+              <a:rPr lang="vi-VN" sz="2400" b="1">
+                <a:solidFill>
+                  <a:srgbClr val="60A5FA"/>
+                </a:solidFill>
+                <a:latin typeface="Aptos" panose="020B0004020202020204" pitchFamily="34" charset="0"/>
+              </a:rPr>
+              <a:t>TPS + latency</a:t>
+            </a:r>
+          </a:p>
+        </p:txBody>
+      </p:sp>
+      <p:sp>
+        <p:nvSpPr>
+          <p:cNvPr id="26" name="TextBox 25">
+            <a:extLst>
+              <a:ext uri="{FF2B5EF4-FFF2-40B4-BE49-F238E27FC236}">
+                <a16:creationId xmlns:a16="http://schemas.microsoft.com/office/drawing/2014/main" id="{22B9DA55-C8DF-2D91-F4C4-69E2DFDB831C}"/>
+              </a:ext>
+            </a:extLst>
+          </p:cNvPr>
+          <p:cNvSpPr txBox="1"/>
+          <p:nvPr/>
+        </p:nvSpPr>
+        <p:spPr>
+          <a:xfrm>
+            <a:off x="5194300" y="4140200"/>
+            <a:ext cx="2438400" cy="153888"/>
+          </a:xfrm>
+          <a:prstGeom prst="rect">
+            <a:avLst/>
+          </a:prstGeom>
+          <a:noFill/>
+        </p:spPr>
+        <p:txBody>
+          <a:bodyPr vert="horz" lIns="0" tIns="0" rIns="0" bIns="0" rtlCol="0">
+            <a:spAutoFit/>
+          </a:bodyPr>
+          <a:lstStyle/>
+          <a:p>
+            <a:r>
+              <a:rPr lang="vi-VN" sz="1000">
+                <a:solidFill>
+                  <a:srgbClr val="94A3B8"/>
+                </a:solidFill>
+                <a:latin typeface="Aptos" panose="020B0004020202020204" pitchFamily="34" charset="0"/>
+              </a:rPr>
+              <a:t>Window metrics</a:t>
+            </a:r>
+          </a:p>
+        </p:txBody>
+      </p:sp>
+      <p:sp>
+        <p:nvSpPr>
+          <p:cNvPr id="27" name="Rectangle: Rounded Corners 26">
+            <a:extLst>
+              <a:ext uri="{FF2B5EF4-FFF2-40B4-BE49-F238E27FC236}">
+                <a16:creationId xmlns:a16="http://schemas.microsoft.com/office/drawing/2014/main" id="{19A8F364-8F7A-423E-8844-DAE5E08ABDF3}"/>
+              </a:ext>
+            </a:extLst>
+          </p:cNvPr>
+          <p:cNvSpPr/>
+          <p:nvPr/>
+        </p:nvSpPr>
+        <p:spPr>
+          <a:xfrm>
+            <a:off x="8128000" y="3530600"/>
+            <a:ext cx="2286000" cy="965200"/>
+          </a:xfrm>
+          <a:prstGeom prst="roundRect">
+            <a:avLst/>
+          </a:prstGeom>
+          <a:solidFill>
+            <a:srgbClr val="1E293B"/>
+          </a:solidFill>
+          <a:ln w="12700">
+            <a:solidFill>
+              <a:srgbClr val="334155"/>
+            </a:solidFill>
+          </a:ln>
+        </p:spPr>
+        <p:style>
+          <a:lnRef idx="2">
+            <a:schemeClr val="accent1">
+              <a:shade val="15000"/>
+            </a:schemeClr>
+          </a:lnRef>
+          <a:fillRef idx="1">
+            <a:schemeClr val="accent1"/>
+          </a:fillRef>
+          <a:effectRef idx="0">
+            <a:schemeClr val="accent1"/>
+          </a:effectRef>
+          <a:fontRef idx="minor">
+            <a:schemeClr val="lt1"/>
+          </a:fontRef>
+        </p:style>
+        <p:txBody>
+          <a:bodyPr rtlCol="0" anchor="ctr"/>
+          <a:lstStyle/>
+          <a:p>
+            <a:pPr algn="ctr"/>
+            <a:endParaRPr lang="vi-VN"/>
+          </a:p>
+        </p:txBody>
+      </p:sp>
+      <p:sp>
+        <p:nvSpPr>
+          <p:cNvPr id="28" name="TextBox 27">
+            <a:extLst>
+              <a:ext uri="{FF2B5EF4-FFF2-40B4-BE49-F238E27FC236}">
+                <a16:creationId xmlns:a16="http://schemas.microsoft.com/office/drawing/2014/main" id="{16F3DE45-FF09-49B7-33B3-22A9C142139F}"/>
+              </a:ext>
+            </a:extLst>
+          </p:cNvPr>
+          <p:cNvSpPr txBox="1"/>
+          <p:nvPr/>
+        </p:nvSpPr>
+        <p:spPr>
+          <a:xfrm>
+            <a:off x="8305800" y="3695700"/>
+            <a:ext cx="1930400" cy="369332"/>
+          </a:xfrm>
+          <a:prstGeom prst="rect">
+            <a:avLst/>
+          </a:prstGeom>
+          <a:noFill/>
+        </p:spPr>
+        <p:txBody>
+          <a:bodyPr vert="horz" lIns="0" tIns="0" rIns="0" bIns="0" rtlCol="0">
+            <a:spAutoFit/>
+          </a:bodyPr>
+          <a:lstStyle/>
+          <a:p>
+            <a:r>
+              <a:rPr lang="vi-VN" sz="1900" b="1">
+                <a:solidFill>
+                  <a:srgbClr val="EF4444"/>
+                </a:solidFill>
+                <a:latin typeface="Aptos" panose="020B0004020202020204" pitchFamily="34" charset="0"/>
+              </a:rPr>
+              <a:t>OOO/Late/BP</a:t>
+            </a:r>
+          </a:p>
+        </p:txBody>
+      </p:sp>
+      <p:sp>
+        <p:nvSpPr>
+          <p:cNvPr id="29" name="TextBox 28">
+            <a:extLst>
+              <a:ext uri="{FF2B5EF4-FFF2-40B4-BE49-F238E27FC236}">
+                <a16:creationId xmlns:a16="http://schemas.microsoft.com/office/drawing/2014/main" id="{32C65736-B62D-E82F-2D7D-70C0F49BB77A}"/>
+              </a:ext>
+            </a:extLst>
+          </p:cNvPr>
+          <p:cNvSpPr txBox="1"/>
+          <p:nvPr/>
+        </p:nvSpPr>
+        <p:spPr>
+          <a:xfrm>
+            <a:off x="8305800" y="4140200"/>
+            <a:ext cx="1930400" cy="153888"/>
+          </a:xfrm>
+          <a:prstGeom prst="rect">
+            <a:avLst/>
+          </a:prstGeom>
+          <a:noFill/>
+        </p:spPr>
+        <p:txBody>
+          <a:bodyPr vert="horz" lIns="0" tIns="0" rIns="0" bIns="0" rtlCol="0">
+            <a:spAutoFit/>
+          </a:bodyPr>
+          <a:lstStyle/>
+          <a:p>
+            <a:r>
+              <a:rPr lang="vi-VN" sz="1000">
+                <a:solidFill>
+                  <a:srgbClr val="94A3B8"/>
+                </a:solidFill>
+                <a:latin typeface="Aptos" panose="020B0004020202020204" pitchFamily="34" charset="0"/>
+              </a:rPr>
+              <a:t>Disorder</a:t>
             </a:r>
           </a:p>
         </p:txBody>
@@ -5735,7 +6398,7 @@
     </p:spTree>
     <p:extLst>
       <p:ext uri="{BB962C8B-B14F-4D97-AF65-F5344CB8AC3E}">
-        <p14:creationId xmlns:p14="http://schemas.microsoft.com/office/powerpoint/2010/main" val="3324969749"/>
+        <p14:creationId xmlns:p14="http://schemas.microsoft.com/office/powerpoint/2010/main" val="3203634595"/>
       </p:ext>
     </p:extLst>
   </p:cSld>
@@ -5767,7 +6430,7 @@
           <p:cNvPr id="2" name="Rectangle 1">
             <a:extLst>
               <a:ext uri="{FF2B5EF4-FFF2-40B4-BE49-F238E27FC236}">
-                <a16:creationId xmlns:a16="http://schemas.microsoft.com/office/drawing/2014/main" id="{8E040408-4063-4CD9-E194-BEDD6B309A80}"/>
+                <a16:creationId xmlns:a16="http://schemas.microsoft.com/office/drawing/2014/main" id="{A0E2F98A-C77B-4C79-1016-6BADDBDCAEA6}"/>
               </a:ext>
             </a:extLst>
           </p:cNvPr>
@@ -5826,7 +6489,7 @@
           <a:lstStyle/>
           <a:p>
             <a:pPr algn="ctr"/>
-            <a:endParaRPr lang="vi-VN"/>
+            <a:endParaRPr lang="vi-VN" dirty="0"/>
           </a:p>
         </p:txBody>
       </p:sp>
@@ -5835,7 +6498,7 @@
           <p:cNvPr id="3" name="TextBox 2">
             <a:extLst>
               <a:ext uri="{FF2B5EF4-FFF2-40B4-BE49-F238E27FC236}">
-                <a16:creationId xmlns:a16="http://schemas.microsoft.com/office/drawing/2014/main" id="{54A71FBA-17C7-7F8D-7645-DB1821FD2403}"/>
+                <a16:creationId xmlns:a16="http://schemas.microsoft.com/office/drawing/2014/main" id="{7B253619-4E38-EF85-C4E0-FB79DEC5F7A9}"/>
               </a:ext>
             </a:extLst>
           </p:cNvPr>
@@ -5865,7 +6528,7 @@
                 </a:solidFill>
                 <a:latin typeface="Aptos" panose="020B0004020202020204" pitchFamily="34" charset="0"/>
               </a:rPr>
-              <a:t>05 / METRICS</a:t>
+              <a:t>05 / TESTS</a:t>
             </a:r>
           </a:p>
         </p:txBody>
@@ -5875,7 +6538,7 @@
           <p:cNvPr id="4" name="TextBox 3">
             <a:extLst>
               <a:ext uri="{FF2B5EF4-FFF2-40B4-BE49-F238E27FC236}">
-                <a16:creationId xmlns:a16="http://schemas.microsoft.com/office/drawing/2014/main" id="{ABF0CC2F-A875-A6B3-D0B6-8347BF68AE63}"/>
+                <a16:creationId xmlns:a16="http://schemas.microsoft.com/office/drawing/2014/main" id="{3049D3E9-533A-D40E-CE48-C757874F5C76}"/>
               </a:ext>
             </a:extLst>
           </p:cNvPr>
@@ -5899,14 +6562,29 @@
           <a:lstStyle/>
           <a:p>
             <a:r>
-              <a:rPr lang="vi-VN" sz="3000" b="1">
+              <a:rPr lang="vi-VN" sz="3000" b="1" dirty="0">
                 <a:solidFill>
                   <a:srgbClr val="F1F5F9"/>
                 </a:solidFill>
                 <a:latin typeface="Aptos" panose="020B0004020202020204" pitchFamily="34" charset="0"/>
               </a:rPr>
-              <a:t>Benchmark metrics checklist</a:t>
-            </a:r>
+              <a:t>Các te</a:t>
+            </a:r>
+            <a:r>
+              <a:rPr lang="en-US" sz="3000" b="1" dirty="0">
+                <a:solidFill>
+                  <a:srgbClr val="F1F5F9"/>
+                </a:solidFill>
+                <a:latin typeface="Aptos" panose="020B0004020202020204" pitchFamily="34" charset="0"/>
+              </a:rPr>
+              <a:t>st demo</a:t>
+            </a:r>
+            <a:endParaRPr lang="vi-VN" sz="3000" b="1" dirty="0">
+              <a:solidFill>
+                <a:srgbClr val="F1F5F9"/>
+              </a:solidFill>
+              <a:latin typeface="Aptos" panose="020B0004020202020204" pitchFamily="34" charset="0"/>
+            </a:endParaRPr>
           </a:p>
         </p:txBody>
       </p:sp>
@@ -5915,7 +6593,7 @@
           <p:cNvPr id="5" name="TextBox 4">
             <a:extLst>
               <a:ext uri="{FF2B5EF4-FFF2-40B4-BE49-F238E27FC236}">
-                <a16:creationId xmlns:a16="http://schemas.microsoft.com/office/drawing/2014/main" id="{2FF0F27D-0486-86E9-6A0A-167DDA0BC4AB}"/>
+                <a16:creationId xmlns:a16="http://schemas.microsoft.com/office/drawing/2014/main" id="{D7044685-07CE-B0D5-644D-96B919C97476}"/>
               </a:ext>
             </a:extLst>
           </p:cNvPr>
@@ -5945,7 +6623,7 @@
                 </a:solidFill>
                 <a:latin typeface="Aptos" panose="020B0004020202020204" pitchFamily="34" charset="0"/>
               </a:rPr>
-              <a:t>Các chỉ số được đo trực tiếp từ BenchmarkRun và StreamWindow.</a:t>
+              <a:t>Backend test suite pass và dashboard có thao tác demo tương ứng.</a:t>
             </a:r>
           </a:p>
         </p:txBody>
@@ -5955,7 +6633,7 @@
           <p:cNvPr id="6" name="Rectangle 5">
             <a:extLst>
               <a:ext uri="{FF2B5EF4-FFF2-40B4-BE49-F238E27FC236}">
-                <a16:creationId xmlns:a16="http://schemas.microsoft.com/office/drawing/2014/main" id="{DFD19B33-D8BE-03A6-0E60-F292990D35E5}"/>
+                <a16:creationId xmlns:a16="http://schemas.microsoft.com/office/drawing/2014/main" id="{C43C04E5-B3F8-37D8-BF66-0FB7FD8C4352}"/>
               </a:ext>
             </a:extLst>
           </p:cNvPr>
@@ -6006,64 +6684,10 @@
       </p:sp>
       <p:sp>
         <p:nvSpPr>
-          <p:cNvPr id="9" name="Rectangle: Rounded Corners 8">
-            <a:extLst>
-              <a:ext uri="{FF2B5EF4-FFF2-40B4-BE49-F238E27FC236}">
-                <a16:creationId xmlns:a16="http://schemas.microsoft.com/office/drawing/2014/main" id="{A637E52B-864C-BFA1-A8E6-E43CA3157119}"/>
-              </a:ext>
-            </a:extLst>
-          </p:cNvPr>
-          <p:cNvSpPr/>
-          <p:nvPr/>
-        </p:nvSpPr>
-        <p:spPr>
-          <a:xfrm>
-            <a:off x="787400" y="2006600"/>
-            <a:ext cx="2032000" cy="965200"/>
-          </a:xfrm>
-          <a:prstGeom prst="roundRect">
-            <a:avLst/>
-          </a:prstGeom>
-          <a:solidFill>
-            <a:srgbClr val="1E293B"/>
-          </a:solidFill>
-          <a:ln w="12700">
-            <a:solidFill>
-              <a:srgbClr val="334155"/>
-            </a:solidFill>
-          </a:ln>
-        </p:spPr>
-        <p:style>
-          <a:lnRef idx="2">
-            <a:schemeClr val="accent1">
-              <a:shade val="15000"/>
-            </a:schemeClr>
-          </a:lnRef>
-          <a:fillRef idx="1">
-            <a:schemeClr val="accent1"/>
-          </a:fillRef>
-          <a:effectRef idx="0">
-            <a:schemeClr val="accent1"/>
-          </a:effectRef>
-          <a:fontRef idx="minor">
-            <a:schemeClr val="lt1"/>
-          </a:fontRef>
-        </p:style>
-        <p:txBody>
-          <a:bodyPr rtlCol="0" anchor="ctr"/>
-          <a:lstStyle/>
-          <a:p>
-            <a:pPr algn="ctr"/>
-            <a:endParaRPr lang="vi-VN"/>
-          </a:p>
-        </p:txBody>
-      </p:sp>
-      <p:sp>
-        <p:nvSpPr>
-          <p:cNvPr id="10" name="TextBox 9">
-            <a:extLst>
-              <a:ext uri="{FF2B5EF4-FFF2-40B4-BE49-F238E27FC236}">
-                <a16:creationId xmlns:a16="http://schemas.microsoft.com/office/drawing/2014/main" id="{D03B5FF3-06A8-DC57-4ED3-B07900D333BE}"/>
+          <p:cNvPr id="9" name="TextBox 8">
+            <a:extLst>
+              <a:ext uri="{FF2B5EF4-FFF2-40B4-BE49-F238E27FC236}">
+                <a16:creationId xmlns:a16="http://schemas.microsoft.com/office/drawing/2014/main" id="{C085966D-C5DA-9649-2E87-4EB70B898B15}"/>
               </a:ext>
             </a:extLst>
           </p:cNvPr>
@@ -6072,8 +6696,8 @@
         </p:nvSpPr>
         <p:spPr>
           <a:xfrm>
-            <a:off x="965200" y="2171700"/>
-            <a:ext cx="1676400" cy="369332"/>
+            <a:off x="965200" y="2006600"/>
+            <a:ext cx="10414000" cy="2462213"/>
           </a:xfrm>
           <a:prstGeom prst="rect">
             <a:avLst/>
@@ -6087,865 +6711,189 @@
           <a:lstStyle/>
           <a:p>
             <a:r>
-              <a:rPr lang="vi-VN" sz="2400" b="1">
-                <a:solidFill>
-                  <a:srgbClr val="60A5FA"/>
-                </a:solidFill>
-                <a:latin typeface="Aptos" panose="020B0004020202020204" pitchFamily="34" charset="0"/>
-              </a:rPr>
-              <a:t>TPS</a:t>
-            </a:r>
-          </a:p>
-        </p:txBody>
-      </p:sp>
-      <p:sp>
-        <p:nvSpPr>
-          <p:cNvPr id="11" name="TextBox 10">
-            <a:extLst>
-              <a:ext uri="{FF2B5EF4-FFF2-40B4-BE49-F238E27FC236}">
-                <a16:creationId xmlns:a16="http://schemas.microsoft.com/office/drawing/2014/main" id="{5D52C6CC-1819-6D28-0E1E-72A5F66FC59A}"/>
-              </a:ext>
-            </a:extLst>
-          </p:cNvPr>
-          <p:cNvSpPr txBox="1"/>
-          <p:nvPr/>
-        </p:nvSpPr>
-        <p:spPr>
-          <a:xfrm>
-            <a:off x="965200" y="2616200"/>
-            <a:ext cx="1676400" cy="153888"/>
-          </a:xfrm>
-          <a:prstGeom prst="rect">
-            <a:avLst/>
-          </a:prstGeom>
-          <a:noFill/>
-        </p:spPr>
-        <p:txBody>
-          <a:bodyPr vert="horz" lIns="0" tIns="0" rIns="0" bIns="0" rtlCol="0">
-            <a:spAutoFit/>
-          </a:bodyPr>
-          <a:lstStyle/>
-          <a:p>
-            <a:r>
-              <a:rPr lang="vi-VN" sz="1000">
-                <a:solidFill>
-                  <a:srgbClr val="94A3B8"/>
-                </a:solidFill>
-                <a:latin typeface="Aptos" panose="020B0004020202020204" pitchFamily="34" charset="0"/>
-              </a:rPr>
-              <a:t>Throughput</a:t>
-            </a:r>
-          </a:p>
-        </p:txBody>
-      </p:sp>
-      <p:sp>
-        <p:nvSpPr>
-          <p:cNvPr id="12" name="Rectangle: Rounded Corners 11">
-            <a:extLst>
-              <a:ext uri="{FF2B5EF4-FFF2-40B4-BE49-F238E27FC236}">
-                <a16:creationId xmlns:a16="http://schemas.microsoft.com/office/drawing/2014/main" id="{82D503C5-2A5D-1488-D671-D6D32CD82344}"/>
-              </a:ext>
-            </a:extLst>
-          </p:cNvPr>
-          <p:cNvSpPr/>
-          <p:nvPr/>
-        </p:nvSpPr>
-        <p:spPr>
-          <a:xfrm>
-            <a:off x="3073400" y="2006600"/>
-            <a:ext cx="2667000" cy="965200"/>
-          </a:xfrm>
-          <a:prstGeom prst="roundRect">
-            <a:avLst/>
-          </a:prstGeom>
-          <a:solidFill>
-            <a:srgbClr val="1E293B"/>
-          </a:solidFill>
-          <a:ln w="12700">
-            <a:solidFill>
-              <a:srgbClr val="334155"/>
-            </a:solidFill>
-          </a:ln>
-        </p:spPr>
-        <p:style>
-          <a:lnRef idx="2">
-            <a:schemeClr val="accent1">
-              <a:shade val="15000"/>
-            </a:schemeClr>
-          </a:lnRef>
-          <a:fillRef idx="1">
-            <a:schemeClr val="accent1"/>
-          </a:fillRef>
-          <a:effectRef idx="0">
-            <a:schemeClr val="accent1"/>
-          </a:effectRef>
-          <a:fontRef idx="minor">
-            <a:schemeClr val="lt1"/>
-          </a:fontRef>
-        </p:style>
-        <p:txBody>
-          <a:bodyPr rtlCol="0" anchor="ctr"/>
-          <a:lstStyle/>
-          <a:p>
-            <a:pPr algn="ctr"/>
-            <a:endParaRPr lang="vi-VN"/>
-          </a:p>
-        </p:txBody>
-      </p:sp>
-      <p:sp>
-        <p:nvSpPr>
-          <p:cNvPr id="13" name="TextBox 12">
-            <a:extLst>
-              <a:ext uri="{FF2B5EF4-FFF2-40B4-BE49-F238E27FC236}">
-                <a16:creationId xmlns:a16="http://schemas.microsoft.com/office/drawing/2014/main" id="{16C7D2B4-3623-6113-248C-56383CB0FEA9}"/>
-              </a:ext>
-            </a:extLst>
-          </p:cNvPr>
-          <p:cNvSpPr txBox="1"/>
-          <p:nvPr/>
-        </p:nvSpPr>
-        <p:spPr>
-          <a:xfrm>
-            <a:off x="3251200" y="2171700"/>
-            <a:ext cx="2311400" cy="369332"/>
-          </a:xfrm>
-          <a:prstGeom prst="rect">
-            <a:avLst/>
-          </a:prstGeom>
-          <a:noFill/>
-        </p:spPr>
-        <p:txBody>
-          <a:bodyPr vert="horz" lIns="0" tIns="0" rIns="0" bIns="0" rtlCol="0">
-            <a:spAutoFit/>
-          </a:bodyPr>
-          <a:lstStyle/>
-          <a:p>
-            <a:r>
-              <a:rPr lang="vi-VN" sz="1900" b="1" dirty="0">
-                <a:solidFill>
-                  <a:srgbClr val="22D3EE"/>
-                </a:solidFill>
-                <a:latin typeface="Aptos" panose="020B0004020202020204" pitchFamily="34" charset="0"/>
-              </a:rPr>
-              <a:t>avg/p50/p95/p99</a:t>
-            </a:r>
-          </a:p>
-        </p:txBody>
-      </p:sp>
-      <p:sp>
-        <p:nvSpPr>
-          <p:cNvPr id="14" name="TextBox 13">
-            <a:extLst>
-              <a:ext uri="{FF2B5EF4-FFF2-40B4-BE49-F238E27FC236}">
-                <a16:creationId xmlns:a16="http://schemas.microsoft.com/office/drawing/2014/main" id="{B1792F75-FC83-4376-7564-A6AF6AA700F1}"/>
-              </a:ext>
-            </a:extLst>
-          </p:cNvPr>
-          <p:cNvSpPr txBox="1"/>
-          <p:nvPr/>
-        </p:nvSpPr>
-        <p:spPr>
-          <a:xfrm>
-            <a:off x="3251200" y="2616200"/>
-            <a:ext cx="2311400" cy="153888"/>
-          </a:xfrm>
-          <a:prstGeom prst="rect">
-            <a:avLst/>
-          </a:prstGeom>
-          <a:noFill/>
-        </p:spPr>
-        <p:txBody>
-          <a:bodyPr vert="horz" lIns="0" tIns="0" rIns="0" bIns="0" rtlCol="0">
-            <a:spAutoFit/>
-          </a:bodyPr>
-          <a:lstStyle/>
-          <a:p>
-            <a:r>
-              <a:rPr lang="vi-VN" sz="1000">
-                <a:solidFill>
-                  <a:srgbClr val="94A3B8"/>
-                </a:solidFill>
-                <a:latin typeface="Aptos" panose="020B0004020202020204" pitchFamily="34" charset="0"/>
-              </a:rPr>
-              <a:t>Latency</a:t>
-            </a:r>
-          </a:p>
-        </p:txBody>
-      </p:sp>
-      <p:sp>
-        <p:nvSpPr>
-          <p:cNvPr id="15" name="Rectangle: Rounded Corners 14">
-            <a:extLst>
-              <a:ext uri="{FF2B5EF4-FFF2-40B4-BE49-F238E27FC236}">
-                <a16:creationId xmlns:a16="http://schemas.microsoft.com/office/drawing/2014/main" id="{24062B57-C49F-635B-EC5E-CB8B1C038284}"/>
-              </a:ext>
-            </a:extLst>
-          </p:cNvPr>
-          <p:cNvSpPr/>
-          <p:nvPr/>
-        </p:nvSpPr>
-        <p:spPr>
-          <a:xfrm>
-            <a:off x="5994400" y="2006600"/>
-            <a:ext cx="2413000" cy="965200"/>
-          </a:xfrm>
-          <a:prstGeom prst="roundRect">
-            <a:avLst/>
-          </a:prstGeom>
-          <a:solidFill>
-            <a:srgbClr val="1E293B"/>
-          </a:solidFill>
-          <a:ln w="12700">
-            <a:solidFill>
-              <a:srgbClr val="334155"/>
-            </a:solidFill>
-          </a:ln>
-        </p:spPr>
-        <p:style>
-          <a:lnRef idx="2">
-            <a:schemeClr val="accent1">
-              <a:shade val="15000"/>
-            </a:schemeClr>
-          </a:lnRef>
-          <a:fillRef idx="1">
-            <a:schemeClr val="accent1"/>
-          </a:fillRef>
-          <a:effectRef idx="0">
-            <a:schemeClr val="accent1"/>
-          </a:effectRef>
-          <a:fontRef idx="minor">
-            <a:schemeClr val="lt1"/>
-          </a:fontRef>
-        </p:style>
-        <p:txBody>
-          <a:bodyPr rtlCol="0" anchor="ctr"/>
-          <a:lstStyle/>
-          <a:p>
-            <a:pPr algn="ctr"/>
-            <a:endParaRPr lang="vi-VN"/>
-          </a:p>
-        </p:txBody>
-      </p:sp>
-      <p:sp>
-        <p:nvSpPr>
-          <p:cNvPr id="16" name="TextBox 15">
-            <a:extLst>
-              <a:ext uri="{FF2B5EF4-FFF2-40B4-BE49-F238E27FC236}">
-                <a16:creationId xmlns:a16="http://schemas.microsoft.com/office/drawing/2014/main" id="{6D5A1F34-A536-BFA7-4D95-5F62AC6EF1C2}"/>
-              </a:ext>
-            </a:extLst>
-          </p:cNvPr>
-          <p:cNvSpPr txBox="1"/>
-          <p:nvPr/>
-        </p:nvSpPr>
-        <p:spPr>
-          <a:xfrm>
-            <a:off x="6172200" y="2171700"/>
-            <a:ext cx="2057400" cy="369332"/>
-          </a:xfrm>
-          <a:prstGeom prst="rect">
-            <a:avLst/>
-          </a:prstGeom>
-          <a:noFill/>
-        </p:spPr>
-        <p:txBody>
-          <a:bodyPr vert="horz" lIns="0" tIns="0" rIns="0" bIns="0" rtlCol="0">
-            <a:spAutoFit/>
-          </a:bodyPr>
-          <a:lstStyle/>
-          <a:p>
-            <a:r>
-              <a:rPr lang="vi-VN" sz="2400" b="1" dirty="0">
-                <a:solidFill>
-                  <a:srgbClr val="EF4444"/>
-                </a:solidFill>
-                <a:latin typeface="Aptos" panose="020B0004020202020204" pitchFamily="34" charset="0"/>
-              </a:rPr>
-              <a:t>ALO risk</a:t>
-            </a:r>
-          </a:p>
-        </p:txBody>
-      </p:sp>
-      <p:sp>
-        <p:nvSpPr>
-          <p:cNvPr id="17" name="TextBox 16">
-            <a:extLst>
-              <a:ext uri="{FF2B5EF4-FFF2-40B4-BE49-F238E27FC236}">
-                <a16:creationId xmlns:a16="http://schemas.microsoft.com/office/drawing/2014/main" id="{90958C8C-11C8-17E4-D7C6-8628EDB8CBB8}"/>
-              </a:ext>
-            </a:extLst>
-          </p:cNvPr>
-          <p:cNvSpPr txBox="1"/>
-          <p:nvPr/>
-        </p:nvSpPr>
-        <p:spPr>
-          <a:xfrm>
-            <a:off x="6172200" y="2616200"/>
-            <a:ext cx="2057400" cy="153888"/>
-          </a:xfrm>
-          <a:prstGeom prst="rect">
-            <a:avLst/>
-          </a:prstGeom>
-          <a:noFill/>
-        </p:spPr>
-        <p:txBody>
-          <a:bodyPr vert="horz" lIns="0" tIns="0" rIns="0" bIns="0" rtlCol="0">
-            <a:spAutoFit/>
-          </a:bodyPr>
-          <a:lstStyle/>
-          <a:p>
-            <a:r>
-              <a:rPr lang="vi-VN" sz="1000">
-                <a:solidFill>
-                  <a:srgbClr val="94A3B8"/>
-                </a:solidFill>
-                <a:latin typeface="Aptos" panose="020B0004020202020204" pitchFamily="34" charset="0"/>
-              </a:rPr>
-              <a:t>Duplicate charges</a:t>
-            </a:r>
-          </a:p>
-        </p:txBody>
-      </p:sp>
-      <p:sp>
-        <p:nvSpPr>
-          <p:cNvPr id="18" name="Rectangle: Rounded Corners 17">
-            <a:extLst>
-              <a:ext uri="{FF2B5EF4-FFF2-40B4-BE49-F238E27FC236}">
-                <a16:creationId xmlns:a16="http://schemas.microsoft.com/office/drawing/2014/main" id="{695FFBA8-DB58-8510-A1C2-B99886848D03}"/>
-              </a:ext>
-            </a:extLst>
-          </p:cNvPr>
-          <p:cNvSpPr/>
-          <p:nvPr/>
-        </p:nvSpPr>
-        <p:spPr>
-          <a:xfrm>
-            <a:off x="8661400" y="2006600"/>
-            <a:ext cx="2667000" cy="965200"/>
-          </a:xfrm>
-          <a:prstGeom prst="roundRect">
-            <a:avLst/>
-          </a:prstGeom>
-          <a:solidFill>
-            <a:srgbClr val="1E293B"/>
-          </a:solidFill>
-          <a:ln w="12700">
-            <a:solidFill>
-              <a:srgbClr val="334155"/>
-            </a:solidFill>
-          </a:ln>
-        </p:spPr>
-        <p:style>
-          <a:lnRef idx="2">
-            <a:schemeClr val="accent1">
-              <a:shade val="15000"/>
-            </a:schemeClr>
-          </a:lnRef>
-          <a:fillRef idx="1">
-            <a:schemeClr val="accent1"/>
-          </a:fillRef>
-          <a:effectRef idx="0">
-            <a:schemeClr val="accent1"/>
-          </a:effectRef>
-          <a:fontRef idx="minor">
-            <a:schemeClr val="lt1"/>
-          </a:fontRef>
-        </p:style>
-        <p:txBody>
-          <a:bodyPr rtlCol="0" anchor="ctr"/>
-          <a:lstStyle/>
-          <a:p>
-            <a:pPr algn="ctr"/>
-            <a:endParaRPr lang="vi-VN"/>
-          </a:p>
-        </p:txBody>
-      </p:sp>
-      <p:sp>
-        <p:nvSpPr>
-          <p:cNvPr id="19" name="TextBox 18">
-            <a:extLst>
-              <a:ext uri="{FF2B5EF4-FFF2-40B4-BE49-F238E27FC236}">
-                <a16:creationId xmlns:a16="http://schemas.microsoft.com/office/drawing/2014/main" id="{8F71325F-6867-7D5B-90A3-7D39FAE78446}"/>
-              </a:ext>
-            </a:extLst>
-          </p:cNvPr>
-          <p:cNvSpPr txBox="1"/>
-          <p:nvPr/>
-        </p:nvSpPr>
-        <p:spPr>
-          <a:xfrm>
-            <a:off x="8839200" y="2171700"/>
-            <a:ext cx="2311400" cy="369332"/>
-          </a:xfrm>
-          <a:prstGeom prst="rect">
-            <a:avLst/>
-          </a:prstGeom>
-          <a:noFill/>
-        </p:spPr>
-        <p:txBody>
-          <a:bodyPr vert="horz" lIns="0" tIns="0" rIns="0" bIns="0" rtlCol="0">
-            <a:spAutoFit/>
-          </a:bodyPr>
-          <a:lstStyle/>
-          <a:p>
-            <a:r>
-              <a:rPr lang="vi-VN" sz="2400" b="1">
-                <a:solidFill>
-                  <a:srgbClr val="10B981"/>
-                </a:solidFill>
-                <a:latin typeface="Aptos" panose="020B0004020202020204" pitchFamily="34" charset="0"/>
-              </a:rPr>
-              <a:t>EOS reject</a:t>
-            </a:r>
-          </a:p>
-        </p:txBody>
-      </p:sp>
-      <p:sp>
-        <p:nvSpPr>
-          <p:cNvPr id="20" name="TextBox 19">
-            <a:extLst>
-              <a:ext uri="{FF2B5EF4-FFF2-40B4-BE49-F238E27FC236}">
-                <a16:creationId xmlns:a16="http://schemas.microsoft.com/office/drawing/2014/main" id="{7B823DDE-9C52-CE6B-0E71-F9B23C457EF0}"/>
-              </a:ext>
-            </a:extLst>
-          </p:cNvPr>
-          <p:cNvSpPr txBox="1"/>
-          <p:nvPr/>
-        </p:nvSpPr>
-        <p:spPr>
-          <a:xfrm>
-            <a:off x="8839200" y="2616200"/>
-            <a:ext cx="2311400" cy="153888"/>
-          </a:xfrm>
-          <a:prstGeom prst="rect">
-            <a:avLst/>
-          </a:prstGeom>
-          <a:noFill/>
-        </p:spPr>
-        <p:txBody>
-          <a:bodyPr vert="horz" lIns="0" tIns="0" rIns="0" bIns="0" rtlCol="0">
-            <a:spAutoFit/>
-          </a:bodyPr>
-          <a:lstStyle/>
-          <a:p>
-            <a:r>
-              <a:rPr lang="vi-VN" sz="1000">
-                <a:solidFill>
-                  <a:srgbClr val="94A3B8"/>
-                </a:solidFill>
-                <a:latin typeface="Aptos" panose="020B0004020202020204" pitchFamily="34" charset="0"/>
-              </a:rPr>
-              <a:t>Duplicates blocked</a:t>
-            </a:r>
-          </a:p>
-        </p:txBody>
-      </p:sp>
-      <p:sp>
-        <p:nvSpPr>
-          <p:cNvPr id="21" name="Rectangle: Rounded Corners 20">
-            <a:extLst>
-              <a:ext uri="{FF2B5EF4-FFF2-40B4-BE49-F238E27FC236}">
-                <a16:creationId xmlns:a16="http://schemas.microsoft.com/office/drawing/2014/main" id="{AB5F48BD-1922-4DE1-D902-48786C73E6BA}"/>
-              </a:ext>
-            </a:extLst>
-          </p:cNvPr>
-          <p:cNvSpPr/>
-          <p:nvPr/>
-        </p:nvSpPr>
-        <p:spPr>
-          <a:xfrm>
-            <a:off x="2032000" y="3530600"/>
-            <a:ext cx="2667000" cy="965200"/>
-          </a:xfrm>
-          <a:prstGeom prst="roundRect">
-            <a:avLst/>
-          </a:prstGeom>
-          <a:solidFill>
-            <a:srgbClr val="1E293B"/>
-          </a:solidFill>
-          <a:ln w="12700">
-            <a:solidFill>
-              <a:srgbClr val="334155"/>
-            </a:solidFill>
-          </a:ln>
-        </p:spPr>
-        <p:style>
-          <a:lnRef idx="2">
-            <a:schemeClr val="accent1">
-              <a:shade val="15000"/>
-            </a:schemeClr>
-          </a:lnRef>
-          <a:fillRef idx="1">
-            <a:schemeClr val="accent1"/>
-          </a:fillRef>
-          <a:effectRef idx="0">
-            <a:schemeClr val="accent1"/>
-          </a:effectRef>
-          <a:fontRef idx="minor">
-            <a:schemeClr val="lt1"/>
-          </a:fontRef>
-        </p:style>
-        <p:txBody>
-          <a:bodyPr rtlCol="0" anchor="ctr"/>
-          <a:lstStyle/>
-          <a:p>
-            <a:pPr algn="ctr"/>
-            <a:endParaRPr lang="vi-VN"/>
-          </a:p>
-        </p:txBody>
-      </p:sp>
-      <p:sp>
-        <p:nvSpPr>
-          <p:cNvPr id="22" name="TextBox 21">
-            <a:extLst>
-              <a:ext uri="{FF2B5EF4-FFF2-40B4-BE49-F238E27FC236}">
-                <a16:creationId xmlns:a16="http://schemas.microsoft.com/office/drawing/2014/main" id="{94A8D4F1-48D9-85AF-1317-E6BBEFF735F9}"/>
-              </a:ext>
-            </a:extLst>
-          </p:cNvPr>
-          <p:cNvSpPr txBox="1"/>
-          <p:nvPr/>
-        </p:nvSpPr>
-        <p:spPr>
-          <a:xfrm>
-            <a:off x="2209800" y="3695700"/>
-            <a:ext cx="2311400" cy="369332"/>
-          </a:xfrm>
-          <a:prstGeom prst="rect">
-            <a:avLst/>
-          </a:prstGeom>
-          <a:noFill/>
-        </p:spPr>
-        <p:txBody>
-          <a:bodyPr vert="horz" lIns="0" tIns="0" rIns="0" bIns="0" rtlCol="0">
-            <a:spAutoFit/>
-          </a:bodyPr>
-          <a:lstStyle/>
-          <a:p>
-            <a:r>
-              <a:rPr lang="vi-VN" sz="2400" b="1">
-                <a:solidFill>
-                  <a:srgbClr val="F59E0B"/>
-                </a:solidFill>
-                <a:latin typeface="Aptos" panose="020B0004020202020204" pitchFamily="34" charset="0"/>
-              </a:rPr>
-              <a:t>1.42 ms</a:t>
-            </a:r>
-          </a:p>
-        </p:txBody>
-      </p:sp>
-      <p:sp>
-        <p:nvSpPr>
-          <p:cNvPr id="23" name="TextBox 22">
-            <a:extLst>
-              <a:ext uri="{FF2B5EF4-FFF2-40B4-BE49-F238E27FC236}">
-                <a16:creationId xmlns:a16="http://schemas.microsoft.com/office/drawing/2014/main" id="{4E6B8077-4785-1056-22D7-220A73B30637}"/>
-              </a:ext>
-            </a:extLst>
-          </p:cNvPr>
-          <p:cNvSpPr txBox="1"/>
-          <p:nvPr/>
-        </p:nvSpPr>
-        <p:spPr>
-          <a:xfrm>
-            <a:off x="2209800" y="4140200"/>
-            <a:ext cx="2311400" cy="153888"/>
-          </a:xfrm>
-          <a:prstGeom prst="rect">
-            <a:avLst/>
-          </a:prstGeom>
-          <a:noFill/>
-        </p:spPr>
-        <p:txBody>
-          <a:bodyPr vert="horz" lIns="0" tIns="0" rIns="0" bIns="0" rtlCol="0">
-            <a:spAutoFit/>
-          </a:bodyPr>
-          <a:lstStyle/>
-          <a:p>
-            <a:r>
-              <a:rPr lang="vi-VN" sz="1000">
-                <a:solidFill>
-                  <a:srgbClr val="94A3B8"/>
-                </a:solidFill>
-                <a:latin typeface="Aptos" panose="020B0004020202020204" pitchFamily="34" charset="0"/>
-              </a:rPr>
-              <a:t>WAL write latency</a:t>
-            </a:r>
-          </a:p>
-        </p:txBody>
-      </p:sp>
-      <p:sp>
-        <p:nvSpPr>
-          <p:cNvPr id="24" name="Rectangle: Rounded Corners 23">
-            <a:extLst>
-              <a:ext uri="{FF2B5EF4-FFF2-40B4-BE49-F238E27FC236}">
-                <a16:creationId xmlns:a16="http://schemas.microsoft.com/office/drawing/2014/main" id="{126EFE39-2819-B592-60C7-B530B474C72B}"/>
-              </a:ext>
-            </a:extLst>
-          </p:cNvPr>
-          <p:cNvSpPr/>
-          <p:nvPr/>
-        </p:nvSpPr>
-        <p:spPr>
-          <a:xfrm>
-            <a:off x="5016500" y="3530600"/>
-            <a:ext cx="2794000" cy="965200"/>
-          </a:xfrm>
-          <a:prstGeom prst="roundRect">
-            <a:avLst/>
-          </a:prstGeom>
-          <a:solidFill>
-            <a:srgbClr val="1E293B"/>
-          </a:solidFill>
-          <a:ln w="12700">
-            <a:solidFill>
-              <a:srgbClr val="334155"/>
-            </a:solidFill>
-          </a:ln>
-        </p:spPr>
-        <p:style>
-          <a:lnRef idx="2">
-            <a:schemeClr val="accent1">
-              <a:shade val="15000"/>
-            </a:schemeClr>
-          </a:lnRef>
-          <a:fillRef idx="1">
-            <a:schemeClr val="accent1"/>
-          </a:fillRef>
-          <a:effectRef idx="0">
-            <a:schemeClr val="accent1"/>
-          </a:effectRef>
-          <a:fontRef idx="minor">
-            <a:schemeClr val="lt1"/>
-          </a:fontRef>
-        </p:style>
-        <p:txBody>
-          <a:bodyPr rtlCol="0" anchor="ctr"/>
-          <a:lstStyle/>
-          <a:p>
-            <a:pPr algn="ctr"/>
-            <a:endParaRPr lang="vi-VN"/>
-          </a:p>
-        </p:txBody>
-      </p:sp>
-      <p:sp>
-        <p:nvSpPr>
-          <p:cNvPr id="25" name="TextBox 24">
-            <a:extLst>
-              <a:ext uri="{FF2B5EF4-FFF2-40B4-BE49-F238E27FC236}">
-                <a16:creationId xmlns:a16="http://schemas.microsoft.com/office/drawing/2014/main" id="{26402144-5A47-5C3A-6F0B-8E3B0F71DCD2}"/>
-              </a:ext>
-            </a:extLst>
-          </p:cNvPr>
-          <p:cNvSpPr txBox="1"/>
-          <p:nvPr/>
-        </p:nvSpPr>
-        <p:spPr>
-          <a:xfrm>
-            <a:off x="5194300" y="3695700"/>
-            <a:ext cx="2438400" cy="369332"/>
-          </a:xfrm>
-          <a:prstGeom prst="rect">
-            <a:avLst/>
-          </a:prstGeom>
-          <a:noFill/>
-        </p:spPr>
-        <p:txBody>
-          <a:bodyPr vert="horz" lIns="0" tIns="0" rIns="0" bIns="0" rtlCol="0">
-            <a:spAutoFit/>
-          </a:bodyPr>
-          <a:lstStyle/>
-          <a:p>
-            <a:r>
-              <a:rPr lang="vi-VN" sz="2400" b="1">
-                <a:solidFill>
-                  <a:srgbClr val="60A5FA"/>
-                </a:solidFill>
-                <a:latin typeface="Aptos" panose="020B0004020202020204" pitchFamily="34" charset="0"/>
-              </a:rPr>
-              <a:t>TPS + latency</a:t>
-            </a:r>
-          </a:p>
-        </p:txBody>
-      </p:sp>
-      <p:sp>
-        <p:nvSpPr>
-          <p:cNvPr id="26" name="TextBox 25">
-            <a:extLst>
-              <a:ext uri="{FF2B5EF4-FFF2-40B4-BE49-F238E27FC236}">
-                <a16:creationId xmlns:a16="http://schemas.microsoft.com/office/drawing/2014/main" id="{22B9DA55-C8DF-2D91-F4C4-69E2DFDB831C}"/>
-              </a:ext>
-            </a:extLst>
-          </p:cNvPr>
-          <p:cNvSpPr txBox="1"/>
-          <p:nvPr/>
-        </p:nvSpPr>
-        <p:spPr>
-          <a:xfrm>
-            <a:off x="5194300" y="4140200"/>
-            <a:ext cx="2438400" cy="153888"/>
-          </a:xfrm>
-          <a:prstGeom prst="rect">
-            <a:avLst/>
-          </a:prstGeom>
-          <a:noFill/>
-        </p:spPr>
-        <p:txBody>
-          <a:bodyPr vert="horz" lIns="0" tIns="0" rIns="0" bIns="0" rtlCol="0">
-            <a:spAutoFit/>
-          </a:bodyPr>
-          <a:lstStyle/>
-          <a:p>
-            <a:r>
-              <a:rPr lang="vi-VN" sz="1000">
-                <a:solidFill>
-                  <a:srgbClr val="94A3B8"/>
-                </a:solidFill>
-                <a:latin typeface="Aptos" panose="020B0004020202020204" pitchFamily="34" charset="0"/>
-              </a:rPr>
-              <a:t>Window metrics</a:t>
-            </a:r>
-          </a:p>
-        </p:txBody>
-      </p:sp>
-      <p:sp>
-        <p:nvSpPr>
-          <p:cNvPr id="27" name="Rectangle: Rounded Corners 26">
-            <a:extLst>
-              <a:ext uri="{FF2B5EF4-FFF2-40B4-BE49-F238E27FC236}">
-                <a16:creationId xmlns:a16="http://schemas.microsoft.com/office/drawing/2014/main" id="{19A8F364-8F7A-423E-8844-DAE5E08ABDF3}"/>
-              </a:ext>
-            </a:extLst>
-          </p:cNvPr>
-          <p:cNvSpPr/>
-          <p:nvPr/>
-        </p:nvSpPr>
-        <p:spPr>
-          <a:xfrm>
-            <a:off x="8128000" y="3530600"/>
-            <a:ext cx="2286000" cy="965200"/>
-          </a:xfrm>
-          <a:prstGeom prst="roundRect">
-            <a:avLst/>
-          </a:prstGeom>
-          <a:solidFill>
-            <a:srgbClr val="1E293B"/>
-          </a:solidFill>
-          <a:ln w="12700">
-            <a:solidFill>
-              <a:srgbClr val="334155"/>
-            </a:solidFill>
-          </a:ln>
-        </p:spPr>
-        <p:style>
-          <a:lnRef idx="2">
-            <a:schemeClr val="accent1">
-              <a:shade val="15000"/>
-            </a:schemeClr>
-          </a:lnRef>
-          <a:fillRef idx="1">
-            <a:schemeClr val="accent1"/>
-          </a:fillRef>
-          <a:effectRef idx="0">
-            <a:schemeClr val="accent1"/>
-          </a:effectRef>
-          <a:fontRef idx="minor">
-            <a:schemeClr val="lt1"/>
-          </a:fontRef>
-        </p:style>
-        <p:txBody>
-          <a:bodyPr rtlCol="0" anchor="ctr"/>
-          <a:lstStyle/>
-          <a:p>
-            <a:pPr algn="ctr"/>
-            <a:endParaRPr lang="vi-VN"/>
-          </a:p>
-        </p:txBody>
-      </p:sp>
-      <p:sp>
-        <p:nvSpPr>
-          <p:cNvPr id="28" name="TextBox 27">
-            <a:extLst>
-              <a:ext uri="{FF2B5EF4-FFF2-40B4-BE49-F238E27FC236}">
-                <a16:creationId xmlns:a16="http://schemas.microsoft.com/office/drawing/2014/main" id="{16F3DE45-FF09-49B7-33B3-22A9C142139F}"/>
-              </a:ext>
-            </a:extLst>
-          </p:cNvPr>
-          <p:cNvSpPr txBox="1"/>
-          <p:nvPr/>
-        </p:nvSpPr>
-        <p:spPr>
-          <a:xfrm>
-            <a:off x="8305800" y="3695700"/>
-            <a:ext cx="1930400" cy="369332"/>
-          </a:xfrm>
-          <a:prstGeom prst="rect">
-            <a:avLst/>
-          </a:prstGeom>
-          <a:noFill/>
-        </p:spPr>
-        <p:txBody>
-          <a:bodyPr vert="horz" lIns="0" tIns="0" rIns="0" bIns="0" rtlCol="0">
-            <a:spAutoFit/>
-          </a:bodyPr>
-          <a:lstStyle/>
-          <a:p>
-            <a:r>
-              <a:rPr lang="vi-VN" sz="1900" b="1">
-                <a:solidFill>
-                  <a:srgbClr val="EF4444"/>
-                </a:solidFill>
-                <a:latin typeface="Aptos" panose="020B0004020202020204" pitchFamily="34" charset="0"/>
-              </a:rPr>
-              <a:t>OOO/Late/BP</a:t>
-            </a:r>
-          </a:p>
-        </p:txBody>
-      </p:sp>
-      <p:sp>
-        <p:nvSpPr>
-          <p:cNvPr id="29" name="TextBox 28">
-            <a:extLst>
-              <a:ext uri="{FF2B5EF4-FFF2-40B4-BE49-F238E27FC236}">
-                <a16:creationId xmlns:a16="http://schemas.microsoft.com/office/drawing/2014/main" id="{32C65736-B62D-E82F-2D7D-70C0F49BB77A}"/>
-              </a:ext>
-            </a:extLst>
-          </p:cNvPr>
-          <p:cNvSpPr txBox="1"/>
-          <p:nvPr/>
-        </p:nvSpPr>
-        <p:spPr>
-          <a:xfrm>
-            <a:off x="8305800" y="4140200"/>
-            <a:ext cx="1930400" cy="153888"/>
-          </a:xfrm>
-          <a:prstGeom prst="rect">
-            <a:avLst/>
-          </a:prstGeom>
-          <a:noFill/>
-        </p:spPr>
-        <p:txBody>
-          <a:bodyPr vert="horz" lIns="0" tIns="0" rIns="0" bIns="0" rtlCol="0">
-            <a:spAutoFit/>
-          </a:bodyPr>
-          <a:lstStyle/>
-          <a:p>
-            <a:r>
-              <a:rPr lang="vi-VN" sz="1000">
-                <a:solidFill>
-                  <a:srgbClr val="94A3B8"/>
-                </a:solidFill>
-                <a:latin typeface="Aptos" panose="020B0004020202020204" pitchFamily="34" charset="0"/>
-              </a:rPr>
-              <a:t>Disorder</a:t>
-            </a:r>
+              <a:rPr lang="en-US" sz="3200" b="1" dirty="0">
+                <a:solidFill>
+                  <a:schemeClr val="bg1"/>
+                </a:solidFill>
+              </a:rPr>
+              <a:t>1. EOS </a:t>
+            </a:r>
+            <a:r>
+              <a:rPr lang="en-US" sz="3200" b="1" dirty="0" err="1">
+                <a:solidFill>
+                  <a:schemeClr val="bg1"/>
+                </a:solidFill>
+              </a:rPr>
+              <a:t>chỉ</a:t>
+            </a:r>
+            <a:r>
+              <a:rPr lang="en-US" sz="3200" b="1" dirty="0">
+                <a:solidFill>
+                  <a:schemeClr val="bg1"/>
+                </a:solidFill>
+              </a:rPr>
+              <a:t> commit </a:t>
+            </a:r>
+            <a:r>
+              <a:rPr lang="en-US" sz="3200" b="1" dirty="0" err="1">
+                <a:solidFill>
+                  <a:schemeClr val="bg1"/>
+                </a:solidFill>
+              </a:rPr>
+              <a:t>một</a:t>
+            </a:r>
+            <a:r>
+              <a:rPr lang="en-US" sz="3200" b="1" dirty="0">
+                <a:solidFill>
+                  <a:schemeClr val="bg1"/>
+                </a:solidFill>
+              </a:rPr>
+              <a:t> transaction</a:t>
+            </a:r>
+            <a:endParaRPr lang="vi-VN" sz="3200" b="1" dirty="0">
+              <a:solidFill>
+                <a:schemeClr val="bg1"/>
+              </a:solidFill>
+            </a:endParaRPr>
+          </a:p>
+          <a:p>
+            <a:r>
+              <a:rPr lang="en-US" sz="3200" b="1" dirty="0">
+                <a:solidFill>
+                  <a:schemeClr val="bg1"/>
+                </a:solidFill>
+              </a:rPr>
+              <a:t>2. </a:t>
+            </a:r>
+            <a:r>
+              <a:rPr lang="en-US" sz="3200" dirty="0">
+                <a:solidFill>
+                  <a:schemeClr val="bg1"/>
+                </a:solidFill>
+              </a:rPr>
+              <a:t>ALO </a:t>
+            </a:r>
+            <a:r>
+              <a:rPr lang="en-US" sz="3200" dirty="0" err="1">
+                <a:solidFill>
+                  <a:schemeClr val="bg1"/>
+                </a:solidFill>
+              </a:rPr>
+              <a:t>xử</a:t>
+            </a:r>
+            <a:r>
+              <a:rPr lang="en-US" sz="3200" dirty="0">
+                <a:solidFill>
+                  <a:schemeClr val="bg1"/>
+                </a:solidFill>
+              </a:rPr>
+              <a:t> </a:t>
+            </a:r>
+            <a:r>
+              <a:rPr lang="en-US" sz="3200" dirty="0" err="1">
+                <a:solidFill>
+                  <a:schemeClr val="bg1"/>
+                </a:solidFill>
+              </a:rPr>
+              <a:t>lý</a:t>
+            </a:r>
+            <a:r>
+              <a:rPr lang="en-US" sz="3200" dirty="0">
+                <a:solidFill>
+                  <a:schemeClr val="bg1"/>
+                </a:solidFill>
+              </a:rPr>
+              <a:t> duplicate </a:t>
+            </a:r>
+            <a:r>
+              <a:rPr lang="en-US" sz="3200" dirty="0" err="1">
+                <a:solidFill>
+                  <a:schemeClr val="bg1"/>
+                </a:solidFill>
+              </a:rPr>
+              <a:t>để</a:t>
+            </a:r>
+            <a:r>
+              <a:rPr lang="en-US" sz="3200" dirty="0">
+                <a:solidFill>
+                  <a:schemeClr val="bg1"/>
+                </a:solidFill>
+              </a:rPr>
+              <a:t> </a:t>
+            </a:r>
+            <a:r>
+              <a:rPr lang="en-US" sz="3200" dirty="0" err="1">
+                <a:solidFill>
+                  <a:schemeClr val="bg1"/>
+                </a:solidFill>
+              </a:rPr>
+              <a:t>làm</a:t>
+            </a:r>
+            <a:r>
+              <a:rPr lang="en-US" sz="3200" dirty="0">
+                <a:solidFill>
+                  <a:schemeClr val="bg1"/>
+                </a:solidFill>
+              </a:rPr>
+              <a:t> baseline</a:t>
+            </a:r>
+            <a:endParaRPr lang="vi-VN" sz="3200" dirty="0">
+              <a:solidFill>
+                <a:schemeClr val="bg1"/>
+              </a:solidFill>
+            </a:endParaRPr>
+          </a:p>
+          <a:p>
+            <a:r>
+              <a:rPr lang="en-US" sz="3200" b="1" dirty="0">
+                <a:solidFill>
+                  <a:schemeClr val="bg1"/>
+                </a:solidFill>
+              </a:rPr>
+              <a:t>3. Retry Simulation</a:t>
+            </a:r>
+            <a:endParaRPr lang="vi-VN" sz="3200" b="1" dirty="0">
+              <a:solidFill>
+                <a:schemeClr val="bg1"/>
+              </a:solidFill>
+            </a:endParaRPr>
+          </a:p>
+          <a:p>
+            <a:r>
+              <a:rPr lang="en-US" sz="3200" b="1" dirty="0">
+                <a:solidFill>
+                  <a:schemeClr val="bg1"/>
+                </a:solidFill>
+              </a:rPr>
+              <a:t>4. Node failure reject payment</a:t>
+            </a:r>
+            <a:endParaRPr lang="vi-VN" sz="3200" b="1" dirty="0">
+              <a:solidFill>
+                <a:schemeClr val="bg1"/>
+              </a:solidFill>
+            </a:endParaRPr>
+          </a:p>
+          <a:p>
+            <a:r>
+              <a:rPr lang="en-US" sz="3200" b="1" dirty="0">
+                <a:solidFill>
+                  <a:schemeClr val="bg1"/>
+                </a:solidFill>
+              </a:rPr>
+              <a:t>5. Live Stream Benchmark EOS vs ALO</a:t>
+            </a:r>
+            <a:endParaRPr lang="vi-VN" sz="3200" b="1" dirty="0">
+              <a:solidFill>
+                <a:schemeClr val="bg1"/>
+              </a:solidFill>
+            </a:endParaRPr>
           </a:p>
         </p:txBody>
       </p:sp>
     </p:spTree>
     <p:extLst>
       <p:ext uri="{BB962C8B-B14F-4D97-AF65-F5344CB8AC3E}">
-        <p14:creationId xmlns:p14="http://schemas.microsoft.com/office/powerpoint/2010/main" val="3203634595"/>
+        <p14:creationId xmlns:p14="http://schemas.microsoft.com/office/powerpoint/2010/main" val="4070461496"/>
       </p:ext>
     </p:extLst>
   </p:cSld>
@@ -6977,7 +6925,7 @@
           <p:cNvPr id="2" name="Rectangle 1">
             <a:extLst>
               <a:ext uri="{FF2B5EF4-FFF2-40B4-BE49-F238E27FC236}">
-                <a16:creationId xmlns:a16="http://schemas.microsoft.com/office/drawing/2014/main" id="{A0E2F98A-C77B-4C79-1016-6BADDBDCAEA6}"/>
+                <a16:creationId xmlns:a16="http://schemas.microsoft.com/office/drawing/2014/main" id="{2C9E50D7-B87E-808B-65A7-EE68DC2CC635}"/>
               </a:ext>
             </a:extLst>
           </p:cNvPr>
@@ -6986,7 +6934,7 @@
         </p:nvSpPr>
         <p:spPr>
           <a:xfrm>
-            <a:off x="0" y="0"/>
+            <a:off x="0" y="39539"/>
             <a:ext cx="12192000" cy="6858000"/>
           </a:xfrm>
           <a:prstGeom prst="rect">
@@ -7036,7 +6984,7 @@
           <a:lstStyle/>
           <a:p>
             <a:pPr algn="ctr"/>
-            <a:endParaRPr lang="vi-VN" dirty="0"/>
+            <a:endParaRPr lang="vi-VN"/>
           </a:p>
         </p:txBody>
       </p:sp>
@@ -7045,7 +6993,7 @@
           <p:cNvPr id="3" name="TextBox 2">
             <a:extLst>
               <a:ext uri="{FF2B5EF4-FFF2-40B4-BE49-F238E27FC236}">
-                <a16:creationId xmlns:a16="http://schemas.microsoft.com/office/drawing/2014/main" id="{7B253619-4E38-EF85-C4E0-FB79DEC5F7A9}"/>
+                <a16:creationId xmlns:a16="http://schemas.microsoft.com/office/drawing/2014/main" id="{322FA511-4D8D-799F-E4FE-94B4919A2E06}"/>
               </a:ext>
             </a:extLst>
           </p:cNvPr>
@@ -7075,7 +7023,7 @@
                 </a:solidFill>
                 <a:latin typeface="Aptos" panose="020B0004020202020204" pitchFamily="34" charset="0"/>
               </a:rPr>
-              <a:t>05 / TESTS</a:t>
+              <a:t>06 / LIMITS</a:t>
             </a:r>
           </a:p>
         </p:txBody>
@@ -7085,7 +7033,7 @@
           <p:cNvPr id="4" name="TextBox 3">
             <a:extLst>
               <a:ext uri="{FF2B5EF4-FFF2-40B4-BE49-F238E27FC236}">
-                <a16:creationId xmlns:a16="http://schemas.microsoft.com/office/drawing/2014/main" id="{3049D3E9-533A-D40E-CE48-C757874F5C76}"/>
+                <a16:creationId xmlns:a16="http://schemas.microsoft.com/office/drawing/2014/main" id="{89C3A201-7587-5072-98F1-8A24A12DCD3C}"/>
               </a:ext>
             </a:extLst>
           </p:cNvPr>
@@ -7109,29 +7057,14 @@
           <a:lstStyle/>
           <a:p>
             <a:r>
-              <a:rPr lang="vi-VN" sz="3000" b="1" dirty="0">
+              <a:rPr lang="vi-VN" sz="3000" b="1">
                 <a:solidFill>
                   <a:srgbClr val="F1F5F9"/>
                 </a:solidFill>
                 <a:latin typeface="Aptos" panose="020B0004020202020204" pitchFamily="34" charset="0"/>
               </a:rPr>
-              <a:t>Các te</a:t>
-            </a:r>
-            <a:r>
-              <a:rPr lang="en-US" sz="3000" b="1" dirty="0">
-                <a:solidFill>
-                  <a:srgbClr val="F1F5F9"/>
-                </a:solidFill>
-                <a:latin typeface="Aptos" panose="020B0004020202020204" pitchFamily="34" charset="0"/>
-              </a:rPr>
-              <a:t>st demo</a:t>
-            </a:r>
-            <a:endParaRPr lang="vi-VN" sz="3000" b="1" dirty="0">
-              <a:solidFill>
-                <a:srgbClr val="F1F5F9"/>
-              </a:solidFill>
-              <a:latin typeface="Aptos" panose="020B0004020202020204" pitchFamily="34" charset="0"/>
-            </a:endParaRPr>
+              <a:t>Hạn chế hiện tại</a:t>
+            </a:r>
           </a:p>
         </p:txBody>
       </p:sp>
@@ -7140,7 +7073,7 @@
           <p:cNvPr id="5" name="TextBox 4">
             <a:extLst>
               <a:ext uri="{FF2B5EF4-FFF2-40B4-BE49-F238E27FC236}">
-                <a16:creationId xmlns:a16="http://schemas.microsoft.com/office/drawing/2014/main" id="{D7044685-07CE-B0D5-644D-96B919C97476}"/>
+                <a16:creationId xmlns:a16="http://schemas.microsoft.com/office/drawing/2014/main" id="{70F3EE82-70DE-57F9-3D0D-6B56B43E16BA}"/>
               </a:ext>
             </a:extLst>
           </p:cNvPr>
@@ -7170,7 +7103,7 @@
                 </a:solidFill>
                 <a:latin typeface="Aptos" panose="020B0004020202020204" pitchFamily="34" charset="0"/>
               </a:rPr>
-              <a:t>Backend test suite pass và dashboard có thao tác demo tương ứng.</a:t>
+              <a:t>Thiết kế phù hợp scope môn học, chưa phải production-grade payment platform.</a:t>
             </a:r>
           </a:p>
         </p:txBody>
@@ -7180,7 +7113,7 @@
           <p:cNvPr id="6" name="Rectangle 5">
             <a:extLst>
               <a:ext uri="{FF2B5EF4-FFF2-40B4-BE49-F238E27FC236}">
-                <a16:creationId xmlns:a16="http://schemas.microsoft.com/office/drawing/2014/main" id="{C43C04E5-B3F8-37D8-BF66-0FB7FD8C4352}"/>
+                <a16:creationId xmlns:a16="http://schemas.microsoft.com/office/drawing/2014/main" id="{C1950389-3891-3784-D090-20188118D379}"/>
               </a:ext>
             </a:extLst>
           </p:cNvPr>
@@ -7234,7 +7167,7 @@
           <p:cNvPr id="9" name="TextBox 8">
             <a:extLst>
               <a:ext uri="{FF2B5EF4-FFF2-40B4-BE49-F238E27FC236}">
-                <a16:creationId xmlns:a16="http://schemas.microsoft.com/office/drawing/2014/main" id="{C085966D-C5DA-9649-2E87-4EB70B898B15}"/>
+                <a16:creationId xmlns:a16="http://schemas.microsoft.com/office/drawing/2014/main" id="{25390576-05EA-762F-8180-A1BA2A593E9B}"/>
               </a:ext>
             </a:extLst>
           </p:cNvPr>
@@ -7243,8 +7176,8 @@
         </p:nvSpPr>
         <p:spPr>
           <a:xfrm>
-            <a:off x="965200" y="2006600"/>
-            <a:ext cx="10414000" cy="4431983"/>
+            <a:off x="1092200" y="2006600"/>
+            <a:ext cx="9906000" cy="3323987"/>
           </a:xfrm>
           <a:prstGeom prst="rect">
             <a:avLst/>
@@ -7258,1389 +7191,7 @@
           <a:lstStyle/>
           <a:p>
             <a:r>
-              <a:rPr lang="en-US" b="1" dirty="0">
-                <a:solidFill>
-                  <a:schemeClr val="bg1"/>
-                </a:solidFill>
-              </a:rPr>
-              <a:t> 1. </a:t>
-            </a:r>
-            <a:r>
-              <a:rPr lang="en-US" b="1" dirty="0" err="1">
-                <a:solidFill>
-                  <a:schemeClr val="bg1"/>
-                </a:solidFill>
-              </a:rPr>
-              <a:t>eosRejectsDuplicateAndCommitsOnce</a:t>
-            </a:r>
-            <a:endParaRPr lang="vi-VN" dirty="0">
-              <a:solidFill>
-                <a:schemeClr val="bg1"/>
-              </a:solidFill>
-            </a:endParaRPr>
-          </a:p>
-          <a:p>
-            <a:r>
-              <a:rPr lang="en-US" dirty="0">
-                <a:solidFill>
-                  <a:schemeClr val="bg1"/>
-                </a:solidFill>
-              </a:rPr>
-              <a:t>     </a:t>
-            </a:r>
-            <a:r>
-              <a:rPr lang="en-US" dirty="0" err="1">
-                <a:solidFill>
-                  <a:schemeClr val="bg1"/>
-                </a:solidFill>
-              </a:rPr>
-              <a:t>Kiểm</a:t>
-            </a:r>
-            <a:r>
-              <a:rPr lang="en-US" dirty="0">
-                <a:solidFill>
-                  <a:schemeClr val="bg1"/>
-                </a:solidFill>
-              </a:rPr>
-              <a:t> </a:t>
-            </a:r>
-            <a:r>
-              <a:rPr lang="en-US" dirty="0" err="1">
-                <a:solidFill>
-                  <a:schemeClr val="bg1"/>
-                </a:solidFill>
-              </a:rPr>
-              <a:t>tra</a:t>
-            </a:r>
-            <a:r>
-              <a:rPr lang="en-US" dirty="0">
-                <a:solidFill>
-                  <a:schemeClr val="bg1"/>
-                </a:solidFill>
-              </a:rPr>
-              <a:t> EOS reject duplicate </a:t>
-            </a:r>
-            <a:r>
-              <a:rPr lang="en-US" dirty="0" err="1">
-                <a:solidFill>
-                  <a:schemeClr val="bg1"/>
-                </a:solidFill>
-              </a:rPr>
-              <a:t>và</a:t>
-            </a:r>
-            <a:r>
-              <a:rPr lang="en-US" dirty="0">
-                <a:solidFill>
-                  <a:schemeClr val="bg1"/>
-                </a:solidFill>
-              </a:rPr>
-              <a:t> </a:t>
-            </a:r>
-            <a:r>
-              <a:rPr lang="en-US" dirty="0" err="1">
-                <a:solidFill>
-                  <a:schemeClr val="bg1"/>
-                </a:solidFill>
-              </a:rPr>
-              <a:t>chỉ</a:t>
-            </a:r>
-            <a:r>
-              <a:rPr lang="en-US" dirty="0">
-                <a:solidFill>
-                  <a:schemeClr val="bg1"/>
-                </a:solidFill>
-              </a:rPr>
-              <a:t> commit 1 transaction.</a:t>
-            </a:r>
-            <a:endParaRPr lang="vi-VN" dirty="0">
-              <a:solidFill>
-                <a:schemeClr val="bg1"/>
-              </a:solidFill>
-            </a:endParaRPr>
-          </a:p>
-          <a:p>
-            <a:r>
-              <a:rPr lang="en-US" b="1" dirty="0">
-                <a:solidFill>
-                  <a:schemeClr val="bg1"/>
-                </a:solidFill>
-              </a:rPr>
-              <a:t>  2. </a:t>
-            </a:r>
-            <a:r>
-              <a:rPr lang="en-US" b="1" dirty="0" err="1">
-                <a:solidFill>
-                  <a:schemeClr val="bg1"/>
-                </a:solidFill>
-              </a:rPr>
-              <a:t>aloProcessesDuplicates</a:t>
-            </a:r>
-            <a:endParaRPr lang="vi-VN" dirty="0">
-              <a:solidFill>
-                <a:schemeClr val="bg1"/>
-              </a:solidFill>
-            </a:endParaRPr>
-          </a:p>
-          <a:p>
-            <a:r>
-              <a:rPr lang="en-US" dirty="0">
-                <a:solidFill>
-                  <a:schemeClr val="bg1"/>
-                </a:solidFill>
-              </a:rPr>
-              <a:t>     </a:t>
-            </a:r>
-            <a:r>
-              <a:rPr lang="en-US" dirty="0" err="1">
-                <a:solidFill>
-                  <a:schemeClr val="bg1"/>
-                </a:solidFill>
-              </a:rPr>
-              <a:t>Kiểm</a:t>
-            </a:r>
-            <a:r>
-              <a:rPr lang="en-US" dirty="0">
-                <a:solidFill>
-                  <a:schemeClr val="bg1"/>
-                </a:solidFill>
-              </a:rPr>
-              <a:t> </a:t>
-            </a:r>
-            <a:r>
-              <a:rPr lang="en-US" dirty="0" err="1">
-                <a:solidFill>
-                  <a:schemeClr val="bg1"/>
-                </a:solidFill>
-              </a:rPr>
-              <a:t>tra</a:t>
-            </a:r>
-            <a:r>
-              <a:rPr lang="en-US" dirty="0">
-                <a:solidFill>
-                  <a:schemeClr val="bg1"/>
-                </a:solidFill>
-              </a:rPr>
-              <a:t> ALO </a:t>
-            </a:r>
-            <a:r>
-              <a:rPr lang="en-US" dirty="0" err="1">
-                <a:solidFill>
-                  <a:schemeClr val="bg1"/>
-                </a:solidFill>
-              </a:rPr>
-              <a:t>xử</a:t>
-            </a:r>
-            <a:r>
-              <a:rPr lang="en-US" dirty="0">
-                <a:solidFill>
-                  <a:schemeClr val="bg1"/>
-                </a:solidFill>
-              </a:rPr>
-              <a:t> </a:t>
-            </a:r>
-            <a:r>
-              <a:rPr lang="en-US" dirty="0" err="1">
-                <a:solidFill>
-                  <a:schemeClr val="bg1"/>
-                </a:solidFill>
-              </a:rPr>
-              <a:t>lý</a:t>
-            </a:r>
-            <a:r>
-              <a:rPr lang="en-US" dirty="0">
-                <a:solidFill>
-                  <a:schemeClr val="bg1"/>
-                </a:solidFill>
-              </a:rPr>
-              <a:t> duplicate </a:t>
-            </a:r>
-            <a:r>
-              <a:rPr lang="en-US" dirty="0" err="1">
-                <a:solidFill>
-                  <a:schemeClr val="bg1"/>
-                </a:solidFill>
-              </a:rPr>
-              <a:t>thành</a:t>
-            </a:r>
-            <a:r>
-              <a:rPr lang="en-US" dirty="0">
-                <a:solidFill>
-                  <a:schemeClr val="bg1"/>
-                </a:solidFill>
-              </a:rPr>
-              <a:t> </a:t>
-            </a:r>
-            <a:r>
-              <a:rPr lang="en-US" dirty="0" err="1">
-                <a:solidFill>
-                  <a:schemeClr val="bg1"/>
-                </a:solidFill>
-              </a:rPr>
-              <a:t>nhiều</a:t>
-            </a:r>
-            <a:r>
-              <a:rPr lang="en-US" dirty="0">
-                <a:solidFill>
-                  <a:schemeClr val="bg1"/>
-                </a:solidFill>
-              </a:rPr>
-              <a:t> transaction </a:t>
-            </a:r>
-            <a:r>
-              <a:rPr lang="en-US" dirty="0" err="1">
-                <a:solidFill>
-                  <a:schemeClr val="bg1"/>
-                </a:solidFill>
-              </a:rPr>
-              <a:t>để</a:t>
-            </a:r>
-            <a:r>
-              <a:rPr lang="en-US" dirty="0">
-                <a:solidFill>
-                  <a:schemeClr val="bg1"/>
-                </a:solidFill>
-              </a:rPr>
-              <a:t> </a:t>
-            </a:r>
-            <a:r>
-              <a:rPr lang="en-US" dirty="0" err="1">
-                <a:solidFill>
-                  <a:schemeClr val="bg1"/>
-                </a:solidFill>
-              </a:rPr>
-              <a:t>làm</a:t>
-            </a:r>
-            <a:r>
-              <a:rPr lang="en-US" dirty="0">
-                <a:solidFill>
-                  <a:schemeClr val="bg1"/>
-                </a:solidFill>
-              </a:rPr>
-              <a:t> baseline.</a:t>
-            </a:r>
-            <a:endParaRPr lang="vi-VN" dirty="0">
-              <a:solidFill>
-                <a:schemeClr val="bg1"/>
-              </a:solidFill>
-            </a:endParaRPr>
-          </a:p>
-          <a:p>
-            <a:r>
-              <a:rPr lang="en-US" b="1" dirty="0">
-                <a:solidFill>
-                  <a:schemeClr val="bg1"/>
-                </a:solidFill>
-              </a:rPr>
-              <a:t>  3. </a:t>
-            </a:r>
-            <a:r>
-              <a:rPr lang="en-US" b="1" dirty="0" err="1">
-                <a:solidFill>
-                  <a:schemeClr val="bg1"/>
-                </a:solidFill>
-              </a:rPr>
-              <a:t>outOfOrderRetryUsesEventTimeWindow</a:t>
-            </a:r>
-            <a:endParaRPr lang="vi-VN" dirty="0">
-              <a:solidFill>
-                <a:schemeClr val="bg1"/>
-              </a:solidFill>
-            </a:endParaRPr>
-          </a:p>
-          <a:p>
-            <a:r>
-              <a:rPr lang="en-US" dirty="0">
-                <a:solidFill>
-                  <a:schemeClr val="bg1"/>
-                </a:solidFill>
-              </a:rPr>
-              <a:t>     </a:t>
-            </a:r>
-            <a:r>
-              <a:rPr lang="en-US" dirty="0" err="1">
-                <a:solidFill>
-                  <a:schemeClr val="bg1"/>
-                </a:solidFill>
-              </a:rPr>
-              <a:t>Kiểm</a:t>
-            </a:r>
-            <a:r>
-              <a:rPr lang="en-US" dirty="0">
-                <a:solidFill>
-                  <a:schemeClr val="bg1"/>
-                </a:solidFill>
-              </a:rPr>
-              <a:t> </a:t>
-            </a:r>
-            <a:r>
-              <a:rPr lang="en-US" dirty="0" err="1">
-                <a:solidFill>
-                  <a:schemeClr val="bg1"/>
-                </a:solidFill>
-              </a:rPr>
-              <a:t>tra</a:t>
-            </a:r>
-            <a:r>
-              <a:rPr lang="en-US" dirty="0">
-                <a:solidFill>
-                  <a:schemeClr val="bg1"/>
-                </a:solidFill>
-              </a:rPr>
-              <a:t> retry </a:t>
-            </a:r>
-            <a:r>
-              <a:rPr lang="en-US" dirty="0" err="1">
-                <a:solidFill>
-                  <a:schemeClr val="bg1"/>
-                </a:solidFill>
-              </a:rPr>
-              <a:t>lệch</a:t>
-            </a:r>
-            <a:r>
-              <a:rPr lang="en-US" dirty="0">
-                <a:solidFill>
-                  <a:schemeClr val="bg1"/>
-                </a:solidFill>
-              </a:rPr>
-              <a:t> </a:t>
-            </a:r>
-            <a:r>
-              <a:rPr lang="en-US" dirty="0" err="1">
-                <a:solidFill>
-                  <a:schemeClr val="bg1"/>
-                </a:solidFill>
-              </a:rPr>
-              <a:t>thứ</a:t>
-            </a:r>
-            <a:r>
-              <a:rPr lang="en-US" dirty="0">
-                <a:solidFill>
-                  <a:schemeClr val="bg1"/>
-                </a:solidFill>
-              </a:rPr>
-              <a:t> </a:t>
-            </a:r>
-            <a:r>
-              <a:rPr lang="en-US" dirty="0" err="1">
-                <a:solidFill>
-                  <a:schemeClr val="bg1"/>
-                </a:solidFill>
-              </a:rPr>
-              <a:t>tự</a:t>
-            </a:r>
-            <a:r>
-              <a:rPr lang="en-US" dirty="0">
-                <a:solidFill>
-                  <a:schemeClr val="bg1"/>
-                </a:solidFill>
-              </a:rPr>
-              <a:t> </a:t>
-            </a:r>
-            <a:r>
-              <a:rPr lang="en-US" dirty="0" err="1">
-                <a:solidFill>
-                  <a:schemeClr val="bg1"/>
-                </a:solidFill>
-              </a:rPr>
-              <a:t>vẫn</a:t>
-            </a:r>
-            <a:r>
-              <a:rPr lang="en-US" dirty="0">
-                <a:solidFill>
-                  <a:schemeClr val="bg1"/>
-                </a:solidFill>
-              </a:rPr>
-              <a:t> </a:t>
-            </a:r>
-            <a:r>
-              <a:rPr lang="en-US" dirty="0" err="1">
-                <a:solidFill>
-                  <a:schemeClr val="bg1"/>
-                </a:solidFill>
-              </a:rPr>
-              <a:t>bị</a:t>
-            </a:r>
-            <a:r>
-              <a:rPr lang="en-US" dirty="0">
-                <a:solidFill>
-                  <a:schemeClr val="bg1"/>
-                </a:solidFill>
-              </a:rPr>
-              <a:t> de-dup </a:t>
-            </a:r>
-            <a:r>
-              <a:rPr lang="en-US" dirty="0" err="1">
-                <a:solidFill>
-                  <a:schemeClr val="bg1"/>
-                </a:solidFill>
-              </a:rPr>
-              <a:t>theo</a:t>
-            </a:r>
-            <a:r>
-              <a:rPr lang="en-US" dirty="0">
-                <a:solidFill>
-                  <a:schemeClr val="bg1"/>
-                </a:solidFill>
-              </a:rPr>
-              <a:t> event-time.</a:t>
-            </a:r>
-            <a:endParaRPr lang="vi-VN" dirty="0">
-              <a:solidFill>
-                <a:schemeClr val="bg1"/>
-              </a:solidFill>
-            </a:endParaRPr>
-          </a:p>
-          <a:p>
-            <a:r>
-              <a:rPr lang="en-US" b="1" dirty="0">
-                <a:solidFill>
-                  <a:schemeClr val="bg1"/>
-                </a:solidFill>
-              </a:rPr>
-              <a:t>  4. </a:t>
-            </a:r>
-            <a:r>
-              <a:rPr lang="en-US" b="1" dirty="0" err="1">
-                <a:solidFill>
-                  <a:schemeClr val="bg1"/>
-                </a:solidFill>
-              </a:rPr>
-              <a:t>concurrentEosDuplicateStillCommitsOnce</a:t>
-            </a:r>
-            <a:endParaRPr lang="vi-VN" dirty="0">
-              <a:solidFill>
-                <a:schemeClr val="bg1"/>
-              </a:solidFill>
-            </a:endParaRPr>
-          </a:p>
-          <a:p>
-            <a:r>
-              <a:rPr lang="en-US" dirty="0">
-                <a:solidFill>
-                  <a:schemeClr val="bg1"/>
-                </a:solidFill>
-              </a:rPr>
-              <a:t>     </a:t>
-            </a:r>
-            <a:r>
-              <a:rPr lang="en-US" dirty="0" err="1">
-                <a:solidFill>
-                  <a:schemeClr val="bg1"/>
-                </a:solidFill>
-              </a:rPr>
-              <a:t>Kiểm</a:t>
-            </a:r>
-            <a:r>
-              <a:rPr lang="en-US" dirty="0">
-                <a:solidFill>
-                  <a:schemeClr val="bg1"/>
-                </a:solidFill>
-              </a:rPr>
-              <a:t> </a:t>
-            </a:r>
-            <a:r>
-              <a:rPr lang="en-US" dirty="0" err="1">
-                <a:solidFill>
-                  <a:schemeClr val="bg1"/>
-                </a:solidFill>
-              </a:rPr>
-              <a:t>tra</a:t>
-            </a:r>
-            <a:r>
-              <a:rPr lang="en-US" dirty="0">
-                <a:solidFill>
-                  <a:schemeClr val="bg1"/>
-                </a:solidFill>
-              </a:rPr>
-              <a:t> concurrent race: </a:t>
-            </a:r>
-            <a:r>
-              <a:rPr lang="en-US" dirty="0" err="1">
-                <a:solidFill>
-                  <a:schemeClr val="bg1"/>
-                </a:solidFill>
-              </a:rPr>
-              <a:t>nhiều</a:t>
-            </a:r>
-            <a:r>
-              <a:rPr lang="en-US" dirty="0">
-                <a:solidFill>
-                  <a:schemeClr val="bg1"/>
-                </a:solidFill>
-              </a:rPr>
-              <a:t> request </a:t>
-            </a:r>
-            <a:r>
-              <a:rPr lang="en-US" dirty="0" err="1">
-                <a:solidFill>
-                  <a:schemeClr val="bg1"/>
-                </a:solidFill>
-              </a:rPr>
-              <a:t>cùng</a:t>
-            </a:r>
-            <a:r>
-              <a:rPr lang="en-US" dirty="0">
-                <a:solidFill>
-                  <a:schemeClr val="bg1"/>
-                </a:solidFill>
-              </a:rPr>
-              <a:t> key </a:t>
-            </a:r>
-            <a:r>
-              <a:rPr lang="en-US" dirty="0" err="1">
-                <a:solidFill>
-                  <a:schemeClr val="bg1"/>
-                </a:solidFill>
-              </a:rPr>
-              <a:t>nhưng</a:t>
-            </a:r>
-            <a:r>
-              <a:rPr lang="en-US" dirty="0">
-                <a:solidFill>
-                  <a:schemeClr val="bg1"/>
-                </a:solidFill>
-              </a:rPr>
-              <a:t> </a:t>
-            </a:r>
-            <a:r>
-              <a:rPr lang="en-US" dirty="0" err="1">
-                <a:solidFill>
-                  <a:schemeClr val="bg1"/>
-                </a:solidFill>
-              </a:rPr>
-              <a:t>chỉ</a:t>
-            </a:r>
-            <a:r>
-              <a:rPr lang="en-US" dirty="0">
-                <a:solidFill>
-                  <a:schemeClr val="bg1"/>
-                </a:solidFill>
-              </a:rPr>
-              <a:t> 1 SUCCESS.</a:t>
-            </a:r>
-            <a:endParaRPr lang="vi-VN" dirty="0">
-              <a:solidFill>
-                <a:schemeClr val="bg1"/>
-              </a:solidFill>
-            </a:endParaRPr>
-          </a:p>
-          <a:p>
-            <a:r>
-              <a:rPr lang="en-US" b="1" dirty="0">
-                <a:solidFill>
-                  <a:schemeClr val="bg1"/>
-                </a:solidFill>
-              </a:rPr>
-              <a:t>  5. </a:t>
-            </a:r>
-            <a:r>
-              <a:rPr lang="en-US" b="1" dirty="0" err="1">
-                <a:solidFill>
-                  <a:schemeClr val="bg1"/>
-                </a:solidFill>
-              </a:rPr>
-              <a:t>nodeFailureRejectsPayment</a:t>
-            </a:r>
-            <a:endParaRPr lang="vi-VN" dirty="0">
-              <a:solidFill>
-                <a:schemeClr val="bg1"/>
-              </a:solidFill>
-            </a:endParaRPr>
-          </a:p>
-          <a:p>
-            <a:r>
-              <a:rPr lang="en-US" dirty="0">
-                <a:solidFill>
-                  <a:schemeClr val="bg1"/>
-                </a:solidFill>
-              </a:rPr>
-              <a:t>     </a:t>
-            </a:r>
-            <a:r>
-              <a:rPr lang="en-US" dirty="0" err="1">
-                <a:solidFill>
-                  <a:schemeClr val="bg1"/>
-                </a:solidFill>
-              </a:rPr>
-              <a:t>Kiểm</a:t>
-            </a:r>
-            <a:r>
-              <a:rPr lang="en-US" dirty="0">
-                <a:solidFill>
-                  <a:schemeClr val="bg1"/>
-                </a:solidFill>
-              </a:rPr>
-              <a:t> </a:t>
-            </a:r>
-            <a:r>
-              <a:rPr lang="en-US" dirty="0" err="1">
-                <a:solidFill>
-                  <a:schemeClr val="bg1"/>
-                </a:solidFill>
-              </a:rPr>
-              <a:t>tra</a:t>
-            </a:r>
-            <a:r>
-              <a:rPr lang="en-US" dirty="0">
-                <a:solidFill>
-                  <a:schemeClr val="bg1"/>
-                </a:solidFill>
-              </a:rPr>
-              <a:t> node FAILED </a:t>
-            </a:r>
-            <a:r>
-              <a:rPr lang="en-US" dirty="0" err="1">
-                <a:solidFill>
-                  <a:schemeClr val="bg1"/>
-                </a:solidFill>
-              </a:rPr>
-              <a:t>thì</a:t>
-            </a:r>
-            <a:r>
-              <a:rPr lang="en-US" dirty="0">
-                <a:solidFill>
-                  <a:schemeClr val="bg1"/>
-                </a:solidFill>
-              </a:rPr>
-              <a:t> payment </a:t>
-            </a:r>
-            <a:r>
-              <a:rPr lang="en-US" dirty="0" err="1">
-                <a:solidFill>
-                  <a:schemeClr val="bg1"/>
-                </a:solidFill>
-              </a:rPr>
-              <a:t>bị</a:t>
-            </a:r>
-            <a:r>
-              <a:rPr lang="en-US" dirty="0">
-                <a:solidFill>
-                  <a:schemeClr val="bg1"/>
-                </a:solidFill>
-              </a:rPr>
-              <a:t> reject 503.</a:t>
-            </a:r>
-            <a:endParaRPr lang="vi-VN" dirty="0">
-              <a:solidFill>
-                <a:schemeClr val="bg1"/>
-              </a:solidFill>
-            </a:endParaRPr>
-          </a:p>
-          <a:p>
-            <a:r>
-              <a:rPr lang="en-US" b="1" dirty="0">
-                <a:solidFill>
-                  <a:schemeClr val="bg1"/>
-                </a:solidFill>
-              </a:rPr>
-              <a:t>  6. </a:t>
-            </a:r>
-            <a:r>
-              <a:rPr lang="en-US" b="1" dirty="0" err="1">
-                <a:solidFill>
-                  <a:schemeClr val="bg1"/>
-                </a:solidFill>
-              </a:rPr>
-              <a:t>benchmarkShowsEosBlocksDuplicatesAndAloDoesNot</a:t>
-            </a:r>
-            <a:endParaRPr lang="vi-VN" dirty="0">
-              <a:solidFill>
-                <a:schemeClr val="bg1"/>
-              </a:solidFill>
-            </a:endParaRPr>
-          </a:p>
-          <a:p>
-            <a:r>
-              <a:rPr lang="en-US" dirty="0">
-                <a:solidFill>
-                  <a:schemeClr val="bg1"/>
-                </a:solidFill>
-              </a:rPr>
-              <a:t>     </a:t>
-            </a:r>
-            <a:r>
-              <a:rPr lang="en-US" dirty="0" err="1">
-                <a:solidFill>
-                  <a:schemeClr val="bg1"/>
-                </a:solidFill>
-              </a:rPr>
-              <a:t>Kiểm</a:t>
-            </a:r>
-            <a:r>
-              <a:rPr lang="en-US" dirty="0">
-                <a:solidFill>
-                  <a:schemeClr val="bg1"/>
-                </a:solidFill>
-              </a:rPr>
-              <a:t> </a:t>
-            </a:r>
-            <a:r>
-              <a:rPr lang="en-US" dirty="0" err="1">
-                <a:solidFill>
-                  <a:schemeClr val="bg1"/>
-                </a:solidFill>
-              </a:rPr>
-              <a:t>tra</a:t>
-            </a:r>
-            <a:r>
-              <a:rPr lang="en-US" dirty="0">
-                <a:solidFill>
-                  <a:schemeClr val="bg1"/>
-                </a:solidFill>
-              </a:rPr>
-              <a:t> benchmark: EOS </a:t>
-            </a:r>
-            <a:r>
-              <a:rPr lang="en-US" dirty="0" err="1">
-                <a:solidFill>
-                  <a:schemeClr val="bg1"/>
-                </a:solidFill>
-              </a:rPr>
-              <a:t>chặn</a:t>
-            </a:r>
-            <a:r>
-              <a:rPr lang="en-US" dirty="0">
-                <a:solidFill>
-                  <a:schemeClr val="bg1"/>
-                </a:solidFill>
-              </a:rPr>
-              <a:t> duplicate, ALO </a:t>
-            </a:r>
-            <a:r>
-              <a:rPr lang="en-US" dirty="0" err="1">
-                <a:solidFill>
-                  <a:schemeClr val="bg1"/>
-                </a:solidFill>
-              </a:rPr>
-              <a:t>không</a:t>
-            </a:r>
-            <a:r>
-              <a:rPr lang="en-US" dirty="0">
-                <a:solidFill>
-                  <a:schemeClr val="bg1"/>
-                </a:solidFill>
-              </a:rPr>
-              <a:t> </a:t>
-            </a:r>
-            <a:r>
-              <a:rPr lang="en-US" dirty="0" err="1">
-                <a:solidFill>
-                  <a:schemeClr val="bg1"/>
-                </a:solidFill>
-              </a:rPr>
-              <a:t>chặn</a:t>
-            </a:r>
-            <a:r>
-              <a:rPr lang="en-US" dirty="0">
-                <a:solidFill>
-                  <a:schemeClr val="bg1"/>
-                </a:solidFill>
-              </a:rPr>
-              <a:t>.</a:t>
-            </a:r>
-            <a:endParaRPr lang="vi-VN" dirty="0">
-              <a:solidFill>
-                <a:schemeClr val="bg1"/>
-              </a:solidFill>
-            </a:endParaRPr>
-          </a:p>
-          <a:p>
-            <a:r>
-              <a:rPr lang="en-US" dirty="0">
-                <a:solidFill>
-                  <a:schemeClr val="bg1"/>
-                </a:solidFill>
-              </a:rPr>
-              <a:t>  </a:t>
-            </a:r>
-            <a:r>
-              <a:rPr lang="en-US" b="1" dirty="0">
-                <a:solidFill>
-                  <a:schemeClr val="bg1"/>
-                </a:solidFill>
-              </a:rPr>
-              <a:t>7. </a:t>
-            </a:r>
-            <a:r>
-              <a:rPr lang="en-US" b="1" dirty="0" err="1">
-                <a:solidFill>
-                  <a:schemeClr val="bg1"/>
-                </a:solidFill>
-              </a:rPr>
-              <a:t>gatewayRoleUsesGatewayPaymentService</a:t>
-            </a:r>
-            <a:endParaRPr lang="vi-VN" dirty="0">
-              <a:solidFill>
-                <a:schemeClr val="bg1"/>
-              </a:solidFill>
-            </a:endParaRPr>
-          </a:p>
-          <a:p>
-            <a:r>
-              <a:rPr lang="en-US" dirty="0">
-                <a:solidFill>
-                  <a:schemeClr val="bg1"/>
-                </a:solidFill>
-              </a:rPr>
-              <a:t>     </a:t>
-            </a:r>
-            <a:r>
-              <a:rPr lang="en-US" dirty="0" err="1">
-                <a:solidFill>
-                  <a:schemeClr val="bg1"/>
-                </a:solidFill>
-              </a:rPr>
-              <a:t>Kiểm</a:t>
-            </a:r>
-            <a:r>
-              <a:rPr lang="en-US" dirty="0">
-                <a:solidFill>
-                  <a:schemeClr val="bg1"/>
-                </a:solidFill>
-              </a:rPr>
-              <a:t> </a:t>
-            </a:r>
-            <a:r>
-              <a:rPr lang="en-US" dirty="0" err="1">
-                <a:solidFill>
-                  <a:schemeClr val="bg1"/>
-                </a:solidFill>
-              </a:rPr>
-              <a:t>tra</a:t>
-            </a:r>
-            <a:r>
-              <a:rPr lang="en-US" dirty="0">
-                <a:solidFill>
-                  <a:schemeClr val="bg1"/>
-                </a:solidFill>
-              </a:rPr>
-              <a:t> profile gateway </a:t>
-            </a:r>
-            <a:r>
-              <a:rPr lang="en-US" dirty="0" err="1">
-                <a:solidFill>
-                  <a:schemeClr val="bg1"/>
-                </a:solidFill>
-              </a:rPr>
-              <a:t>dùng</a:t>
-            </a:r>
-            <a:r>
-              <a:rPr lang="en-US" dirty="0">
-                <a:solidFill>
-                  <a:schemeClr val="bg1"/>
-                </a:solidFill>
-              </a:rPr>
-              <a:t> </a:t>
-            </a:r>
-            <a:r>
-              <a:rPr lang="en-US" dirty="0" err="1">
-                <a:solidFill>
-                  <a:schemeClr val="bg1"/>
-                </a:solidFill>
-              </a:rPr>
-              <a:t>đúng</a:t>
-            </a:r>
-            <a:r>
-              <a:rPr lang="en-US" dirty="0">
-                <a:solidFill>
-                  <a:schemeClr val="bg1"/>
-                </a:solidFill>
-              </a:rPr>
-              <a:t> </a:t>
-            </a:r>
-            <a:r>
-              <a:rPr lang="en-US" dirty="0" err="1">
-                <a:solidFill>
-                  <a:schemeClr val="bg1"/>
-                </a:solidFill>
-              </a:rPr>
-              <a:t>GatewayPaymentService</a:t>
-            </a:r>
-            <a:r>
-              <a:rPr lang="en-US" dirty="0">
-                <a:solidFill>
-                  <a:schemeClr val="bg1"/>
-                </a:solidFill>
-              </a:rPr>
-              <a:t>.</a:t>
-            </a:r>
-            <a:endParaRPr lang="vi-VN" dirty="0">
-              <a:solidFill>
-                <a:schemeClr val="bg1"/>
-              </a:solidFill>
-            </a:endParaRPr>
-          </a:p>
-          <a:p>
-            <a:r>
-              <a:rPr lang="en-US" b="1" dirty="0">
-                <a:solidFill>
-                  <a:schemeClr val="bg1"/>
-                </a:solidFill>
-              </a:rPr>
-              <a:t>  8. </a:t>
-            </a:r>
-            <a:r>
-              <a:rPr lang="en-US" b="1" dirty="0" err="1">
-                <a:solidFill>
-                  <a:schemeClr val="bg1"/>
-                </a:solidFill>
-              </a:rPr>
-              <a:t>configuredNodeOnlyProcessesItsOwnNodeId</a:t>
-            </a:r>
-            <a:endParaRPr lang="vi-VN" dirty="0">
-              <a:solidFill>
-                <a:schemeClr val="bg1"/>
-              </a:solidFill>
-            </a:endParaRPr>
-          </a:p>
-          <a:p>
-            <a:r>
-              <a:rPr lang="en-US" dirty="0">
-                <a:solidFill>
-                  <a:schemeClr val="bg1"/>
-                </a:solidFill>
-              </a:rPr>
-              <a:t>     </a:t>
-            </a:r>
-            <a:r>
-              <a:rPr lang="en-US" dirty="0" err="1">
-                <a:solidFill>
-                  <a:schemeClr val="bg1"/>
-                </a:solidFill>
-              </a:rPr>
-              <a:t>Kiểm</a:t>
-            </a:r>
-            <a:r>
-              <a:rPr lang="en-US" dirty="0">
-                <a:solidFill>
-                  <a:schemeClr val="bg1"/>
-                </a:solidFill>
-              </a:rPr>
-              <a:t> </a:t>
-            </a:r>
-            <a:r>
-              <a:rPr lang="en-US" dirty="0" err="1">
-                <a:solidFill>
-                  <a:schemeClr val="bg1"/>
-                </a:solidFill>
-              </a:rPr>
-              <a:t>tra</a:t>
-            </a:r>
-            <a:r>
-              <a:rPr lang="en-US" dirty="0">
-                <a:solidFill>
-                  <a:schemeClr val="bg1"/>
-                </a:solidFill>
-              </a:rPr>
-              <a:t> node profile </a:t>
-            </a:r>
-            <a:r>
-              <a:rPr lang="en-US" dirty="0" err="1">
-                <a:solidFill>
-                  <a:schemeClr val="bg1"/>
-                </a:solidFill>
-              </a:rPr>
-              <a:t>chỉ</a:t>
-            </a:r>
-            <a:r>
-              <a:rPr lang="en-US" dirty="0">
-                <a:solidFill>
-                  <a:schemeClr val="bg1"/>
-                </a:solidFill>
-              </a:rPr>
-              <a:t> </a:t>
-            </a:r>
-            <a:r>
-              <a:rPr lang="en-US" dirty="0" err="1">
-                <a:solidFill>
-                  <a:schemeClr val="bg1"/>
-                </a:solidFill>
-              </a:rPr>
-              <a:t>xử</a:t>
-            </a:r>
-            <a:r>
-              <a:rPr lang="en-US" dirty="0">
-                <a:solidFill>
-                  <a:schemeClr val="bg1"/>
-                </a:solidFill>
-              </a:rPr>
-              <a:t> </a:t>
-            </a:r>
-            <a:r>
-              <a:rPr lang="en-US" dirty="0" err="1">
-                <a:solidFill>
-                  <a:schemeClr val="bg1"/>
-                </a:solidFill>
-              </a:rPr>
-              <a:t>lý</a:t>
-            </a:r>
-            <a:r>
-              <a:rPr lang="en-US" dirty="0">
-                <a:solidFill>
-                  <a:schemeClr val="bg1"/>
-                </a:solidFill>
-              </a:rPr>
-              <a:t> </a:t>
-            </a:r>
-            <a:r>
-              <a:rPr lang="en-US" dirty="0" err="1">
-                <a:solidFill>
-                  <a:schemeClr val="bg1"/>
-                </a:solidFill>
-              </a:rPr>
-              <a:t>đúng</a:t>
-            </a:r>
-            <a:r>
-              <a:rPr lang="en-US" dirty="0">
-                <a:solidFill>
-                  <a:schemeClr val="bg1"/>
-                </a:solidFill>
-              </a:rPr>
-              <a:t> node-id </a:t>
-            </a:r>
-            <a:r>
-              <a:rPr lang="en-US" dirty="0" err="1">
-                <a:solidFill>
-                  <a:schemeClr val="bg1"/>
-                </a:solidFill>
-              </a:rPr>
-              <a:t>của</a:t>
-            </a:r>
-            <a:r>
-              <a:rPr lang="en-US" dirty="0">
-                <a:solidFill>
-                  <a:schemeClr val="bg1"/>
-                </a:solidFill>
-              </a:rPr>
-              <a:t> </a:t>
-            </a:r>
-            <a:r>
-              <a:rPr lang="en-US" dirty="0" err="1">
-                <a:solidFill>
-                  <a:schemeClr val="bg1"/>
-                </a:solidFill>
-              </a:rPr>
-              <a:t>nó</a:t>
-            </a:r>
-            <a:r>
-              <a:rPr lang="en-US" dirty="0">
-                <a:solidFill>
-                  <a:schemeClr val="bg1"/>
-                </a:solidFill>
-              </a:rPr>
-              <a:t>.</a:t>
-            </a:r>
-            <a:endParaRPr lang="vi-VN" sz="1700" dirty="0">
-              <a:solidFill>
-                <a:schemeClr val="bg1"/>
-              </a:solidFill>
-              <a:latin typeface="Aptos" panose="020B0004020202020204" pitchFamily="34" charset="0"/>
-            </a:endParaRPr>
-          </a:p>
-        </p:txBody>
-      </p:sp>
-    </p:spTree>
-    <p:extLst>
-      <p:ext uri="{BB962C8B-B14F-4D97-AF65-F5344CB8AC3E}">
-        <p14:creationId xmlns:p14="http://schemas.microsoft.com/office/powerpoint/2010/main" val="4070461496"/>
-      </p:ext>
-    </p:extLst>
-  </p:cSld>
-  <p:clrMapOvr>
-    <a:masterClrMapping/>
-  </p:clrMapOvr>
-</p:sld>
-</file>
-
-<file path=ppt/slides/slide15.xml><?xml version="1.0" encoding="utf-8"?>
-<p:sld xmlns:a="http://schemas.openxmlformats.org/drawingml/2006/main" xmlns:r="http://schemas.openxmlformats.org/officeDocument/2006/relationships" xmlns:p="http://schemas.openxmlformats.org/presentationml/2006/main">
-  <p:cSld>
-    <p:spTree>
-      <p:nvGrpSpPr>
-        <p:cNvPr id="1" name=""/>
-        <p:cNvGrpSpPr/>
-        <p:nvPr/>
-      </p:nvGrpSpPr>
-      <p:grpSpPr>
-        <a:xfrm>
-          <a:off x="0" y="0"/>
-          <a:ext cx="0" cy="0"/>
-          <a:chOff x="0" y="0"/>
-          <a:chExt cx="0" cy="0"/>
-        </a:xfrm>
-      </p:grpSpPr>
-      <p:sp>
-        <p:nvSpPr>
-          <p:cNvPr id="2" name="Rectangle 1">
-            <a:extLst>
-              <a:ext uri="{FF2B5EF4-FFF2-40B4-BE49-F238E27FC236}">
-                <a16:creationId xmlns:a16="http://schemas.microsoft.com/office/drawing/2014/main" id="{2C9E50D7-B87E-808B-65A7-EE68DC2CC635}"/>
-              </a:ext>
-            </a:extLst>
-          </p:cNvPr>
-          <p:cNvSpPr/>
-          <p:nvPr/>
-        </p:nvSpPr>
-        <p:spPr>
-          <a:xfrm>
-            <a:off x="0" y="39539"/>
-            <a:ext cx="12192000" cy="6858000"/>
-          </a:xfrm>
-          <a:prstGeom prst="rect">
-            <a:avLst/>
-          </a:prstGeom>
-          <a:solidFill>
-            <a:srgbClr val="0F172A"/>
-          </a:solidFill>
-          <a:ln w="12700" cap="flat" cmpd="sng" algn="ctr">
-            <a:noFill/>
-            <a:prstDash val="solid"/>
-            <a:miter lim="800000"/>
-          </a:ln>
-          <a:effectLst/>
-          <a:extLst>
-            <a:ext uri="{91240B29-F687-4F45-9708-019B960494DF}">
-              <a14:hiddenLine xmlns:a14="http://schemas.microsoft.com/office/drawing/2010/main" w="12700" cap="flat" cmpd="sng" algn="ctr">
-                <a:solidFill>
-                  <a:schemeClr val="accent1">
-                    <a:shade val="15000"/>
-                  </a:schemeClr>
-                </a:solidFill>
-                <a:prstDash val="solid"/>
-                <a:miter lim="800000"/>
-              </a14:hiddenLine>
-            </a:ext>
-          </a:extLst>
-        </p:spPr>
-        <p:style>
-          <a:lnRef idx="2">
-            <a:schemeClr val="accent1">
-              <a:shade val="15000"/>
-            </a:schemeClr>
-          </a:lnRef>
-          <a:fillRef idx="1">
-            <a:schemeClr val="accent1"/>
-          </a:fillRef>
-          <a:effectRef idx="0">
-            <a:schemeClr val="accent1"/>
-          </a:effectRef>
-          <a:fontRef idx="minor">
-            <a:schemeClr val="lt1"/>
-          </a:fontRef>
-        </p:style>
-        <p:txBody>
-          <a:bodyPr rtlCol="0" anchor="ctr"/>
-          <a:lstStyle/>
-          <a:p>
-            <a:pPr algn="ctr"/>
-            <a:endParaRPr lang="vi-VN"/>
-          </a:p>
-        </p:txBody>
-      </p:sp>
-      <p:sp>
-        <p:nvSpPr>
-          <p:cNvPr id="3" name="TextBox 2">
-            <a:extLst>
-              <a:ext uri="{FF2B5EF4-FFF2-40B4-BE49-F238E27FC236}">
-                <a16:creationId xmlns:a16="http://schemas.microsoft.com/office/drawing/2014/main" id="{322FA511-4D8D-799F-E4FE-94B4919A2E06}"/>
-              </a:ext>
-            </a:extLst>
-          </p:cNvPr>
-          <p:cNvSpPr txBox="1"/>
-          <p:nvPr/>
-        </p:nvSpPr>
-        <p:spPr>
-          <a:xfrm>
-            <a:off x="533400" y="330200"/>
-            <a:ext cx="2286000" cy="169277"/>
-          </a:xfrm>
-          <a:prstGeom prst="rect">
-            <a:avLst/>
-          </a:prstGeom>
-          <a:noFill/>
-        </p:spPr>
-        <p:txBody>
-          <a:bodyPr vert="horz" lIns="0" tIns="0" rIns="0" bIns="0" rtlCol="0">
-            <a:spAutoFit/>
-          </a:bodyPr>
-          <a:lstStyle/>
-          <a:p>
-            <a:r>
-              <a:rPr lang="vi-VN" sz="1100" b="1">
-                <a:solidFill>
-                  <a:srgbClr val="10B981"/>
-                </a:solidFill>
-                <a:latin typeface="Aptos" panose="020B0004020202020204" pitchFamily="34" charset="0"/>
-              </a:rPr>
-              <a:t>06 / LIMITS</a:t>
-            </a:r>
-          </a:p>
-        </p:txBody>
-      </p:sp>
-      <p:sp>
-        <p:nvSpPr>
-          <p:cNvPr id="4" name="TextBox 3">
-            <a:extLst>
-              <a:ext uri="{FF2B5EF4-FFF2-40B4-BE49-F238E27FC236}">
-                <a16:creationId xmlns:a16="http://schemas.microsoft.com/office/drawing/2014/main" id="{89C3A201-7587-5072-98F1-8A24A12DCD3C}"/>
-              </a:ext>
-            </a:extLst>
-          </p:cNvPr>
-          <p:cNvSpPr txBox="1"/>
-          <p:nvPr/>
-        </p:nvSpPr>
-        <p:spPr>
-          <a:xfrm>
-            <a:off x="533400" y="660400"/>
-            <a:ext cx="9906000" cy="461665"/>
-          </a:xfrm>
-          <a:prstGeom prst="rect">
-            <a:avLst/>
-          </a:prstGeom>
-          <a:noFill/>
-        </p:spPr>
-        <p:txBody>
-          <a:bodyPr vert="horz" lIns="0" tIns="0" rIns="0" bIns="0" rtlCol="0">
-            <a:spAutoFit/>
-          </a:bodyPr>
-          <a:lstStyle/>
-          <a:p>
-            <a:r>
-              <a:rPr lang="vi-VN" sz="3000" b="1">
-                <a:solidFill>
-                  <a:srgbClr val="F1F5F9"/>
-                </a:solidFill>
-                <a:latin typeface="Aptos" panose="020B0004020202020204" pitchFamily="34" charset="0"/>
-              </a:rPr>
-              <a:t>Hạn chế hiện tại</a:t>
-            </a:r>
-          </a:p>
-        </p:txBody>
-      </p:sp>
-      <p:sp>
-        <p:nvSpPr>
-          <p:cNvPr id="5" name="TextBox 4">
-            <a:extLst>
-              <a:ext uri="{FF2B5EF4-FFF2-40B4-BE49-F238E27FC236}">
-                <a16:creationId xmlns:a16="http://schemas.microsoft.com/office/drawing/2014/main" id="{70F3EE82-70DE-57F9-3D0D-6B56B43E16BA}"/>
-              </a:ext>
-            </a:extLst>
-          </p:cNvPr>
-          <p:cNvSpPr txBox="1"/>
-          <p:nvPr/>
-        </p:nvSpPr>
-        <p:spPr>
-          <a:xfrm>
-            <a:off x="558800" y="1270000"/>
-            <a:ext cx="10414000" cy="215444"/>
-          </a:xfrm>
-          <a:prstGeom prst="rect">
-            <a:avLst/>
-          </a:prstGeom>
-          <a:noFill/>
-        </p:spPr>
-        <p:txBody>
-          <a:bodyPr vert="horz" lIns="0" tIns="0" rIns="0" bIns="0" rtlCol="0">
-            <a:spAutoFit/>
-          </a:bodyPr>
-          <a:lstStyle/>
-          <a:p>
-            <a:r>
-              <a:rPr lang="vi-VN" sz="1400">
-                <a:solidFill>
-                  <a:srgbClr val="94A3B8"/>
-                </a:solidFill>
-                <a:latin typeface="Aptos" panose="020B0004020202020204" pitchFamily="34" charset="0"/>
-              </a:rPr>
-              <a:t>Thiết kế phù hợp scope môn học, chưa phải production-grade payment platform.</a:t>
-            </a:r>
-          </a:p>
-        </p:txBody>
-      </p:sp>
-      <p:sp>
-        <p:nvSpPr>
-          <p:cNvPr id="6" name="Rectangle 5">
-            <a:extLst>
-              <a:ext uri="{FF2B5EF4-FFF2-40B4-BE49-F238E27FC236}">
-                <a16:creationId xmlns:a16="http://schemas.microsoft.com/office/drawing/2014/main" id="{C1950389-3891-3784-D090-20188118D379}"/>
-              </a:ext>
-            </a:extLst>
-          </p:cNvPr>
-          <p:cNvSpPr/>
-          <p:nvPr/>
-        </p:nvSpPr>
-        <p:spPr>
-          <a:xfrm>
-            <a:off x="533400" y="1600200"/>
-            <a:ext cx="11125200" cy="12700"/>
-          </a:xfrm>
-          <a:prstGeom prst="rect">
-            <a:avLst/>
-          </a:prstGeom>
-          <a:solidFill>
-            <a:srgbClr val="334155"/>
-          </a:solidFill>
-          <a:ln w="12700">
-            <a:solidFill>
-              <a:srgbClr val="334155"/>
-            </a:solidFill>
-          </a:ln>
-        </p:spPr>
-        <p:style>
-          <a:lnRef idx="2">
-            <a:schemeClr val="accent1">
-              <a:shade val="15000"/>
-            </a:schemeClr>
-          </a:lnRef>
-          <a:fillRef idx="1">
-            <a:schemeClr val="accent1"/>
-          </a:fillRef>
-          <a:effectRef idx="0">
-            <a:schemeClr val="accent1"/>
-          </a:effectRef>
-          <a:fontRef idx="minor">
-            <a:schemeClr val="lt1"/>
-          </a:fontRef>
-        </p:style>
-        <p:txBody>
-          <a:bodyPr rtlCol="0" anchor="ctr"/>
-          <a:lstStyle/>
-          <a:p>
-            <a:pPr algn="ctr"/>
-            <a:endParaRPr lang="vi-VN"/>
-          </a:p>
-        </p:txBody>
-      </p:sp>
-      <p:sp>
-        <p:nvSpPr>
-          <p:cNvPr id="9" name="TextBox 8">
-            <a:extLst>
-              <a:ext uri="{FF2B5EF4-FFF2-40B4-BE49-F238E27FC236}">
-                <a16:creationId xmlns:a16="http://schemas.microsoft.com/office/drawing/2014/main" id="{25390576-05EA-762F-8180-A1BA2A593E9B}"/>
-              </a:ext>
-            </a:extLst>
-          </p:cNvPr>
-          <p:cNvSpPr txBox="1"/>
-          <p:nvPr/>
-        </p:nvSpPr>
-        <p:spPr>
-          <a:xfrm>
-            <a:off x="1092200" y="2006600"/>
-            <a:ext cx="9906000" cy="1754326"/>
-          </a:xfrm>
-          <a:prstGeom prst="rect">
-            <a:avLst/>
-          </a:prstGeom>
-          <a:noFill/>
-        </p:spPr>
-        <p:txBody>
-          <a:bodyPr vert="horz" lIns="0" tIns="0" rIns="0" bIns="0" rtlCol="0">
-            <a:spAutoFit/>
-          </a:bodyPr>
-          <a:lstStyle/>
-          <a:p>
-            <a:r>
-              <a:rPr lang="vi-VN" sz="1900" dirty="0">
+              <a:rPr lang="vi-VN" sz="2400" dirty="0">
                 <a:solidFill>
                   <a:srgbClr val="F1F5F9"/>
                 </a:solidFill>
@@ -8650,7 +7201,7 @@
 • Account state được seed giống nhau ở các node để đơn giản hóa demo.
 • Chưa có distributed commit protocol kiểu 2PC cho transfer chạm nhiều shard account.</a:t>
             </a:r>
-            <a:endParaRPr lang="en-US" sz="1900" dirty="0">
+            <a:endParaRPr lang="en-US" sz="2400" dirty="0">
               <a:solidFill>
                 <a:srgbClr val="F1F5F9"/>
               </a:solidFill>
@@ -8659,7 +7210,7 @@
           </a:p>
           <a:p>
             <a:r>
-              <a:rPr lang="vi-VN" sz="1900" dirty="0">
+              <a:rPr lang="vi-VN" sz="2400" dirty="0">
                 <a:solidFill>
                   <a:srgbClr val="F1F5F9"/>
                 </a:solidFill>
@@ -8685,7 +7236,7 @@
 </p:sld>
 </file>
 
-<file path=ppt/slides/slide16.xml><?xml version="1.0" encoding="utf-8"?>
+<file path=ppt/slides/slide15.xml><?xml version="1.0" encoding="utf-8"?>
 <p:sld xmlns:a="http://schemas.openxmlformats.org/drawingml/2006/main" xmlns:r="http://schemas.openxmlformats.org/officeDocument/2006/relationships" xmlns:p="http://schemas.openxmlformats.org/presentationml/2006/main">
   <p:cSld>
     <p:spTree>
@@ -9277,7 +7828,7 @@
         <p:spPr>
           <a:xfrm>
             <a:off x="1397000" y="1950000"/>
-            <a:ext cx="4420000" cy="560000"/>
+            <a:ext cx="4420000" cy="400110"/>
           </a:xfrm>
           <a:prstGeom prst="rect">
             <a:avLst/>
@@ -9291,18 +7842,18 @@
           <a:lstStyle/>
           <a:p>
             <a:r>
-              <a:rPr lang="vi-VN" sz="1500" b="1">
+              <a:rPr lang="vi-VN" sz="1500" b="1" dirty="0">
                 <a:solidFill>
                   <a:srgbClr val="F1F5F9"/>
                 </a:solidFill>
                 <a:latin typeface="Aptos" panose="020B0004020202020204" pitchFamily="34" charset="0"/>
               </a:rPr>
-              <a:t>Vấn đề &amp; Mục tiêu EOS</a:t>
-            </a:r>
-          </a:p>
-          <a:p>
-            <a:r>
-              <a:rPr lang="vi-VN" sz="1100">
+              <a:t>Vấn đề </a:t>
+            </a:r>
+          </a:p>
+          <a:p>
+            <a:r>
+              <a:rPr lang="vi-VN" sz="1100" dirty="0">
                 <a:solidFill>
                   <a:srgbClr val="94A3B8"/>
                 </a:solidFill>
@@ -9513,7 +8064,7 @@
           <a:lstStyle/>
           <a:p>
             <a:r>
-              <a:rPr lang="vi-VN" sz="1500" b="1">
+              <a:rPr lang="vi-VN" sz="1500" b="1" dirty="0">
                 <a:solidFill>
                   <a:srgbClr val="F1F5F9"/>
                 </a:solidFill>
@@ -9524,7 +8075,7 @@
           </a:p>
           <a:p>
             <a:r>
-              <a:rPr lang="vi-VN" sz="1100">
+              <a:rPr lang="vi-VN" sz="1100" dirty="0">
                 <a:solidFill>
                   <a:srgbClr val="94A3B8"/>
                 </a:solidFill>
@@ -10464,857 +9015,6 @@
           <p:cNvPr id="2" name="Rectangle 1">
             <a:extLst>
               <a:ext uri="{FF2B5EF4-FFF2-40B4-BE49-F238E27FC236}">
-                <a16:creationId xmlns:a16="http://schemas.microsoft.com/office/drawing/2014/main" id="{37C56EBC-7625-7856-25E5-0D8EA903297C}"/>
-              </a:ext>
-            </a:extLst>
-          </p:cNvPr>
-          <p:cNvSpPr/>
-          <p:nvPr/>
-        </p:nvSpPr>
-        <p:spPr>
-          <a:xfrm>
-            <a:off x="0" y="0"/>
-            <a:ext cx="12192000" cy="6858000"/>
-          </a:xfrm>
-          <a:prstGeom prst="rect">
-            <a:avLst/>
-          </a:prstGeom>
-          <a:solidFill>
-            <a:srgbClr val="0F172A"/>
-          </a:solidFill>
-          <a:ln w="12700" cap="flat" cmpd="sng" algn="ctr">
-            <a:noFill/>
-            <a:prstDash val="solid"/>
-            <a:miter lim="800000"/>
-          </a:ln>
-          <a:effectLst/>
-          <a:extLst>
-            <a:ext uri="{91240B29-F687-4F45-9708-019B960494DF}">
-              <a14:hiddenLine xmlns:a14="http://schemas.microsoft.com/office/drawing/2010/main" w="12700" cap="flat" cmpd="sng" algn="ctr">
-                <a:solidFill>
-                  <a:schemeClr val="accent1">
-                    <a:shade val="15000"/>
-                  </a:schemeClr>
-                </a:solidFill>
-                <a:prstDash val="solid"/>
-                <a:miter lim="800000"/>
-              </a14:hiddenLine>
-            </a:ext>
-          </a:extLst>
-        </p:spPr>
-        <p:style>
-          <a:lnRef idx="2">
-            <a:schemeClr val="accent1">
-              <a:shade val="15000"/>
-            </a:schemeClr>
-          </a:lnRef>
-          <a:fillRef idx="1">
-            <a:schemeClr val="accent1"/>
-          </a:fillRef>
-          <a:effectRef idx="0">
-            <a:schemeClr val="accent1"/>
-          </a:effectRef>
-          <a:fontRef idx="minor">
-            <a:schemeClr val="lt1"/>
-          </a:fontRef>
-        </p:style>
-        <p:txBody>
-          <a:bodyPr rtlCol="0" anchor="ctr"/>
-          <a:lstStyle/>
-          <a:p>
-            <a:pPr algn="ctr"/>
-            <a:endParaRPr lang="vi-VN" dirty="0"/>
-          </a:p>
-        </p:txBody>
-      </p:sp>
-      <p:sp>
-        <p:nvSpPr>
-          <p:cNvPr id="3" name="TextBox 2">
-            <a:extLst>
-              <a:ext uri="{FF2B5EF4-FFF2-40B4-BE49-F238E27FC236}">
-                <a16:creationId xmlns:a16="http://schemas.microsoft.com/office/drawing/2014/main" id="{3EDC01CE-5636-6594-347B-8F4DD8E1ED05}"/>
-              </a:ext>
-            </a:extLst>
-          </p:cNvPr>
-          <p:cNvSpPr txBox="1"/>
-          <p:nvPr/>
-        </p:nvSpPr>
-        <p:spPr>
-          <a:xfrm>
-            <a:off x="533400" y="330200"/>
-            <a:ext cx="2286000" cy="169277"/>
-          </a:xfrm>
-          <a:prstGeom prst="rect">
-            <a:avLst/>
-          </a:prstGeom>
-          <a:noFill/>
-        </p:spPr>
-        <p:txBody>
-          <a:bodyPr vert="horz" lIns="0" tIns="0" rIns="0" bIns="0" rtlCol="0">
-            <a:spAutoFit/>
-          </a:bodyPr>
-          <a:lstStyle/>
-          <a:p>
-            <a:r>
-              <a:rPr lang="vi-VN" sz="1100" b="1">
-                <a:solidFill>
-                  <a:srgbClr val="10B981"/>
-                </a:solidFill>
-                <a:latin typeface="Aptos" panose="020B0004020202020204" pitchFamily="34" charset="0"/>
-              </a:rPr>
-              <a:t>01 / GOALS</a:t>
-            </a:r>
-          </a:p>
-        </p:txBody>
-      </p:sp>
-      <p:sp>
-        <p:nvSpPr>
-          <p:cNvPr id="4" name="TextBox 3">
-            <a:extLst>
-              <a:ext uri="{FF2B5EF4-FFF2-40B4-BE49-F238E27FC236}">
-                <a16:creationId xmlns:a16="http://schemas.microsoft.com/office/drawing/2014/main" id="{25002DA6-39B4-7D87-8F37-6DD8151F3D91}"/>
-              </a:ext>
-            </a:extLst>
-          </p:cNvPr>
-          <p:cNvSpPr txBox="1"/>
-          <p:nvPr/>
-        </p:nvSpPr>
-        <p:spPr>
-          <a:xfrm>
-            <a:off x="533400" y="660400"/>
-            <a:ext cx="9906000" cy="461665"/>
-          </a:xfrm>
-          <a:prstGeom prst="rect">
-            <a:avLst/>
-          </a:prstGeom>
-          <a:noFill/>
-        </p:spPr>
-        <p:txBody>
-          <a:bodyPr vert="horz" lIns="0" tIns="0" rIns="0" bIns="0" rtlCol="0">
-            <a:spAutoFit/>
-          </a:bodyPr>
-          <a:lstStyle/>
-          <a:p>
-            <a:r>
-              <a:rPr lang="vi-VN" sz="3000" b="1">
-                <a:solidFill>
-                  <a:srgbClr val="F1F5F9"/>
-                </a:solidFill>
-                <a:latin typeface="Aptos" panose="020B0004020202020204" pitchFamily="34" charset="0"/>
-              </a:rPr>
-              <a:t>Mục tiêu và tiêu chí thành công</a:t>
-            </a:r>
-          </a:p>
-        </p:txBody>
-      </p:sp>
-      <p:sp>
-        <p:nvSpPr>
-          <p:cNvPr id="5" name="TextBox 4">
-            <a:extLst>
-              <a:ext uri="{FF2B5EF4-FFF2-40B4-BE49-F238E27FC236}">
-                <a16:creationId xmlns:a16="http://schemas.microsoft.com/office/drawing/2014/main" id="{51B018A7-9844-BBED-D00F-64DE7CB61FFD}"/>
-              </a:ext>
-            </a:extLst>
-          </p:cNvPr>
-          <p:cNvSpPr txBox="1"/>
-          <p:nvPr/>
-        </p:nvSpPr>
-        <p:spPr>
-          <a:xfrm>
-            <a:off x="558800" y="1270000"/>
-            <a:ext cx="10414000" cy="215444"/>
-          </a:xfrm>
-          <a:prstGeom prst="rect">
-            <a:avLst/>
-          </a:prstGeom>
-          <a:noFill/>
-        </p:spPr>
-        <p:txBody>
-          <a:bodyPr vert="horz" lIns="0" tIns="0" rIns="0" bIns="0" rtlCol="0">
-            <a:spAutoFit/>
-          </a:bodyPr>
-          <a:lstStyle/>
-          <a:p>
-            <a:r>
-              <a:rPr lang="vi-VN" sz="1400">
-                <a:solidFill>
-                  <a:srgbClr val="94A3B8"/>
-                </a:solidFill>
-                <a:latin typeface="Aptos" panose="020B0004020202020204" pitchFamily="34" charset="0"/>
-              </a:rPr>
-              <a:t>Đề tài tập trung vào correctness trước, sau đó mới đo chi phí.</a:t>
-            </a:r>
-          </a:p>
-        </p:txBody>
-      </p:sp>
-      <p:sp>
-        <p:nvSpPr>
-          <p:cNvPr id="6" name="Rectangle 5">
-            <a:extLst>
-              <a:ext uri="{FF2B5EF4-FFF2-40B4-BE49-F238E27FC236}">
-                <a16:creationId xmlns:a16="http://schemas.microsoft.com/office/drawing/2014/main" id="{9C37370C-FF72-FBAB-2A2D-34B4C4A40CA6}"/>
-              </a:ext>
-            </a:extLst>
-          </p:cNvPr>
-          <p:cNvSpPr/>
-          <p:nvPr/>
-        </p:nvSpPr>
-        <p:spPr>
-          <a:xfrm>
-            <a:off x="533400" y="1600200"/>
-            <a:ext cx="11125200" cy="12700"/>
-          </a:xfrm>
-          <a:prstGeom prst="rect">
-            <a:avLst/>
-          </a:prstGeom>
-          <a:solidFill>
-            <a:srgbClr val="334155"/>
-          </a:solidFill>
-          <a:ln w="12700">
-            <a:solidFill>
-              <a:srgbClr val="334155"/>
-            </a:solidFill>
-          </a:ln>
-        </p:spPr>
-        <p:style>
-          <a:lnRef idx="2">
-            <a:schemeClr val="accent1">
-              <a:shade val="15000"/>
-            </a:schemeClr>
-          </a:lnRef>
-          <a:fillRef idx="1">
-            <a:schemeClr val="accent1"/>
-          </a:fillRef>
-          <a:effectRef idx="0">
-            <a:schemeClr val="accent1"/>
-          </a:effectRef>
-          <a:fontRef idx="minor">
-            <a:schemeClr val="lt1"/>
-          </a:fontRef>
-        </p:style>
-        <p:txBody>
-          <a:bodyPr rtlCol="0" anchor="ctr"/>
-          <a:lstStyle/>
-          <a:p>
-            <a:pPr algn="ctr"/>
-            <a:endParaRPr lang="vi-VN"/>
-          </a:p>
-        </p:txBody>
-      </p:sp>
-      <p:sp>
-        <p:nvSpPr>
-          <p:cNvPr id="9" name="Rectangle: Rounded Corners 8">
-            <a:extLst>
-              <a:ext uri="{FF2B5EF4-FFF2-40B4-BE49-F238E27FC236}">
-                <a16:creationId xmlns:a16="http://schemas.microsoft.com/office/drawing/2014/main" id="{860E1A2E-CB22-2D92-C901-301E943456A2}"/>
-              </a:ext>
-            </a:extLst>
-          </p:cNvPr>
-          <p:cNvSpPr/>
-          <p:nvPr/>
-        </p:nvSpPr>
-        <p:spPr>
-          <a:xfrm>
-            <a:off x="787400" y="2133600"/>
-            <a:ext cx="2413000" cy="965200"/>
-          </a:xfrm>
-          <a:prstGeom prst="roundRect">
-            <a:avLst/>
-          </a:prstGeom>
-          <a:solidFill>
-            <a:srgbClr val="1E293B"/>
-          </a:solidFill>
-          <a:ln w="12700">
-            <a:solidFill>
-              <a:srgbClr val="334155"/>
-            </a:solidFill>
-          </a:ln>
-        </p:spPr>
-        <p:style>
-          <a:lnRef idx="2">
-            <a:schemeClr val="accent1">
-              <a:shade val="15000"/>
-            </a:schemeClr>
-          </a:lnRef>
-          <a:fillRef idx="1">
-            <a:schemeClr val="accent1"/>
-          </a:fillRef>
-          <a:effectRef idx="0">
-            <a:schemeClr val="accent1"/>
-          </a:effectRef>
-          <a:fontRef idx="minor">
-            <a:schemeClr val="lt1"/>
-          </a:fontRef>
-        </p:style>
-        <p:txBody>
-          <a:bodyPr rtlCol="0" anchor="ctr"/>
-          <a:lstStyle/>
-          <a:p>
-            <a:pPr algn="ctr"/>
-            <a:endParaRPr lang="vi-VN"/>
-          </a:p>
-        </p:txBody>
-      </p:sp>
-      <p:sp>
-        <p:nvSpPr>
-          <p:cNvPr id="10" name="TextBox 9">
-            <a:extLst>
-              <a:ext uri="{FF2B5EF4-FFF2-40B4-BE49-F238E27FC236}">
-                <a16:creationId xmlns:a16="http://schemas.microsoft.com/office/drawing/2014/main" id="{2176975F-211F-6E34-170D-BEE863FFFD9E}"/>
-              </a:ext>
-            </a:extLst>
-          </p:cNvPr>
-          <p:cNvSpPr txBox="1"/>
-          <p:nvPr/>
-        </p:nvSpPr>
-        <p:spPr>
-          <a:xfrm>
-            <a:off x="965200" y="2298700"/>
-            <a:ext cx="2057400" cy="369332"/>
-          </a:xfrm>
-          <a:prstGeom prst="rect">
-            <a:avLst/>
-          </a:prstGeom>
-          <a:noFill/>
-        </p:spPr>
-        <p:txBody>
-          <a:bodyPr vert="horz" lIns="0" tIns="0" rIns="0" bIns="0" rtlCol="0">
-            <a:spAutoFit/>
-          </a:bodyPr>
-          <a:lstStyle/>
-          <a:p>
-            <a:r>
-              <a:rPr lang="vi-VN" sz="2400" b="1">
-                <a:solidFill>
-                  <a:srgbClr val="10B981"/>
-                </a:solidFill>
-                <a:latin typeface="Aptos" panose="020B0004020202020204" pitchFamily="34" charset="0"/>
-              </a:rPr>
-              <a:t>0</a:t>
-            </a:r>
-          </a:p>
-        </p:txBody>
-      </p:sp>
-      <p:sp>
-        <p:nvSpPr>
-          <p:cNvPr id="11" name="TextBox 10">
-            <a:extLst>
-              <a:ext uri="{FF2B5EF4-FFF2-40B4-BE49-F238E27FC236}">
-                <a16:creationId xmlns:a16="http://schemas.microsoft.com/office/drawing/2014/main" id="{6FC9C23C-90BA-1C79-A936-A05943FD3FCF}"/>
-              </a:ext>
-            </a:extLst>
-          </p:cNvPr>
-          <p:cNvSpPr txBox="1"/>
-          <p:nvPr/>
-        </p:nvSpPr>
-        <p:spPr>
-          <a:xfrm>
-            <a:off x="965200" y="2743200"/>
-            <a:ext cx="2057400" cy="153888"/>
-          </a:xfrm>
-          <a:prstGeom prst="rect">
-            <a:avLst/>
-          </a:prstGeom>
-          <a:noFill/>
-        </p:spPr>
-        <p:txBody>
-          <a:bodyPr vert="horz" lIns="0" tIns="0" rIns="0" bIns="0" rtlCol="0">
-            <a:spAutoFit/>
-          </a:bodyPr>
-          <a:lstStyle/>
-          <a:p>
-            <a:r>
-              <a:rPr lang="vi-VN" sz="1000">
-                <a:solidFill>
-                  <a:srgbClr val="94A3B8"/>
-                </a:solidFill>
-                <a:latin typeface="Aptos" panose="020B0004020202020204" pitchFamily="34" charset="0"/>
-              </a:rPr>
-              <a:t>Duplicate charges trong EOS</a:t>
-            </a:r>
-          </a:p>
-        </p:txBody>
-      </p:sp>
-      <p:sp>
-        <p:nvSpPr>
-          <p:cNvPr id="12" name="Rectangle: Rounded Corners 11">
-            <a:extLst>
-              <a:ext uri="{FF2B5EF4-FFF2-40B4-BE49-F238E27FC236}">
-                <a16:creationId xmlns:a16="http://schemas.microsoft.com/office/drawing/2014/main" id="{2A0A4BFC-552B-5FB2-C520-5C5F312B82FC}"/>
-              </a:ext>
-            </a:extLst>
-          </p:cNvPr>
-          <p:cNvSpPr/>
-          <p:nvPr/>
-        </p:nvSpPr>
-        <p:spPr>
-          <a:xfrm>
-            <a:off x="3581400" y="2133600"/>
-            <a:ext cx="2413000" cy="965200"/>
-          </a:xfrm>
-          <a:prstGeom prst="roundRect">
-            <a:avLst/>
-          </a:prstGeom>
-          <a:solidFill>
-            <a:srgbClr val="1E293B"/>
-          </a:solidFill>
-          <a:ln w="12700">
-            <a:solidFill>
-              <a:srgbClr val="334155"/>
-            </a:solidFill>
-          </a:ln>
-        </p:spPr>
-        <p:style>
-          <a:lnRef idx="2">
-            <a:schemeClr val="accent1">
-              <a:shade val="15000"/>
-            </a:schemeClr>
-          </a:lnRef>
-          <a:fillRef idx="1">
-            <a:schemeClr val="accent1"/>
-          </a:fillRef>
-          <a:effectRef idx="0">
-            <a:schemeClr val="accent1"/>
-          </a:effectRef>
-          <a:fontRef idx="minor">
-            <a:schemeClr val="lt1"/>
-          </a:fontRef>
-        </p:style>
-        <p:txBody>
-          <a:bodyPr rtlCol="0" anchor="ctr"/>
-          <a:lstStyle/>
-          <a:p>
-            <a:pPr algn="ctr"/>
-            <a:endParaRPr lang="vi-VN"/>
-          </a:p>
-        </p:txBody>
-      </p:sp>
-      <p:sp>
-        <p:nvSpPr>
-          <p:cNvPr id="13" name="TextBox 12">
-            <a:extLst>
-              <a:ext uri="{FF2B5EF4-FFF2-40B4-BE49-F238E27FC236}">
-                <a16:creationId xmlns:a16="http://schemas.microsoft.com/office/drawing/2014/main" id="{5EEEDE2F-1DE2-937C-44ED-C4475FFCF3D4}"/>
-              </a:ext>
-            </a:extLst>
-          </p:cNvPr>
-          <p:cNvSpPr txBox="1"/>
-          <p:nvPr/>
-        </p:nvSpPr>
-        <p:spPr>
-          <a:xfrm>
-            <a:off x="3759200" y="2298700"/>
-            <a:ext cx="2057400" cy="369332"/>
-          </a:xfrm>
-          <a:prstGeom prst="rect">
-            <a:avLst/>
-          </a:prstGeom>
-          <a:noFill/>
-        </p:spPr>
-        <p:txBody>
-          <a:bodyPr vert="horz" lIns="0" tIns="0" rIns="0" bIns="0" rtlCol="0">
-            <a:spAutoFit/>
-          </a:bodyPr>
-          <a:lstStyle/>
-          <a:p>
-            <a:r>
-              <a:rPr lang="vi-VN" sz="2400" b="1">
-                <a:solidFill>
-                  <a:srgbClr val="10B981"/>
-                </a:solidFill>
-                <a:latin typeface="Aptos" panose="020B0004020202020204" pitchFamily="34" charset="0"/>
-              </a:rPr>
-              <a:t>50</a:t>
-            </a:r>
-          </a:p>
-        </p:txBody>
-      </p:sp>
-      <p:sp>
-        <p:nvSpPr>
-          <p:cNvPr id="14" name="TextBox 13">
-            <a:extLst>
-              <a:ext uri="{FF2B5EF4-FFF2-40B4-BE49-F238E27FC236}">
-                <a16:creationId xmlns:a16="http://schemas.microsoft.com/office/drawing/2014/main" id="{F20A9611-646A-64E7-CD71-594559016AA9}"/>
-              </a:ext>
-            </a:extLst>
-          </p:cNvPr>
-          <p:cNvSpPr txBox="1"/>
-          <p:nvPr/>
-        </p:nvSpPr>
-        <p:spPr>
-          <a:xfrm>
-            <a:off x="3759200" y="2743200"/>
-            <a:ext cx="2057400" cy="153888"/>
-          </a:xfrm>
-          <a:prstGeom prst="rect">
-            <a:avLst/>
-          </a:prstGeom>
-          <a:noFill/>
-        </p:spPr>
-        <p:txBody>
-          <a:bodyPr vert="horz" lIns="0" tIns="0" rIns="0" bIns="0" rtlCol="0">
-            <a:spAutoFit/>
-          </a:bodyPr>
-          <a:lstStyle/>
-          <a:p>
-            <a:r>
-              <a:rPr lang="vi-VN" sz="1000">
-                <a:solidFill>
-                  <a:srgbClr val="94A3B8"/>
-                </a:solidFill>
-                <a:latin typeface="Aptos" panose="020B0004020202020204" pitchFamily="34" charset="0"/>
-              </a:rPr>
-              <a:t>Duplicate bị EOS chặn</a:t>
-            </a:r>
-          </a:p>
-        </p:txBody>
-      </p:sp>
-      <p:sp>
-        <p:nvSpPr>
-          <p:cNvPr id="15" name="Rectangle: Rounded Corners 14">
-            <a:extLst>
-              <a:ext uri="{FF2B5EF4-FFF2-40B4-BE49-F238E27FC236}">
-                <a16:creationId xmlns:a16="http://schemas.microsoft.com/office/drawing/2014/main" id="{766309B7-B8B6-F913-DB3B-6AA4B8345552}"/>
-              </a:ext>
-            </a:extLst>
-          </p:cNvPr>
-          <p:cNvSpPr/>
-          <p:nvPr/>
-        </p:nvSpPr>
-        <p:spPr>
-          <a:xfrm>
-            <a:off x="6375400" y="2133600"/>
-            <a:ext cx="2413000" cy="965200"/>
-          </a:xfrm>
-          <a:prstGeom prst="roundRect">
-            <a:avLst/>
-          </a:prstGeom>
-          <a:solidFill>
-            <a:srgbClr val="1E293B"/>
-          </a:solidFill>
-          <a:ln w="12700">
-            <a:solidFill>
-              <a:srgbClr val="334155"/>
-            </a:solidFill>
-          </a:ln>
-        </p:spPr>
-        <p:style>
-          <a:lnRef idx="2">
-            <a:schemeClr val="accent1">
-              <a:shade val="15000"/>
-            </a:schemeClr>
-          </a:lnRef>
-          <a:fillRef idx="1">
-            <a:schemeClr val="accent1"/>
-          </a:fillRef>
-          <a:effectRef idx="0">
-            <a:schemeClr val="accent1"/>
-          </a:effectRef>
-          <a:fontRef idx="minor">
-            <a:schemeClr val="lt1"/>
-          </a:fontRef>
-        </p:style>
-        <p:txBody>
-          <a:bodyPr rtlCol="0" anchor="ctr"/>
-          <a:lstStyle/>
-          <a:p>
-            <a:pPr algn="ctr"/>
-            <a:endParaRPr lang="vi-VN"/>
-          </a:p>
-        </p:txBody>
-      </p:sp>
-      <p:sp>
-        <p:nvSpPr>
-          <p:cNvPr id="16" name="TextBox 15">
-            <a:extLst>
-              <a:ext uri="{FF2B5EF4-FFF2-40B4-BE49-F238E27FC236}">
-                <a16:creationId xmlns:a16="http://schemas.microsoft.com/office/drawing/2014/main" id="{F254682C-C9D2-FC06-EB77-174171476E5A}"/>
-              </a:ext>
-            </a:extLst>
-          </p:cNvPr>
-          <p:cNvSpPr txBox="1"/>
-          <p:nvPr/>
-        </p:nvSpPr>
-        <p:spPr>
-          <a:xfrm>
-            <a:off x="6553200" y="2298700"/>
-            <a:ext cx="2057400" cy="369332"/>
-          </a:xfrm>
-          <a:prstGeom prst="rect">
-            <a:avLst/>
-          </a:prstGeom>
-          <a:noFill/>
-        </p:spPr>
-        <p:txBody>
-          <a:bodyPr vert="horz" lIns="0" tIns="0" rIns="0" bIns="0" rtlCol="0">
-            <a:spAutoFit/>
-          </a:bodyPr>
-          <a:lstStyle/>
-          <a:p>
-            <a:r>
-              <a:rPr lang="vi-VN" sz="2400" b="1">
-                <a:solidFill>
-                  <a:srgbClr val="22D3EE"/>
-                </a:solidFill>
-                <a:latin typeface="Aptos" panose="020B0004020202020204" pitchFamily="34" charset="0"/>
-              </a:rPr>
-              <a:t>110 / 110</a:t>
-            </a:r>
-          </a:p>
-        </p:txBody>
-      </p:sp>
-      <p:sp>
-        <p:nvSpPr>
-          <p:cNvPr id="17" name="TextBox 16">
-            <a:extLst>
-              <a:ext uri="{FF2B5EF4-FFF2-40B4-BE49-F238E27FC236}">
-                <a16:creationId xmlns:a16="http://schemas.microsoft.com/office/drawing/2014/main" id="{B6D2EAFB-8B5C-7E81-1CA0-1C74AF277227}"/>
-              </a:ext>
-            </a:extLst>
-          </p:cNvPr>
-          <p:cNvSpPr txBox="1"/>
-          <p:nvPr/>
-        </p:nvSpPr>
-        <p:spPr>
-          <a:xfrm>
-            <a:off x="6553200" y="2743200"/>
-            <a:ext cx="2057400" cy="153888"/>
-          </a:xfrm>
-          <a:prstGeom prst="rect">
-            <a:avLst/>
-          </a:prstGeom>
-          <a:noFill/>
-        </p:spPr>
-        <p:txBody>
-          <a:bodyPr vert="horz" lIns="0" tIns="0" rIns="0" bIns="0" rtlCol="0">
-            <a:spAutoFit/>
-          </a:bodyPr>
-          <a:lstStyle/>
-          <a:p>
-            <a:r>
-              <a:rPr lang="vi-VN" sz="1000">
-                <a:solidFill>
-                  <a:srgbClr val="94A3B8"/>
-                </a:solidFill>
-                <a:latin typeface="Aptos" panose="020B0004020202020204" pitchFamily="34" charset="0"/>
-              </a:rPr>
-              <a:t>WAL / Success</a:t>
-            </a:r>
-          </a:p>
-        </p:txBody>
-      </p:sp>
-      <p:sp>
-        <p:nvSpPr>
-          <p:cNvPr id="18" name="Rectangle: Rounded Corners 17">
-            <a:extLst>
-              <a:ext uri="{FF2B5EF4-FFF2-40B4-BE49-F238E27FC236}">
-                <a16:creationId xmlns:a16="http://schemas.microsoft.com/office/drawing/2014/main" id="{7352A246-F8D1-D8B7-B12A-D765A35AC2CD}"/>
-              </a:ext>
-            </a:extLst>
-          </p:cNvPr>
-          <p:cNvSpPr/>
-          <p:nvPr/>
-        </p:nvSpPr>
-        <p:spPr>
-          <a:xfrm>
-            <a:off x="9169400" y="2133600"/>
-            <a:ext cx="2159000" cy="965200"/>
-          </a:xfrm>
-          <a:prstGeom prst="roundRect">
-            <a:avLst/>
-          </a:prstGeom>
-          <a:solidFill>
-            <a:srgbClr val="1E293B"/>
-          </a:solidFill>
-          <a:ln w="12700">
-            <a:solidFill>
-              <a:srgbClr val="334155"/>
-            </a:solidFill>
-          </a:ln>
-        </p:spPr>
-        <p:style>
-          <a:lnRef idx="2">
-            <a:schemeClr val="accent1">
-              <a:shade val="15000"/>
-            </a:schemeClr>
-          </a:lnRef>
-          <a:fillRef idx="1">
-            <a:schemeClr val="accent1"/>
-          </a:fillRef>
-          <a:effectRef idx="0">
-            <a:schemeClr val="accent1"/>
-          </a:effectRef>
-          <a:fontRef idx="minor">
-            <a:schemeClr val="lt1"/>
-          </a:fontRef>
-        </p:style>
-        <p:txBody>
-          <a:bodyPr rtlCol="0" anchor="ctr"/>
-          <a:lstStyle/>
-          <a:p>
-            <a:pPr algn="ctr"/>
-            <a:endParaRPr lang="vi-VN"/>
-          </a:p>
-        </p:txBody>
-      </p:sp>
-      <p:sp>
-        <p:nvSpPr>
-          <p:cNvPr id="19" name="TextBox 18">
-            <a:extLst>
-              <a:ext uri="{FF2B5EF4-FFF2-40B4-BE49-F238E27FC236}">
-                <a16:creationId xmlns:a16="http://schemas.microsoft.com/office/drawing/2014/main" id="{3FBFFFE2-49FA-B953-CD49-C66BCB82543B}"/>
-              </a:ext>
-            </a:extLst>
-          </p:cNvPr>
-          <p:cNvSpPr txBox="1"/>
-          <p:nvPr/>
-        </p:nvSpPr>
-        <p:spPr>
-          <a:xfrm>
-            <a:off x="9347200" y="2298700"/>
-            <a:ext cx="1803400" cy="369332"/>
-          </a:xfrm>
-          <a:prstGeom prst="rect">
-            <a:avLst/>
-          </a:prstGeom>
-          <a:noFill/>
-        </p:spPr>
-        <p:txBody>
-          <a:bodyPr vert="horz" lIns="0" tIns="0" rIns="0" bIns="0" rtlCol="0">
-            <a:spAutoFit/>
-          </a:bodyPr>
-          <a:lstStyle/>
-          <a:p>
-            <a:r>
-              <a:rPr lang="vi-VN" sz="2400" b="1">
-                <a:solidFill>
-                  <a:srgbClr val="10B981"/>
-                </a:solidFill>
-                <a:latin typeface="Aptos" panose="020B0004020202020204" pitchFamily="34" charset="0"/>
-              </a:rPr>
-              <a:t>8 PASS</a:t>
-            </a:r>
-          </a:p>
-        </p:txBody>
-      </p:sp>
-      <p:sp>
-        <p:nvSpPr>
-          <p:cNvPr id="20" name="TextBox 19">
-            <a:extLst>
-              <a:ext uri="{FF2B5EF4-FFF2-40B4-BE49-F238E27FC236}">
-                <a16:creationId xmlns:a16="http://schemas.microsoft.com/office/drawing/2014/main" id="{A5045032-B94E-974E-CDBA-071AD56CD4E5}"/>
-              </a:ext>
-            </a:extLst>
-          </p:cNvPr>
-          <p:cNvSpPr txBox="1"/>
-          <p:nvPr/>
-        </p:nvSpPr>
-        <p:spPr>
-          <a:xfrm>
-            <a:off x="9347200" y="2743200"/>
-            <a:ext cx="1803400" cy="153888"/>
-          </a:xfrm>
-          <a:prstGeom prst="rect">
-            <a:avLst/>
-          </a:prstGeom>
-          <a:noFill/>
-        </p:spPr>
-        <p:txBody>
-          <a:bodyPr vert="horz" lIns="0" tIns="0" rIns="0" bIns="0" rtlCol="0">
-            <a:spAutoFit/>
-          </a:bodyPr>
-          <a:lstStyle/>
-          <a:p>
-            <a:r>
-              <a:rPr lang="vi-VN" sz="1000">
-                <a:solidFill>
-                  <a:srgbClr val="94A3B8"/>
-                </a:solidFill>
-                <a:latin typeface="Aptos" panose="020B0004020202020204" pitchFamily="34" charset="0"/>
-              </a:rPr>
-              <a:t>Backend tests</a:t>
-            </a:r>
-          </a:p>
-        </p:txBody>
-      </p:sp>
-      <p:sp>
-        <p:nvSpPr>
-          <p:cNvPr id="21" name="TextBox 20">
-            <a:extLst>
-              <a:ext uri="{FF2B5EF4-FFF2-40B4-BE49-F238E27FC236}">
-                <a16:creationId xmlns:a16="http://schemas.microsoft.com/office/drawing/2014/main" id="{BD77D215-5DEA-D012-A769-E0787401997F}"/>
-              </a:ext>
-            </a:extLst>
-          </p:cNvPr>
-          <p:cNvSpPr txBox="1"/>
-          <p:nvPr/>
-        </p:nvSpPr>
-        <p:spPr>
-          <a:xfrm>
-            <a:off x="1143000" y="3708400"/>
-            <a:ext cx="9906000" cy="1169551"/>
-          </a:xfrm>
-          <a:prstGeom prst="rect">
-            <a:avLst/>
-          </a:prstGeom>
-          <a:noFill/>
-        </p:spPr>
-        <p:txBody>
-          <a:bodyPr vert="horz" lIns="0" tIns="0" rIns="0" bIns="0" rtlCol="0">
-            <a:spAutoFit/>
-          </a:bodyPr>
-          <a:lstStyle/>
-          <a:p>
-            <a:r>
-              <a:rPr lang="vi-VN" sz="1900" dirty="0">
-                <a:solidFill>
-                  <a:srgbClr val="F1F5F9"/>
-                </a:solidFill>
-                <a:latin typeface="Aptos" panose="020B0004020202020204" pitchFamily="34" charset="0"/>
-              </a:rPr>
-              <a:t>• Gateway che giấu topology node khỏi client.
-• Global dedup store bảo đảm idempotency toàn hệ thống.
-• Local WAL giúp chứng minh reliability và recovery.
-• Benchmark đo TPS, avg/p50/p95/p99, WAL write latency và window metrics.</a:t>
-            </a:r>
-          </a:p>
-        </p:txBody>
-      </p:sp>
-    </p:spTree>
-    <p:extLst>
-      <p:ext uri="{BB962C8B-B14F-4D97-AF65-F5344CB8AC3E}">
-        <p14:creationId xmlns:p14="http://schemas.microsoft.com/office/powerpoint/2010/main" val="3724119467"/>
-      </p:ext>
-    </p:extLst>
-  </p:cSld>
-  <p:clrMapOvr>
-    <a:masterClrMapping/>
-  </p:clrMapOvr>
-</p:sld>
-</file>
-
-<file path=ppt/slides/slide5.xml><?xml version="1.0" encoding="utf-8"?>
-<p:sld xmlns:a="http://schemas.openxmlformats.org/drawingml/2006/main" xmlns:r="http://schemas.openxmlformats.org/officeDocument/2006/relationships" xmlns:p="http://schemas.openxmlformats.org/presentationml/2006/main">
-  <p:cSld>
-    <p:spTree>
-      <p:nvGrpSpPr>
-        <p:cNvPr id="1" name=""/>
-        <p:cNvGrpSpPr/>
-        <p:nvPr/>
-      </p:nvGrpSpPr>
-      <p:grpSpPr>
-        <a:xfrm>
-          <a:off x="0" y="0"/>
-          <a:ext cx="0" cy="0"/>
-          <a:chOff x="0" y="0"/>
-          <a:chExt cx="0" cy="0"/>
-        </a:xfrm>
-      </p:grpSpPr>
-      <p:sp>
-        <p:nvSpPr>
-          <p:cNvPr id="2" name="Rectangle 1">
-            <a:extLst>
-              <a:ext uri="{FF2B5EF4-FFF2-40B4-BE49-F238E27FC236}">
                 <a16:creationId xmlns:a16="http://schemas.microsoft.com/office/drawing/2014/main" id="{9EFEF1DA-A805-C8A6-0DC7-39BA8443FA52}"/>
               </a:ext>
             </a:extLst>
@@ -12471,6 +10171,561 @@
 </p:sld>
 </file>
 
+<file path=ppt/slides/slide5.xml><?xml version="1.0" encoding="utf-8"?>
+<p:sld xmlns:a="http://schemas.openxmlformats.org/drawingml/2006/main" xmlns:r="http://schemas.openxmlformats.org/officeDocument/2006/relationships" xmlns:p="http://schemas.openxmlformats.org/presentationml/2006/main">
+  <p:cSld>
+    <p:spTree>
+      <p:nvGrpSpPr>
+        <p:cNvPr id="1" name=""/>
+        <p:cNvGrpSpPr/>
+        <p:nvPr/>
+      </p:nvGrpSpPr>
+      <p:grpSpPr>
+        <a:xfrm>
+          <a:off x="0" y="0"/>
+          <a:ext cx="0" cy="0"/>
+          <a:chOff x="0" y="0"/>
+          <a:chExt cx="0" cy="0"/>
+        </a:xfrm>
+      </p:grpSpPr>
+      <p:sp>
+        <p:nvSpPr>
+          <p:cNvPr id="2" name="Rectangle 1">
+            <a:extLst>
+              <a:ext uri="{FF2B5EF4-FFF2-40B4-BE49-F238E27FC236}">
+                <a16:creationId xmlns:a16="http://schemas.microsoft.com/office/drawing/2014/main" id="{595443C2-AF8B-CE72-C273-5B6C3910DD3D}"/>
+              </a:ext>
+            </a:extLst>
+          </p:cNvPr>
+          <p:cNvSpPr/>
+          <p:nvPr/>
+        </p:nvSpPr>
+        <p:spPr>
+          <a:xfrm>
+            <a:off x="0" y="0"/>
+            <a:ext cx="12192000" cy="6858000"/>
+          </a:xfrm>
+          <a:prstGeom prst="rect">
+            <a:avLst/>
+          </a:prstGeom>
+          <a:solidFill>
+            <a:srgbClr val="0F172A"/>
+          </a:solidFill>
+          <a:ln w="12700" cap="flat" cmpd="sng" algn="ctr">
+            <a:noFill/>
+            <a:prstDash val="solid"/>
+            <a:miter lim="800000"/>
+          </a:ln>
+          <a:effectLst/>
+          <a:extLst>
+            <a:ext uri="{91240B29-F687-4F45-9708-019B960494DF}">
+              <a14:hiddenLine xmlns:a14="http://schemas.microsoft.com/office/drawing/2010/main" w="12700" cap="flat" cmpd="sng" algn="ctr">
+                <a:solidFill>
+                  <a:schemeClr val="accent1">
+                    <a:shade val="15000"/>
+                  </a:schemeClr>
+                </a:solidFill>
+                <a:prstDash val="solid"/>
+                <a:miter lim="800000"/>
+              </a14:hiddenLine>
+            </a:ext>
+          </a:extLst>
+        </p:spPr>
+        <p:style>
+          <a:lnRef idx="2">
+            <a:schemeClr val="accent1">
+              <a:shade val="15000"/>
+            </a:schemeClr>
+          </a:lnRef>
+          <a:fillRef idx="1">
+            <a:schemeClr val="accent1"/>
+          </a:fillRef>
+          <a:effectRef idx="0">
+            <a:schemeClr val="accent1"/>
+          </a:effectRef>
+          <a:fontRef idx="minor">
+            <a:schemeClr val="lt1"/>
+          </a:fontRef>
+        </p:style>
+        <p:txBody>
+          <a:bodyPr rtlCol="0" anchor="ctr"/>
+          <a:lstStyle/>
+          <a:p>
+            <a:pPr algn="ctr"/>
+            <a:endParaRPr lang="vi-VN"/>
+          </a:p>
+        </p:txBody>
+      </p:sp>
+      <p:sp>
+        <p:nvSpPr>
+          <p:cNvPr id="3" name="TextBox 2">
+            <a:extLst>
+              <a:ext uri="{FF2B5EF4-FFF2-40B4-BE49-F238E27FC236}">
+                <a16:creationId xmlns:a16="http://schemas.microsoft.com/office/drawing/2014/main" id="{48184A34-115A-13B1-0EE1-D0E9F60D69A5}"/>
+              </a:ext>
+            </a:extLst>
+          </p:cNvPr>
+          <p:cNvSpPr txBox="1"/>
+          <p:nvPr/>
+        </p:nvSpPr>
+        <p:spPr>
+          <a:xfrm>
+            <a:off x="533400" y="330200"/>
+            <a:ext cx="2286000" cy="169277"/>
+          </a:xfrm>
+          <a:prstGeom prst="rect">
+            <a:avLst/>
+          </a:prstGeom>
+          <a:noFill/>
+        </p:spPr>
+        <p:txBody>
+          <a:bodyPr vert="horz" lIns="0" tIns="0" rIns="0" bIns="0" rtlCol="0">
+            <a:spAutoFit/>
+          </a:bodyPr>
+          <a:lstStyle/>
+          <a:p>
+            <a:r>
+              <a:rPr lang="vi-VN" sz="1100" b="1">
+                <a:solidFill>
+                  <a:srgbClr val="10B981"/>
+                </a:solidFill>
+                <a:latin typeface="Aptos" panose="020B0004020202020204" pitchFamily="34" charset="0"/>
+              </a:rPr>
+              <a:t>02 / STATE</a:t>
+            </a:r>
+          </a:p>
+        </p:txBody>
+      </p:sp>
+      <p:sp>
+        <p:nvSpPr>
+          <p:cNvPr id="4" name="TextBox 3">
+            <a:extLst>
+              <a:ext uri="{FF2B5EF4-FFF2-40B4-BE49-F238E27FC236}">
+                <a16:creationId xmlns:a16="http://schemas.microsoft.com/office/drawing/2014/main" id="{224BC7CC-26F1-0C9D-E24E-D6339162605B}"/>
+              </a:ext>
+            </a:extLst>
+          </p:cNvPr>
+          <p:cNvSpPr txBox="1"/>
+          <p:nvPr/>
+        </p:nvSpPr>
+        <p:spPr>
+          <a:xfrm>
+            <a:off x="533400" y="660400"/>
+            <a:ext cx="9906000" cy="461665"/>
+          </a:xfrm>
+          <a:prstGeom prst="rect">
+            <a:avLst/>
+          </a:prstGeom>
+          <a:noFill/>
+        </p:spPr>
+        <p:txBody>
+          <a:bodyPr vert="horz" lIns="0" tIns="0" rIns="0" bIns="0" rtlCol="0">
+            <a:spAutoFit/>
+          </a:bodyPr>
+          <a:lstStyle/>
+          <a:p>
+            <a:r>
+              <a:rPr lang="vi-VN" sz="3000" b="1">
+                <a:solidFill>
+                  <a:srgbClr val="F1F5F9"/>
+                </a:solidFill>
+                <a:latin typeface="Aptos" panose="020B0004020202020204" pitchFamily="34" charset="0"/>
+              </a:rPr>
+              <a:t>Dataset, state và phân mảnh</a:t>
+            </a:r>
+          </a:p>
+        </p:txBody>
+      </p:sp>
+      <p:sp>
+        <p:nvSpPr>
+          <p:cNvPr id="5" name="TextBox 4">
+            <a:extLst>
+              <a:ext uri="{FF2B5EF4-FFF2-40B4-BE49-F238E27FC236}">
+                <a16:creationId xmlns:a16="http://schemas.microsoft.com/office/drawing/2014/main" id="{11C9015E-7442-7493-8185-B5A986D205D6}"/>
+              </a:ext>
+            </a:extLst>
+          </p:cNvPr>
+          <p:cNvSpPr txBox="1"/>
+          <p:nvPr/>
+        </p:nvSpPr>
+        <p:spPr>
+          <a:xfrm>
+            <a:off x="558800" y="1270000"/>
+            <a:ext cx="10414000" cy="215444"/>
+          </a:xfrm>
+          <a:prstGeom prst="rect">
+            <a:avLst/>
+          </a:prstGeom>
+          <a:noFill/>
+        </p:spPr>
+        <p:txBody>
+          <a:bodyPr vert="horz" lIns="0" tIns="0" rIns="0" bIns="0" rtlCol="0">
+            <a:spAutoFit/>
+          </a:bodyPr>
+          <a:lstStyle/>
+          <a:p>
+            <a:r>
+              <a:rPr lang="vi-VN" sz="1400">
+                <a:solidFill>
+                  <a:srgbClr val="94A3B8"/>
+                </a:solidFill>
+                <a:latin typeface="Aptos" panose="020B0004020202020204" pitchFamily="34" charset="0"/>
+              </a:rPr>
+              <a:t>Dữ liệu demo được sinh có kiểm soát để đo duplicate và event-time disorder.</a:t>
+            </a:r>
+          </a:p>
+        </p:txBody>
+      </p:sp>
+      <p:sp>
+        <p:nvSpPr>
+          <p:cNvPr id="6" name="Rectangle 5">
+            <a:extLst>
+              <a:ext uri="{FF2B5EF4-FFF2-40B4-BE49-F238E27FC236}">
+                <a16:creationId xmlns:a16="http://schemas.microsoft.com/office/drawing/2014/main" id="{6BACDAA5-5051-388A-72FA-E340C665EF30}"/>
+              </a:ext>
+            </a:extLst>
+          </p:cNvPr>
+          <p:cNvSpPr/>
+          <p:nvPr/>
+        </p:nvSpPr>
+        <p:spPr>
+          <a:xfrm>
+            <a:off x="533400" y="1600200"/>
+            <a:ext cx="11125200" cy="12700"/>
+          </a:xfrm>
+          <a:prstGeom prst="rect">
+            <a:avLst/>
+          </a:prstGeom>
+          <a:solidFill>
+            <a:srgbClr val="334155"/>
+          </a:solidFill>
+          <a:ln w="12700">
+            <a:solidFill>
+              <a:srgbClr val="334155"/>
+            </a:solidFill>
+          </a:ln>
+        </p:spPr>
+        <p:style>
+          <a:lnRef idx="2">
+            <a:schemeClr val="accent1">
+              <a:shade val="15000"/>
+            </a:schemeClr>
+          </a:lnRef>
+          <a:fillRef idx="1">
+            <a:schemeClr val="accent1"/>
+          </a:fillRef>
+          <a:effectRef idx="0">
+            <a:schemeClr val="accent1"/>
+          </a:effectRef>
+          <a:fontRef idx="minor">
+            <a:schemeClr val="lt1"/>
+          </a:fontRef>
+        </p:style>
+        <p:txBody>
+          <a:bodyPr rtlCol="0" anchor="ctr"/>
+          <a:lstStyle/>
+          <a:p>
+            <a:pPr algn="ctr"/>
+            <a:endParaRPr lang="vi-VN"/>
+          </a:p>
+        </p:txBody>
+      </p:sp>
+      <p:sp>
+        <p:nvSpPr>
+          <p:cNvPr id="9" name="Rectangle: Rounded Corners 8">
+            <a:extLst>
+              <a:ext uri="{FF2B5EF4-FFF2-40B4-BE49-F238E27FC236}">
+                <a16:creationId xmlns:a16="http://schemas.microsoft.com/office/drawing/2014/main" id="{AC7F5EFD-A5A3-547C-F51F-25788D34EAB4}"/>
+              </a:ext>
+            </a:extLst>
+          </p:cNvPr>
+          <p:cNvSpPr/>
+          <p:nvPr/>
+        </p:nvSpPr>
+        <p:spPr>
+          <a:xfrm>
+            <a:off x="889000" y="2006600"/>
+            <a:ext cx="4826000" cy="3175000"/>
+          </a:xfrm>
+          <a:prstGeom prst="roundRect">
+            <a:avLst/>
+          </a:prstGeom>
+          <a:solidFill>
+            <a:srgbClr val="1E293B"/>
+          </a:solidFill>
+          <a:ln w="12700">
+            <a:solidFill>
+              <a:srgbClr val="334155"/>
+            </a:solidFill>
+          </a:ln>
+        </p:spPr>
+        <p:style>
+          <a:lnRef idx="2">
+            <a:schemeClr val="accent1">
+              <a:shade val="15000"/>
+            </a:schemeClr>
+          </a:lnRef>
+          <a:fillRef idx="1">
+            <a:schemeClr val="accent1"/>
+          </a:fillRef>
+          <a:effectRef idx="0">
+            <a:schemeClr val="accent1"/>
+          </a:effectRef>
+          <a:fontRef idx="minor">
+            <a:schemeClr val="lt1"/>
+          </a:fontRef>
+        </p:style>
+        <p:txBody>
+          <a:bodyPr rtlCol="0" anchor="ctr"/>
+          <a:lstStyle/>
+          <a:p>
+            <a:pPr algn="ctr"/>
+            <a:endParaRPr lang="vi-VN"/>
+          </a:p>
+        </p:txBody>
+      </p:sp>
+      <p:sp>
+        <p:nvSpPr>
+          <p:cNvPr id="10" name="TextBox 9">
+            <a:extLst>
+              <a:ext uri="{FF2B5EF4-FFF2-40B4-BE49-F238E27FC236}">
+                <a16:creationId xmlns:a16="http://schemas.microsoft.com/office/drawing/2014/main" id="{9F88DE92-A550-05AA-E063-127AAA922993}"/>
+              </a:ext>
+            </a:extLst>
+          </p:cNvPr>
+          <p:cNvSpPr txBox="1"/>
+          <p:nvPr/>
+        </p:nvSpPr>
+        <p:spPr>
+          <a:xfrm>
+            <a:off x="1219200" y="2311400"/>
+            <a:ext cx="3810000" cy="338554"/>
+          </a:xfrm>
+          <a:prstGeom prst="rect">
+            <a:avLst/>
+          </a:prstGeom>
+          <a:noFill/>
+        </p:spPr>
+        <p:txBody>
+          <a:bodyPr vert="horz" lIns="0" tIns="0" rIns="0" bIns="0" rtlCol="0">
+            <a:spAutoFit/>
+          </a:bodyPr>
+          <a:lstStyle/>
+          <a:p>
+            <a:r>
+              <a:rPr lang="vi-VN" sz="2200" b="1">
+                <a:solidFill>
+                  <a:srgbClr val="22D3EE"/>
+                </a:solidFill>
+                <a:latin typeface="Aptos" panose="020B0004020202020204" pitchFamily="34" charset="0"/>
+              </a:rPr>
+              <a:t>Local state theo node</a:t>
+            </a:r>
+          </a:p>
+        </p:txBody>
+      </p:sp>
+      <p:sp>
+        <p:nvSpPr>
+          <p:cNvPr id="11" name="TextBox 10">
+            <a:extLst>
+              <a:ext uri="{FF2B5EF4-FFF2-40B4-BE49-F238E27FC236}">
+                <a16:creationId xmlns:a16="http://schemas.microsoft.com/office/drawing/2014/main" id="{7A080C66-D4C1-CB66-8362-CEBFBEDAD1BD}"/>
+              </a:ext>
+            </a:extLst>
+          </p:cNvPr>
+          <p:cNvSpPr txBox="1"/>
+          <p:nvPr/>
+        </p:nvSpPr>
+        <p:spPr>
+          <a:xfrm>
+            <a:off x="1295400" y="2921000"/>
+            <a:ext cx="3810000" cy="1831271"/>
+          </a:xfrm>
+          <a:prstGeom prst="rect">
+            <a:avLst/>
+          </a:prstGeom>
+          <a:noFill/>
+        </p:spPr>
+        <p:txBody>
+          <a:bodyPr vert="horz" lIns="0" tIns="0" rIns="0" bIns="0" rtlCol="0">
+            <a:spAutoFit/>
+          </a:bodyPr>
+          <a:lstStyle/>
+          <a:p>
+            <a:r>
+              <a:rPr lang="en-US" sz="1700">
+                <a:solidFill>
+                  <a:srgbClr val="F1F5F9"/>
+                </a:solidFill>
+                <a:latin typeface="Aptos" panose="020B0004020202020204" pitchFamily="34" charset="0"/>
+              </a:rPr>
+              <a:t>• account
+• payment_request
+• payment_transaction
+• wal_log_entry
+• stream_window
+• processor_checkpoint
+• processing_node</a:t>
+            </a:r>
+            <a:endParaRPr lang="vi-VN" sz="1700">
+              <a:solidFill>
+                <a:srgbClr val="F1F5F9"/>
+              </a:solidFill>
+              <a:latin typeface="Aptos" panose="020B0004020202020204" pitchFamily="34" charset="0"/>
+            </a:endParaRPr>
+          </a:p>
+        </p:txBody>
+      </p:sp>
+      <p:sp>
+        <p:nvSpPr>
+          <p:cNvPr id="12" name="Rectangle: Rounded Corners 11">
+            <a:extLst>
+              <a:ext uri="{FF2B5EF4-FFF2-40B4-BE49-F238E27FC236}">
+                <a16:creationId xmlns:a16="http://schemas.microsoft.com/office/drawing/2014/main" id="{7BA47DC5-166F-61C1-6BDD-575805E78CD4}"/>
+              </a:ext>
+            </a:extLst>
+          </p:cNvPr>
+          <p:cNvSpPr/>
+          <p:nvPr/>
+        </p:nvSpPr>
+        <p:spPr>
+          <a:xfrm>
+            <a:off x="6477000" y="2006600"/>
+            <a:ext cx="4826000" cy="3175000"/>
+          </a:xfrm>
+          <a:prstGeom prst="roundRect">
+            <a:avLst/>
+          </a:prstGeom>
+          <a:solidFill>
+            <a:srgbClr val="1E293B"/>
+          </a:solidFill>
+          <a:ln w="12700">
+            <a:solidFill>
+              <a:srgbClr val="334155"/>
+            </a:solidFill>
+          </a:ln>
+        </p:spPr>
+        <p:style>
+          <a:lnRef idx="2">
+            <a:schemeClr val="accent1">
+              <a:shade val="15000"/>
+            </a:schemeClr>
+          </a:lnRef>
+          <a:fillRef idx="1">
+            <a:schemeClr val="accent1"/>
+          </a:fillRef>
+          <a:effectRef idx="0">
+            <a:schemeClr val="accent1"/>
+          </a:effectRef>
+          <a:fontRef idx="minor">
+            <a:schemeClr val="lt1"/>
+          </a:fontRef>
+        </p:style>
+        <p:txBody>
+          <a:bodyPr rtlCol="0" anchor="ctr"/>
+          <a:lstStyle/>
+          <a:p>
+            <a:pPr algn="ctr"/>
+            <a:endParaRPr lang="vi-VN"/>
+          </a:p>
+        </p:txBody>
+      </p:sp>
+      <p:sp>
+        <p:nvSpPr>
+          <p:cNvPr id="13" name="TextBox 12">
+            <a:extLst>
+              <a:ext uri="{FF2B5EF4-FFF2-40B4-BE49-F238E27FC236}">
+                <a16:creationId xmlns:a16="http://schemas.microsoft.com/office/drawing/2014/main" id="{40D1C50B-D16C-E332-4324-4BABF7CC8AB7}"/>
+              </a:ext>
+            </a:extLst>
+          </p:cNvPr>
+          <p:cNvSpPr txBox="1"/>
+          <p:nvPr/>
+        </p:nvSpPr>
+        <p:spPr>
+          <a:xfrm>
+            <a:off x="6807200" y="2311400"/>
+            <a:ext cx="3810000" cy="338554"/>
+          </a:xfrm>
+          <a:prstGeom prst="rect">
+            <a:avLst/>
+          </a:prstGeom>
+          <a:noFill/>
+        </p:spPr>
+        <p:txBody>
+          <a:bodyPr vert="horz" lIns="0" tIns="0" rIns="0" bIns="0" rtlCol="0">
+            <a:spAutoFit/>
+          </a:bodyPr>
+          <a:lstStyle/>
+          <a:p>
+            <a:r>
+              <a:rPr lang="vi-VN" sz="2200" b="1" dirty="0">
+                <a:solidFill>
+                  <a:srgbClr val="F59E0B"/>
+                </a:solidFill>
+                <a:latin typeface="Aptos" panose="020B0004020202020204" pitchFamily="34" charset="0"/>
+              </a:rPr>
+              <a:t>Global coordination state</a:t>
+            </a:r>
+          </a:p>
+        </p:txBody>
+      </p:sp>
+      <p:sp>
+        <p:nvSpPr>
+          <p:cNvPr id="14" name="TextBox 13">
+            <a:extLst>
+              <a:ext uri="{FF2B5EF4-FFF2-40B4-BE49-F238E27FC236}">
+                <a16:creationId xmlns:a16="http://schemas.microsoft.com/office/drawing/2014/main" id="{B241828F-989C-0EA5-0631-283D2516952C}"/>
+              </a:ext>
+            </a:extLst>
+          </p:cNvPr>
+          <p:cNvSpPr txBox="1"/>
+          <p:nvPr/>
+        </p:nvSpPr>
+        <p:spPr>
+          <a:xfrm>
+            <a:off x="6883400" y="2921000"/>
+            <a:ext cx="3810000" cy="1569660"/>
+          </a:xfrm>
+          <a:prstGeom prst="rect">
+            <a:avLst/>
+          </a:prstGeom>
+          <a:noFill/>
+        </p:spPr>
+        <p:txBody>
+          <a:bodyPr vert="horz" lIns="0" tIns="0" rIns="0" bIns="0" rtlCol="0">
+            <a:spAutoFit/>
+          </a:bodyPr>
+          <a:lstStyle/>
+          <a:p>
+            <a:r>
+              <a:rPr lang="vi-VN" sz="1700">
+                <a:solidFill>
+                  <a:srgbClr val="F1F5F9"/>
+                </a:solidFill>
+                <a:latin typeface="Aptos" panose="020B0004020202020204" pitchFamily="34" charset="0"/>
+              </a:rPr>
+              <a:t>• global_deduplication_record
+• Primary key: idempotency_key
+• originalRequest + nodeId + eventTimeMs
+• resultStatus/resultData để trả kết quả nhất quán</a:t>
+            </a:r>
+          </a:p>
+        </p:txBody>
+      </p:sp>
+    </p:spTree>
+    <p:extLst>
+      <p:ext uri="{BB962C8B-B14F-4D97-AF65-F5344CB8AC3E}">
+        <p14:creationId xmlns:p14="http://schemas.microsoft.com/office/powerpoint/2010/main" val="102301305"/>
+      </p:ext>
+    </p:extLst>
+  </p:cSld>
+  <p:clrMapOvr>
+    <a:masterClrMapping/>
+  </p:clrMapOvr>
+</p:sld>
+</file>
+
 <file path=ppt/slides/slide6.xml><?xml version="1.0" encoding="utf-8"?>
 <p:sld xmlns:a="http://schemas.openxmlformats.org/drawingml/2006/main" xmlns:r="http://schemas.openxmlformats.org/officeDocument/2006/relationships" xmlns:p="http://schemas.openxmlformats.org/presentationml/2006/main">
   <p:cSld>
@@ -12493,7 +10748,7 @@
           <p:cNvPr id="2" name="Rectangle 1">
             <a:extLst>
               <a:ext uri="{FF2B5EF4-FFF2-40B4-BE49-F238E27FC236}">
-                <a16:creationId xmlns:a16="http://schemas.microsoft.com/office/drawing/2014/main" id="{595443C2-AF8B-CE72-C273-5B6C3910DD3D}"/>
+                <a16:creationId xmlns:a16="http://schemas.microsoft.com/office/drawing/2014/main" id="{61904401-307A-5BBA-1500-74F886BB63B9}"/>
               </a:ext>
             </a:extLst>
           </p:cNvPr>
@@ -12561,7 +10816,7 @@
           <p:cNvPr id="3" name="TextBox 2">
             <a:extLst>
               <a:ext uri="{FF2B5EF4-FFF2-40B4-BE49-F238E27FC236}">
-                <a16:creationId xmlns:a16="http://schemas.microsoft.com/office/drawing/2014/main" id="{48184A34-115A-13B1-0EE1-D0E9F60D69A5}"/>
+                <a16:creationId xmlns:a16="http://schemas.microsoft.com/office/drawing/2014/main" id="{2D0270D9-0F97-CDE0-C999-A5FE4B5F8880}"/>
               </a:ext>
             </a:extLst>
           </p:cNvPr>
@@ -12591,7 +10846,7 @@
                 </a:solidFill>
                 <a:latin typeface="Aptos" panose="020B0004020202020204" pitchFamily="34" charset="0"/>
               </a:rPr>
-              <a:t>02 / STATE</a:t>
+              <a:t>03 / THEORY</a:t>
             </a:r>
           </a:p>
         </p:txBody>
@@ -12601,7 +10856,7 @@
           <p:cNvPr id="4" name="TextBox 3">
             <a:extLst>
               <a:ext uri="{FF2B5EF4-FFF2-40B4-BE49-F238E27FC236}">
-                <a16:creationId xmlns:a16="http://schemas.microsoft.com/office/drawing/2014/main" id="{224BC7CC-26F1-0C9D-E24E-D6339162605B}"/>
+                <a16:creationId xmlns:a16="http://schemas.microsoft.com/office/drawing/2014/main" id="{2E97FF63-2037-3D49-106F-6C617B674BAB}"/>
               </a:ext>
             </a:extLst>
           </p:cNvPr>
@@ -12631,7 +10886,7 @@
                 </a:solidFill>
                 <a:latin typeface="Aptos" panose="020B0004020202020204" pitchFamily="34" charset="0"/>
               </a:rPr>
-              <a:t>Dataset, state và phân mảnh</a:t>
+              <a:t>Cơ sở lý thuyết Özsu &amp; Valduriez</a:t>
             </a:r>
           </a:p>
         </p:txBody>
@@ -12641,7 +10896,7 @@
           <p:cNvPr id="5" name="TextBox 4">
             <a:extLst>
               <a:ext uri="{FF2B5EF4-FFF2-40B4-BE49-F238E27FC236}">
-                <a16:creationId xmlns:a16="http://schemas.microsoft.com/office/drawing/2014/main" id="{11C9015E-7442-7493-8185-B5A986D205D6}"/>
+                <a16:creationId xmlns:a16="http://schemas.microsoft.com/office/drawing/2014/main" id="{16E4414E-0D32-8FF4-402F-DB2F7FC7588D}"/>
               </a:ext>
             </a:extLst>
           </p:cNvPr>
@@ -12671,7 +10926,7 @@
                 </a:solidFill>
                 <a:latin typeface="Aptos" panose="020B0004020202020204" pitchFamily="34" charset="0"/>
               </a:rPr>
-              <a:t>Dữ liệu demo được sinh có kiểm soát để đo duplicate và event-time disorder.</a:t>
+              <a:t>Các quyết định thiết kế đều gắn với khái niệm CSDL phân tán.</a:t>
             </a:r>
           </a:p>
         </p:txBody>
@@ -12681,7 +10936,7 @@
           <p:cNvPr id="6" name="Rectangle 5">
             <a:extLst>
               <a:ext uri="{FF2B5EF4-FFF2-40B4-BE49-F238E27FC236}">
-                <a16:creationId xmlns:a16="http://schemas.microsoft.com/office/drawing/2014/main" id="{6BACDAA5-5051-388A-72FA-E340C665EF30}"/>
+                <a16:creationId xmlns:a16="http://schemas.microsoft.com/office/drawing/2014/main" id="{3615CE0A-DDA5-CE42-2863-6E4040849736}"/>
               </a:ext>
             </a:extLst>
           </p:cNvPr>
@@ -12735,7 +10990,7 @@
           <p:cNvPr id="9" name="Rectangle: Rounded Corners 8">
             <a:extLst>
               <a:ext uri="{FF2B5EF4-FFF2-40B4-BE49-F238E27FC236}">
-                <a16:creationId xmlns:a16="http://schemas.microsoft.com/office/drawing/2014/main" id="{AC7F5EFD-A5A3-547C-F51F-25788D34EAB4}"/>
+                <a16:creationId xmlns:a16="http://schemas.microsoft.com/office/drawing/2014/main" id="{C4C79BA5-EEB2-8B66-0EA1-9C84027AA863}"/>
               </a:ext>
             </a:extLst>
           </p:cNvPr>
@@ -12744,8 +10999,8 @@
         </p:nvSpPr>
         <p:spPr>
           <a:xfrm>
-            <a:off x="889000" y="2006600"/>
-            <a:ext cx="4826000" cy="3175000"/>
+            <a:off x="787400" y="2006600"/>
+            <a:ext cx="2413000" cy="965200"/>
           </a:xfrm>
           <a:prstGeom prst="roundRect">
             <a:avLst/>
@@ -12789,7 +11044,7 @@
           <p:cNvPr id="10" name="TextBox 9">
             <a:extLst>
               <a:ext uri="{FF2B5EF4-FFF2-40B4-BE49-F238E27FC236}">
-                <a16:creationId xmlns:a16="http://schemas.microsoft.com/office/drawing/2014/main" id="{9F88DE92-A550-05AA-E063-127AAA922993}"/>
+                <a16:creationId xmlns:a16="http://schemas.microsoft.com/office/drawing/2014/main" id="{55119E59-8F97-9FD9-64FC-AA96D70F28A1}"/>
               </a:ext>
             </a:extLst>
           </p:cNvPr>
@@ -12798,8 +11053,8 @@
         </p:nvSpPr>
         <p:spPr>
           <a:xfrm>
-            <a:off x="1219200" y="2311400"/>
-            <a:ext cx="3810000" cy="338554"/>
+            <a:off x="965200" y="2171700"/>
+            <a:ext cx="2057400" cy="369332"/>
           </a:xfrm>
           <a:prstGeom prst="rect">
             <a:avLst/>
@@ -12813,13 +11068,13 @@
           <a:lstStyle/>
           <a:p>
             <a:r>
-              <a:rPr lang="vi-VN" sz="2200" b="1">
-                <a:solidFill>
-                  <a:srgbClr val="22D3EE"/>
-                </a:solidFill>
-                <a:latin typeface="Aptos" panose="020B0004020202020204" pitchFamily="34" charset="0"/>
-              </a:rPr>
-              <a:t>Local state theo node</a:t>
+              <a:rPr lang="vi-VN" sz="2400" b="1">
+                <a:solidFill>
+                  <a:srgbClr val="60A5FA"/>
+                </a:solidFill>
+                <a:latin typeface="Aptos" panose="020B0004020202020204" pitchFamily="34" charset="0"/>
+              </a:rPr>
+              <a:t>Gateway</a:t>
             </a:r>
           </a:p>
         </p:txBody>
@@ -12829,7 +11084,7 @@
           <p:cNvPr id="11" name="TextBox 10">
             <a:extLst>
               <a:ext uri="{FF2B5EF4-FFF2-40B4-BE49-F238E27FC236}">
-                <a16:creationId xmlns:a16="http://schemas.microsoft.com/office/drawing/2014/main" id="{7A080C66-D4C1-CB66-8362-CEBFBEDAD1BD}"/>
+                <a16:creationId xmlns:a16="http://schemas.microsoft.com/office/drawing/2014/main" id="{3A6C0DA4-8CDD-9F99-EA80-1BD163B8C253}"/>
               </a:ext>
             </a:extLst>
           </p:cNvPr>
@@ -12838,8 +11093,8 @@
         </p:nvSpPr>
         <p:spPr>
           <a:xfrm>
-            <a:off x="1295400" y="2921000"/>
-            <a:ext cx="3810000" cy="1831271"/>
+            <a:off x="965200" y="2616200"/>
+            <a:ext cx="2057400" cy="153888"/>
           </a:xfrm>
           <a:prstGeom prst="rect">
             <a:avLst/>
@@ -12853,26 +11108,14 @@
           <a:lstStyle/>
           <a:p>
             <a:r>
-              <a:rPr lang="en-US" sz="1700">
-                <a:solidFill>
-                  <a:srgbClr val="F1F5F9"/>
-                </a:solidFill>
-                <a:latin typeface="Aptos" panose="020B0004020202020204" pitchFamily="34" charset="0"/>
-              </a:rPr>
-              <a:t>• account
-• payment_request
-• payment_transaction
-• wal_log_entry
-• stream_window
-• processor_checkpoint
-• processing_node</a:t>
-            </a:r>
-            <a:endParaRPr lang="vi-VN" sz="1700">
-              <a:solidFill>
-                <a:srgbClr val="F1F5F9"/>
-              </a:solidFill>
-              <a:latin typeface="Aptos" panose="020B0004020202020204" pitchFamily="34" charset="0"/>
-            </a:endParaRPr>
+              <a:rPr lang="vi-VN" sz="1000">
+                <a:solidFill>
+                  <a:srgbClr val="94A3B8"/>
+                </a:solidFill>
+                <a:latin typeface="Aptos" panose="020B0004020202020204" pitchFamily="34" charset="0"/>
+              </a:rPr>
+              <a:t>Transparency</a:t>
+            </a:r>
           </a:p>
         </p:txBody>
       </p:sp>
@@ -12881,7 +11124,7 @@
           <p:cNvPr id="12" name="Rectangle: Rounded Corners 11">
             <a:extLst>
               <a:ext uri="{FF2B5EF4-FFF2-40B4-BE49-F238E27FC236}">
-                <a16:creationId xmlns:a16="http://schemas.microsoft.com/office/drawing/2014/main" id="{7BA47DC5-166F-61C1-6BDD-575805E78CD4}"/>
+                <a16:creationId xmlns:a16="http://schemas.microsoft.com/office/drawing/2014/main" id="{41C77E2E-6D7A-E393-6996-FD5299C2C991}"/>
               </a:ext>
             </a:extLst>
           </p:cNvPr>
@@ -12890,8 +11133,8 @@
         </p:nvSpPr>
         <p:spPr>
           <a:xfrm>
-            <a:off x="6477000" y="2006600"/>
-            <a:ext cx="4826000" cy="3175000"/>
+            <a:off x="3581400" y="2006600"/>
+            <a:ext cx="2413000" cy="965200"/>
           </a:xfrm>
           <a:prstGeom prst="roundRect">
             <a:avLst/>
@@ -12935,7 +11178,7 @@
           <p:cNvPr id="13" name="TextBox 12">
             <a:extLst>
               <a:ext uri="{FF2B5EF4-FFF2-40B4-BE49-F238E27FC236}">
-                <a16:creationId xmlns:a16="http://schemas.microsoft.com/office/drawing/2014/main" id="{40D1C50B-D16C-E332-4324-4BABF7CC8AB7}"/>
+                <a16:creationId xmlns:a16="http://schemas.microsoft.com/office/drawing/2014/main" id="{D46CC114-B555-1388-079E-CC19A973C82A}"/>
               </a:ext>
             </a:extLst>
           </p:cNvPr>
@@ -12944,8 +11187,8 @@
         </p:nvSpPr>
         <p:spPr>
           <a:xfrm>
-            <a:off x="6807200" y="2311400"/>
-            <a:ext cx="3810000" cy="338554"/>
+            <a:off x="3759200" y="2171700"/>
+            <a:ext cx="2057400" cy="369332"/>
           </a:xfrm>
           <a:prstGeom prst="rect">
             <a:avLst/>
@@ -12959,13 +11202,13 @@
           <a:lstStyle/>
           <a:p>
             <a:r>
-              <a:rPr lang="vi-VN" sz="2200" b="1" dirty="0">
-                <a:solidFill>
-                  <a:srgbClr val="F59E0B"/>
-                </a:solidFill>
-                <a:latin typeface="Aptos" panose="020B0004020202020204" pitchFamily="34" charset="0"/>
-              </a:rPr>
-              <a:t>Global coordination state</a:t>
+              <a:rPr lang="vi-VN" sz="2400" b="1">
+                <a:solidFill>
+                  <a:srgbClr val="22D3EE"/>
+                </a:solidFill>
+                <a:latin typeface="Aptos" panose="020B0004020202020204" pitchFamily="34" charset="0"/>
+              </a:rPr>
+              <a:t>Node state</a:t>
             </a:r>
           </a:p>
         </p:txBody>
@@ -12975,7 +11218,7 @@
           <p:cNvPr id="14" name="TextBox 13">
             <a:extLst>
               <a:ext uri="{FF2B5EF4-FFF2-40B4-BE49-F238E27FC236}">
-                <a16:creationId xmlns:a16="http://schemas.microsoft.com/office/drawing/2014/main" id="{B241828F-989C-0EA5-0631-283D2516952C}"/>
+                <a16:creationId xmlns:a16="http://schemas.microsoft.com/office/drawing/2014/main" id="{F8D479D2-1ED5-C990-6CB5-4AE3B30EF4F4}"/>
               </a:ext>
             </a:extLst>
           </p:cNvPr>
@@ -12984,8 +11227,8 @@
         </p:nvSpPr>
         <p:spPr>
           <a:xfrm>
-            <a:off x="6883400" y="2921000"/>
-            <a:ext cx="3810000" cy="1569660"/>
+            <a:off x="3759200" y="2616200"/>
+            <a:ext cx="2057400" cy="153888"/>
           </a:xfrm>
           <a:prstGeom prst="rect">
             <a:avLst/>
@@ -12999,16 +11242,324 @@
           <a:lstStyle/>
           <a:p>
             <a:r>
-              <a:rPr lang="vi-VN" sz="1700">
+              <a:rPr lang="vi-VN" sz="1000">
+                <a:solidFill>
+                  <a:srgbClr val="94A3B8"/>
+                </a:solidFill>
+                <a:latin typeface="Aptos" panose="020B0004020202020204" pitchFamily="34" charset="0"/>
+              </a:rPr>
+              <a:t>Fragmentation</a:t>
+            </a:r>
+          </a:p>
+        </p:txBody>
+      </p:sp>
+      <p:sp>
+        <p:nvSpPr>
+          <p:cNvPr id="15" name="Rectangle: Rounded Corners 14">
+            <a:extLst>
+              <a:ext uri="{FF2B5EF4-FFF2-40B4-BE49-F238E27FC236}">
+                <a16:creationId xmlns:a16="http://schemas.microsoft.com/office/drawing/2014/main" id="{71177ACE-6670-D8B2-E590-7AC676BAE1EB}"/>
+              </a:ext>
+            </a:extLst>
+          </p:cNvPr>
+          <p:cNvSpPr/>
+          <p:nvPr/>
+        </p:nvSpPr>
+        <p:spPr>
+          <a:xfrm>
+            <a:off x="6375400" y="2006600"/>
+            <a:ext cx="2413000" cy="965200"/>
+          </a:xfrm>
+          <a:prstGeom prst="roundRect">
+            <a:avLst/>
+          </a:prstGeom>
+          <a:solidFill>
+            <a:srgbClr val="1E293B"/>
+          </a:solidFill>
+          <a:ln w="12700">
+            <a:solidFill>
+              <a:srgbClr val="334155"/>
+            </a:solidFill>
+          </a:ln>
+        </p:spPr>
+        <p:style>
+          <a:lnRef idx="2">
+            <a:schemeClr val="accent1">
+              <a:shade val="15000"/>
+            </a:schemeClr>
+          </a:lnRef>
+          <a:fillRef idx="1">
+            <a:schemeClr val="accent1"/>
+          </a:fillRef>
+          <a:effectRef idx="0">
+            <a:schemeClr val="accent1"/>
+          </a:effectRef>
+          <a:fontRef idx="minor">
+            <a:schemeClr val="lt1"/>
+          </a:fontRef>
+        </p:style>
+        <p:txBody>
+          <a:bodyPr rtlCol="0" anchor="ctr"/>
+          <a:lstStyle/>
+          <a:p>
+            <a:pPr algn="ctr"/>
+            <a:endParaRPr lang="vi-VN"/>
+          </a:p>
+        </p:txBody>
+      </p:sp>
+      <p:sp>
+        <p:nvSpPr>
+          <p:cNvPr id="16" name="TextBox 15">
+            <a:extLst>
+              <a:ext uri="{FF2B5EF4-FFF2-40B4-BE49-F238E27FC236}">
+                <a16:creationId xmlns:a16="http://schemas.microsoft.com/office/drawing/2014/main" id="{5D6D8829-5183-0B03-E81A-0C1AFC2A5833}"/>
+              </a:ext>
+            </a:extLst>
+          </p:cNvPr>
+          <p:cNvSpPr txBox="1"/>
+          <p:nvPr/>
+        </p:nvSpPr>
+        <p:spPr>
+          <a:xfrm>
+            <a:off x="6553200" y="2171700"/>
+            <a:ext cx="2057400" cy="369332"/>
+          </a:xfrm>
+          <a:prstGeom prst="rect">
+            <a:avLst/>
+          </a:prstGeom>
+          <a:noFill/>
+        </p:spPr>
+        <p:txBody>
+          <a:bodyPr vert="horz" lIns="0" tIns="0" rIns="0" bIns="0" rtlCol="0">
+            <a:spAutoFit/>
+          </a:bodyPr>
+          <a:lstStyle/>
+          <a:p>
+            <a:r>
+              <a:rPr lang="vi-VN" sz="1900" b="1">
+                <a:solidFill>
+                  <a:srgbClr val="F59E0B"/>
+                </a:solidFill>
+                <a:latin typeface="Aptos" panose="020B0004020202020204" pitchFamily="34" charset="0"/>
+              </a:rPr>
+              <a:t>Global dedup</a:t>
+            </a:r>
+          </a:p>
+        </p:txBody>
+      </p:sp>
+      <p:sp>
+        <p:nvSpPr>
+          <p:cNvPr id="17" name="TextBox 16">
+            <a:extLst>
+              <a:ext uri="{FF2B5EF4-FFF2-40B4-BE49-F238E27FC236}">
+                <a16:creationId xmlns:a16="http://schemas.microsoft.com/office/drawing/2014/main" id="{364FABF7-8E1E-5218-768A-5349FBDFF6EA}"/>
+              </a:ext>
+            </a:extLst>
+          </p:cNvPr>
+          <p:cNvSpPr txBox="1"/>
+          <p:nvPr/>
+        </p:nvSpPr>
+        <p:spPr>
+          <a:xfrm>
+            <a:off x="6553200" y="2616200"/>
+            <a:ext cx="2057400" cy="153888"/>
+          </a:xfrm>
+          <a:prstGeom prst="rect">
+            <a:avLst/>
+          </a:prstGeom>
+          <a:noFill/>
+        </p:spPr>
+        <p:txBody>
+          <a:bodyPr vert="horz" lIns="0" tIns="0" rIns="0" bIns="0" rtlCol="0">
+            <a:spAutoFit/>
+          </a:bodyPr>
+          <a:lstStyle/>
+          <a:p>
+            <a:r>
+              <a:rPr lang="vi-VN" sz="1000">
+                <a:solidFill>
+                  <a:srgbClr val="94A3B8"/>
+                </a:solidFill>
+                <a:latin typeface="Aptos" panose="020B0004020202020204" pitchFamily="34" charset="0"/>
+              </a:rPr>
+              <a:t>Data control</a:t>
+            </a:r>
+          </a:p>
+        </p:txBody>
+      </p:sp>
+      <p:sp>
+        <p:nvSpPr>
+          <p:cNvPr id="18" name="Rectangle: Rounded Corners 17">
+            <a:extLst>
+              <a:ext uri="{FF2B5EF4-FFF2-40B4-BE49-F238E27FC236}">
+                <a16:creationId xmlns:a16="http://schemas.microsoft.com/office/drawing/2014/main" id="{45BB1FFF-96FF-1DA6-22BC-730E3E7BF826}"/>
+              </a:ext>
+            </a:extLst>
+          </p:cNvPr>
+          <p:cNvSpPr/>
+          <p:nvPr/>
+        </p:nvSpPr>
+        <p:spPr>
+          <a:xfrm>
+            <a:off x="9169400" y="2006600"/>
+            <a:ext cx="2159000" cy="965200"/>
+          </a:xfrm>
+          <a:prstGeom prst="roundRect">
+            <a:avLst/>
+          </a:prstGeom>
+          <a:solidFill>
+            <a:srgbClr val="1E293B"/>
+          </a:solidFill>
+          <a:ln w="12700">
+            <a:solidFill>
+              <a:srgbClr val="334155"/>
+            </a:solidFill>
+          </a:ln>
+        </p:spPr>
+        <p:style>
+          <a:lnRef idx="2">
+            <a:schemeClr val="accent1">
+              <a:shade val="15000"/>
+            </a:schemeClr>
+          </a:lnRef>
+          <a:fillRef idx="1">
+            <a:schemeClr val="accent1"/>
+          </a:fillRef>
+          <a:effectRef idx="0">
+            <a:schemeClr val="accent1"/>
+          </a:effectRef>
+          <a:fontRef idx="minor">
+            <a:schemeClr val="lt1"/>
+          </a:fontRef>
+        </p:style>
+        <p:txBody>
+          <a:bodyPr rtlCol="0" anchor="ctr"/>
+          <a:lstStyle/>
+          <a:p>
+            <a:pPr algn="ctr"/>
+            <a:endParaRPr lang="vi-VN"/>
+          </a:p>
+        </p:txBody>
+      </p:sp>
+      <p:sp>
+        <p:nvSpPr>
+          <p:cNvPr id="19" name="TextBox 18">
+            <a:extLst>
+              <a:ext uri="{FF2B5EF4-FFF2-40B4-BE49-F238E27FC236}">
+                <a16:creationId xmlns:a16="http://schemas.microsoft.com/office/drawing/2014/main" id="{601E5603-5A10-5822-6214-E9891E3289AC}"/>
+              </a:ext>
+            </a:extLst>
+          </p:cNvPr>
+          <p:cNvSpPr txBox="1"/>
+          <p:nvPr/>
+        </p:nvSpPr>
+        <p:spPr>
+          <a:xfrm>
+            <a:off x="9347200" y="2171700"/>
+            <a:ext cx="1803400" cy="369332"/>
+          </a:xfrm>
+          <a:prstGeom prst="rect">
+            <a:avLst/>
+          </a:prstGeom>
+          <a:noFill/>
+        </p:spPr>
+        <p:txBody>
+          <a:bodyPr vert="horz" lIns="0" tIns="0" rIns="0" bIns="0" rtlCol="0">
+            <a:spAutoFit/>
+          </a:bodyPr>
+          <a:lstStyle/>
+          <a:p>
+            <a:r>
+              <a:rPr lang="vi-VN" sz="2400" b="1">
+                <a:solidFill>
+                  <a:srgbClr val="10B981"/>
+                </a:solidFill>
+                <a:latin typeface="Aptos" panose="020B0004020202020204" pitchFamily="34" charset="0"/>
+              </a:rPr>
+              <a:t>WAL</a:t>
+            </a:r>
+          </a:p>
+        </p:txBody>
+      </p:sp>
+      <p:sp>
+        <p:nvSpPr>
+          <p:cNvPr id="20" name="TextBox 19">
+            <a:extLst>
+              <a:ext uri="{FF2B5EF4-FFF2-40B4-BE49-F238E27FC236}">
+                <a16:creationId xmlns:a16="http://schemas.microsoft.com/office/drawing/2014/main" id="{C440AE3A-7642-A688-BA4C-3A82A7F9EE83}"/>
+              </a:ext>
+            </a:extLst>
+          </p:cNvPr>
+          <p:cNvSpPr txBox="1"/>
+          <p:nvPr/>
+        </p:nvSpPr>
+        <p:spPr>
+          <a:xfrm>
+            <a:off x="9347200" y="2616200"/>
+            <a:ext cx="1803400" cy="153888"/>
+          </a:xfrm>
+          <a:prstGeom prst="rect">
+            <a:avLst/>
+          </a:prstGeom>
+          <a:noFill/>
+        </p:spPr>
+        <p:txBody>
+          <a:bodyPr vert="horz" lIns="0" tIns="0" rIns="0" bIns="0" rtlCol="0">
+            <a:spAutoFit/>
+          </a:bodyPr>
+          <a:lstStyle/>
+          <a:p>
+            <a:r>
+              <a:rPr lang="vi-VN" sz="1000">
+                <a:solidFill>
+                  <a:srgbClr val="94A3B8"/>
+                </a:solidFill>
+                <a:latin typeface="Aptos" panose="020B0004020202020204" pitchFamily="34" charset="0"/>
+              </a:rPr>
+              <a:t>Reliability</a:t>
+            </a:r>
+          </a:p>
+        </p:txBody>
+      </p:sp>
+      <p:sp>
+        <p:nvSpPr>
+          <p:cNvPr id="21" name="TextBox 20">
+            <a:extLst>
+              <a:ext uri="{FF2B5EF4-FFF2-40B4-BE49-F238E27FC236}">
+                <a16:creationId xmlns:a16="http://schemas.microsoft.com/office/drawing/2014/main" id="{78C739E8-3A1A-5AAF-D198-46F7AE0FB29D}"/>
+              </a:ext>
+            </a:extLst>
+          </p:cNvPr>
+          <p:cNvSpPr txBox="1"/>
+          <p:nvPr/>
+        </p:nvSpPr>
+        <p:spPr>
+          <a:xfrm>
+            <a:off x="1041400" y="3606800"/>
+            <a:ext cx="10414000" cy="1107996"/>
+          </a:xfrm>
+          <a:prstGeom prst="rect">
+            <a:avLst/>
+          </a:prstGeom>
+          <a:noFill/>
+        </p:spPr>
+        <p:txBody>
+          <a:bodyPr vert="horz" lIns="0" tIns="0" rIns="0" bIns="0" rtlCol="0">
+            <a:spAutoFit/>
+          </a:bodyPr>
+          <a:lstStyle/>
+          <a:p>
+            <a:r>
+              <a:rPr lang="vi-VN">
                 <a:solidFill>
                   <a:srgbClr val="F1F5F9"/>
                 </a:solidFill>
                 <a:latin typeface="Aptos" panose="020B0004020202020204" pitchFamily="34" charset="0"/>
               </a:rPr>
-              <a:t>• global_deduplication_record
-• Primary key: idempotency_key
-• originalRequest + nodeId + eventTimeMs
-• resultStatus/resultData để trả kết quả nhất quán</a:t>
+              <a:t>• Distribution/network transparency: client không cần biết request xử lý ở site nào.
+• Horizontal fragmentation: mỗi node giữ request, WAL, transaction, window riêng.
+• Consistency control: idempotency key phải được kiểm soát toàn cục.
+• Recovery: log giúp đưa hệ thống về trạng thái nhất quán sau crash.</a:t>
             </a:r>
           </a:p>
         </p:txBody>
@@ -13016,7 +11567,7 @@
     </p:spTree>
     <p:extLst>
       <p:ext uri="{BB962C8B-B14F-4D97-AF65-F5344CB8AC3E}">
-        <p14:creationId xmlns:p14="http://schemas.microsoft.com/office/powerpoint/2010/main" val="102301305"/>
+        <p14:creationId xmlns:p14="http://schemas.microsoft.com/office/powerpoint/2010/main" val="1224024812"/>
       </p:ext>
     </p:extLst>
   </p:cSld>
@@ -13048,7 +11599,7 @@
           <p:cNvPr id="2" name="Rectangle 1">
             <a:extLst>
               <a:ext uri="{FF2B5EF4-FFF2-40B4-BE49-F238E27FC236}">
-                <a16:creationId xmlns:a16="http://schemas.microsoft.com/office/drawing/2014/main" id="{61904401-307A-5BBA-1500-74F886BB63B9}"/>
+                <a16:creationId xmlns:a16="http://schemas.microsoft.com/office/drawing/2014/main" id="{A61AEB2E-7ED2-5EF3-BBB4-8CC8343AB766}"/>
               </a:ext>
             </a:extLst>
           </p:cNvPr>
@@ -13116,7 +11667,7 @@
           <p:cNvPr id="3" name="TextBox 2">
             <a:extLst>
               <a:ext uri="{FF2B5EF4-FFF2-40B4-BE49-F238E27FC236}">
-                <a16:creationId xmlns:a16="http://schemas.microsoft.com/office/drawing/2014/main" id="{2D0270D9-0F97-CDE0-C999-A5FE4B5F8880}"/>
+                <a16:creationId xmlns:a16="http://schemas.microsoft.com/office/drawing/2014/main" id="{DCD34CF6-2A2E-8352-1944-816E99C3D9B9}"/>
               </a:ext>
             </a:extLst>
           </p:cNvPr>
@@ -13146,7 +11697,7 @@
                 </a:solidFill>
                 <a:latin typeface="Aptos" panose="020B0004020202020204" pitchFamily="34" charset="0"/>
               </a:rPr>
-              <a:t>03 / THEORY</a:t>
+              <a:t>03 / COST MODEL</a:t>
             </a:r>
           </a:p>
         </p:txBody>
@@ -13156,7 +11707,7 @@
           <p:cNvPr id="4" name="TextBox 3">
             <a:extLst>
               <a:ext uri="{FF2B5EF4-FFF2-40B4-BE49-F238E27FC236}">
-                <a16:creationId xmlns:a16="http://schemas.microsoft.com/office/drawing/2014/main" id="{2E97FF63-2037-3D49-106F-6C617B674BAB}"/>
+                <a16:creationId xmlns:a16="http://schemas.microsoft.com/office/drawing/2014/main" id="{64E20731-746B-A05B-7EDE-30EA696766CD}"/>
               </a:ext>
             </a:extLst>
           </p:cNvPr>
@@ -13186,7 +11737,7 @@
                 </a:solidFill>
                 <a:latin typeface="Aptos" panose="020B0004020202020204" pitchFamily="34" charset="0"/>
               </a:rPr>
-              <a:t>Cơ sở lý thuyết Özsu &amp; Valduriez</a:t>
+              <a:t>Mô hình chi phí phân tán</a:t>
             </a:r>
           </a:p>
         </p:txBody>
@@ -13196,7 +11747,7 @@
           <p:cNvPr id="5" name="TextBox 4">
             <a:extLst>
               <a:ext uri="{FF2B5EF4-FFF2-40B4-BE49-F238E27FC236}">
-                <a16:creationId xmlns:a16="http://schemas.microsoft.com/office/drawing/2014/main" id="{16E4414E-0D32-8FF4-402F-DB2F7FC7588D}"/>
+                <a16:creationId xmlns:a16="http://schemas.microsoft.com/office/drawing/2014/main" id="{9185B819-D19D-7C33-F3D4-787ECEA1E09E}"/>
               </a:ext>
             </a:extLst>
           </p:cNvPr>
@@ -13226,7 +11777,7 @@
                 </a:solidFill>
                 <a:latin typeface="Aptos" panose="020B0004020202020204" pitchFamily="34" charset="0"/>
               </a:rPr>
-              <a:t>Các quyết định thiết kế đều gắn với khái niệm CSDL phân tán.</a:t>
+              <a:t>EOS có thêm coordination và I/O nhưng loại bỏ chi phí nghiệp vụ do duplicate charge.</a:t>
             </a:r>
           </a:p>
         </p:txBody>
@@ -13236,7 +11787,7 @@
           <p:cNvPr id="6" name="Rectangle 5">
             <a:extLst>
               <a:ext uri="{FF2B5EF4-FFF2-40B4-BE49-F238E27FC236}">
-                <a16:creationId xmlns:a16="http://schemas.microsoft.com/office/drawing/2014/main" id="{3615CE0A-DDA5-CE42-2863-6E4040849736}"/>
+                <a16:creationId xmlns:a16="http://schemas.microsoft.com/office/drawing/2014/main" id="{43D48142-8876-1C49-FD6F-FA7F120436F3}"/>
               </a:ext>
             </a:extLst>
           </p:cNvPr>
@@ -13290,7 +11841,7 @@
           <p:cNvPr id="9" name="Rectangle: Rounded Corners 8">
             <a:extLst>
               <a:ext uri="{FF2B5EF4-FFF2-40B4-BE49-F238E27FC236}">
-                <a16:creationId xmlns:a16="http://schemas.microsoft.com/office/drawing/2014/main" id="{C4C79BA5-EEB2-8B66-0EA1-9C84027AA863}"/>
+                <a16:creationId xmlns:a16="http://schemas.microsoft.com/office/drawing/2014/main" id="{173B0946-F0CB-5759-7F32-96C1B21B2FB4}"/>
               </a:ext>
             </a:extLst>
           </p:cNvPr>
@@ -13299,8 +11850,8 @@
         </p:nvSpPr>
         <p:spPr>
           <a:xfrm>
-            <a:off x="787400" y="2006600"/>
-            <a:ext cx="2413000" cy="965200"/>
+            <a:off x="889000" y="2032000"/>
+            <a:ext cx="10414000" cy="914400"/>
           </a:xfrm>
           <a:prstGeom prst="roundRect">
             <a:avLst/>
@@ -13344,7 +11895,7 @@
           <p:cNvPr id="10" name="TextBox 9">
             <a:extLst>
               <a:ext uri="{FF2B5EF4-FFF2-40B4-BE49-F238E27FC236}">
-                <a16:creationId xmlns:a16="http://schemas.microsoft.com/office/drawing/2014/main" id="{55119E59-8F97-9FD9-64FC-AA96D70F28A1}"/>
+                <a16:creationId xmlns:a16="http://schemas.microsoft.com/office/drawing/2014/main" id="{6718C7F3-56F4-58CB-2CD5-36C7EA1DB84A}"/>
               </a:ext>
             </a:extLst>
           </p:cNvPr>
@@ -13353,8 +11904,8 @@
         </p:nvSpPr>
         <p:spPr>
           <a:xfrm>
-            <a:off x="965200" y="2171700"/>
-            <a:ext cx="2057400" cy="369332"/>
+            <a:off x="1219200" y="2336800"/>
+            <a:ext cx="9652000" cy="553998"/>
           </a:xfrm>
           <a:prstGeom prst="rect">
             <a:avLst/>
@@ -13367,64 +11918,40 @@
           </a:bodyPr>
           <a:lstStyle/>
           <a:p>
-            <a:r>
-              <a:rPr lang="vi-VN" sz="2400" b="1">
-                <a:solidFill>
-                  <a:srgbClr val="60A5FA"/>
-                </a:solidFill>
-                <a:latin typeface="Aptos" panose="020B0004020202020204" pitchFamily="34" charset="0"/>
-              </a:rPr>
-              <a:t>Gateway</a:t>
-            </a:r>
-          </a:p>
-        </p:txBody>
-      </p:sp>
-      <p:sp>
-        <p:nvSpPr>
-          <p:cNvPr id="11" name="TextBox 10">
-            <a:extLst>
-              <a:ext uri="{FF2B5EF4-FFF2-40B4-BE49-F238E27FC236}">
-                <a16:creationId xmlns:a16="http://schemas.microsoft.com/office/drawing/2014/main" id="{3A6C0DA4-8CDD-9F99-EA80-1BD163B8C253}"/>
-              </a:ext>
-            </a:extLst>
-          </p:cNvPr>
-          <p:cNvSpPr txBox="1"/>
-          <p:nvPr/>
-        </p:nvSpPr>
-        <p:spPr>
-          <a:xfrm>
-            <a:off x="965200" y="2616200"/>
-            <a:ext cx="2057400" cy="153888"/>
-          </a:xfrm>
-          <a:prstGeom prst="rect">
-            <a:avLst/>
-          </a:prstGeom>
-          <a:noFill/>
-        </p:spPr>
-        <p:txBody>
-          <a:bodyPr vert="horz" lIns="0" tIns="0" rIns="0" bIns="0" rtlCol="0">
-            <a:spAutoFit/>
-          </a:bodyPr>
-          <a:lstStyle/>
-          <a:p>
-            <a:r>
-              <a:rPr lang="vi-VN" sz="1000">
-                <a:solidFill>
-                  <a:srgbClr val="94A3B8"/>
-                </a:solidFill>
-                <a:latin typeface="Aptos" panose="020B0004020202020204" pitchFamily="34" charset="0"/>
-              </a:rPr>
-              <a:t>Transparency</a:t>
-            </a:r>
-          </a:p>
-        </p:txBody>
-      </p:sp>
-      <p:sp>
-        <p:nvSpPr>
-          <p:cNvPr id="12" name="Rectangle: Rounded Corners 11">
-            <a:extLst>
-              <a:ext uri="{FF2B5EF4-FFF2-40B4-BE49-F238E27FC236}">
-                <a16:creationId xmlns:a16="http://schemas.microsoft.com/office/drawing/2014/main" id="{41C77E2E-6D7A-E393-6996-FD5299C2C991}"/>
+            <a:pPr algn="ctr"/>
+            <a:r>
+              <a:rPr lang="fr-FR" b="1" dirty="0" err="1">
+                <a:solidFill>
+                  <a:srgbClr val="F1F5F9"/>
+                </a:solidFill>
+                <a:latin typeface="Aptos" panose="020B0004020202020204" pitchFamily="34" charset="0"/>
+              </a:rPr>
+              <a:t>Total_Time</a:t>
+            </a:r>
+            <a:r>
+              <a:rPr lang="fr-FR" b="1" dirty="0">
+                <a:solidFill>
+                  <a:srgbClr val="F1F5F9"/>
+                </a:solidFill>
+                <a:latin typeface="Aptos" panose="020B0004020202020204" pitchFamily="34" charset="0"/>
+              </a:rPr>
+              <a:t> = T_CPU * #instructions + T_IO * #disk_IOs + T_MSG * #messages + T_TR * #bytes_transferred</a:t>
+            </a:r>
+            <a:endParaRPr lang="vi-VN" b="1" dirty="0">
+              <a:solidFill>
+                <a:srgbClr val="F1F5F9"/>
+              </a:solidFill>
+              <a:latin typeface="Aptos" panose="020B0004020202020204" pitchFamily="34" charset="0"/>
+            </a:endParaRPr>
+          </a:p>
+        </p:txBody>
+      </p:sp>
+      <p:sp>
+        <p:nvSpPr>
+          <p:cNvPr id="11" name="Rectangle: Rounded Corners 10">
+            <a:extLst>
+              <a:ext uri="{FF2B5EF4-FFF2-40B4-BE49-F238E27FC236}">
+                <a16:creationId xmlns:a16="http://schemas.microsoft.com/office/drawing/2014/main" id="{619DB041-B2FC-53EA-759D-D96DF2517D83}"/>
               </a:ext>
             </a:extLst>
           </p:cNvPr>
@@ -13433,8 +11960,8 @@
         </p:nvSpPr>
         <p:spPr>
           <a:xfrm>
-            <a:off x="3581400" y="2006600"/>
-            <a:ext cx="2413000" cy="965200"/>
+            <a:off x="1092200" y="3530600"/>
+            <a:ext cx="4572000" cy="1746884"/>
           </a:xfrm>
           <a:prstGeom prst="roundRect">
             <a:avLst/>
@@ -13444,7 +11971,7 @@
           </a:solidFill>
           <a:ln w="12700">
             <a:solidFill>
-              <a:srgbClr val="334155"/>
+              <a:srgbClr val="10B981"/>
             </a:solidFill>
           </a:ln>
         </p:spPr>
@@ -13475,10 +12002,10 @@
       </p:sp>
       <p:sp>
         <p:nvSpPr>
-          <p:cNvPr id="13" name="TextBox 12">
-            <a:extLst>
-              <a:ext uri="{FF2B5EF4-FFF2-40B4-BE49-F238E27FC236}">
-                <a16:creationId xmlns:a16="http://schemas.microsoft.com/office/drawing/2014/main" id="{D46CC114-B555-1388-079E-CC19A973C82A}"/>
+          <p:cNvPr id="12" name="TextBox 11">
+            <a:extLst>
+              <a:ext uri="{FF2B5EF4-FFF2-40B4-BE49-F238E27FC236}">
+                <a16:creationId xmlns:a16="http://schemas.microsoft.com/office/drawing/2014/main" id="{1BE2C913-B0DC-7963-D106-D85429FAD214}"/>
               </a:ext>
             </a:extLst>
           </p:cNvPr>
@@ -13487,8 +12014,8 @@
         </p:nvSpPr>
         <p:spPr>
           <a:xfrm>
-            <a:off x="3759200" y="2171700"/>
-            <a:ext cx="2057400" cy="369332"/>
+            <a:off x="1397000" y="3810000"/>
+            <a:ext cx="3810000" cy="307777"/>
           </a:xfrm>
           <a:prstGeom prst="rect">
             <a:avLst/>
@@ -13502,23 +12029,29 @@
           <a:lstStyle/>
           <a:p>
             <a:r>
-              <a:rPr lang="vi-VN" sz="2400" b="1">
-                <a:solidFill>
-                  <a:srgbClr val="22D3EE"/>
-                </a:solidFill>
-                <a:latin typeface="Aptos" panose="020B0004020202020204" pitchFamily="34" charset="0"/>
-              </a:rPr>
-              <a:t>Node state</a:t>
-            </a:r>
-          </a:p>
-        </p:txBody>
-      </p:sp>
-      <p:sp>
-        <p:nvSpPr>
-          <p:cNvPr id="14" name="TextBox 13">
-            <a:extLst>
-              <a:ext uri="{FF2B5EF4-FFF2-40B4-BE49-F238E27FC236}">
-                <a16:creationId xmlns:a16="http://schemas.microsoft.com/office/drawing/2014/main" id="{F8D479D2-1ED5-C990-6CB5-4AE3B30EF4F4}"/>
+              <a:rPr lang="en-US" sz="2000" b="1">
+                <a:solidFill>
+                  <a:srgbClr val="10B981"/>
+                </a:solidFill>
+                <a:latin typeface="Aptos" panose="020B0004020202020204" pitchFamily="34" charset="0"/>
+              </a:rPr>
+              <a:t>EOS overhead có chủ ý</a:t>
+            </a:r>
+            <a:endParaRPr lang="vi-VN" sz="2000" b="1">
+              <a:solidFill>
+                <a:srgbClr val="10B981"/>
+              </a:solidFill>
+              <a:latin typeface="Aptos" panose="020B0004020202020204" pitchFamily="34" charset="0"/>
+            </a:endParaRPr>
+          </a:p>
+        </p:txBody>
+      </p:sp>
+      <p:sp>
+        <p:nvSpPr>
+          <p:cNvPr id="13" name="TextBox 12">
+            <a:extLst>
+              <a:ext uri="{FF2B5EF4-FFF2-40B4-BE49-F238E27FC236}">
+                <a16:creationId xmlns:a16="http://schemas.microsoft.com/office/drawing/2014/main" id="{A96D31DE-6FFE-22CE-E423-D90759E1D39B}"/>
               </a:ext>
             </a:extLst>
           </p:cNvPr>
@@ -13527,8 +12060,8 @@
         </p:nvSpPr>
         <p:spPr>
           <a:xfrm>
-            <a:off x="3759200" y="2616200"/>
-            <a:ext cx="2057400" cy="153888"/>
+            <a:off x="1473200" y="4292600"/>
+            <a:ext cx="3619500" cy="738664"/>
           </a:xfrm>
           <a:prstGeom prst="rect">
             <a:avLst/>
@@ -13542,23 +12075,31 @@
           <a:lstStyle/>
           <a:p>
             <a:r>
-              <a:rPr lang="vi-VN" sz="1000">
-                <a:solidFill>
-                  <a:srgbClr val="94A3B8"/>
-                </a:solidFill>
-                <a:latin typeface="Aptos" panose="020B0004020202020204" pitchFamily="34" charset="0"/>
-              </a:rPr>
-              <a:t>Fragmentation</a:t>
-            </a:r>
-          </a:p>
-        </p:txBody>
-      </p:sp>
-      <p:sp>
-        <p:nvSpPr>
-          <p:cNvPr id="15" name="Rectangle: Rounded Corners 14">
-            <a:extLst>
-              <a:ext uri="{FF2B5EF4-FFF2-40B4-BE49-F238E27FC236}">
-                <a16:creationId xmlns:a16="http://schemas.microsoft.com/office/drawing/2014/main" id="{71177ACE-6670-D8B2-E590-7AC676BAE1EB}"/>
+              <a:rPr lang="en-US" sz="1600">
+                <a:solidFill>
+                  <a:srgbClr val="F1F5F9"/>
+                </a:solidFill>
+                <a:latin typeface="Aptos" panose="020B0004020202020204" pitchFamily="34" charset="0"/>
+              </a:rPr>
+              <a:t>• global_dedup lookup/claim
+• WAL write trước commit
+• tail latency cao hơn ALO</a:t>
+            </a:r>
+            <a:endParaRPr lang="vi-VN" sz="1600">
+              <a:solidFill>
+                <a:srgbClr val="F1F5F9"/>
+              </a:solidFill>
+              <a:latin typeface="Aptos" panose="020B0004020202020204" pitchFamily="34" charset="0"/>
+            </a:endParaRPr>
+          </a:p>
+        </p:txBody>
+      </p:sp>
+      <p:sp>
+        <p:nvSpPr>
+          <p:cNvPr id="14" name="Rectangle: Rounded Corners 13">
+            <a:extLst>
+              <a:ext uri="{FF2B5EF4-FFF2-40B4-BE49-F238E27FC236}">
+                <a16:creationId xmlns:a16="http://schemas.microsoft.com/office/drawing/2014/main" id="{B37CB17A-B80F-CDB0-3633-033C12AFB53F}"/>
               </a:ext>
             </a:extLst>
           </p:cNvPr>
@@ -13567,8 +12108,8 @@
         </p:nvSpPr>
         <p:spPr>
           <a:xfrm>
-            <a:off x="6375400" y="2006600"/>
-            <a:ext cx="2413000" cy="965200"/>
+            <a:off x="6527800" y="3530599"/>
+            <a:ext cx="4572000" cy="1746885"/>
           </a:xfrm>
           <a:prstGeom prst="roundRect">
             <a:avLst/>
@@ -13578,7 +12119,7 @@
           </a:solidFill>
           <a:ln w="12700">
             <a:solidFill>
-              <a:srgbClr val="334155"/>
+              <a:srgbClr val="EF4444"/>
             </a:solidFill>
           </a:ln>
         </p:spPr>
@@ -13609,10 +12150,10 @@
       </p:sp>
       <p:sp>
         <p:nvSpPr>
-          <p:cNvPr id="16" name="TextBox 15">
-            <a:extLst>
-              <a:ext uri="{FF2B5EF4-FFF2-40B4-BE49-F238E27FC236}">
-                <a16:creationId xmlns:a16="http://schemas.microsoft.com/office/drawing/2014/main" id="{5D6D8829-5183-0B03-E81A-0C1AFC2A5833}"/>
+          <p:cNvPr id="15" name="TextBox 14">
+            <a:extLst>
+              <a:ext uri="{FF2B5EF4-FFF2-40B4-BE49-F238E27FC236}">
+                <a16:creationId xmlns:a16="http://schemas.microsoft.com/office/drawing/2014/main" id="{0476FBCC-9C51-316D-3773-A18A4DE8A166}"/>
               </a:ext>
             </a:extLst>
           </p:cNvPr>
@@ -13621,8 +12162,8 @@
         </p:nvSpPr>
         <p:spPr>
           <a:xfrm>
-            <a:off x="6553200" y="2171700"/>
-            <a:ext cx="2057400" cy="369332"/>
+            <a:off x="6832600" y="3810000"/>
+            <a:ext cx="3810000" cy="307777"/>
           </a:xfrm>
           <a:prstGeom prst="rect">
             <a:avLst/>
@@ -13636,23 +12177,23 @@
           <a:lstStyle/>
           <a:p>
             <a:r>
-              <a:rPr lang="vi-VN" sz="1900" b="1">
-                <a:solidFill>
-                  <a:srgbClr val="F59E0B"/>
-                </a:solidFill>
-                <a:latin typeface="Aptos" panose="020B0004020202020204" pitchFamily="34" charset="0"/>
-              </a:rPr>
-              <a:t>Global dedup</a:t>
-            </a:r>
-          </a:p>
-        </p:txBody>
-      </p:sp>
-      <p:sp>
-        <p:nvSpPr>
-          <p:cNvPr id="17" name="TextBox 16">
-            <a:extLst>
-              <a:ext uri="{FF2B5EF4-FFF2-40B4-BE49-F238E27FC236}">
-                <a16:creationId xmlns:a16="http://schemas.microsoft.com/office/drawing/2014/main" id="{364FABF7-8E1E-5218-768A-5349FBDFF6EA}"/>
+              <a:rPr lang="vi-VN" sz="2000" b="1">
+                <a:solidFill>
+                  <a:srgbClr val="EF4444"/>
+                </a:solidFill>
+                <a:latin typeface="Aptos" panose="020B0004020202020204" pitchFamily="34" charset="0"/>
+              </a:rPr>
+              <a:t>ALO risk</a:t>
+            </a:r>
+          </a:p>
+        </p:txBody>
+      </p:sp>
+      <p:sp>
+        <p:nvSpPr>
+          <p:cNvPr id="16" name="TextBox 15">
+            <a:extLst>
+              <a:ext uri="{FF2B5EF4-FFF2-40B4-BE49-F238E27FC236}">
+                <a16:creationId xmlns:a16="http://schemas.microsoft.com/office/drawing/2014/main" id="{DD0B61D4-B3D7-8871-0F13-7080C75B29E4}"/>
               </a:ext>
             </a:extLst>
           </p:cNvPr>
@@ -13661,8 +12202,8 @@
         </p:nvSpPr>
         <p:spPr>
           <a:xfrm>
-            <a:off x="6553200" y="2616200"/>
-            <a:ext cx="2057400" cy="153888"/>
+            <a:off x="6908800" y="4292600"/>
+            <a:ext cx="3619500" cy="984885"/>
           </a:xfrm>
           <a:prstGeom prst="rect">
             <a:avLst/>
@@ -13676,190 +12217,15 @@
           <a:lstStyle/>
           <a:p>
             <a:r>
-              <a:rPr lang="vi-VN" sz="1000">
-                <a:solidFill>
-                  <a:srgbClr val="94A3B8"/>
-                </a:solidFill>
-                <a:latin typeface="Aptos" panose="020B0004020202020204" pitchFamily="34" charset="0"/>
-              </a:rPr>
-              <a:t>Data control</a:t>
-            </a:r>
-          </a:p>
-        </p:txBody>
-      </p:sp>
-      <p:sp>
-        <p:nvSpPr>
-          <p:cNvPr id="18" name="Rectangle: Rounded Corners 17">
-            <a:extLst>
-              <a:ext uri="{FF2B5EF4-FFF2-40B4-BE49-F238E27FC236}">
-                <a16:creationId xmlns:a16="http://schemas.microsoft.com/office/drawing/2014/main" id="{45BB1FFF-96FF-1DA6-22BC-730E3E7BF826}"/>
-              </a:ext>
-            </a:extLst>
-          </p:cNvPr>
-          <p:cNvSpPr/>
-          <p:nvPr/>
-        </p:nvSpPr>
-        <p:spPr>
-          <a:xfrm>
-            <a:off x="9169400" y="2006600"/>
-            <a:ext cx="2159000" cy="965200"/>
-          </a:xfrm>
-          <a:prstGeom prst="roundRect">
-            <a:avLst/>
-          </a:prstGeom>
-          <a:solidFill>
-            <a:srgbClr val="1E293B"/>
-          </a:solidFill>
-          <a:ln w="12700">
-            <a:solidFill>
-              <a:srgbClr val="334155"/>
-            </a:solidFill>
-          </a:ln>
-        </p:spPr>
-        <p:style>
-          <a:lnRef idx="2">
-            <a:schemeClr val="accent1">
-              <a:shade val="15000"/>
-            </a:schemeClr>
-          </a:lnRef>
-          <a:fillRef idx="1">
-            <a:schemeClr val="accent1"/>
-          </a:fillRef>
-          <a:effectRef idx="0">
-            <a:schemeClr val="accent1"/>
-          </a:effectRef>
-          <a:fontRef idx="minor">
-            <a:schemeClr val="lt1"/>
-          </a:fontRef>
-        </p:style>
-        <p:txBody>
-          <a:bodyPr rtlCol="0" anchor="ctr"/>
-          <a:lstStyle/>
-          <a:p>
-            <a:pPr algn="ctr"/>
-            <a:endParaRPr lang="vi-VN"/>
-          </a:p>
-        </p:txBody>
-      </p:sp>
-      <p:sp>
-        <p:nvSpPr>
-          <p:cNvPr id="19" name="TextBox 18">
-            <a:extLst>
-              <a:ext uri="{FF2B5EF4-FFF2-40B4-BE49-F238E27FC236}">
-                <a16:creationId xmlns:a16="http://schemas.microsoft.com/office/drawing/2014/main" id="{601E5603-5A10-5822-6214-E9891E3289AC}"/>
-              </a:ext>
-            </a:extLst>
-          </p:cNvPr>
-          <p:cNvSpPr txBox="1"/>
-          <p:nvPr/>
-        </p:nvSpPr>
-        <p:spPr>
-          <a:xfrm>
-            <a:off x="9347200" y="2171700"/>
-            <a:ext cx="1803400" cy="369332"/>
-          </a:xfrm>
-          <a:prstGeom prst="rect">
-            <a:avLst/>
-          </a:prstGeom>
-          <a:noFill/>
-        </p:spPr>
-        <p:txBody>
-          <a:bodyPr vert="horz" lIns="0" tIns="0" rIns="0" bIns="0" rtlCol="0">
-            <a:spAutoFit/>
-          </a:bodyPr>
-          <a:lstStyle/>
-          <a:p>
-            <a:r>
-              <a:rPr lang="vi-VN" sz="2400" b="1">
-                <a:solidFill>
-                  <a:srgbClr val="10B981"/>
-                </a:solidFill>
-                <a:latin typeface="Aptos" panose="020B0004020202020204" pitchFamily="34" charset="0"/>
-              </a:rPr>
-              <a:t>WAL</a:t>
-            </a:r>
-          </a:p>
-        </p:txBody>
-      </p:sp>
-      <p:sp>
-        <p:nvSpPr>
-          <p:cNvPr id="20" name="TextBox 19">
-            <a:extLst>
-              <a:ext uri="{FF2B5EF4-FFF2-40B4-BE49-F238E27FC236}">
-                <a16:creationId xmlns:a16="http://schemas.microsoft.com/office/drawing/2014/main" id="{C440AE3A-7642-A688-BA4C-3A82A7F9EE83}"/>
-              </a:ext>
-            </a:extLst>
-          </p:cNvPr>
-          <p:cNvSpPr txBox="1"/>
-          <p:nvPr/>
-        </p:nvSpPr>
-        <p:spPr>
-          <a:xfrm>
-            <a:off x="9347200" y="2616200"/>
-            <a:ext cx="1803400" cy="153888"/>
-          </a:xfrm>
-          <a:prstGeom prst="rect">
-            <a:avLst/>
-          </a:prstGeom>
-          <a:noFill/>
-        </p:spPr>
-        <p:txBody>
-          <a:bodyPr vert="horz" lIns="0" tIns="0" rIns="0" bIns="0" rtlCol="0">
-            <a:spAutoFit/>
-          </a:bodyPr>
-          <a:lstStyle/>
-          <a:p>
-            <a:r>
-              <a:rPr lang="vi-VN" sz="1000">
-                <a:solidFill>
-                  <a:srgbClr val="94A3B8"/>
-                </a:solidFill>
-                <a:latin typeface="Aptos" panose="020B0004020202020204" pitchFamily="34" charset="0"/>
-              </a:rPr>
-              <a:t>Reliability</a:t>
-            </a:r>
-          </a:p>
-        </p:txBody>
-      </p:sp>
-      <p:sp>
-        <p:nvSpPr>
-          <p:cNvPr id="21" name="TextBox 20">
-            <a:extLst>
-              <a:ext uri="{FF2B5EF4-FFF2-40B4-BE49-F238E27FC236}">
-                <a16:creationId xmlns:a16="http://schemas.microsoft.com/office/drawing/2014/main" id="{78C739E8-3A1A-5AAF-D198-46F7AE0FB29D}"/>
-              </a:ext>
-            </a:extLst>
-          </p:cNvPr>
-          <p:cNvSpPr txBox="1"/>
-          <p:nvPr/>
-        </p:nvSpPr>
-        <p:spPr>
-          <a:xfrm>
-            <a:off x="1041400" y="3606800"/>
-            <a:ext cx="10414000" cy="1107996"/>
-          </a:xfrm>
-          <a:prstGeom prst="rect">
-            <a:avLst/>
-          </a:prstGeom>
-          <a:noFill/>
-        </p:spPr>
-        <p:txBody>
-          <a:bodyPr vert="horz" lIns="0" tIns="0" rIns="0" bIns="0" rtlCol="0">
-            <a:spAutoFit/>
-          </a:bodyPr>
-          <a:lstStyle/>
-          <a:p>
-            <a:r>
-              <a:rPr lang="vi-VN">
+              <a:rPr lang="vi-VN" sz="1600" dirty="0">
                 <a:solidFill>
                   <a:srgbClr val="F1F5F9"/>
                 </a:solidFill>
                 <a:latin typeface="Aptos" panose="020B0004020202020204" pitchFamily="34" charset="0"/>
               </a:rPr>
-              <a:t>• Distribution/network transparency: client không cần biết request xử lý ở site nào.
-• Horizontal fragmentation: mỗi node giữ request, WAL, transaction, window riêng.
-• Consistency control: idempotency key phải được kiểm soát toàn cục.
-• Recovery: log giúp đưa hệ thống về trạng thái nhất quán sau crash.</a:t>
+              <a:t>• ít bước hơn nên nhanh hơn
+• không chặn duplicate
+• duplicate request thành transaction thật</a:t>
             </a:r>
           </a:p>
         </p:txBody>
@@ -13867,7 +12233,7 @@
     </p:spTree>
     <p:extLst>
       <p:ext uri="{BB962C8B-B14F-4D97-AF65-F5344CB8AC3E}">
-        <p14:creationId xmlns:p14="http://schemas.microsoft.com/office/powerpoint/2010/main" val="1224024812"/>
+        <p14:creationId xmlns:p14="http://schemas.microsoft.com/office/powerpoint/2010/main" val="3490635986"/>
       </p:ext>
     </p:extLst>
   </p:cSld>
@@ -13899,7 +12265,7 @@
           <p:cNvPr id="2" name="Rectangle 1">
             <a:extLst>
               <a:ext uri="{FF2B5EF4-FFF2-40B4-BE49-F238E27FC236}">
-                <a16:creationId xmlns:a16="http://schemas.microsoft.com/office/drawing/2014/main" id="{A61AEB2E-7ED2-5EF3-BBB4-8CC8343AB766}"/>
+                <a16:creationId xmlns:a16="http://schemas.microsoft.com/office/drawing/2014/main" id="{7B296BFC-BA1D-2DCD-510A-1C0975FEAA6D}"/>
               </a:ext>
             </a:extLst>
           </p:cNvPr>
@@ -13967,7 +12333,7 @@
           <p:cNvPr id="3" name="TextBox 2">
             <a:extLst>
               <a:ext uri="{FF2B5EF4-FFF2-40B4-BE49-F238E27FC236}">
-                <a16:creationId xmlns:a16="http://schemas.microsoft.com/office/drawing/2014/main" id="{DCD34CF6-2A2E-8352-1944-816E99C3D9B9}"/>
+                <a16:creationId xmlns:a16="http://schemas.microsoft.com/office/drawing/2014/main" id="{F574DCEE-C824-73C7-6CE6-1B44490ADFB8}"/>
               </a:ext>
             </a:extLst>
           </p:cNvPr>
@@ -13997,7 +12363,7 @@
                 </a:solidFill>
                 <a:latin typeface="Aptos" panose="020B0004020202020204" pitchFamily="34" charset="0"/>
               </a:rPr>
-              <a:t>03 / COST MODEL</a:t>
+              <a:t>04 / EOS FLOW</a:t>
             </a:r>
           </a:p>
         </p:txBody>
@@ -14007,7 +12373,7 @@
           <p:cNvPr id="4" name="TextBox 3">
             <a:extLst>
               <a:ext uri="{FF2B5EF4-FFF2-40B4-BE49-F238E27FC236}">
-                <a16:creationId xmlns:a16="http://schemas.microsoft.com/office/drawing/2014/main" id="{64E20731-746B-A05B-7EDE-30EA696766CD}"/>
+                <a16:creationId xmlns:a16="http://schemas.microsoft.com/office/drawing/2014/main" id="{29827A72-4085-9D9B-567C-E9413DB614F3}"/>
               </a:ext>
             </a:extLst>
           </p:cNvPr>
@@ -14037,7 +12403,7 @@
                 </a:solidFill>
                 <a:latin typeface="Aptos" panose="020B0004020202020204" pitchFamily="34" charset="0"/>
               </a:rPr>
-              <a:t>Mô hình chi phí phân tán</a:t>
+              <a:t>Luồng xử lý payment ở chế độ EOS</a:t>
             </a:r>
           </a:p>
         </p:txBody>
@@ -14047,7 +12413,7 @@
           <p:cNvPr id="5" name="TextBox 4">
             <a:extLst>
               <a:ext uri="{FF2B5EF4-FFF2-40B4-BE49-F238E27FC236}">
-                <a16:creationId xmlns:a16="http://schemas.microsoft.com/office/drawing/2014/main" id="{9185B819-D19D-7C33-F3D4-787ECEA1E09E}"/>
+                <a16:creationId xmlns:a16="http://schemas.microsoft.com/office/drawing/2014/main" id="{C392E1BC-BE33-B81A-16EC-488E8D4068D7}"/>
               </a:ext>
             </a:extLst>
           </p:cNvPr>
@@ -14077,7 +12443,7 @@
                 </a:solidFill>
                 <a:latin typeface="Aptos" panose="020B0004020202020204" pitchFamily="34" charset="0"/>
               </a:rPr>
-              <a:t>EOS có thêm coordination và I/O nhưng loại bỏ chi phí nghiệp vụ do duplicate charge.</a:t>
+              <a:t>Claim key trước, ghi WAL trước khi cập nhật balance.</a:t>
             </a:r>
           </a:p>
         </p:txBody>
@@ -14087,7 +12453,7 @@
           <p:cNvPr id="6" name="Rectangle 5">
             <a:extLst>
               <a:ext uri="{FF2B5EF4-FFF2-40B4-BE49-F238E27FC236}">
-                <a16:creationId xmlns:a16="http://schemas.microsoft.com/office/drawing/2014/main" id="{43D48142-8876-1C49-FD6F-FA7F120436F3}"/>
+                <a16:creationId xmlns:a16="http://schemas.microsoft.com/office/drawing/2014/main" id="{7AF2C880-F7D0-3BD6-D49E-FCD8E2F70152}"/>
               </a:ext>
             </a:extLst>
           </p:cNvPr>
@@ -14141,7 +12507,7 @@
           <p:cNvPr id="9" name="Rectangle: Rounded Corners 8">
             <a:extLst>
               <a:ext uri="{FF2B5EF4-FFF2-40B4-BE49-F238E27FC236}">
-                <a16:creationId xmlns:a16="http://schemas.microsoft.com/office/drawing/2014/main" id="{173B0946-F0CB-5759-7F32-96C1B21B2FB4}"/>
+                <a16:creationId xmlns:a16="http://schemas.microsoft.com/office/drawing/2014/main" id="{B5866917-4145-0AB0-363E-45E69567D6A4}"/>
               </a:ext>
             </a:extLst>
           </p:cNvPr>
@@ -14150,8 +12516,8 @@
         </p:nvSpPr>
         <p:spPr>
           <a:xfrm>
-            <a:off x="889000" y="2032000"/>
-            <a:ext cx="10414000" cy="914400"/>
+            <a:off x="787400" y="2463800"/>
+            <a:ext cx="1651000" cy="1193800"/>
           </a:xfrm>
           <a:prstGeom prst="roundRect">
             <a:avLst/>
@@ -14161,7 +12527,7 @@
           </a:solidFill>
           <a:ln w="12700">
             <a:solidFill>
-              <a:srgbClr val="334155"/>
+              <a:srgbClr val="10B981"/>
             </a:solidFill>
           </a:ln>
         </p:spPr>
@@ -14195,7 +12561,7 @@
           <p:cNvPr id="10" name="TextBox 9">
             <a:extLst>
               <a:ext uri="{FF2B5EF4-FFF2-40B4-BE49-F238E27FC236}">
-                <a16:creationId xmlns:a16="http://schemas.microsoft.com/office/drawing/2014/main" id="{6718C7F3-56F4-58CB-2CD5-36C7EA1DB84A}"/>
+                <a16:creationId xmlns:a16="http://schemas.microsoft.com/office/drawing/2014/main" id="{E002EA41-3B2B-7F9A-5F17-BF5B57B7EAFB}"/>
               </a:ext>
             </a:extLst>
           </p:cNvPr>
@@ -14204,8 +12570,8 @@
         </p:nvSpPr>
         <p:spPr>
           <a:xfrm>
-            <a:off x="1219200" y="2336800"/>
-            <a:ext cx="9652000" cy="553998"/>
+            <a:off x="914400" y="2717800"/>
+            <a:ext cx="1397000" cy="400110"/>
           </a:xfrm>
           <a:prstGeom prst="rect">
             <a:avLst/>
@@ -14220,29 +12586,14 @@
           <a:p>
             <a:pPr algn="ctr"/>
             <a:r>
-              <a:rPr lang="fr-FR" b="1" dirty="0" err="1">
+              <a:rPr lang="vi-VN" sz="1300" b="1">
                 <a:solidFill>
                   <a:srgbClr val="F1F5F9"/>
                 </a:solidFill>
                 <a:latin typeface="Aptos" panose="020B0004020202020204" pitchFamily="34" charset="0"/>
               </a:rPr>
-              <a:t>Total_Time</a:t>
-            </a:r>
-            <a:r>
-              <a:rPr lang="fr-FR" b="1" dirty="0">
-                <a:solidFill>
-                  <a:srgbClr val="F1F5F9"/>
-                </a:solidFill>
-                <a:latin typeface="Aptos" panose="020B0004020202020204" pitchFamily="34" charset="0"/>
-              </a:rPr>
-              <a:t> = T_CPU * #instructions + T_IO * #disk_IOs + T_MSG * #messages + T_TR * #bytes_transferred</a:t>
-            </a:r>
-            <a:endParaRPr lang="vi-VN" b="1" dirty="0">
-              <a:solidFill>
-                <a:srgbClr val="F1F5F9"/>
-              </a:solidFill>
-              <a:latin typeface="Aptos" panose="020B0004020202020204" pitchFamily="34" charset="0"/>
-            </a:endParaRPr>
+              <a:t>1. Validate event + node status</a:t>
+            </a:r>
           </a:p>
         </p:txBody>
       </p:sp>
@@ -14251,7 +12602,7 @@
           <p:cNvPr id="11" name="Rectangle: Rounded Corners 10">
             <a:extLst>
               <a:ext uri="{FF2B5EF4-FFF2-40B4-BE49-F238E27FC236}">
-                <a16:creationId xmlns:a16="http://schemas.microsoft.com/office/drawing/2014/main" id="{619DB041-B2FC-53EA-759D-D96DF2517D83}"/>
+                <a16:creationId xmlns:a16="http://schemas.microsoft.com/office/drawing/2014/main" id="{440C3793-71DF-3D6F-E64E-B685E1CADF2C}"/>
               </a:ext>
             </a:extLst>
           </p:cNvPr>
@@ -14260,8 +12611,8 @@
         </p:nvSpPr>
         <p:spPr>
           <a:xfrm>
-            <a:off x="1092200" y="3530600"/>
-            <a:ext cx="4572000" cy="1746884"/>
+            <a:off x="2628900" y="2463800"/>
+            <a:ext cx="1651000" cy="1193800"/>
           </a:xfrm>
           <a:prstGeom prst="roundRect">
             <a:avLst/>
@@ -14305,7 +12656,7 @@
           <p:cNvPr id="12" name="TextBox 11">
             <a:extLst>
               <a:ext uri="{FF2B5EF4-FFF2-40B4-BE49-F238E27FC236}">
-                <a16:creationId xmlns:a16="http://schemas.microsoft.com/office/drawing/2014/main" id="{1BE2C913-B0DC-7963-D106-D85429FAD214}"/>
+                <a16:creationId xmlns:a16="http://schemas.microsoft.com/office/drawing/2014/main" id="{7735F8F8-5CFD-61C2-3AD2-A341A1A3B23C}"/>
               </a:ext>
             </a:extLst>
           </p:cNvPr>
@@ -14314,8 +12665,8 @@
         </p:nvSpPr>
         <p:spPr>
           <a:xfrm>
-            <a:off x="1397000" y="3810000"/>
-            <a:ext cx="3810000" cy="307777"/>
+            <a:off x="2755900" y="2717800"/>
+            <a:ext cx="1397000" cy="400110"/>
           </a:xfrm>
           <a:prstGeom prst="rect">
             <a:avLst/>
@@ -14328,64 +12679,44 @@
           </a:bodyPr>
           <a:lstStyle/>
           <a:p>
-            <a:r>
-              <a:rPr lang="en-US" sz="2000" b="1">
-                <a:solidFill>
-                  <a:srgbClr val="10B981"/>
-                </a:solidFill>
-                <a:latin typeface="Aptos" panose="020B0004020202020204" pitchFamily="34" charset="0"/>
-              </a:rPr>
-              <a:t>EOS overhead có chủ ý</a:t>
-            </a:r>
-            <a:endParaRPr lang="vi-VN" sz="2000" b="1">
-              <a:solidFill>
-                <a:srgbClr val="10B981"/>
-              </a:solidFill>
-              <a:latin typeface="Aptos" panose="020B0004020202020204" pitchFamily="34" charset="0"/>
-            </a:endParaRPr>
-          </a:p>
-        </p:txBody>
-      </p:sp>
-      <p:sp>
-        <p:nvSpPr>
-          <p:cNvPr id="13" name="TextBox 12">
-            <a:extLst>
-              <a:ext uri="{FF2B5EF4-FFF2-40B4-BE49-F238E27FC236}">
-                <a16:creationId xmlns:a16="http://schemas.microsoft.com/office/drawing/2014/main" id="{A96D31DE-6FFE-22CE-E423-D90759E1D39B}"/>
-              </a:ext>
-            </a:extLst>
-          </p:cNvPr>
-          <p:cNvSpPr txBox="1"/>
-          <p:nvPr/>
-        </p:nvSpPr>
-        <p:spPr>
-          <a:xfrm>
-            <a:off x="1473200" y="4292600"/>
-            <a:ext cx="3619500" cy="738664"/>
-          </a:xfrm>
-          <a:prstGeom prst="rect">
-            <a:avLst/>
-          </a:prstGeom>
-          <a:noFill/>
-        </p:spPr>
-        <p:txBody>
-          <a:bodyPr vert="horz" lIns="0" tIns="0" rIns="0" bIns="0" rtlCol="0">
-            <a:spAutoFit/>
-          </a:bodyPr>
-          <a:lstStyle/>
-          <a:p>
-            <a:r>
-              <a:rPr lang="en-US" sz="1600">
+            <a:pPr algn="ctr"/>
+            <a:r>
+              <a:rPr lang="vi-VN" sz="1300" b="1" dirty="0">
                 <a:solidFill>
                   <a:srgbClr val="F1F5F9"/>
                 </a:solidFill>
                 <a:latin typeface="Aptos" panose="020B0004020202020204" pitchFamily="34" charset="0"/>
               </a:rPr>
-              <a:t>• global_dedup lookup/claim
-• WAL write trước commit
-• tail latency cao hơn ALO</a:t>
-            </a:r>
-            <a:endParaRPr lang="vi-VN" sz="1600">
+              <a:t>2. </a:t>
+            </a:r>
+            <a:r>
+              <a:rPr lang="en-US" sz="1300" b="1" dirty="0">
+                <a:solidFill>
+                  <a:srgbClr val="F1F5F9"/>
+                </a:solidFill>
+                <a:latin typeface="Aptos" panose="020B0004020202020204" pitchFamily="34" charset="0"/>
+              </a:rPr>
+              <a:t>Atomic </a:t>
+            </a:r>
+            <a:r>
+              <a:rPr lang="en-US" sz="1300" b="1" dirty="0" err="1">
+                <a:solidFill>
+                  <a:srgbClr val="F1F5F9"/>
+                </a:solidFill>
+                <a:latin typeface="Aptos" panose="020B0004020202020204" pitchFamily="34" charset="0"/>
+              </a:rPr>
+              <a:t>dedup</a:t>
+            </a:r>
+            <a:r>
+              <a:rPr lang="en-US" sz="1300" b="1" dirty="0">
+                <a:solidFill>
+                  <a:srgbClr val="F1F5F9"/>
+                </a:solidFill>
+                <a:latin typeface="Aptos" panose="020B0004020202020204" pitchFamily="34" charset="0"/>
+              </a:rPr>
+              <a:t> check + claim</a:t>
+            </a:r>
+            <a:endParaRPr lang="vi-VN" sz="1300" b="1" dirty="0">
               <a:solidFill>
                 <a:srgbClr val="F1F5F9"/>
               </a:solidFill>
@@ -14396,10 +12727,10 @@
       </p:sp>
       <p:sp>
         <p:nvSpPr>
-          <p:cNvPr id="14" name="Rectangle: Rounded Corners 13">
-            <a:extLst>
-              <a:ext uri="{FF2B5EF4-FFF2-40B4-BE49-F238E27FC236}">
-                <a16:creationId xmlns:a16="http://schemas.microsoft.com/office/drawing/2014/main" id="{B37CB17A-B80F-CDB0-3633-033C12AFB53F}"/>
+          <p:cNvPr id="13" name="Rectangle: Rounded Corners 12">
+            <a:extLst>
+              <a:ext uri="{FF2B5EF4-FFF2-40B4-BE49-F238E27FC236}">
+                <a16:creationId xmlns:a16="http://schemas.microsoft.com/office/drawing/2014/main" id="{3EBFCA27-5910-08CC-471C-C8885FAAC351}"/>
               </a:ext>
             </a:extLst>
           </p:cNvPr>
@@ -14408,8 +12739,8 @@
         </p:nvSpPr>
         <p:spPr>
           <a:xfrm>
-            <a:off x="6527800" y="3530599"/>
-            <a:ext cx="4572000" cy="1746885"/>
+            <a:off x="4470400" y="2463800"/>
+            <a:ext cx="1651000" cy="1193800"/>
           </a:xfrm>
           <a:prstGeom prst="roundRect">
             <a:avLst/>
@@ -14419,7 +12750,7 @@
           </a:solidFill>
           <a:ln w="12700">
             <a:solidFill>
-              <a:srgbClr val="EF4444"/>
+              <a:srgbClr val="10B981"/>
             </a:solidFill>
           </a:ln>
         </p:spPr>
@@ -14450,10 +12781,10 @@
       </p:sp>
       <p:sp>
         <p:nvSpPr>
-          <p:cNvPr id="15" name="TextBox 14">
-            <a:extLst>
-              <a:ext uri="{FF2B5EF4-FFF2-40B4-BE49-F238E27FC236}">
-                <a16:creationId xmlns:a16="http://schemas.microsoft.com/office/drawing/2014/main" id="{0476FBCC-9C51-316D-3773-A18A4DE8A166}"/>
+          <p:cNvPr id="14" name="TextBox 13">
+            <a:extLst>
+              <a:ext uri="{FF2B5EF4-FFF2-40B4-BE49-F238E27FC236}">
+                <a16:creationId xmlns:a16="http://schemas.microsoft.com/office/drawing/2014/main" id="{3643568E-3201-818A-8F21-07060D5249B8}"/>
               </a:ext>
             </a:extLst>
           </p:cNvPr>
@@ -14462,8 +12793,8 @@
         </p:nvSpPr>
         <p:spPr>
           <a:xfrm>
-            <a:off x="6832600" y="3810000"/>
-            <a:ext cx="3810000" cy="307777"/>
+            <a:off x="4597400" y="2717800"/>
+            <a:ext cx="1397000" cy="400110"/>
           </a:xfrm>
           <a:prstGeom prst="rect">
             <a:avLst/>
@@ -14476,15 +12807,76 @@
           </a:bodyPr>
           <a:lstStyle/>
           <a:p>
-            <a:r>
-              <a:rPr lang="vi-VN" sz="2000" b="1">
-                <a:solidFill>
-                  <a:srgbClr val="EF4444"/>
-                </a:solidFill>
-                <a:latin typeface="Aptos" panose="020B0004020202020204" pitchFamily="34" charset="0"/>
-              </a:rPr>
-              <a:t>ALO risk</a:t>
-            </a:r>
+            <a:pPr algn="ctr"/>
+            <a:r>
+              <a:rPr lang="en-US" sz="1300" b="1" dirty="0">
+                <a:solidFill>
+                  <a:srgbClr val="F1F5F9"/>
+                </a:solidFill>
+                <a:latin typeface="Aptos" panose="020B0004020202020204" pitchFamily="34" charset="0"/>
+              </a:rPr>
+              <a:t>3. Write WAL PENDING</a:t>
+            </a:r>
+            <a:endParaRPr lang="vi-VN" sz="1300" b="1" dirty="0">
+              <a:solidFill>
+                <a:srgbClr val="F1F5F9"/>
+              </a:solidFill>
+              <a:latin typeface="Aptos" panose="020B0004020202020204" pitchFamily="34" charset="0"/>
+            </a:endParaRPr>
+          </a:p>
+        </p:txBody>
+      </p:sp>
+      <p:sp>
+        <p:nvSpPr>
+          <p:cNvPr id="15" name="Rectangle: Rounded Corners 14">
+            <a:extLst>
+              <a:ext uri="{FF2B5EF4-FFF2-40B4-BE49-F238E27FC236}">
+                <a16:creationId xmlns:a16="http://schemas.microsoft.com/office/drawing/2014/main" id="{CECFE563-B2F1-B5B0-8B38-B9DCAF467EA7}"/>
+              </a:ext>
+            </a:extLst>
+          </p:cNvPr>
+          <p:cNvSpPr/>
+          <p:nvPr/>
+        </p:nvSpPr>
+        <p:spPr>
+          <a:xfrm>
+            <a:off x="6311900" y="2463800"/>
+            <a:ext cx="1651000" cy="1193800"/>
+          </a:xfrm>
+          <a:prstGeom prst="roundRect">
+            <a:avLst/>
+          </a:prstGeom>
+          <a:solidFill>
+            <a:srgbClr val="1E293B"/>
+          </a:solidFill>
+          <a:ln w="12700">
+            <a:solidFill>
+              <a:srgbClr val="10B981"/>
+            </a:solidFill>
+          </a:ln>
+        </p:spPr>
+        <p:style>
+          <a:lnRef idx="2">
+            <a:schemeClr val="accent1">
+              <a:shade val="15000"/>
+            </a:schemeClr>
+          </a:lnRef>
+          <a:fillRef idx="1">
+            <a:schemeClr val="accent1"/>
+          </a:fillRef>
+          <a:effectRef idx="0">
+            <a:schemeClr val="accent1"/>
+          </a:effectRef>
+          <a:fontRef idx="minor">
+            <a:schemeClr val="lt1"/>
+          </a:fontRef>
+        </p:style>
+        <p:txBody>
+          <a:bodyPr rtlCol="0" anchor="ctr"/>
+          <a:lstStyle/>
+          <a:p>
+            <a:pPr algn="ctr"/>
+            <a:endParaRPr lang="vi-VN"/>
           </a:p>
         </p:txBody>
       </p:sp>
@@ -14493,7 +12885,7 @@
           <p:cNvPr id="16" name="TextBox 15">
             <a:extLst>
               <a:ext uri="{FF2B5EF4-FFF2-40B4-BE49-F238E27FC236}">
-                <a16:creationId xmlns:a16="http://schemas.microsoft.com/office/drawing/2014/main" id="{DD0B61D4-B3D7-8871-0F13-7080C75B29E4}"/>
+                <a16:creationId xmlns:a16="http://schemas.microsoft.com/office/drawing/2014/main" id="{0B197F47-5F2E-2439-41FC-9B9DFB6BFEC4}"/>
               </a:ext>
             </a:extLst>
           </p:cNvPr>
@@ -14502,8 +12894,8 @@
         </p:nvSpPr>
         <p:spPr>
           <a:xfrm>
-            <a:off x="6908800" y="4292600"/>
-            <a:ext cx="3619500" cy="984885"/>
+            <a:off x="6438900" y="2717800"/>
+            <a:ext cx="1397000" cy="400110"/>
           </a:xfrm>
           <a:prstGeom prst="rect">
             <a:avLst/>
@@ -14516,16 +12908,253 @@
           </a:bodyPr>
           <a:lstStyle/>
           <a:p>
-            <a:r>
-              <a:rPr lang="vi-VN" sz="1600" dirty="0">
+            <a:pPr algn="ctr"/>
+            <a:r>
+              <a:rPr lang="vi-VN" sz="1300" b="1" dirty="0">
                 <a:solidFill>
                   <a:srgbClr val="F1F5F9"/>
                 </a:solidFill>
                 <a:latin typeface="Aptos" panose="020B0004020202020204" pitchFamily="34" charset="0"/>
               </a:rPr>
-              <a:t>• ít bước hơn nên nhanh hơn
-• không chặn duplicate
-• duplicate request thành transaction thật</a:t>
+              <a:t>4. Local ACID Transaction</a:t>
+            </a:r>
+          </a:p>
+        </p:txBody>
+      </p:sp>
+      <p:sp>
+        <p:nvSpPr>
+          <p:cNvPr id="17" name="Rectangle: Rounded Corners 16">
+            <a:extLst>
+              <a:ext uri="{FF2B5EF4-FFF2-40B4-BE49-F238E27FC236}">
+                <a16:creationId xmlns:a16="http://schemas.microsoft.com/office/drawing/2014/main" id="{2913FC8A-4CC6-EB42-BE2C-D248BC5ACCAD}"/>
+              </a:ext>
+            </a:extLst>
+          </p:cNvPr>
+          <p:cNvSpPr/>
+          <p:nvPr/>
+        </p:nvSpPr>
+        <p:spPr>
+          <a:xfrm>
+            <a:off x="8153400" y="2463800"/>
+            <a:ext cx="1651000" cy="1193800"/>
+          </a:xfrm>
+          <a:prstGeom prst="roundRect">
+            <a:avLst/>
+          </a:prstGeom>
+          <a:solidFill>
+            <a:srgbClr val="1E293B"/>
+          </a:solidFill>
+          <a:ln w="12700">
+            <a:solidFill>
+              <a:srgbClr val="10B981"/>
+            </a:solidFill>
+          </a:ln>
+        </p:spPr>
+        <p:style>
+          <a:lnRef idx="2">
+            <a:schemeClr val="accent1">
+              <a:shade val="15000"/>
+            </a:schemeClr>
+          </a:lnRef>
+          <a:fillRef idx="1">
+            <a:schemeClr val="accent1"/>
+          </a:fillRef>
+          <a:effectRef idx="0">
+            <a:schemeClr val="accent1"/>
+          </a:effectRef>
+          <a:fontRef idx="minor">
+            <a:schemeClr val="lt1"/>
+          </a:fontRef>
+        </p:style>
+        <p:txBody>
+          <a:bodyPr rtlCol="0" anchor="ctr"/>
+          <a:lstStyle/>
+          <a:p>
+            <a:pPr algn="ctr"/>
+            <a:endParaRPr lang="vi-VN"/>
+          </a:p>
+        </p:txBody>
+      </p:sp>
+      <p:sp>
+        <p:nvSpPr>
+          <p:cNvPr id="18" name="TextBox 17">
+            <a:extLst>
+              <a:ext uri="{FF2B5EF4-FFF2-40B4-BE49-F238E27FC236}">
+                <a16:creationId xmlns:a16="http://schemas.microsoft.com/office/drawing/2014/main" id="{E6E73C0A-C78F-0CB6-C9B5-9465A9FAB9E4}"/>
+              </a:ext>
+            </a:extLst>
+          </p:cNvPr>
+          <p:cNvSpPr txBox="1"/>
+          <p:nvPr/>
+        </p:nvSpPr>
+        <p:spPr>
+          <a:xfrm>
+            <a:off x="8280400" y="2717800"/>
+            <a:ext cx="1397000" cy="400110"/>
+          </a:xfrm>
+          <a:prstGeom prst="rect">
+            <a:avLst/>
+          </a:prstGeom>
+          <a:noFill/>
+        </p:spPr>
+        <p:txBody>
+          <a:bodyPr vert="horz" lIns="0" tIns="0" rIns="0" bIns="0" rtlCol="0">
+            <a:spAutoFit/>
+          </a:bodyPr>
+          <a:lstStyle/>
+          <a:p>
+            <a:pPr algn="ctr"/>
+            <a:r>
+              <a:rPr lang="vi-VN" sz="1300" b="1" dirty="0">
+                <a:solidFill>
+                  <a:srgbClr val="F1F5F9"/>
+                </a:solidFill>
+                <a:latin typeface="Aptos" panose="020B0004020202020204" pitchFamily="34" charset="0"/>
+              </a:rPr>
+              <a:t>5. Complete dedup SUCCESS</a:t>
+            </a:r>
+          </a:p>
+        </p:txBody>
+      </p:sp>
+      <p:sp>
+        <p:nvSpPr>
+          <p:cNvPr id="19" name="Rectangle: Rounded Corners 18">
+            <a:extLst>
+              <a:ext uri="{FF2B5EF4-FFF2-40B4-BE49-F238E27FC236}">
+                <a16:creationId xmlns:a16="http://schemas.microsoft.com/office/drawing/2014/main" id="{C495E70F-2FCA-289C-3C08-8B1EDBB0A76F}"/>
+              </a:ext>
+            </a:extLst>
+          </p:cNvPr>
+          <p:cNvSpPr/>
+          <p:nvPr/>
+        </p:nvSpPr>
+        <p:spPr>
+          <a:xfrm>
+            <a:off x="9994900" y="2463800"/>
+            <a:ext cx="1651000" cy="1193800"/>
+          </a:xfrm>
+          <a:prstGeom prst="roundRect">
+            <a:avLst/>
+          </a:prstGeom>
+          <a:solidFill>
+            <a:srgbClr val="1E293B"/>
+          </a:solidFill>
+          <a:ln w="12700">
+            <a:solidFill>
+              <a:srgbClr val="10B981"/>
+            </a:solidFill>
+          </a:ln>
+        </p:spPr>
+        <p:style>
+          <a:lnRef idx="2">
+            <a:schemeClr val="accent1">
+              <a:shade val="15000"/>
+            </a:schemeClr>
+          </a:lnRef>
+          <a:fillRef idx="1">
+            <a:schemeClr val="accent1"/>
+          </a:fillRef>
+          <a:effectRef idx="0">
+            <a:schemeClr val="accent1"/>
+          </a:effectRef>
+          <a:fontRef idx="minor">
+            <a:schemeClr val="lt1"/>
+          </a:fontRef>
+        </p:style>
+        <p:txBody>
+          <a:bodyPr rtlCol="0" anchor="ctr"/>
+          <a:lstStyle/>
+          <a:p>
+            <a:pPr algn="ctr"/>
+            <a:endParaRPr lang="vi-VN"/>
+          </a:p>
+        </p:txBody>
+      </p:sp>
+      <p:sp>
+        <p:nvSpPr>
+          <p:cNvPr id="20" name="TextBox 19">
+            <a:extLst>
+              <a:ext uri="{FF2B5EF4-FFF2-40B4-BE49-F238E27FC236}">
+                <a16:creationId xmlns:a16="http://schemas.microsoft.com/office/drawing/2014/main" id="{0874EE2C-F30A-46EC-8608-E1BDDA24BC49}"/>
+              </a:ext>
+            </a:extLst>
+          </p:cNvPr>
+          <p:cNvSpPr txBox="1"/>
+          <p:nvPr/>
+        </p:nvSpPr>
+        <p:spPr>
+          <a:xfrm>
+            <a:off x="10121900" y="2717800"/>
+            <a:ext cx="1397000" cy="400110"/>
+          </a:xfrm>
+          <a:prstGeom prst="rect">
+            <a:avLst/>
+          </a:prstGeom>
+          <a:noFill/>
+        </p:spPr>
+        <p:txBody>
+          <a:bodyPr vert="horz" lIns="0" tIns="0" rIns="0" bIns="0" rtlCol="0">
+            <a:spAutoFit/>
+          </a:bodyPr>
+          <a:lstStyle/>
+          <a:p>
+            <a:pPr algn="ctr"/>
+            <a:r>
+              <a:rPr lang="en-US" sz="1300" b="1" dirty="0">
+                <a:solidFill>
+                  <a:srgbClr val="F1F5F9"/>
+                </a:solidFill>
+                <a:latin typeface="Aptos" panose="020B0004020202020204" pitchFamily="34" charset="0"/>
+              </a:rPr>
+              <a:t>6. Mark WAL COMMITTED</a:t>
+            </a:r>
+            <a:endParaRPr lang="vi-VN" sz="1300" b="1" dirty="0">
+              <a:solidFill>
+                <a:srgbClr val="F1F5F9"/>
+              </a:solidFill>
+              <a:latin typeface="Aptos" panose="020B0004020202020204" pitchFamily="34" charset="0"/>
+            </a:endParaRPr>
+          </a:p>
+        </p:txBody>
+      </p:sp>
+      <p:sp>
+        <p:nvSpPr>
+          <p:cNvPr id="21" name="TextBox 20">
+            <a:extLst>
+              <a:ext uri="{FF2B5EF4-FFF2-40B4-BE49-F238E27FC236}">
+                <a16:creationId xmlns:a16="http://schemas.microsoft.com/office/drawing/2014/main" id="{108F54AD-0905-146D-D7A0-46B67575B6B1}"/>
+              </a:ext>
+            </a:extLst>
+          </p:cNvPr>
+          <p:cNvSpPr txBox="1"/>
+          <p:nvPr/>
+        </p:nvSpPr>
+        <p:spPr>
+          <a:xfrm>
+            <a:off x="1193800" y="4343400"/>
+            <a:ext cx="9652000" cy="830997"/>
+          </a:xfrm>
+          <a:prstGeom prst="rect">
+            <a:avLst/>
+          </a:prstGeom>
+          <a:noFill/>
+        </p:spPr>
+        <p:txBody>
+          <a:bodyPr vert="horz" lIns="0" tIns="0" rIns="0" bIns="0" rtlCol="0">
+            <a:spAutoFit/>
+          </a:bodyPr>
+          <a:lstStyle/>
+          <a:p>
+            <a:r>
+              <a:rPr lang="vi-VN">
+                <a:solidFill>
+                  <a:srgbClr val="F1F5F9"/>
+                </a:solidFill>
+                <a:latin typeface="Aptos" panose="020B0004020202020204" pitchFamily="34" charset="0"/>
+              </a:rPr>
+              <a:t>• Nếu key đã tồn tại: request mới nhận DUPLICATE_REJECTED.
+• Nếu node failed: payment bị reject trước khi ghi transaction.
+• Toàn bộ thay đổi chính chạy trong transaction local của node.</a:t>
             </a:r>
           </a:p>
         </p:txBody>
@@ -14533,7 +13162,7 @@
     </p:spTree>
     <p:extLst>
       <p:ext uri="{BB962C8B-B14F-4D97-AF65-F5344CB8AC3E}">
-        <p14:creationId xmlns:p14="http://schemas.microsoft.com/office/powerpoint/2010/main" val="3490635986"/>
+        <p14:creationId xmlns:p14="http://schemas.microsoft.com/office/powerpoint/2010/main" val="1665451171"/>
       </p:ext>
     </p:extLst>
   </p:cSld>
@@ -14565,7 +13194,7 @@
           <p:cNvPr id="2" name="Rectangle 1">
             <a:extLst>
               <a:ext uri="{FF2B5EF4-FFF2-40B4-BE49-F238E27FC236}">
-                <a16:creationId xmlns:a16="http://schemas.microsoft.com/office/drawing/2014/main" id="{7B296BFC-BA1D-2DCD-510A-1C0975FEAA6D}"/>
+                <a16:creationId xmlns:a16="http://schemas.microsoft.com/office/drawing/2014/main" id="{407F8EF9-BFBA-C97D-3A4F-025889ACBF1C}"/>
               </a:ext>
             </a:extLst>
           </p:cNvPr>
@@ -14633,7 +13262,7 @@
           <p:cNvPr id="3" name="TextBox 2">
             <a:extLst>
               <a:ext uri="{FF2B5EF4-FFF2-40B4-BE49-F238E27FC236}">
-                <a16:creationId xmlns:a16="http://schemas.microsoft.com/office/drawing/2014/main" id="{F574DCEE-C824-73C7-6CE6-1B44490ADFB8}"/>
+                <a16:creationId xmlns:a16="http://schemas.microsoft.com/office/drawing/2014/main" id="{19158A17-F5AA-F92A-CBD0-6AD12AD6CFB8}"/>
               </a:ext>
             </a:extLst>
           </p:cNvPr>
@@ -14663,7 +13292,7 @@
                 </a:solidFill>
                 <a:latin typeface="Aptos" panose="020B0004020202020204" pitchFamily="34" charset="0"/>
               </a:rPr>
-              <a:t>04 / EOS FLOW</a:t>
+              <a:t>04 / DEDUP</a:t>
             </a:r>
           </a:p>
         </p:txBody>
@@ -14673,7 +13302,7 @@
           <p:cNvPr id="4" name="TextBox 3">
             <a:extLst>
               <a:ext uri="{FF2B5EF4-FFF2-40B4-BE49-F238E27FC236}">
-                <a16:creationId xmlns:a16="http://schemas.microsoft.com/office/drawing/2014/main" id="{29827A72-4085-9D9B-567C-E9413DB614F3}"/>
+                <a16:creationId xmlns:a16="http://schemas.microsoft.com/office/drawing/2014/main" id="{6C07264B-9DA3-2516-6D20-0DF721984B94}"/>
               </a:ext>
             </a:extLst>
           </p:cNvPr>
@@ -14703,7 +13332,7 @@
                 </a:solidFill>
                 <a:latin typeface="Aptos" panose="020B0004020202020204" pitchFamily="34" charset="0"/>
               </a:rPr>
-              <a:t>Luồng xử lý payment ở chế độ EOS</a:t>
+              <a:t>Global idempotency key</a:t>
             </a:r>
           </a:p>
         </p:txBody>
@@ -14713,7 +13342,7 @@
           <p:cNvPr id="5" name="TextBox 4">
             <a:extLst>
               <a:ext uri="{FF2B5EF4-FFF2-40B4-BE49-F238E27FC236}">
-                <a16:creationId xmlns:a16="http://schemas.microsoft.com/office/drawing/2014/main" id="{C392E1BC-BE33-B81A-16EC-488E8D4068D7}"/>
+                <a16:creationId xmlns:a16="http://schemas.microsoft.com/office/drawing/2014/main" id="{B762A149-0C71-CD30-09EB-BB659CAF7158}"/>
               </a:ext>
             </a:extLst>
           </p:cNvPr>
@@ -14743,7 +13372,7 @@
                 </a:solidFill>
                 <a:latin typeface="Aptos" panose="020B0004020202020204" pitchFamily="34" charset="0"/>
               </a:rPr>
-              <a:t>Claim key trước, ghi WAL trước khi cập nhật balance.</a:t>
+              <a:t>Điểm kiểm soát nhỏ nhưng quyết định correctness toàn hệ thống.</a:t>
             </a:r>
           </a:p>
         </p:txBody>
@@ -14753,7 +13382,7 @@
           <p:cNvPr id="6" name="Rectangle 5">
             <a:extLst>
               <a:ext uri="{FF2B5EF4-FFF2-40B4-BE49-F238E27FC236}">
-                <a16:creationId xmlns:a16="http://schemas.microsoft.com/office/drawing/2014/main" id="{7AF2C880-F7D0-3BD6-D49E-FCD8E2F70152}"/>
+                <a16:creationId xmlns:a16="http://schemas.microsoft.com/office/drawing/2014/main" id="{63431FCC-48B5-54B2-F8CC-051850E06A20}"/>
               </a:ext>
             </a:extLst>
           </p:cNvPr>
@@ -14807,7 +13436,7 @@
           <p:cNvPr id="9" name="Rectangle: Rounded Corners 8">
             <a:extLst>
               <a:ext uri="{FF2B5EF4-FFF2-40B4-BE49-F238E27FC236}">
-                <a16:creationId xmlns:a16="http://schemas.microsoft.com/office/drawing/2014/main" id="{B5866917-4145-0AB0-363E-45E69567D6A4}"/>
+                <a16:creationId xmlns:a16="http://schemas.microsoft.com/office/drawing/2014/main" id="{4985599B-B031-590E-A6AE-9C8CCFFD7575}"/>
               </a:ext>
             </a:extLst>
           </p:cNvPr>
@@ -14816,8 +13445,8 @@
         </p:nvSpPr>
         <p:spPr>
           <a:xfrm>
-            <a:off x="787400" y="2463800"/>
-            <a:ext cx="1651000" cy="1193800"/>
+            <a:off x="914400" y="2032000"/>
+            <a:ext cx="4572000" cy="2794000"/>
           </a:xfrm>
           <a:prstGeom prst="roundRect">
             <a:avLst/>
@@ -14827,7 +13456,7 @@
           </a:solidFill>
           <a:ln w="12700">
             <a:solidFill>
-              <a:srgbClr val="10B981"/>
+              <a:srgbClr val="334155"/>
             </a:solidFill>
           </a:ln>
         </p:spPr>
@@ -14861,7 +13490,7 @@
           <p:cNvPr id="10" name="TextBox 9">
             <a:extLst>
               <a:ext uri="{FF2B5EF4-FFF2-40B4-BE49-F238E27FC236}">
-                <a16:creationId xmlns:a16="http://schemas.microsoft.com/office/drawing/2014/main" id="{E002EA41-3B2B-7F9A-5F17-BF5B57B7EAFB}"/>
+                <a16:creationId xmlns:a16="http://schemas.microsoft.com/office/drawing/2014/main" id="{18B3655F-17E1-8991-A17B-99F0F62BA5B3}"/>
               </a:ext>
             </a:extLst>
           </p:cNvPr>
@@ -14870,8 +13499,8 @@
         </p:nvSpPr>
         <p:spPr>
           <a:xfrm>
-            <a:off x="914400" y="2717800"/>
-            <a:ext cx="1397000" cy="400110"/>
+            <a:off x="1244600" y="2336800"/>
+            <a:ext cx="3810000" cy="338554"/>
           </a:xfrm>
           <a:prstGeom prst="rect">
             <a:avLst/>
@@ -14884,25 +13513,67 @@
           </a:bodyPr>
           <a:lstStyle/>
           <a:p>
-            <a:pPr algn="ctr"/>
-            <a:r>
-              <a:rPr lang="vi-VN" sz="1300" b="1">
+            <a:r>
+              <a:rPr lang="vi-VN" sz="2200" b="1">
+                <a:solidFill>
+                  <a:srgbClr val="F59E0B"/>
+                </a:solidFill>
+                <a:latin typeface="Aptos" panose="020B0004020202020204" pitchFamily="34" charset="0"/>
+              </a:rPr>
+              <a:t>GlobalDeduplicationStore</a:t>
+            </a:r>
+          </a:p>
+        </p:txBody>
+      </p:sp>
+      <p:sp>
+        <p:nvSpPr>
+          <p:cNvPr id="11" name="TextBox 10">
+            <a:extLst>
+              <a:ext uri="{FF2B5EF4-FFF2-40B4-BE49-F238E27FC236}">
+                <a16:creationId xmlns:a16="http://schemas.microsoft.com/office/drawing/2014/main" id="{A561747F-5695-2AFA-841E-8B8AC8FA1018}"/>
+              </a:ext>
+            </a:extLst>
+          </p:cNvPr>
+          <p:cNvSpPr txBox="1"/>
+          <p:nvPr/>
+        </p:nvSpPr>
+        <p:spPr>
+          <a:xfrm>
+            <a:off x="1320800" y="2946400"/>
+            <a:ext cx="3708400" cy="1308050"/>
+          </a:xfrm>
+          <a:prstGeom prst="rect">
+            <a:avLst/>
+          </a:prstGeom>
+          <a:noFill/>
+        </p:spPr>
+        <p:txBody>
+          <a:bodyPr vert="horz" lIns="0" tIns="0" rIns="0" bIns="0" rtlCol="0">
+            <a:spAutoFit/>
+          </a:bodyPr>
+          <a:lstStyle/>
+          <a:p>
+            <a:r>
+              <a:rPr lang="vi-VN" sz="1700">
                 <a:solidFill>
                   <a:srgbClr val="F1F5F9"/>
                 </a:solidFill>
                 <a:latin typeface="Aptos" panose="020B0004020202020204" pitchFamily="34" charset="0"/>
               </a:rPr>
-              <a:t>1. Validate event + node status</a:t>
-            </a:r>
-          </a:p>
-        </p:txBody>
-      </p:sp>
-      <p:sp>
-        <p:nvSpPr>
-          <p:cNvPr id="11" name="Rectangle: Rounded Corners 10">
-            <a:extLst>
-              <a:ext uri="{FF2B5EF4-FFF2-40B4-BE49-F238E27FC236}">
-                <a16:creationId xmlns:a16="http://schemas.microsoft.com/office/drawing/2014/main" id="{440C3793-71DF-3D6F-E64E-B685E1CADF2C}"/>
+              <a:t>• idempotency_key là primary key
+• claimOrExisting() dùng insert atomic
+• completeSuccess() lưu result_data
+• deleteExpired() dùng event-time window</a:t>
+            </a:r>
+          </a:p>
+        </p:txBody>
+      </p:sp>
+      <p:sp>
+        <p:nvSpPr>
+          <p:cNvPr id="12" name="Rectangle: Rounded Corners 11">
+            <a:extLst>
+              <a:ext uri="{FF2B5EF4-FFF2-40B4-BE49-F238E27FC236}">
+                <a16:creationId xmlns:a16="http://schemas.microsoft.com/office/drawing/2014/main" id="{6BA1B64B-301A-A5DC-FD80-3E403DD9329B}"/>
               </a:ext>
             </a:extLst>
           </p:cNvPr>
@@ -14911,8 +13582,8 @@
         </p:nvSpPr>
         <p:spPr>
           <a:xfrm>
-            <a:off x="2628900" y="2463800"/>
-            <a:ext cx="1651000" cy="1193800"/>
+            <a:off x="6705600" y="2032000"/>
+            <a:ext cx="4318000" cy="2794000"/>
           </a:xfrm>
           <a:prstGeom prst="roundRect">
             <a:avLst/>
@@ -14922,7 +13593,7 @@
           </a:solidFill>
           <a:ln w="12700">
             <a:solidFill>
-              <a:srgbClr val="10B981"/>
+              <a:srgbClr val="334155"/>
             </a:solidFill>
           </a:ln>
         </p:spPr>
@@ -14953,10 +13624,10 @@
       </p:sp>
       <p:sp>
         <p:nvSpPr>
-          <p:cNvPr id="12" name="TextBox 11">
-            <a:extLst>
-              <a:ext uri="{FF2B5EF4-FFF2-40B4-BE49-F238E27FC236}">
-                <a16:creationId xmlns:a16="http://schemas.microsoft.com/office/drawing/2014/main" id="{7735F8F8-5CFD-61C2-3AD2-A341A1A3B23C}"/>
+          <p:cNvPr id="13" name="TextBox 12">
+            <a:extLst>
+              <a:ext uri="{FF2B5EF4-FFF2-40B4-BE49-F238E27FC236}">
+                <a16:creationId xmlns:a16="http://schemas.microsoft.com/office/drawing/2014/main" id="{4398AD1D-01F6-3F0F-992A-0E24FC5E783F}"/>
               </a:ext>
             </a:extLst>
           </p:cNvPr>
@@ -14965,8 +13636,8 @@
         </p:nvSpPr>
         <p:spPr>
           <a:xfrm>
-            <a:off x="2755900" y="2717800"/>
-            <a:ext cx="1397000" cy="400110"/>
+            <a:off x="7035800" y="2336800"/>
+            <a:ext cx="3302000" cy="338554"/>
           </a:xfrm>
           <a:prstGeom prst="rect">
             <a:avLst/>
@@ -14979,103 +13650,15 @@
           </a:bodyPr>
           <a:lstStyle/>
           <a:p>
-            <a:pPr algn="ctr"/>
-            <a:r>
-              <a:rPr lang="vi-VN" sz="1300" b="1" dirty="0">
-                <a:solidFill>
-                  <a:srgbClr val="F1F5F9"/>
-                </a:solidFill>
-                <a:latin typeface="Aptos" panose="020B0004020202020204" pitchFamily="34" charset="0"/>
-              </a:rPr>
-              <a:t>2. </a:t>
-            </a:r>
-            <a:r>
-              <a:rPr lang="en-US" sz="1300" b="1" dirty="0">
-                <a:solidFill>
-                  <a:srgbClr val="F1F5F9"/>
-                </a:solidFill>
-                <a:latin typeface="Aptos" panose="020B0004020202020204" pitchFamily="34" charset="0"/>
-              </a:rPr>
-              <a:t>Atomic </a:t>
-            </a:r>
-            <a:r>
-              <a:rPr lang="en-US" sz="1300" b="1" dirty="0" err="1">
-                <a:solidFill>
-                  <a:srgbClr val="F1F5F9"/>
-                </a:solidFill>
-                <a:latin typeface="Aptos" panose="020B0004020202020204" pitchFamily="34" charset="0"/>
-              </a:rPr>
-              <a:t>dedup</a:t>
-            </a:r>
-            <a:r>
-              <a:rPr lang="en-US" sz="1300" b="1" dirty="0">
-                <a:solidFill>
-                  <a:srgbClr val="F1F5F9"/>
-                </a:solidFill>
-                <a:latin typeface="Aptos" panose="020B0004020202020204" pitchFamily="34" charset="0"/>
-              </a:rPr>
-              <a:t> check + claim</a:t>
-            </a:r>
-            <a:endParaRPr lang="vi-VN" sz="1300" b="1" dirty="0">
-              <a:solidFill>
-                <a:srgbClr val="F1F5F9"/>
-              </a:solidFill>
-              <a:latin typeface="Aptos" panose="020B0004020202020204" pitchFamily="34" charset="0"/>
-            </a:endParaRPr>
-          </a:p>
-        </p:txBody>
-      </p:sp>
-      <p:sp>
-        <p:nvSpPr>
-          <p:cNvPr id="13" name="Rectangle: Rounded Corners 12">
-            <a:extLst>
-              <a:ext uri="{FF2B5EF4-FFF2-40B4-BE49-F238E27FC236}">
-                <a16:creationId xmlns:a16="http://schemas.microsoft.com/office/drawing/2014/main" id="{3EBFCA27-5910-08CC-471C-C8885FAAC351}"/>
-              </a:ext>
-            </a:extLst>
-          </p:cNvPr>
-          <p:cNvSpPr/>
-          <p:nvPr/>
-        </p:nvSpPr>
-        <p:spPr>
-          <a:xfrm>
-            <a:off x="4470400" y="2463800"/>
-            <a:ext cx="1651000" cy="1193800"/>
-          </a:xfrm>
-          <a:prstGeom prst="roundRect">
-            <a:avLst/>
-          </a:prstGeom>
-          <a:solidFill>
-            <a:srgbClr val="1E293B"/>
-          </a:solidFill>
-          <a:ln w="12700">
-            <a:solidFill>
-              <a:srgbClr val="10B981"/>
-            </a:solidFill>
-          </a:ln>
-        </p:spPr>
-        <p:style>
-          <a:lnRef idx="2">
-            <a:schemeClr val="accent1">
-              <a:shade val="15000"/>
-            </a:schemeClr>
-          </a:lnRef>
-          <a:fillRef idx="1">
-            <a:schemeClr val="accent1"/>
-          </a:fillRef>
-          <a:effectRef idx="0">
-            <a:schemeClr val="accent1"/>
-          </a:effectRef>
-          <a:fontRef idx="minor">
-            <a:schemeClr val="lt1"/>
-          </a:fontRef>
-        </p:style>
-        <p:txBody>
-          <a:bodyPr rtlCol="0" anchor="ctr"/>
-          <a:lstStyle/>
-          <a:p>
-            <a:pPr algn="ctr"/>
-            <a:endParaRPr lang="vi-VN"/>
+            <a:r>
+              <a:rPr lang="vi-VN" sz="2200" b="1">
+                <a:solidFill>
+                  <a:srgbClr val="22D3EE"/>
+                </a:solidFill>
+                <a:latin typeface="Aptos" panose="020B0004020202020204" pitchFamily="34" charset="0"/>
+              </a:rPr>
+              <a:t>Kịch bản cross-node</a:t>
+            </a:r>
           </a:p>
         </p:txBody>
       </p:sp>
@@ -15084,7 +13667,7 @@
           <p:cNvPr id="14" name="TextBox 13">
             <a:extLst>
               <a:ext uri="{FF2B5EF4-FFF2-40B4-BE49-F238E27FC236}">
-                <a16:creationId xmlns:a16="http://schemas.microsoft.com/office/drawing/2014/main" id="{3643568E-3201-818A-8F21-07060D5249B8}"/>
+                <a16:creationId xmlns:a16="http://schemas.microsoft.com/office/drawing/2014/main" id="{86A173B4-5335-7C5C-F8E9-8D5A51479291}"/>
               </a:ext>
             </a:extLst>
           </p:cNvPr>
@@ -15093,8 +13676,8 @@
         </p:nvSpPr>
         <p:spPr>
           <a:xfrm>
-            <a:off x="4597400" y="2717800"/>
-            <a:ext cx="1397000" cy="400110"/>
+            <a:off x="7112000" y="2946400"/>
+            <a:ext cx="3175000" cy="1308050"/>
           </a:xfrm>
           <a:prstGeom prst="rect">
             <a:avLst/>
@@ -15107,354 +13690,17 @@
           </a:bodyPr>
           <a:lstStyle/>
           <a:p>
-            <a:pPr algn="ctr"/>
-            <a:r>
-              <a:rPr lang="en-US" sz="1300" b="1" dirty="0">
+            <a:r>
+              <a:rPr lang="vi-VN" sz="1700">
                 <a:solidFill>
                   <a:srgbClr val="F1F5F9"/>
                 </a:solidFill>
                 <a:latin typeface="Aptos" panose="020B0004020202020204" pitchFamily="34" charset="0"/>
               </a:rPr>
-              <a:t>3. Write WAL PENDING</a:t>
-            </a:r>
-            <a:endParaRPr lang="vi-VN" sz="1300" b="1" dirty="0">
-              <a:solidFill>
-                <a:srgbClr val="F1F5F9"/>
-              </a:solidFill>
-              <a:latin typeface="Aptos" panose="020B0004020202020204" pitchFamily="34" charset="0"/>
-            </a:endParaRPr>
-          </a:p>
-        </p:txBody>
-      </p:sp>
-      <p:sp>
-        <p:nvSpPr>
-          <p:cNvPr id="15" name="Rectangle: Rounded Corners 14">
-            <a:extLst>
-              <a:ext uri="{FF2B5EF4-FFF2-40B4-BE49-F238E27FC236}">
-                <a16:creationId xmlns:a16="http://schemas.microsoft.com/office/drawing/2014/main" id="{CECFE563-B2F1-B5B0-8B38-B9DCAF467EA7}"/>
-              </a:ext>
-            </a:extLst>
-          </p:cNvPr>
-          <p:cNvSpPr/>
-          <p:nvPr/>
-        </p:nvSpPr>
-        <p:spPr>
-          <a:xfrm>
-            <a:off x="6311900" y="2463800"/>
-            <a:ext cx="1651000" cy="1193800"/>
-          </a:xfrm>
-          <a:prstGeom prst="roundRect">
-            <a:avLst/>
-          </a:prstGeom>
-          <a:solidFill>
-            <a:srgbClr val="1E293B"/>
-          </a:solidFill>
-          <a:ln w="12700">
-            <a:solidFill>
-              <a:srgbClr val="10B981"/>
-            </a:solidFill>
-          </a:ln>
-        </p:spPr>
-        <p:style>
-          <a:lnRef idx="2">
-            <a:schemeClr val="accent1">
-              <a:shade val="15000"/>
-            </a:schemeClr>
-          </a:lnRef>
-          <a:fillRef idx="1">
-            <a:schemeClr val="accent1"/>
-          </a:fillRef>
-          <a:effectRef idx="0">
-            <a:schemeClr val="accent1"/>
-          </a:effectRef>
-          <a:fontRef idx="minor">
-            <a:schemeClr val="lt1"/>
-          </a:fontRef>
-        </p:style>
-        <p:txBody>
-          <a:bodyPr rtlCol="0" anchor="ctr"/>
-          <a:lstStyle/>
-          <a:p>
-            <a:pPr algn="ctr"/>
-            <a:endParaRPr lang="vi-VN"/>
-          </a:p>
-        </p:txBody>
-      </p:sp>
-      <p:sp>
-        <p:nvSpPr>
-          <p:cNvPr id="16" name="TextBox 15">
-            <a:extLst>
-              <a:ext uri="{FF2B5EF4-FFF2-40B4-BE49-F238E27FC236}">
-                <a16:creationId xmlns:a16="http://schemas.microsoft.com/office/drawing/2014/main" id="{0B197F47-5F2E-2439-41FC-9B9DFB6BFEC4}"/>
-              </a:ext>
-            </a:extLst>
-          </p:cNvPr>
-          <p:cNvSpPr txBox="1"/>
-          <p:nvPr/>
-        </p:nvSpPr>
-        <p:spPr>
-          <a:xfrm>
-            <a:off x="6438900" y="2717800"/>
-            <a:ext cx="1397000" cy="400110"/>
-          </a:xfrm>
-          <a:prstGeom prst="rect">
-            <a:avLst/>
-          </a:prstGeom>
-          <a:noFill/>
-        </p:spPr>
-        <p:txBody>
-          <a:bodyPr vert="horz" lIns="0" tIns="0" rIns="0" bIns="0" rtlCol="0">
-            <a:spAutoFit/>
-          </a:bodyPr>
-          <a:lstStyle/>
-          <a:p>
-            <a:pPr algn="ctr"/>
-            <a:r>
-              <a:rPr lang="vi-VN" sz="1300" b="1" dirty="0">
-                <a:solidFill>
-                  <a:srgbClr val="F1F5F9"/>
-                </a:solidFill>
-                <a:latin typeface="Aptos" panose="020B0004020202020204" pitchFamily="34" charset="0"/>
-              </a:rPr>
-              <a:t>4. Local ACID Transaction</a:t>
-            </a:r>
-          </a:p>
-        </p:txBody>
-      </p:sp>
-      <p:sp>
-        <p:nvSpPr>
-          <p:cNvPr id="17" name="Rectangle: Rounded Corners 16">
-            <a:extLst>
-              <a:ext uri="{FF2B5EF4-FFF2-40B4-BE49-F238E27FC236}">
-                <a16:creationId xmlns:a16="http://schemas.microsoft.com/office/drawing/2014/main" id="{2913FC8A-4CC6-EB42-BE2C-D248BC5ACCAD}"/>
-              </a:ext>
-            </a:extLst>
-          </p:cNvPr>
-          <p:cNvSpPr/>
-          <p:nvPr/>
-        </p:nvSpPr>
-        <p:spPr>
-          <a:xfrm>
-            <a:off x="8153400" y="2463800"/>
-            <a:ext cx="1651000" cy="1193800"/>
-          </a:xfrm>
-          <a:prstGeom prst="roundRect">
-            <a:avLst/>
-          </a:prstGeom>
-          <a:solidFill>
-            <a:srgbClr val="1E293B"/>
-          </a:solidFill>
-          <a:ln w="12700">
-            <a:solidFill>
-              <a:srgbClr val="10B981"/>
-            </a:solidFill>
-          </a:ln>
-        </p:spPr>
-        <p:style>
-          <a:lnRef idx="2">
-            <a:schemeClr val="accent1">
-              <a:shade val="15000"/>
-            </a:schemeClr>
-          </a:lnRef>
-          <a:fillRef idx="1">
-            <a:schemeClr val="accent1"/>
-          </a:fillRef>
-          <a:effectRef idx="0">
-            <a:schemeClr val="accent1"/>
-          </a:effectRef>
-          <a:fontRef idx="minor">
-            <a:schemeClr val="lt1"/>
-          </a:fontRef>
-        </p:style>
-        <p:txBody>
-          <a:bodyPr rtlCol="0" anchor="ctr"/>
-          <a:lstStyle/>
-          <a:p>
-            <a:pPr algn="ctr"/>
-            <a:endParaRPr lang="vi-VN"/>
-          </a:p>
-        </p:txBody>
-      </p:sp>
-      <p:sp>
-        <p:nvSpPr>
-          <p:cNvPr id="18" name="TextBox 17">
-            <a:extLst>
-              <a:ext uri="{FF2B5EF4-FFF2-40B4-BE49-F238E27FC236}">
-                <a16:creationId xmlns:a16="http://schemas.microsoft.com/office/drawing/2014/main" id="{E6E73C0A-C78F-0CB6-C9B5-9465A9FAB9E4}"/>
-              </a:ext>
-            </a:extLst>
-          </p:cNvPr>
-          <p:cNvSpPr txBox="1"/>
-          <p:nvPr/>
-        </p:nvSpPr>
-        <p:spPr>
-          <a:xfrm>
-            <a:off x="8280400" y="2717800"/>
-            <a:ext cx="1397000" cy="400110"/>
-          </a:xfrm>
-          <a:prstGeom prst="rect">
-            <a:avLst/>
-          </a:prstGeom>
-          <a:noFill/>
-        </p:spPr>
-        <p:txBody>
-          <a:bodyPr vert="horz" lIns="0" tIns="0" rIns="0" bIns="0" rtlCol="0">
-            <a:spAutoFit/>
-          </a:bodyPr>
-          <a:lstStyle/>
-          <a:p>
-            <a:pPr algn="ctr"/>
-            <a:r>
-              <a:rPr lang="vi-VN" sz="1300" b="1" dirty="0">
-                <a:solidFill>
-                  <a:srgbClr val="F1F5F9"/>
-                </a:solidFill>
-                <a:latin typeface="Aptos" panose="020B0004020202020204" pitchFamily="34" charset="0"/>
-              </a:rPr>
-              <a:t>5. Complete dedup SUCCESS</a:t>
-            </a:r>
-          </a:p>
-        </p:txBody>
-      </p:sp>
-      <p:sp>
-        <p:nvSpPr>
-          <p:cNvPr id="19" name="Rectangle: Rounded Corners 18">
-            <a:extLst>
-              <a:ext uri="{FF2B5EF4-FFF2-40B4-BE49-F238E27FC236}">
-                <a16:creationId xmlns:a16="http://schemas.microsoft.com/office/drawing/2014/main" id="{C495E70F-2FCA-289C-3C08-8B1EDBB0A76F}"/>
-              </a:ext>
-            </a:extLst>
-          </p:cNvPr>
-          <p:cNvSpPr/>
-          <p:nvPr/>
-        </p:nvSpPr>
-        <p:spPr>
-          <a:xfrm>
-            <a:off x="9994900" y="2463800"/>
-            <a:ext cx="1651000" cy="1193800"/>
-          </a:xfrm>
-          <a:prstGeom prst="roundRect">
-            <a:avLst/>
-          </a:prstGeom>
-          <a:solidFill>
-            <a:srgbClr val="1E293B"/>
-          </a:solidFill>
-          <a:ln w="12700">
-            <a:solidFill>
-              <a:srgbClr val="10B981"/>
-            </a:solidFill>
-          </a:ln>
-        </p:spPr>
-        <p:style>
-          <a:lnRef idx="2">
-            <a:schemeClr val="accent1">
-              <a:shade val="15000"/>
-            </a:schemeClr>
-          </a:lnRef>
-          <a:fillRef idx="1">
-            <a:schemeClr val="accent1"/>
-          </a:fillRef>
-          <a:effectRef idx="0">
-            <a:schemeClr val="accent1"/>
-          </a:effectRef>
-          <a:fontRef idx="minor">
-            <a:schemeClr val="lt1"/>
-          </a:fontRef>
-        </p:style>
-        <p:txBody>
-          <a:bodyPr rtlCol="0" anchor="ctr"/>
-          <a:lstStyle/>
-          <a:p>
-            <a:pPr algn="ctr"/>
-            <a:endParaRPr lang="vi-VN"/>
-          </a:p>
-        </p:txBody>
-      </p:sp>
-      <p:sp>
-        <p:nvSpPr>
-          <p:cNvPr id="20" name="TextBox 19">
-            <a:extLst>
-              <a:ext uri="{FF2B5EF4-FFF2-40B4-BE49-F238E27FC236}">
-                <a16:creationId xmlns:a16="http://schemas.microsoft.com/office/drawing/2014/main" id="{0874EE2C-F30A-46EC-8608-E1BDDA24BC49}"/>
-              </a:ext>
-            </a:extLst>
-          </p:cNvPr>
-          <p:cNvSpPr txBox="1"/>
-          <p:nvPr/>
-        </p:nvSpPr>
-        <p:spPr>
-          <a:xfrm>
-            <a:off x="10121900" y="2717800"/>
-            <a:ext cx="1397000" cy="400110"/>
-          </a:xfrm>
-          <a:prstGeom prst="rect">
-            <a:avLst/>
-          </a:prstGeom>
-          <a:noFill/>
-        </p:spPr>
-        <p:txBody>
-          <a:bodyPr vert="horz" lIns="0" tIns="0" rIns="0" bIns="0" rtlCol="0">
-            <a:spAutoFit/>
-          </a:bodyPr>
-          <a:lstStyle/>
-          <a:p>
-            <a:pPr algn="ctr"/>
-            <a:r>
-              <a:rPr lang="en-US" sz="1300" b="1" dirty="0">
-                <a:solidFill>
-                  <a:srgbClr val="F1F5F9"/>
-                </a:solidFill>
-                <a:latin typeface="Aptos" panose="020B0004020202020204" pitchFamily="34" charset="0"/>
-              </a:rPr>
-              <a:t>6. Mark WAL COMMITTED</a:t>
-            </a:r>
-            <a:endParaRPr lang="vi-VN" sz="1300" b="1" dirty="0">
-              <a:solidFill>
-                <a:srgbClr val="F1F5F9"/>
-              </a:solidFill>
-              <a:latin typeface="Aptos" panose="020B0004020202020204" pitchFamily="34" charset="0"/>
-            </a:endParaRPr>
-          </a:p>
-        </p:txBody>
-      </p:sp>
-      <p:sp>
-        <p:nvSpPr>
-          <p:cNvPr id="21" name="TextBox 20">
-            <a:extLst>
-              <a:ext uri="{FF2B5EF4-FFF2-40B4-BE49-F238E27FC236}">
-                <a16:creationId xmlns:a16="http://schemas.microsoft.com/office/drawing/2014/main" id="{108F54AD-0905-146D-D7A0-46B67575B6B1}"/>
-              </a:ext>
-            </a:extLst>
-          </p:cNvPr>
-          <p:cNvSpPr txBox="1"/>
-          <p:nvPr/>
-        </p:nvSpPr>
-        <p:spPr>
-          <a:xfrm>
-            <a:off x="1193800" y="4343400"/>
-            <a:ext cx="9652000" cy="830997"/>
-          </a:xfrm>
-          <a:prstGeom prst="rect">
-            <a:avLst/>
-          </a:prstGeom>
-          <a:noFill/>
-        </p:spPr>
-        <p:txBody>
-          <a:bodyPr vert="horz" lIns="0" tIns="0" rIns="0" bIns="0" rtlCol="0">
-            <a:spAutoFit/>
-          </a:bodyPr>
-          <a:lstStyle/>
-          <a:p>
-            <a:r>
-              <a:rPr lang="vi-VN">
-                <a:solidFill>
-                  <a:srgbClr val="F1F5F9"/>
-                </a:solidFill>
-                <a:latin typeface="Aptos" panose="020B0004020202020204" pitchFamily="34" charset="0"/>
-              </a:rPr>
-              <a:t>• Nếu key đã tồn tại: request mới nhận DUPLICATE_REJECTED.
-• Nếu node failed: payment bị reject trước khi ghi transaction.
-• Toàn bộ thay đổi chính chạy trong transaction local của node.</a:t>
+              <a:t>• Request 1 -&gt; NODE_B -&gt; SUCCESS
+• Request 2 cùng key -&gt; NODE_C
+• NODE_C thấy key đã claim
+• Kết quả: DUPLICATE_REJECTED</a:t>
             </a:r>
           </a:p>
         </p:txBody>
@@ -15462,7 +13708,7 @@
     </p:spTree>
     <p:extLst>
       <p:ext uri="{BB962C8B-B14F-4D97-AF65-F5344CB8AC3E}">
-        <p14:creationId xmlns:p14="http://schemas.microsoft.com/office/powerpoint/2010/main" val="1665451171"/>
+        <p14:creationId xmlns:p14="http://schemas.microsoft.com/office/powerpoint/2010/main" val="2784200470"/>
       </p:ext>
     </p:extLst>
   </p:cSld>
